--- a/Activityboard.pptx
+++ b/Activityboard.pptx
@@ -16,7 +16,7 @@
     <p:sldId id="284" r:id="rId10"/>
     <p:sldId id="283" r:id="rId11"/>
     <p:sldId id="259" r:id="rId12"/>
-    <p:sldId id="261" r:id="rId13"/>
+    <p:sldId id="287" r:id="rId13"/>
     <p:sldId id="286" r:id="rId14"/>
     <p:sldId id="264" r:id="rId15"/>
     <p:sldId id="265" r:id="rId16"/>
@@ -1332,7 +1332,7 @@
         <p:spPr>
           <a:xfrm>
             <a:off x="2560412" y="1477430"/>
-            <a:ext cx="1052852" cy="276999"/>
+            <a:ext cx="1542153" cy="276999"/>
           </a:xfrm>
           <a:prstGeom prst="rect">
             <a:avLst/>
@@ -1347,7 +1347,7 @@
           <a:p>
             <a:r>
               <a:rPr lang="de-DE" sz="1200" b="1"/>
-              <a:t>Master Board</a:t>
+              <a:t>Sound Module Board</a:t>
             </a:r>
           </a:p>
         </p:txBody>
@@ -5326,7 +5326,7 @@
         <p:spPr>
           <a:xfrm>
             <a:off x="593658" y="339004"/>
-            <a:ext cx="4657044" cy="2031325"/>
+            <a:ext cx="4855816" cy="2031325"/>
           </a:xfrm>
           <a:prstGeom prst="rect">
             <a:avLst/>
@@ -5422,13 +5422,14 @@
               <a:t>(</a:t>
             </a:r>
             <a:r>
-              <a:rPr lang="en-US" sz="1400">
+              <a:rPr lang="en-US" sz="1400" b="0">
                 <a:solidFill>
                   <a:srgbClr val="005C5F"/>
                 </a:solidFill>
+                <a:effectLst/>
                 <a:latin typeface="Consolas" panose="020B0609020204030204" pitchFamily="49" charset="0"/>
               </a:rPr>
-              <a:t>3</a:t>
+              <a:t>11</a:t>
             </a:r>
             <a:r>
               <a:rPr lang="en-US" sz="1400" b="0">
@@ -5441,13 +5442,14 @@
               <a:t>, </a:t>
             </a:r>
             <a:r>
-              <a:rPr lang="en-US" sz="1400">
+              <a:rPr lang="en-US" sz="1400" b="0">
                 <a:solidFill>
                   <a:srgbClr val="005C5F"/>
                 </a:solidFill>
+                <a:effectLst/>
                 <a:latin typeface="Consolas" panose="020B0609020204030204" pitchFamily="49" charset="0"/>
               </a:rPr>
-              <a:t>2</a:t>
+              <a:t>10</a:t>
             </a:r>
             <a:r>
               <a:rPr lang="en-US" sz="1400" b="0">
@@ -5815,7 +5817,7 @@
         <p:spPr>
           <a:xfrm>
             <a:off x="381000" y="2616200"/>
-            <a:ext cx="4945585" cy="738664"/>
+            <a:ext cx="5044971" cy="738664"/>
           </a:xfrm>
           <a:prstGeom prst="rect">
             <a:avLst/>
@@ -5844,7 +5846,7 @@
               <a:rPr lang="de-DE" sz="1400">
                 <a:latin typeface="Consolas" panose="020B0609020204030204" pitchFamily="49" charset="0"/>
               </a:rPr>
-              <a:t>D2 (TX) auf 2 (RX) braucht 1 k Ohm Widerstand</a:t>
+              <a:t>D2 (TX) auf 10 (RX) braucht 1 k Ohm Widerstand</a:t>
             </a:r>
           </a:p>
           <a:p>
@@ -5856,7 +5858,7 @@
               <a:rPr lang="de-DE" sz="1400">
                 <a:latin typeface="Consolas" panose="020B0609020204030204" pitchFamily="49" charset="0"/>
               </a:rPr>
-              <a:t>D3 (RX) auf 3 (TX)</a:t>
+              <a:t>D3 (RX) auf 11 (TX)</a:t>
             </a:r>
           </a:p>
         </p:txBody>
@@ -5891,152 +5893,38 @@
           <a:chExt cx="0" cy="0"/>
         </a:xfrm>
       </p:grpSpPr>
-      <p:pic>
-        <p:nvPicPr>
-          <p:cNvPr id="8" name="Grafik 7">
-            <a:extLst>
-              <a:ext uri="{FF2B5EF4-FFF2-40B4-BE49-F238E27FC236}">
-                <a16:creationId xmlns:a16="http://schemas.microsoft.com/office/drawing/2014/main" id="{C99E22CA-A0C7-456F-A8E1-618D1343ACDC}"/>
-              </a:ext>
-            </a:extLst>
-          </p:cNvPr>
-          <p:cNvPicPr>
-            <a:picLocks noChangeAspect="1"/>
-          </p:cNvPicPr>
-          <p:nvPr/>
-        </p:nvPicPr>
-        <p:blipFill>
-          <a:blip r:embed="rId2"/>
-          <a:stretch>
-            <a:fillRect/>
-          </a:stretch>
-        </p:blipFill>
-        <p:spPr>
-          <a:xfrm>
-            <a:off x="2145328" y="697223"/>
-            <a:ext cx="6820872" cy="5463553"/>
-          </a:xfrm>
-          <a:prstGeom prst="rect">
-            <a:avLst/>
-          </a:prstGeom>
-        </p:spPr>
-      </p:pic>
-      <p:sp>
-        <p:nvSpPr>
-          <p:cNvPr id="10" name="Textfeld 9">
-            <a:extLst>
-              <a:ext uri="{FF2B5EF4-FFF2-40B4-BE49-F238E27FC236}">
-                <a16:creationId xmlns:a16="http://schemas.microsoft.com/office/drawing/2014/main" id="{E962363D-674D-41F4-88CB-20E6D932F6FA}"/>
-              </a:ext>
-            </a:extLst>
-          </p:cNvPr>
-          <p:cNvSpPr txBox="1"/>
-          <p:nvPr/>
-        </p:nvSpPr>
-        <p:spPr>
-          <a:xfrm>
-            <a:off x="3945467" y="230201"/>
-            <a:ext cx="6096000" cy="307777"/>
-          </a:xfrm>
-          <a:prstGeom prst="rect">
-            <a:avLst/>
-          </a:prstGeom>
-          <a:noFill/>
-        </p:spPr>
-        <p:txBody>
-          <a:bodyPr wrap="square">
-            <a:spAutoFit/>
-          </a:bodyPr>
-          <a:lstStyle/>
-          <a:p>
-            <a:r>
-              <a:rPr lang="de-DE" sz="1400" b="0" i="0">
-                <a:solidFill>
-                  <a:srgbClr val="000000"/>
-                </a:solidFill>
-                <a:effectLst/>
-                <a:latin typeface="Source Code Pro" panose="020B0604020202020204" pitchFamily="49" charset="0"/>
-              </a:rPr>
-              <a:t>hier : SoftwareSerial playerSerial</a:t>
-            </a:r>
-            <a:r>
-              <a:rPr lang="de-DE" sz="1400" b="0" i="0">
-                <a:solidFill>
-                  <a:srgbClr val="12217C"/>
-                </a:solidFill>
-                <a:effectLst/>
-                <a:latin typeface="Source Code Pro" panose="020B0604020202020204" pitchFamily="49" charset="0"/>
-              </a:rPr>
-              <a:t>(</a:t>
-            </a:r>
-            <a:r>
-              <a:rPr lang="de-DE" sz="1400" b="0" i="0">
-                <a:solidFill>
-                  <a:srgbClr val="007F7F"/>
-                </a:solidFill>
-                <a:effectLst/>
-                <a:latin typeface="Source Code Pro" panose="020B0604020202020204" pitchFamily="49" charset="0"/>
-              </a:rPr>
-              <a:t>10</a:t>
-            </a:r>
-            <a:r>
-              <a:rPr lang="de-DE" sz="1400" b="0" i="0">
-                <a:solidFill>
-                  <a:srgbClr val="000000"/>
-                </a:solidFill>
-                <a:effectLst/>
-                <a:latin typeface="Source Code Pro" panose="020B0604020202020204" pitchFamily="49" charset="0"/>
-              </a:rPr>
-              <a:t>,</a:t>
-            </a:r>
-            <a:r>
-              <a:rPr lang="de-DE" sz="1400" b="0" i="0">
-                <a:solidFill>
-                  <a:srgbClr val="007F7F"/>
-                </a:solidFill>
-                <a:effectLst/>
-                <a:latin typeface="Source Code Pro" panose="020B0604020202020204" pitchFamily="49" charset="0"/>
-              </a:rPr>
-              <a:t>11</a:t>
-            </a:r>
-            <a:r>
-              <a:rPr lang="de-DE" sz="1400" b="0" i="0">
-                <a:solidFill>
-                  <a:srgbClr val="12217C"/>
-                </a:solidFill>
-                <a:effectLst/>
-                <a:latin typeface="Source Code Pro" panose="020B0604020202020204" pitchFamily="49" charset="0"/>
-              </a:rPr>
-              <a:t>)</a:t>
-            </a:r>
-            <a:r>
-              <a:rPr lang="de-DE" sz="1400" b="0" i="0">
-                <a:solidFill>
-                  <a:srgbClr val="000000"/>
-                </a:solidFill>
-                <a:effectLst/>
-                <a:latin typeface="Source Code Pro" panose="020B0604020202020204" pitchFamily="49" charset="0"/>
-              </a:rPr>
-              <a:t>; </a:t>
-            </a:r>
-            <a:r>
-              <a:rPr lang="de-DE" sz="1400" b="0" i="0">
-                <a:solidFill>
-                  <a:srgbClr val="086B08"/>
-                </a:solidFill>
-                <a:effectLst/>
-                <a:latin typeface="Source Code Pro" panose="020B0604020202020204" pitchFamily="49" charset="0"/>
-              </a:rPr>
-              <a:t>// RX, TX</a:t>
-            </a:r>
-            <a:endParaRPr lang="de-DE" sz="1400"/>
+      <p:sp>
+        <p:nvSpPr>
+          <p:cNvPr id="3" name="Titel 2">
+            <a:extLst>
+              <a:ext uri="{FF2B5EF4-FFF2-40B4-BE49-F238E27FC236}">
+                <a16:creationId xmlns:a16="http://schemas.microsoft.com/office/drawing/2014/main" id="{07AEB966-3C77-4E8D-A40C-4FD3CCA4D492}"/>
+              </a:ext>
+            </a:extLst>
+          </p:cNvPr>
+          <p:cNvSpPr>
+            <a:spLocks noGrp="1"/>
+          </p:cNvSpPr>
+          <p:nvPr>
+            <p:ph type="title"/>
+          </p:nvPr>
+        </p:nvSpPr>
+        <p:spPr/>
+        <p:txBody>
+          <a:bodyPr/>
+          <a:lstStyle/>
+          <a:p>
+            <a:r>
+              <a:rPr lang="de-DE"/>
+              <a:t>Numpad Module</a:t>
+            </a:r>
           </a:p>
         </p:txBody>
       </p:sp>
     </p:spTree>
     <p:extLst>
       <p:ext uri="{BB962C8B-B14F-4D97-AF65-F5344CB8AC3E}">
-        <p14:creationId xmlns:p14="http://schemas.microsoft.com/office/powerpoint/2010/main" val="3780853512"/>
+        <p14:creationId xmlns:p14="http://schemas.microsoft.com/office/powerpoint/2010/main" val="3429327455"/>
       </p:ext>
     </p:extLst>
   </p:cSld>
@@ -6084,7 +5972,2037 @@
           <a:bodyPr/>
           <a:lstStyle/>
           <a:p>
-            <a:endParaRPr lang="de-DE"/>
+            <a:r>
+              <a:rPr lang="de-DE"/>
+              <a:t>Numpad Module</a:t>
+            </a:r>
+          </a:p>
+        </p:txBody>
+      </p:sp>
+      <p:sp>
+        <p:nvSpPr>
+          <p:cNvPr id="3" name="Rechteck 2">
+            <a:extLst>
+              <a:ext uri="{FF2B5EF4-FFF2-40B4-BE49-F238E27FC236}">
+                <a16:creationId xmlns:a16="http://schemas.microsoft.com/office/drawing/2014/main" id="{5EC744CD-49AF-4519-BBD3-98DC18C0A490}"/>
+              </a:ext>
+            </a:extLst>
+          </p:cNvPr>
+          <p:cNvSpPr/>
+          <p:nvPr/>
+        </p:nvSpPr>
+        <p:spPr>
+          <a:xfrm>
+            <a:off x="2506375" y="1379879"/>
+            <a:ext cx="4448607" cy="2745658"/>
+          </a:xfrm>
+          <a:prstGeom prst="rect">
+            <a:avLst/>
+          </a:prstGeom>
+          <a:solidFill>
+            <a:schemeClr val="tx2">
+              <a:lumMod val="20000"/>
+              <a:lumOff val="80000"/>
+            </a:schemeClr>
+          </a:solidFill>
+          <a:ln>
+            <a:solidFill>
+              <a:schemeClr val="accent2">
+                <a:shade val="50000"/>
+              </a:schemeClr>
+            </a:solidFill>
+          </a:ln>
+        </p:spPr>
+        <p:style>
+          <a:lnRef idx="2">
+            <a:schemeClr val="accent3">
+              <a:shade val="50000"/>
+            </a:schemeClr>
+          </a:lnRef>
+          <a:fillRef idx="1">
+            <a:schemeClr val="accent3"/>
+          </a:fillRef>
+          <a:effectRef idx="0">
+            <a:schemeClr val="accent3"/>
+          </a:effectRef>
+          <a:fontRef idx="minor">
+            <a:schemeClr val="lt1"/>
+          </a:fontRef>
+        </p:style>
+        <p:txBody>
+          <a:bodyPr rtlCol="0" anchor="ctr" anchorCtr="0"/>
+          <a:lstStyle/>
+          <a:p>
+            <a:pPr algn="ctr"/>
+            <a:endParaRPr lang="de-DE" sz="1400"/>
+          </a:p>
+        </p:txBody>
+      </p:sp>
+      <p:sp>
+        <p:nvSpPr>
+          <p:cNvPr id="4" name="Rechteck 3">
+            <a:extLst>
+              <a:ext uri="{FF2B5EF4-FFF2-40B4-BE49-F238E27FC236}">
+                <a16:creationId xmlns:a16="http://schemas.microsoft.com/office/drawing/2014/main" id="{76FAABFF-D107-468E-9DAB-B2C07003CFE1}"/>
+              </a:ext>
+            </a:extLst>
+          </p:cNvPr>
+          <p:cNvSpPr/>
+          <p:nvPr/>
+        </p:nvSpPr>
+        <p:spPr>
+          <a:xfrm>
+            <a:off x="2268402" y="2571204"/>
+            <a:ext cx="475946" cy="276999"/>
+          </a:xfrm>
+          <a:prstGeom prst="rect">
+            <a:avLst/>
+          </a:prstGeom>
+          <a:solidFill>
+            <a:schemeClr val="accent2">
+              <a:lumMod val="75000"/>
+            </a:schemeClr>
+          </a:solidFill>
+          <a:ln>
+            <a:solidFill>
+              <a:schemeClr val="tx1"/>
+            </a:solidFill>
+          </a:ln>
+        </p:spPr>
+        <p:style>
+          <a:lnRef idx="2">
+            <a:schemeClr val="accent1">
+              <a:shade val="50000"/>
+            </a:schemeClr>
+          </a:lnRef>
+          <a:fillRef idx="1">
+            <a:schemeClr val="accent1"/>
+          </a:fillRef>
+          <a:effectRef idx="0">
+            <a:schemeClr val="accent1"/>
+          </a:effectRef>
+          <a:fontRef idx="minor">
+            <a:schemeClr val="lt1"/>
+          </a:fontRef>
+        </p:style>
+        <p:txBody>
+          <a:bodyPr rtlCol="0" anchor="ctr"/>
+          <a:lstStyle/>
+          <a:p>
+            <a:pPr algn="ctr"/>
+            <a:endParaRPr lang="de-DE" sz="1400"/>
+          </a:p>
+        </p:txBody>
+      </p:sp>
+      <p:sp>
+        <p:nvSpPr>
+          <p:cNvPr id="5" name="Textfeld 4">
+            <a:extLst>
+              <a:ext uri="{FF2B5EF4-FFF2-40B4-BE49-F238E27FC236}">
+                <a16:creationId xmlns:a16="http://schemas.microsoft.com/office/drawing/2014/main" id="{B6F72438-2631-498A-93FE-E94A6B407DC9}"/>
+              </a:ext>
+            </a:extLst>
+          </p:cNvPr>
+          <p:cNvSpPr txBox="1"/>
+          <p:nvPr/>
+        </p:nvSpPr>
+        <p:spPr>
+          <a:xfrm>
+            <a:off x="5221704" y="1659389"/>
+            <a:ext cx="1688026" cy="276999"/>
+          </a:xfrm>
+          <a:prstGeom prst="rect">
+            <a:avLst/>
+          </a:prstGeom>
+          <a:noFill/>
+        </p:spPr>
+        <p:txBody>
+          <a:bodyPr wrap="none" rtlCol="0">
+            <a:spAutoFit/>
+          </a:bodyPr>
+          <a:lstStyle/>
+          <a:p>
+            <a:r>
+              <a:rPr lang="de-DE" sz="1200" b="1"/>
+              <a:t>Numpad Module Board</a:t>
+            </a:r>
+          </a:p>
+        </p:txBody>
+      </p:sp>
+      <p:cxnSp>
+        <p:nvCxnSpPr>
+          <p:cNvPr id="6" name="Gerader Verbinder 5">
+            <a:extLst>
+              <a:ext uri="{FF2B5EF4-FFF2-40B4-BE49-F238E27FC236}">
+                <a16:creationId xmlns:a16="http://schemas.microsoft.com/office/drawing/2014/main" id="{6C8980B2-FF0B-49EB-BF73-420EFE0B7D26}"/>
+              </a:ext>
+            </a:extLst>
+          </p:cNvPr>
+          <p:cNvCxnSpPr>
+            <a:cxnSpLocks/>
+            <a:stCxn id="4" idx="1"/>
+            <a:endCxn id="7" idx="3"/>
+          </p:cNvCxnSpPr>
+          <p:nvPr/>
+        </p:nvCxnSpPr>
+        <p:spPr>
+          <a:xfrm flipH="1">
+            <a:off x="1834851" y="2709704"/>
+            <a:ext cx="433551" cy="0"/>
+          </a:xfrm>
+          <a:prstGeom prst="line">
+            <a:avLst/>
+          </a:prstGeom>
+          <a:ln w="73025" cmpd="tri">
+            <a:solidFill>
+              <a:srgbClr val="C00000"/>
+            </a:solidFill>
+            <a:prstDash val="solid"/>
+          </a:ln>
+        </p:spPr>
+        <p:style>
+          <a:lnRef idx="1">
+            <a:schemeClr val="accent1"/>
+          </a:lnRef>
+          <a:fillRef idx="0">
+            <a:schemeClr val="accent1"/>
+          </a:fillRef>
+          <a:effectRef idx="0">
+            <a:schemeClr val="accent1"/>
+          </a:effectRef>
+          <a:fontRef idx="minor">
+            <a:schemeClr val="tx1"/>
+          </a:fontRef>
+        </p:style>
+      </p:cxnSp>
+      <p:sp>
+        <p:nvSpPr>
+          <p:cNvPr id="7" name="Rechteck 6">
+            <a:extLst>
+              <a:ext uri="{FF2B5EF4-FFF2-40B4-BE49-F238E27FC236}">
+                <a16:creationId xmlns:a16="http://schemas.microsoft.com/office/drawing/2014/main" id="{2E8C89E6-3AE5-4D17-842E-4FD0D3BDA2ED}"/>
+              </a:ext>
+            </a:extLst>
+          </p:cNvPr>
+          <p:cNvSpPr/>
+          <p:nvPr/>
+        </p:nvSpPr>
+        <p:spPr>
+          <a:xfrm>
+            <a:off x="610567" y="2411388"/>
+            <a:ext cx="1224284" cy="596632"/>
+          </a:xfrm>
+          <a:prstGeom prst="rect">
+            <a:avLst/>
+          </a:prstGeom>
+        </p:spPr>
+        <p:style>
+          <a:lnRef idx="2">
+            <a:schemeClr val="accent1"/>
+          </a:lnRef>
+          <a:fillRef idx="1">
+            <a:schemeClr val="lt1"/>
+          </a:fillRef>
+          <a:effectRef idx="0">
+            <a:schemeClr val="accent1"/>
+          </a:effectRef>
+          <a:fontRef idx="minor">
+            <a:schemeClr val="dk1"/>
+          </a:fontRef>
+        </p:style>
+        <p:txBody>
+          <a:bodyPr rtlCol="0" anchor="ctr"/>
+          <a:lstStyle/>
+          <a:p>
+            <a:pPr algn="ctr"/>
+            <a:r>
+              <a:rPr lang="de-DE" sz="1050"/>
+              <a:t>Activity Bus </a:t>
+            </a:r>
+            <a:br>
+              <a:rPr lang="de-DE" sz="1050"/>
+            </a:br>
+            <a:r>
+              <a:rPr lang="de-DE" sz="1050"/>
+              <a:t>Panel Port (USB)</a:t>
+            </a:r>
+          </a:p>
+        </p:txBody>
+      </p:sp>
+      <p:cxnSp>
+        <p:nvCxnSpPr>
+          <p:cNvPr id="8" name="Gerader Verbinder 7">
+            <a:extLst>
+              <a:ext uri="{FF2B5EF4-FFF2-40B4-BE49-F238E27FC236}">
+                <a16:creationId xmlns:a16="http://schemas.microsoft.com/office/drawing/2014/main" id="{70F2217F-2FA8-4C90-AEF8-5405AC483490}"/>
+              </a:ext>
+            </a:extLst>
+          </p:cNvPr>
+          <p:cNvCxnSpPr>
+            <a:cxnSpLocks/>
+            <a:stCxn id="4" idx="3"/>
+            <a:endCxn id="9" idx="1"/>
+          </p:cNvCxnSpPr>
+          <p:nvPr/>
+        </p:nvCxnSpPr>
+        <p:spPr>
+          <a:xfrm>
+            <a:off x="2744348" y="2709704"/>
+            <a:ext cx="908749" cy="0"/>
+          </a:xfrm>
+          <a:prstGeom prst="line">
+            <a:avLst/>
+          </a:prstGeom>
+          <a:ln w="73025" cmpd="tri">
+            <a:prstDash val="solid"/>
+          </a:ln>
+        </p:spPr>
+        <p:style>
+          <a:lnRef idx="1">
+            <a:schemeClr val="accent1"/>
+          </a:lnRef>
+          <a:fillRef idx="0">
+            <a:schemeClr val="accent1"/>
+          </a:fillRef>
+          <a:effectRef idx="0">
+            <a:schemeClr val="accent1"/>
+          </a:effectRef>
+          <a:fontRef idx="minor">
+            <a:schemeClr val="tx1"/>
+          </a:fontRef>
+        </p:style>
+      </p:cxnSp>
+      <p:sp>
+        <p:nvSpPr>
+          <p:cNvPr id="9" name="Rechteck 8">
+            <a:extLst>
+              <a:ext uri="{FF2B5EF4-FFF2-40B4-BE49-F238E27FC236}">
+                <a16:creationId xmlns:a16="http://schemas.microsoft.com/office/drawing/2014/main" id="{1F4B38DF-B6F8-4A51-9C54-A11FB8887326}"/>
+              </a:ext>
+            </a:extLst>
+          </p:cNvPr>
+          <p:cNvSpPr/>
+          <p:nvPr/>
+        </p:nvSpPr>
+        <p:spPr>
+          <a:xfrm>
+            <a:off x="3653097" y="2471579"/>
+            <a:ext cx="2155161" cy="476250"/>
+          </a:xfrm>
+          <a:prstGeom prst="rect">
+            <a:avLst/>
+          </a:prstGeom>
+          <a:solidFill>
+            <a:schemeClr val="accent3">
+              <a:lumMod val="20000"/>
+              <a:lumOff val="80000"/>
+            </a:schemeClr>
+          </a:solidFill>
+        </p:spPr>
+        <p:style>
+          <a:lnRef idx="2">
+            <a:schemeClr val="accent1">
+              <a:shade val="50000"/>
+            </a:schemeClr>
+          </a:lnRef>
+          <a:fillRef idx="1">
+            <a:schemeClr val="accent1"/>
+          </a:fillRef>
+          <a:effectRef idx="0">
+            <a:schemeClr val="accent1"/>
+          </a:effectRef>
+          <a:fontRef idx="minor">
+            <a:schemeClr val="lt1"/>
+          </a:fontRef>
+        </p:style>
+        <p:txBody>
+          <a:bodyPr rtlCol="0" anchor="ctr"/>
+          <a:lstStyle/>
+          <a:p>
+            <a:pPr algn="ctr"/>
+            <a:r>
+              <a:rPr lang="de-DE" sz="1050" b="1">
+                <a:solidFill>
+                  <a:schemeClr val="tx1"/>
+                </a:solidFill>
+              </a:rPr>
+              <a:t>PCF8574</a:t>
+            </a:r>
+          </a:p>
+        </p:txBody>
+      </p:sp>
+      <p:sp>
+        <p:nvSpPr>
+          <p:cNvPr id="10" name="Textfeld 9">
+            <a:extLst>
+              <a:ext uri="{FF2B5EF4-FFF2-40B4-BE49-F238E27FC236}">
+                <a16:creationId xmlns:a16="http://schemas.microsoft.com/office/drawing/2014/main" id="{F1E5E489-8F8A-4158-B3FF-D951437445B8}"/>
+              </a:ext>
+            </a:extLst>
+          </p:cNvPr>
+          <p:cNvSpPr txBox="1"/>
+          <p:nvPr/>
+        </p:nvSpPr>
+        <p:spPr>
+          <a:xfrm>
+            <a:off x="3279233" y="2366328"/>
+            <a:ext cx="254878" cy="161583"/>
+          </a:xfrm>
+          <a:prstGeom prst="rect">
+            <a:avLst/>
+          </a:prstGeom>
+          <a:noFill/>
+        </p:spPr>
+        <p:txBody>
+          <a:bodyPr wrap="none" lIns="0" tIns="0" rIns="0" bIns="0" rtlCol="0">
+            <a:spAutoFit/>
+          </a:bodyPr>
+          <a:lstStyle/>
+          <a:p>
+            <a:pPr algn="ctr"/>
+            <a:r>
+              <a:rPr lang="de-DE" sz="1050"/>
+              <a:t>GND</a:t>
+            </a:r>
+          </a:p>
+        </p:txBody>
+      </p:sp>
+      <p:sp>
+        <p:nvSpPr>
+          <p:cNvPr id="11" name="Textfeld 10">
+            <a:extLst>
+              <a:ext uri="{FF2B5EF4-FFF2-40B4-BE49-F238E27FC236}">
+                <a16:creationId xmlns:a16="http://schemas.microsoft.com/office/drawing/2014/main" id="{E6F1C7A7-94D3-437F-A644-0A536426AF40}"/>
+              </a:ext>
+            </a:extLst>
+          </p:cNvPr>
+          <p:cNvSpPr txBox="1"/>
+          <p:nvPr/>
+        </p:nvSpPr>
+        <p:spPr>
+          <a:xfrm>
+            <a:off x="3296065" y="2184535"/>
+            <a:ext cx="221214" cy="161583"/>
+          </a:xfrm>
+          <a:prstGeom prst="rect">
+            <a:avLst/>
+          </a:prstGeom>
+          <a:noFill/>
+        </p:spPr>
+        <p:txBody>
+          <a:bodyPr wrap="none" lIns="0" tIns="0" rIns="0" bIns="0" rtlCol="0">
+            <a:spAutoFit/>
+          </a:bodyPr>
+          <a:lstStyle/>
+          <a:p>
+            <a:pPr algn="ctr"/>
+            <a:r>
+              <a:rPr lang="de-DE" sz="1050"/>
+              <a:t>VCC</a:t>
+            </a:r>
+          </a:p>
+        </p:txBody>
+      </p:sp>
+      <p:sp>
+        <p:nvSpPr>
+          <p:cNvPr id="14" name="Rechteck 13">
+            <a:extLst>
+              <a:ext uri="{FF2B5EF4-FFF2-40B4-BE49-F238E27FC236}">
+                <a16:creationId xmlns:a16="http://schemas.microsoft.com/office/drawing/2014/main" id="{ADEDB657-E6B6-4B35-8560-BF3A8C0B7922}"/>
+              </a:ext>
+            </a:extLst>
+          </p:cNvPr>
+          <p:cNvSpPr/>
+          <p:nvPr/>
+        </p:nvSpPr>
+        <p:spPr>
+          <a:xfrm>
+            <a:off x="4138179" y="4575110"/>
+            <a:ext cx="1670074" cy="596632"/>
+          </a:xfrm>
+          <a:prstGeom prst="rect">
+            <a:avLst/>
+          </a:prstGeom>
+        </p:spPr>
+        <p:style>
+          <a:lnRef idx="2">
+            <a:schemeClr val="accent1"/>
+          </a:lnRef>
+          <a:fillRef idx="1">
+            <a:schemeClr val="lt1"/>
+          </a:fillRef>
+          <a:effectRef idx="0">
+            <a:schemeClr val="accent1"/>
+          </a:effectRef>
+          <a:fontRef idx="minor">
+            <a:schemeClr val="dk1"/>
+          </a:fontRef>
+        </p:style>
+        <p:txBody>
+          <a:bodyPr rtlCol="0" anchor="ctr"/>
+          <a:lstStyle/>
+          <a:p>
+            <a:pPr algn="ctr"/>
+            <a:r>
+              <a:rPr lang="de-DE" sz="1050"/>
+              <a:t>Numpad</a:t>
+            </a:r>
+          </a:p>
+        </p:txBody>
+      </p:sp>
+      <p:sp>
+        <p:nvSpPr>
+          <p:cNvPr id="27" name="Textfeld 26">
+            <a:extLst>
+              <a:ext uri="{FF2B5EF4-FFF2-40B4-BE49-F238E27FC236}">
+                <a16:creationId xmlns:a16="http://schemas.microsoft.com/office/drawing/2014/main" id="{D5258AE5-2960-40DA-B34D-E13C021B3E83}"/>
+              </a:ext>
+            </a:extLst>
+          </p:cNvPr>
+          <p:cNvSpPr txBox="1"/>
+          <p:nvPr/>
+        </p:nvSpPr>
+        <p:spPr>
+          <a:xfrm>
+            <a:off x="3311293" y="2983347"/>
+            <a:ext cx="190758" cy="161583"/>
+          </a:xfrm>
+          <a:prstGeom prst="rect">
+            <a:avLst/>
+          </a:prstGeom>
+          <a:noFill/>
+        </p:spPr>
+        <p:txBody>
+          <a:bodyPr wrap="none" lIns="0" tIns="0" rIns="0" bIns="0" rtlCol="0">
+            <a:spAutoFit/>
+          </a:bodyPr>
+          <a:lstStyle/>
+          <a:p>
+            <a:pPr algn="ctr"/>
+            <a:r>
+              <a:rPr lang="de-DE" sz="1050"/>
+              <a:t>SCL</a:t>
+            </a:r>
+          </a:p>
+        </p:txBody>
+      </p:sp>
+      <p:sp>
+        <p:nvSpPr>
+          <p:cNvPr id="28" name="Textfeld 27">
+            <a:extLst>
+              <a:ext uri="{FF2B5EF4-FFF2-40B4-BE49-F238E27FC236}">
+                <a16:creationId xmlns:a16="http://schemas.microsoft.com/office/drawing/2014/main" id="{FA935AFC-07E8-4B54-87EF-A256C6EC14FD}"/>
+              </a:ext>
+            </a:extLst>
+          </p:cNvPr>
+          <p:cNvSpPr txBox="1"/>
+          <p:nvPr/>
+        </p:nvSpPr>
+        <p:spPr>
+          <a:xfrm>
+            <a:off x="3294462" y="2801554"/>
+            <a:ext cx="224420" cy="161583"/>
+          </a:xfrm>
+          <a:prstGeom prst="rect">
+            <a:avLst/>
+          </a:prstGeom>
+          <a:noFill/>
+        </p:spPr>
+        <p:txBody>
+          <a:bodyPr wrap="none" lIns="0" tIns="0" rIns="0" bIns="0" rtlCol="0">
+            <a:spAutoFit/>
+          </a:bodyPr>
+          <a:lstStyle/>
+          <a:p>
+            <a:pPr algn="ctr"/>
+            <a:r>
+              <a:rPr lang="de-DE" sz="1050"/>
+              <a:t>SDA</a:t>
+            </a:r>
+          </a:p>
+        </p:txBody>
+      </p:sp>
+      <p:sp>
+        <p:nvSpPr>
+          <p:cNvPr id="29" name="Textfeld 28">
+            <a:extLst>
+              <a:ext uri="{FF2B5EF4-FFF2-40B4-BE49-F238E27FC236}">
+                <a16:creationId xmlns:a16="http://schemas.microsoft.com/office/drawing/2014/main" id="{BE2FE2C4-1C2E-4C93-9B71-E62C39C97F25}"/>
+              </a:ext>
+            </a:extLst>
+          </p:cNvPr>
+          <p:cNvSpPr txBox="1"/>
+          <p:nvPr/>
+        </p:nvSpPr>
+        <p:spPr>
+          <a:xfrm>
+            <a:off x="956824" y="952545"/>
+            <a:ext cx="1311578" cy="1200329"/>
+          </a:xfrm>
+          <a:prstGeom prst="rect">
+            <a:avLst/>
+          </a:prstGeom>
+          <a:noFill/>
+        </p:spPr>
+        <p:txBody>
+          <a:bodyPr wrap="none" rtlCol="0">
+            <a:spAutoFit/>
+          </a:bodyPr>
+          <a:lstStyle/>
+          <a:p>
+            <a:r>
+              <a:rPr lang="de-DE" sz="1200" b="1"/>
+              <a:t>USB Pin Belegung</a:t>
+            </a:r>
+            <a:br>
+              <a:rPr lang="de-DE" sz="1200" b="1"/>
+            </a:br>
+            <a:endParaRPr lang="de-DE" sz="1200" b="1"/>
+          </a:p>
+          <a:p>
+            <a:pPr marL="171450" indent="-171450">
+              <a:buFont typeface="Arial" panose="020B0604020202020204" pitchFamily="34" charset="0"/>
+              <a:buChar char="•"/>
+            </a:pPr>
+            <a:r>
+              <a:rPr lang="de-DE" sz="1200"/>
+              <a:t>G : GND </a:t>
+            </a:r>
+          </a:p>
+          <a:p>
+            <a:pPr marL="171450" indent="-171450">
+              <a:buFont typeface="Arial" panose="020B0604020202020204" pitchFamily="34" charset="0"/>
+              <a:buChar char="•"/>
+            </a:pPr>
+            <a:r>
+              <a:rPr lang="de-DE" sz="1200"/>
+              <a:t>D- : SDA</a:t>
+            </a:r>
+          </a:p>
+          <a:p>
+            <a:pPr marL="171450" indent="-171450">
+              <a:buFont typeface="Arial" panose="020B0604020202020204" pitchFamily="34" charset="0"/>
+              <a:buChar char="•"/>
+            </a:pPr>
+            <a:r>
+              <a:rPr lang="de-DE" sz="1200"/>
+              <a:t>D+ : SCL</a:t>
+            </a:r>
+          </a:p>
+          <a:p>
+            <a:pPr marL="171450" indent="-171450">
+              <a:buFont typeface="Arial" panose="020B0604020202020204" pitchFamily="34" charset="0"/>
+              <a:buChar char="•"/>
+            </a:pPr>
+            <a:r>
+              <a:rPr lang="de-DE" sz="1200"/>
+              <a:t>V : VCC (5V)</a:t>
+            </a:r>
+          </a:p>
+        </p:txBody>
+      </p:sp>
+      <p:sp>
+        <p:nvSpPr>
+          <p:cNvPr id="30" name="Rechteck 29">
+            <a:extLst>
+              <a:ext uri="{FF2B5EF4-FFF2-40B4-BE49-F238E27FC236}">
+                <a16:creationId xmlns:a16="http://schemas.microsoft.com/office/drawing/2014/main" id="{7F19D6DD-8014-42AF-8934-E707A82513EE}"/>
+              </a:ext>
+            </a:extLst>
+          </p:cNvPr>
+          <p:cNvSpPr/>
+          <p:nvPr/>
+        </p:nvSpPr>
+        <p:spPr>
+          <a:xfrm>
+            <a:off x="4138178" y="3968560"/>
+            <a:ext cx="313100" cy="276999"/>
+          </a:xfrm>
+          <a:prstGeom prst="rect">
+            <a:avLst/>
+          </a:prstGeom>
+        </p:spPr>
+        <p:style>
+          <a:lnRef idx="2">
+            <a:schemeClr val="accent1">
+              <a:shade val="50000"/>
+            </a:schemeClr>
+          </a:lnRef>
+          <a:fillRef idx="1">
+            <a:schemeClr val="accent1"/>
+          </a:fillRef>
+          <a:effectRef idx="0">
+            <a:schemeClr val="accent1"/>
+          </a:effectRef>
+          <a:fontRef idx="minor">
+            <a:schemeClr val="lt1"/>
+          </a:fontRef>
+        </p:style>
+        <p:txBody>
+          <a:bodyPr rtlCol="0" anchor="ctr"/>
+          <a:lstStyle/>
+          <a:p>
+            <a:pPr algn="ctr"/>
+            <a:endParaRPr lang="de-DE" sz="1050"/>
+          </a:p>
+        </p:txBody>
+      </p:sp>
+      <p:cxnSp>
+        <p:nvCxnSpPr>
+          <p:cNvPr id="31" name="Gerader Verbinder 30">
+            <a:extLst>
+              <a:ext uri="{FF2B5EF4-FFF2-40B4-BE49-F238E27FC236}">
+                <a16:creationId xmlns:a16="http://schemas.microsoft.com/office/drawing/2014/main" id="{426E1315-530F-4280-B276-C6F3FE6BAFD8}"/>
+              </a:ext>
+            </a:extLst>
+          </p:cNvPr>
+          <p:cNvCxnSpPr>
+            <a:cxnSpLocks/>
+            <a:endCxn id="30" idx="2"/>
+          </p:cNvCxnSpPr>
+          <p:nvPr/>
+        </p:nvCxnSpPr>
+        <p:spPr>
+          <a:xfrm flipV="1">
+            <a:off x="4294728" y="4245559"/>
+            <a:ext cx="0" cy="329551"/>
+          </a:xfrm>
+          <a:prstGeom prst="line">
+            <a:avLst/>
+          </a:prstGeom>
+          <a:ln w="38100" cmpd="dbl">
+            <a:solidFill>
+              <a:schemeClr val="accent1"/>
+            </a:solidFill>
+          </a:ln>
+        </p:spPr>
+        <p:style>
+          <a:lnRef idx="1">
+            <a:schemeClr val="accent1"/>
+          </a:lnRef>
+          <a:fillRef idx="0">
+            <a:schemeClr val="accent1"/>
+          </a:fillRef>
+          <a:effectRef idx="0">
+            <a:schemeClr val="accent1"/>
+          </a:effectRef>
+          <a:fontRef idx="minor">
+            <a:schemeClr val="tx1"/>
+          </a:fontRef>
+        </p:style>
+      </p:cxnSp>
+      <p:sp>
+        <p:nvSpPr>
+          <p:cNvPr id="33" name="Textfeld 32">
+            <a:extLst>
+              <a:ext uri="{FF2B5EF4-FFF2-40B4-BE49-F238E27FC236}">
+                <a16:creationId xmlns:a16="http://schemas.microsoft.com/office/drawing/2014/main" id="{89763073-C3BA-414E-B6A2-15128BC95EDC}"/>
+              </a:ext>
+            </a:extLst>
+          </p:cNvPr>
+          <p:cNvSpPr txBox="1"/>
+          <p:nvPr/>
+        </p:nvSpPr>
+        <p:spPr>
+          <a:xfrm>
+            <a:off x="3917471" y="3751859"/>
+            <a:ext cx="254878" cy="161583"/>
+          </a:xfrm>
+          <a:prstGeom prst="rect">
+            <a:avLst/>
+          </a:prstGeom>
+          <a:noFill/>
+        </p:spPr>
+        <p:txBody>
+          <a:bodyPr wrap="none" lIns="0" tIns="0" rIns="0" bIns="0" rtlCol="0">
+            <a:spAutoFit/>
+          </a:bodyPr>
+          <a:lstStyle/>
+          <a:p>
+            <a:pPr algn="ctr"/>
+            <a:r>
+              <a:rPr lang="de-DE" sz="1050"/>
+              <a:t>GND</a:t>
+            </a:r>
+          </a:p>
+        </p:txBody>
+      </p:sp>
+      <p:cxnSp>
+        <p:nvCxnSpPr>
+          <p:cNvPr id="34" name="Verbinder: gewinkelt 470">
+            <a:extLst>
+              <a:ext uri="{FF2B5EF4-FFF2-40B4-BE49-F238E27FC236}">
+                <a16:creationId xmlns:a16="http://schemas.microsoft.com/office/drawing/2014/main" id="{B613DC5D-5139-4BC4-971B-5598FFAA5037}"/>
+              </a:ext>
+            </a:extLst>
+          </p:cNvPr>
+          <p:cNvCxnSpPr>
+            <a:cxnSpLocks/>
+          </p:cNvCxnSpPr>
+          <p:nvPr/>
+        </p:nvCxnSpPr>
+        <p:spPr>
+          <a:xfrm>
+            <a:off x="4248548" y="3806977"/>
+            <a:ext cx="0" cy="161583"/>
+          </a:xfrm>
+          <a:prstGeom prst="straightConnector1">
+            <a:avLst/>
+          </a:prstGeom>
+        </p:spPr>
+        <p:style>
+          <a:lnRef idx="1">
+            <a:schemeClr val="accent1"/>
+          </a:lnRef>
+          <a:fillRef idx="0">
+            <a:schemeClr val="accent1"/>
+          </a:fillRef>
+          <a:effectRef idx="0">
+            <a:schemeClr val="accent1"/>
+          </a:effectRef>
+          <a:fontRef idx="minor">
+            <a:schemeClr val="tx1"/>
+          </a:fontRef>
+        </p:style>
+      </p:cxnSp>
+      <p:cxnSp>
+        <p:nvCxnSpPr>
+          <p:cNvPr id="41" name="Verbinder: gewinkelt 470">
+            <a:extLst>
+              <a:ext uri="{FF2B5EF4-FFF2-40B4-BE49-F238E27FC236}">
+                <a16:creationId xmlns:a16="http://schemas.microsoft.com/office/drawing/2014/main" id="{E4A80945-05A5-4817-BFC5-9632A7967140}"/>
+              </a:ext>
+            </a:extLst>
+          </p:cNvPr>
+          <p:cNvCxnSpPr>
+            <a:cxnSpLocks/>
+          </p:cNvCxnSpPr>
+          <p:nvPr/>
+        </p:nvCxnSpPr>
+        <p:spPr>
+          <a:xfrm>
+            <a:off x="4400948" y="3802363"/>
+            <a:ext cx="0" cy="161583"/>
+          </a:xfrm>
+          <a:prstGeom prst="straightConnector1">
+            <a:avLst/>
+          </a:prstGeom>
+        </p:spPr>
+        <p:style>
+          <a:lnRef idx="1">
+            <a:schemeClr val="accent1"/>
+          </a:lnRef>
+          <a:fillRef idx="0">
+            <a:schemeClr val="accent1"/>
+          </a:fillRef>
+          <a:effectRef idx="0">
+            <a:schemeClr val="accent1"/>
+          </a:effectRef>
+          <a:fontRef idx="minor">
+            <a:schemeClr val="tx1"/>
+          </a:fontRef>
+        </p:style>
+      </p:cxnSp>
+      <p:sp>
+        <p:nvSpPr>
+          <p:cNvPr id="42" name="Textfeld 41">
+            <a:extLst>
+              <a:ext uri="{FF2B5EF4-FFF2-40B4-BE49-F238E27FC236}">
+                <a16:creationId xmlns:a16="http://schemas.microsoft.com/office/drawing/2014/main" id="{6867D794-AEDF-4514-9C4D-9D81DC9CB0E0}"/>
+              </a:ext>
+            </a:extLst>
+          </p:cNvPr>
+          <p:cNvSpPr txBox="1"/>
+          <p:nvPr/>
+        </p:nvSpPr>
+        <p:spPr>
+          <a:xfrm>
+            <a:off x="4465623" y="3748589"/>
+            <a:ext cx="221214" cy="161583"/>
+          </a:xfrm>
+          <a:prstGeom prst="rect">
+            <a:avLst/>
+          </a:prstGeom>
+          <a:noFill/>
+        </p:spPr>
+        <p:txBody>
+          <a:bodyPr wrap="none" lIns="0" tIns="0" rIns="0" bIns="0" rtlCol="0">
+            <a:spAutoFit/>
+          </a:bodyPr>
+          <a:lstStyle/>
+          <a:p>
+            <a:pPr algn="ctr"/>
+            <a:r>
+              <a:rPr lang="de-DE" sz="1050"/>
+              <a:t>VCC</a:t>
+            </a:r>
+          </a:p>
+        </p:txBody>
+      </p:sp>
+      <p:sp>
+        <p:nvSpPr>
+          <p:cNvPr id="43" name="Rechteck 42">
+            <a:extLst>
+              <a:ext uri="{FF2B5EF4-FFF2-40B4-BE49-F238E27FC236}">
+                <a16:creationId xmlns:a16="http://schemas.microsoft.com/office/drawing/2014/main" id="{0D75C4AC-1F3F-4C12-A77F-D41CB60314CD}"/>
+              </a:ext>
+            </a:extLst>
+          </p:cNvPr>
+          <p:cNvSpPr/>
+          <p:nvPr/>
+        </p:nvSpPr>
+        <p:spPr>
+          <a:xfrm>
+            <a:off x="4966252" y="3994836"/>
+            <a:ext cx="842003" cy="276999"/>
+          </a:xfrm>
+          <a:prstGeom prst="rect">
+            <a:avLst/>
+          </a:prstGeom>
+        </p:spPr>
+        <p:style>
+          <a:lnRef idx="2">
+            <a:schemeClr val="accent1">
+              <a:shade val="50000"/>
+            </a:schemeClr>
+          </a:lnRef>
+          <a:fillRef idx="1">
+            <a:schemeClr val="accent1"/>
+          </a:fillRef>
+          <a:effectRef idx="0">
+            <a:schemeClr val="accent1"/>
+          </a:effectRef>
+          <a:fontRef idx="minor">
+            <a:schemeClr val="lt1"/>
+          </a:fontRef>
+        </p:style>
+        <p:txBody>
+          <a:bodyPr rtlCol="0" anchor="ctr"/>
+          <a:lstStyle/>
+          <a:p>
+            <a:pPr algn="ctr"/>
+            <a:endParaRPr lang="de-DE" sz="1050"/>
+          </a:p>
+        </p:txBody>
+      </p:sp>
+      <p:cxnSp>
+        <p:nvCxnSpPr>
+          <p:cNvPr id="46" name="Gerader Verbinder 45">
+            <a:extLst>
+              <a:ext uri="{FF2B5EF4-FFF2-40B4-BE49-F238E27FC236}">
+                <a16:creationId xmlns:a16="http://schemas.microsoft.com/office/drawing/2014/main" id="{1B09F344-5FD9-452C-81C3-5661EC49E162}"/>
+              </a:ext>
+            </a:extLst>
+          </p:cNvPr>
+          <p:cNvCxnSpPr>
+            <a:cxnSpLocks/>
+          </p:cNvCxnSpPr>
+          <p:nvPr/>
+        </p:nvCxnSpPr>
+        <p:spPr>
+          <a:xfrm flipV="1">
+            <a:off x="5116320" y="2957266"/>
+            <a:ext cx="0" cy="1034388"/>
+          </a:xfrm>
+          <a:prstGeom prst="line">
+            <a:avLst/>
+          </a:prstGeom>
+          <a:ln w="12700">
+            <a:prstDash val="sysDash"/>
+          </a:ln>
+        </p:spPr>
+        <p:style>
+          <a:lnRef idx="1">
+            <a:schemeClr val="accent1"/>
+          </a:lnRef>
+          <a:fillRef idx="0">
+            <a:schemeClr val="accent1"/>
+          </a:fillRef>
+          <a:effectRef idx="0">
+            <a:schemeClr val="accent1"/>
+          </a:effectRef>
+          <a:fontRef idx="minor">
+            <a:schemeClr val="tx1"/>
+          </a:fontRef>
+        </p:style>
+      </p:cxnSp>
+      <p:cxnSp>
+        <p:nvCxnSpPr>
+          <p:cNvPr id="49" name="Gerader Verbinder 48">
+            <a:extLst>
+              <a:ext uri="{FF2B5EF4-FFF2-40B4-BE49-F238E27FC236}">
+                <a16:creationId xmlns:a16="http://schemas.microsoft.com/office/drawing/2014/main" id="{0CCCC499-2291-4640-959C-98B73FED5412}"/>
+              </a:ext>
+            </a:extLst>
+          </p:cNvPr>
+          <p:cNvCxnSpPr>
+            <a:cxnSpLocks/>
+          </p:cNvCxnSpPr>
+          <p:nvPr/>
+        </p:nvCxnSpPr>
+        <p:spPr>
+          <a:xfrm flipV="1">
+            <a:off x="5207914" y="2957266"/>
+            <a:ext cx="0" cy="1034388"/>
+          </a:xfrm>
+          <a:prstGeom prst="line">
+            <a:avLst/>
+          </a:prstGeom>
+          <a:ln w="12700">
+            <a:prstDash val="sysDash"/>
+          </a:ln>
+        </p:spPr>
+        <p:style>
+          <a:lnRef idx="1">
+            <a:schemeClr val="accent1"/>
+          </a:lnRef>
+          <a:fillRef idx="0">
+            <a:schemeClr val="accent1"/>
+          </a:fillRef>
+          <a:effectRef idx="0">
+            <a:schemeClr val="accent1"/>
+          </a:effectRef>
+          <a:fontRef idx="minor">
+            <a:schemeClr val="tx1"/>
+          </a:fontRef>
+        </p:style>
+      </p:cxnSp>
+      <p:cxnSp>
+        <p:nvCxnSpPr>
+          <p:cNvPr id="50" name="Gerader Verbinder 49">
+            <a:extLst>
+              <a:ext uri="{FF2B5EF4-FFF2-40B4-BE49-F238E27FC236}">
+                <a16:creationId xmlns:a16="http://schemas.microsoft.com/office/drawing/2014/main" id="{8E18D386-CC8F-4DD3-BF70-4CF91521B236}"/>
+              </a:ext>
+            </a:extLst>
+          </p:cNvPr>
+          <p:cNvCxnSpPr>
+            <a:cxnSpLocks/>
+          </p:cNvCxnSpPr>
+          <p:nvPr/>
+        </p:nvCxnSpPr>
+        <p:spPr>
+          <a:xfrm flipV="1">
+            <a:off x="5299508" y="2957266"/>
+            <a:ext cx="0" cy="1034388"/>
+          </a:xfrm>
+          <a:prstGeom prst="line">
+            <a:avLst/>
+          </a:prstGeom>
+          <a:ln w="12700">
+            <a:prstDash val="sysDash"/>
+          </a:ln>
+        </p:spPr>
+        <p:style>
+          <a:lnRef idx="1">
+            <a:schemeClr val="accent1"/>
+          </a:lnRef>
+          <a:fillRef idx="0">
+            <a:schemeClr val="accent1"/>
+          </a:fillRef>
+          <a:effectRef idx="0">
+            <a:schemeClr val="accent1"/>
+          </a:effectRef>
+          <a:fontRef idx="minor">
+            <a:schemeClr val="tx1"/>
+          </a:fontRef>
+        </p:style>
+      </p:cxnSp>
+      <p:cxnSp>
+        <p:nvCxnSpPr>
+          <p:cNvPr id="51" name="Gerader Verbinder 50">
+            <a:extLst>
+              <a:ext uri="{FF2B5EF4-FFF2-40B4-BE49-F238E27FC236}">
+                <a16:creationId xmlns:a16="http://schemas.microsoft.com/office/drawing/2014/main" id="{00411E19-635A-4B91-A219-F7C78F663007}"/>
+              </a:ext>
+            </a:extLst>
+          </p:cNvPr>
+          <p:cNvCxnSpPr>
+            <a:cxnSpLocks/>
+          </p:cNvCxnSpPr>
+          <p:nvPr/>
+        </p:nvCxnSpPr>
+        <p:spPr>
+          <a:xfrm flipV="1">
+            <a:off x="5391102" y="2957266"/>
+            <a:ext cx="0" cy="1034388"/>
+          </a:xfrm>
+          <a:prstGeom prst="line">
+            <a:avLst/>
+          </a:prstGeom>
+          <a:ln w="12700">
+            <a:prstDash val="sysDash"/>
+          </a:ln>
+        </p:spPr>
+        <p:style>
+          <a:lnRef idx="1">
+            <a:schemeClr val="accent1"/>
+          </a:lnRef>
+          <a:fillRef idx="0">
+            <a:schemeClr val="accent1"/>
+          </a:fillRef>
+          <a:effectRef idx="0">
+            <a:schemeClr val="accent1"/>
+          </a:effectRef>
+          <a:fontRef idx="minor">
+            <a:schemeClr val="tx1"/>
+          </a:fontRef>
+        </p:style>
+      </p:cxnSp>
+      <p:cxnSp>
+        <p:nvCxnSpPr>
+          <p:cNvPr id="52" name="Gerader Verbinder 51">
+            <a:extLst>
+              <a:ext uri="{FF2B5EF4-FFF2-40B4-BE49-F238E27FC236}">
+                <a16:creationId xmlns:a16="http://schemas.microsoft.com/office/drawing/2014/main" id="{EB303F1C-9C26-4329-9DE1-AFD916272A94}"/>
+              </a:ext>
+            </a:extLst>
+          </p:cNvPr>
+          <p:cNvCxnSpPr>
+            <a:cxnSpLocks/>
+          </p:cNvCxnSpPr>
+          <p:nvPr/>
+        </p:nvCxnSpPr>
+        <p:spPr>
+          <a:xfrm flipV="1">
+            <a:off x="5482696" y="2957266"/>
+            <a:ext cx="0" cy="1034388"/>
+          </a:xfrm>
+          <a:prstGeom prst="line">
+            <a:avLst/>
+          </a:prstGeom>
+          <a:ln w="12700">
+            <a:prstDash val="sysDash"/>
+          </a:ln>
+        </p:spPr>
+        <p:style>
+          <a:lnRef idx="1">
+            <a:schemeClr val="accent1"/>
+          </a:lnRef>
+          <a:fillRef idx="0">
+            <a:schemeClr val="accent1"/>
+          </a:fillRef>
+          <a:effectRef idx="0">
+            <a:schemeClr val="accent1"/>
+          </a:effectRef>
+          <a:fontRef idx="minor">
+            <a:schemeClr val="tx1"/>
+          </a:fontRef>
+        </p:style>
+      </p:cxnSp>
+      <p:cxnSp>
+        <p:nvCxnSpPr>
+          <p:cNvPr id="53" name="Gerader Verbinder 52">
+            <a:extLst>
+              <a:ext uri="{FF2B5EF4-FFF2-40B4-BE49-F238E27FC236}">
+                <a16:creationId xmlns:a16="http://schemas.microsoft.com/office/drawing/2014/main" id="{7ADD7CC2-BD87-4AF1-9D57-E20B53549320}"/>
+              </a:ext>
+            </a:extLst>
+          </p:cNvPr>
+          <p:cNvCxnSpPr>
+            <a:cxnSpLocks/>
+          </p:cNvCxnSpPr>
+          <p:nvPr/>
+        </p:nvCxnSpPr>
+        <p:spPr>
+          <a:xfrm flipV="1">
+            <a:off x="5574290" y="2957266"/>
+            <a:ext cx="0" cy="1034388"/>
+          </a:xfrm>
+          <a:prstGeom prst="line">
+            <a:avLst/>
+          </a:prstGeom>
+          <a:ln w="12700">
+            <a:prstDash val="sysDash"/>
+          </a:ln>
+        </p:spPr>
+        <p:style>
+          <a:lnRef idx="1">
+            <a:schemeClr val="accent1"/>
+          </a:lnRef>
+          <a:fillRef idx="0">
+            <a:schemeClr val="accent1"/>
+          </a:fillRef>
+          <a:effectRef idx="0">
+            <a:schemeClr val="accent1"/>
+          </a:effectRef>
+          <a:fontRef idx="minor">
+            <a:schemeClr val="tx1"/>
+          </a:fontRef>
+        </p:style>
+      </p:cxnSp>
+      <p:cxnSp>
+        <p:nvCxnSpPr>
+          <p:cNvPr id="54" name="Gerader Verbinder 53">
+            <a:extLst>
+              <a:ext uri="{FF2B5EF4-FFF2-40B4-BE49-F238E27FC236}">
+                <a16:creationId xmlns:a16="http://schemas.microsoft.com/office/drawing/2014/main" id="{A616602B-FE5F-4145-AB10-118E3D043CF3}"/>
+              </a:ext>
+            </a:extLst>
+          </p:cNvPr>
+          <p:cNvCxnSpPr>
+            <a:cxnSpLocks/>
+          </p:cNvCxnSpPr>
+          <p:nvPr/>
+        </p:nvCxnSpPr>
+        <p:spPr>
+          <a:xfrm flipV="1">
+            <a:off x="5665884" y="2957266"/>
+            <a:ext cx="0" cy="1034388"/>
+          </a:xfrm>
+          <a:prstGeom prst="line">
+            <a:avLst/>
+          </a:prstGeom>
+          <a:ln w="12700">
+            <a:prstDash val="sysDash"/>
+          </a:ln>
+        </p:spPr>
+        <p:style>
+          <a:lnRef idx="1">
+            <a:schemeClr val="accent1"/>
+          </a:lnRef>
+          <a:fillRef idx="0">
+            <a:schemeClr val="accent1"/>
+          </a:fillRef>
+          <a:effectRef idx="0">
+            <a:schemeClr val="accent1"/>
+          </a:effectRef>
+          <a:fontRef idx="minor">
+            <a:schemeClr val="tx1"/>
+          </a:fontRef>
+        </p:style>
+      </p:cxnSp>
+      <p:cxnSp>
+        <p:nvCxnSpPr>
+          <p:cNvPr id="56" name="Gerader Verbinder 55">
+            <a:extLst>
+              <a:ext uri="{FF2B5EF4-FFF2-40B4-BE49-F238E27FC236}">
+                <a16:creationId xmlns:a16="http://schemas.microsoft.com/office/drawing/2014/main" id="{D32A9C08-C11E-46AC-B318-8F22C3BF06AE}"/>
+              </a:ext>
+            </a:extLst>
+          </p:cNvPr>
+          <p:cNvCxnSpPr>
+            <a:cxnSpLocks/>
+          </p:cNvCxnSpPr>
+          <p:nvPr/>
+        </p:nvCxnSpPr>
+        <p:spPr>
+          <a:xfrm flipV="1">
+            <a:off x="5116320" y="4264031"/>
+            <a:ext cx="0" cy="303275"/>
+          </a:xfrm>
+          <a:prstGeom prst="line">
+            <a:avLst/>
+          </a:prstGeom>
+          <a:ln w="12700">
+            <a:prstDash val="sysDash"/>
+          </a:ln>
+        </p:spPr>
+        <p:style>
+          <a:lnRef idx="1">
+            <a:schemeClr val="accent1"/>
+          </a:lnRef>
+          <a:fillRef idx="0">
+            <a:schemeClr val="accent1"/>
+          </a:fillRef>
+          <a:effectRef idx="0">
+            <a:schemeClr val="accent1"/>
+          </a:effectRef>
+          <a:fontRef idx="minor">
+            <a:schemeClr val="tx1"/>
+          </a:fontRef>
+        </p:style>
+      </p:cxnSp>
+      <p:cxnSp>
+        <p:nvCxnSpPr>
+          <p:cNvPr id="58" name="Gerader Verbinder 57">
+            <a:extLst>
+              <a:ext uri="{FF2B5EF4-FFF2-40B4-BE49-F238E27FC236}">
+                <a16:creationId xmlns:a16="http://schemas.microsoft.com/office/drawing/2014/main" id="{5C13E2FE-0BBC-4449-9A4A-66C5B53AF63B}"/>
+              </a:ext>
+            </a:extLst>
+          </p:cNvPr>
+          <p:cNvCxnSpPr>
+            <a:cxnSpLocks/>
+          </p:cNvCxnSpPr>
+          <p:nvPr/>
+        </p:nvCxnSpPr>
+        <p:spPr>
+          <a:xfrm flipV="1">
+            <a:off x="5194829" y="4264031"/>
+            <a:ext cx="0" cy="303275"/>
+          </a:xfrm>
+          <a:prstGeom prst="line">
+            <a:avLst/>
+          </a:prstGeom>
+          <a:ln w="12700">
+            <a:prstDash val="sysDash"/>
+          </a:ln>
+        </p:spPr>
+        <p:style>
+          <a:lnRef idx="1">
+            <a:schemeClr val="accent1"/>
+          </a:lnRef>
+          <a:fillRef idx="0">
+            <a:schemeClr val="accent1"/>
+          </a:fillRef>
+          <a:effectRef idx="0">
+            <a:schemeClr val="accent1"/>
+          </a:effectRef>
+          <a:fontRef idx="minor">
+            <a:schemeClr val="tx1"/>
+          </a:fontRef>
+        </p:style>
+      </p:cxnSp>
+      <p:cxnSp>
+        <p:nvCxnSpPr>
+          <p:cNvPr id="59" name="Gerader Verbinder 58">
+            <a:extLst>
+              <a:ext uri="{FF2B5EF4-FFF2-40B4-BE49-F238E27FC236}">
+                <a16:creationId xmlns:a16="http://schemas.microsoft.com/office/drawing/2014/main" id="{0787AC6F-67EB-4D04-B4A8-6F67D923A3D4}"/>
+              </a:ext>
+            </a:extLst>
+          </p:cNvPr>
+          <p:cNvCxnSpPr>
+            <a:cxnSpLocks/>
+          </p:cNvCxnSpPr>
+          <p:nvPr/>
+        </p:nvCxnSpPr>
+        <p:spPr>
+          <a:xfrm flipV="1">
+            <a:off x="5273338" y="4264031"/>
+            <a:ext cx="0" cy="303275"/>
+          </a:xfrm>
+          <a:prstGeom prst="line">
+            <a:avLst/>
+          </a:prstGeom>
+          <a:ln w="12700">
+            <a:prstDash val="sysDash"/>
+          </a:ln>
+        </p:spPr>
+        <p:style>
+          <a:lnRef idx="1">
+            <a:schemeClr val="accent1"/>
+          </a:lnRef>
+          <a:fillRef idx="0">
+            <a:schemeClr val="accent1"/>
+          </a:fillRef>
+          <a:effectRef idx="0">
+            <a:schemeClr val="accent1"/>
+          </a:effectRef>
+          <a:fontRef idx="minor">
+            <a:schemeClr val="tx1"/>
+          </a:fontRef>
+        </p:style>
+      </p:cxnSp>
+      <p:cxnSp>
+        <p:nvCxnSpPr>
+          <p:cNvPr id="60" name="Gerader Verbinder 59">
+            <a:extLst>
+              <a:ext uri="{FF2B5EF4-FFF2-40B4-BE49-F238E27FC236}">
+                <a16:creationId xmlns:a16="http://schemas.microsoft.com/office/drawing/2014/main" id="{9ED501F5-9BF5-4FFB-94C3-CF6490DB619F}"/>
+              </a:ext>
+            </a:extLst>
+          </p:cNvPr>
+          <p:cNvCxnSpPr>
+            <a:cxnSpLocks/>
+          </p:cNvCxnSpPr>
+          <p:nvPr/>
+        </p:nvCxnSpPr>
+        <p:spPr>
+          <a:xfrm flipV="1">
+            <a:off x="5351847" y="4264031"/>
+            <a:ext cx="0" cy="303275"/>
+          </a:xfrm>
+          <a:prstGeom prst="line">
+            <a:avLst/>
+          </a:prstGeom>
+          <a:ln w="12700">
+            <a:prstDash val="sysDash"/>
+          </a:ln>
+        </p:spPr>
+        <p:style>
+          <a:lnRef idx="1">
+            <a:schemeClr val="accent1"/>
+          </a:lnRef>
+          <a:fillRef idx="0">
+            <a:schemeClr val="accent1"/>
+          </a:fillRef>
+          <a:effectRef idx="0">
+            <a:schemeClr val="accent1"/>
+          </a:effectRef>
+          <a:fontRef idx="minor">
+            <a:schemeClr val="tx1"/>
+          </a:fontRef>
+        </p:style>
+      </p:cxnSp>
+      <p:cxnSp>
+        <p:nvCxnSpPr>
+          <p:cNvPr id="61" name="Gerader Verbinder 60">
+            <a:extLst>
+              <a:ext uri="{FF2B5EF4-FFF2-40B4-BE49-F238E27FC236}">
+                <a16:creationId xmlns:a16="http://schemas.microsoft.com/office/drawing/2014/main" id="{8863C53B-A8EE-4690-9B57-40C8D8C9A0A0}"/>
+              </a:ext>
+            </a:extLst>
+          </p:cNvPr>
+          <p:cNvCxnSpPr>
+            <a:cxnSpLocks/>
+          </p:cNvCxnSpPr>
+          <p:nvPr/>
+        </p:nvCxnSpPr>
+        <p:spPr>
+          <a:xfrm flipV="1">
+            <a:off x="5430356" y="4264031"/>
+            <a:ext cx="0" cy="303275"/>
+          </a:xfrm>
+          <a:prstGeom prst="line">
+            <a:avLst/>
+          </a:prstGeom>
+          <a:ln w="12700">
+            <a:prstDash val="sysDash"/>
+          </a:ln>
+        </p:spPr>
+        <p:style>
+          <a:lnRef idx="1">
+            <a:schemeClr val="accent1"/>
+          </a:lnRef>
+          <a:fillRef idx="0">
+            <a:schemeClr val="accent1"/>
+          </a:fillRef>
+          <a:effectRef idx="0">
+            <a:schemeClr val="accent1"/>
+          </a:effectRef>
+          <a:fontRef idx="minor">
+            <a:schemeClr val="tx1"/>
+          </a:fontRef>
+        </p:style>
+      </p:cxnSp>
+      <p:cxnSp>
+        <p:nvCxnSpPr>
+          <p:cNvPr id="62" name="Gerader Verbinder 61">
+            <a:extLst>
+              <a:ext uri="{FF2B5EF4-FFF2-40B4-BE49-F238E27FC236}">
+                <a16:creationId xmlns:a16="http://schemas.microsoft.com/office/drawing/2014/main" id="{D0383E39-D257-4D02-A8D1-803746C1C597}"/>
+              </a:ext>
+            </a:extLst>
+          </p:cNvPr>
+          <p:cNvCxnSpPr>
+            <a:cxnSpLocks/>
+          </p:cNvCxnSpPr>
+          <p:nvPr/>
+        </p:nvCxnSpPr>
+        <p:spPr>
+          <a:xfrm flipV="1">
+            <a:off x="5508865" y="4264031"/>
+            <a:ext cx="0" cy="303275"/>
+          </a:xfrm>
+          <a:prstGeom prst="line">
+            <a:avLst/>
+          </a:prstGeom>
+          <a:ln w="12700">
+            <a:prstDash val="sysDash"/>
+          </a:ln>
+        </p:spPr>
+        <p:style>
+          <a:lnRef idx="1">
+            <a:schemeClr val="accent1"/>
+          </a:lnRef>
+          <a:fillRef idx="0">
+            <a:schemeClr val="accent1"/>
+          </a:fillRef>
+          <a:effectRef idx="0">
+            <a:schemeClr val="accent1"/>
+          </a:effectRef>
+          <a:fontRef idx="minor">
+            <a:schemeClr val="tx1"/>
+          </a:fontRef>
+        </p:style>
+      </p:cxnSp>
+      <p:cxnSp>
+        <p:nvCxnSpPr>
+          <p:cNvPr id="63" name="Gerader Verbinder 62">
+            <a:extLst>
+              <a:ext uri="{FF2B5EF4-FFF2-40B4-BE49-F238E27FC236}">
+                <a16:creationId xmlns:a16="http://schemas.microsoft.com/office/drawing/2014/main" id="{06E6ADC5-D739-405C-8C10-DA0E6BB4D318}"/>
+              </a:ext>
+            </a:extLst>
+          </p:cNvPr>
+          <p:cNvCxnSpPr>
+            <a:cxnSpLocks/>
+          </p:cNvCxnSpPr>
+          <p:nvPr/>
+        </p:nvCxnSpPr>
+        <p:spPr>
+          <a:xfrm flipV="1">
+            <a:off x="5587374" y="4264031"/>
+            <a:ext cx="0" cy="303275"/>
+          </a:xfrm>
+          <a:prstGeom prst="line">
+            <a:avLst/>
+          </a:prstGeom>
+          <a:ln w="12700">
+            <a:prstDash val="sysDash"/>
+          </a:ln>
+        </p:spPr>
+        <p:style>
+          <a:lnRef idx="1">
+            <a:schemeClr val="accent1"/>
+          </a:lnRef>
+          <a:fillRef idx="0">
+            <a:schemeClr val="accent1"/>
+          </a:fillRef>
+          <a:effectRef idx="0">
+            <a:schemeClr val="accent1"/>
+          </a:effectRef>
+          <a:fontRef idx="minor">
+            <a:schemeClr val="tx1"/>
+          </a:fontRef>
+        </p:style>
+      </p:cxnSp>
+      <p:cxnSp>
+        <p:nvCxnSpPr>
+          <p:cNvPr id="64" name="Gerader Verbinder 63">
+            <a:extLst>
+              <a:ext uri="{FF2B5EF4-FFF2-40B4-BE49-F238E27FC236}">
+                <a16:creationId xmlns:a16="http://schemas.microsoft.com/office/drawing/2014/main" id="{8CAA905D-C85A-4DB4-963F-127C77B7E4EE}"/>
+              </a:ext>
+            </a:extLst>
+          </p:cNvPr>
+          <p:cNvCxnSpPr>
+            <a:cxnSpLocks/>
+          </p:cNvCxnSpPr>
+          <p:nvPr/>
+        </p:nvCxnSpPr>
+        <p:spPr>
+          <a:xfrm flipV="1">
+            <a:off x="5665884" y="4264031"/>
+            <a:ext cx="0" cy="303275"/>
+          </a:xfrm>
+          <a:prstGeom prst="line">
+            <a:avLst/>
+          </a:prstGeom>
+          <a:ln w="12700">
+            <a:prstDash val="sysDash"/>
+          </a:ln>
+        </p:spPr>
+        <p:style>
+          <a:lnRef idx="1">
+            <a:schemeClr val="accent1"/>
+          </a:lnRef>
+          <a:fillRef idx="0">
+            <a:schemeClr val="accent1"/>
+          </a:fillRef>
+          <a:effectRef idx="0">
+            <a:schemeClr val="accent1"/>
+          </a:effectRef>
+          <a:fontRef idx="minor">
+            <a:schemeClr val="tx1"/>
+          </a:fontRef>
+        </p:style>
+      </p:cxnSp>
+      <p:graphicFrame>
+        <p:nvGraphicFramePr>
+          <p:cNvPr id="67" name="Tabelle 67">
+            <a:extLst>
+              <a:ext uri="{FF2B5EF4-FFF2-40B4-BE49-F238E27FC236}">
+                <a16:creationId xmlns:a16="http://schemas.microsoft.com/office/drawing/2014/main" id="{8890D295-6599-49A6-98D9-6D7BF2CB8141}"/>
+              </a:ext>
+            </a:extLst>
+          </p:cNvPr>
+          <p:cNvGraphicFramePr>
+            <a:graphicFrameLocks noGrp="1"/>
+          </p:cNvGraphicFramePr>
+          <p:nvPr>
+            <p:extLst>
+              <p:ext uri="{D42A27DB-BD31-4B8C-83A1-F6EECF244321}">
+                <p14:modId xmlns:p14="http://schemas.microsoft.com/office/powerpoint/2010/main" val="1460835987"/>
+              </p:ext>
+            </p:extLst>
+          </p:nvPr>
+        </p:nvGraphicFramePr>
+        <p:xfrm>
+          <a:off x="7759900" y="1379879"/>
+          <a:ext cx="3682035" cy="2745657"/>
+        </p:xfrm>
+        <a:graphic>
+          <a:graphicData uri="http://schemas.openxmlformats.org/drawingml/2006/table">
+            <a:tbl>
+              <a:tblPr firstRow="1" bandRow="1">
+                <a:tableStyleId>{5C22544A-7EE6-4342-B048-85BDC9FD1C3A}</a:tableStyleId>
+              </a:tblPr>
+              <a:tblGrid>
+                <a:gridCol w="1227345">
+                  <a:extLst>
+                    <a:ext uri="{9D8B030D-6E8A-4147-A177-3AD203B41FA5}">
+                      <a16:colId xmlns:a16="http://schemas.microsoft.com/office/drawing/2014/main" val="2121670733"/>
+                    </a:ext>
+                  </a:extLst>
+                </a:gridCol>
+                <a:gridCol w="1227345">
+                  <a:extLst>
+                    <a:ext uri="{9D8B030D-6E8A-4147-A177-3AD203B41FA5}">
+                      <a16:colId xmlns:a16="http://schemas.microsoft.com/office/drawing/2014/main" val="2417437244"/>
+                    </a:ext>
+                  </a:extLst>
+                </a:gridCol>
+                <a:gridCol w="1227345">
+                  <a:extLst>
+                    <a:ext uri="{9D8B030D-6E8A-4147-A177-3AD203B41FA5}">
+                      <a16:colId xmlns:a16="http://schemas.microsoft.com/office/drawing/2014/main" val="1433090279"/>
+                    </a:ext>
+                  </a:extLst>
+                </a:gridCol>
+              </a:tblGrid>
+              <a:tr h="305073">
+                <a:tc>
+                  <a:txBody>
+                    <a:bodyPr/>
+                    <a:lstStyle/>
+                    <a:p>
+                      <a:r>
+                        <a:rPr lang="de-DE" sz="1200"/>
+                        <a:t>PCF8574</a:t>
+                      </a:r>
+                    </a:p>
+                  </a:txBody>
+                  <a:tcPr/>
+                </a:tc>
+                <a:tc>
+                  <a:txBody>
+                    <a:bodyPr/>
+                    <a:lstStyle/>
+                    <a:p>
+                      <a:r>
+                        <a:rPr lang="de-DE" sz="1200"/>
+                        <a:t>Numpad</a:t>
+                      </a:r>
+                    </a:p>
+                  </a:txBody>
+                  <a:tcPr/>
+                </a:tc>
+                <a:tc>
+                  <a:txBody>
+                    <a:bodyPr/>
+                    <a:lstStyle/>
+                    <a:p>
+                      <a:r>
+                        <a:rPr lang="de-DE" sz="1200"/>
+                        <a:t>Bedeutung</a:t>
+                      </a:r>
+                    </a:p>
+                  </a:txBody>
+                  <a:tcPr/>
+                </a:tc>
+                <a:extLst>
+                  <a:ext uri="{0D108BD9-81ED-4DB2-BD59-A6C34878D82A}">
+                    <a16:rowId xmlns:a16="http://schemas.microsoft.com/office/drawing/2014/main" val="1533146800"/>
+                  </a:ext>
+                </a:extLst>
+              </a:tr>
+              <a:tr h="305073">
+                <a:tc>
+                  <a:txBody>
+                    <a:bodyPr/>
+                    <a:lstStyle/>
+                    <a:p>
+                      <a:r>
+                        <a:rPr lang="de-DE" sz="1200"/>
+                        <a:t>P0</a:t>
+                      </a:r>
+                    </a:p>
+                  </a:txBody>
+                  <a:tcPr/>
+                </a:tc>
+                <a:tc>
+                  <a:txBody>
+                    <a:bodyPr/>
+                    <a:lstStyle/>
+                    <a:p>
+                      <a:r>
+                        <a:rPr lang="de-DE" sz="1200"/>
+                        <a:t>Pin 2</a:t>
+                      </a:r>
+                    </a:p>
+                  </a:txBody>
+                  <a:tcPr/>
+                </a:tc>
+                <a:tc>
+                  <a:txBody>
+                    <a:bodyPr/>
+                    <a:lstStyle/>
+                    <a:p>
+                      <a:r>
+                        <a:rPr lang="de-DE" sz="1200"/>
+                        <a:t>row 1</a:t>
+                      </a:r>
+                    </a:p>
+                  </a:txBody>
+                  <a:tcPr/>
+                </a:tc>
+                <a:extLst>
+                  <a:ext uri="{0D108BD9-81ED-4DB2-BD59-A6C34878D82A}">
+                    <a16:rowId xmlns:a16="http://schemas.microsoft.com/office/drawing/2014/main" val="2618513504"/>
+                  </a:ext>
+                </a:extLst>
+              </a:tr>
+              <a:tr h="305073">
+                <a:tc>
+                  <a:txBody>
+                    <a:bodyPr/>
+                    <a:lstStyle/>
+                    <a:p>
+                      <a:r>
+                        <a:rPr lang="de-DE" sz="1200"/>
+                        <a:t>P1</a:t>
+                      </a:r>
+                    </a:p>
+                  </a:txBody>
+                  <a:tcPr/>
+                </a:tc>
+                <a:tc>
+                  <a:txBody>
+                    <a:bodyPr/>
+                    <a:lstStyle/>
+                    <a:p>
+                      <a:r>
+                        <a:rPr lang="de-DE" sz="1200"/>
+                        <a:t>Pin 7</a:t>
+                      </a:r>
+                    </a:p>
+                  </a:txBody>
+                  <a:tcPr/>
+                </a:tc>
+                <a:tc>
+                  <a:txBody>
+                    <a:bodyPr/>
+                    <a:lstStyle/>
+                    <a:p>
+                      <a:r>
+                        <a:rPr lang="de-DE" sz="1200"/>
+                        <a:t>row 2</a:t>
+                      </a:r>
+                    </a:p>
+                  </a:txBody>
+                  <a:tcPr/>
+                </a:tc>
+                <a:extLst>
+                  <a:ext uri="{0D108BD9-81ED-4DB2-BD59-A6C34878D82A}">
+                    <a16:rowId xmlns:a16="http://schemas.microsoft.com/office/drawing/2014/main" val="1932918445"/>
+                  </a:ext>
+                </a:extLst>
+              </a:tr>
+              <a:tr h="305073">
+                <a:tc>
+                  <a:txBody>
+                    <a:bodyPr/>
+                    <a:lstStyle/>
+                    <a:p>
+                      <a:r>
+                        <a:rPr lang="de-DE" sz="1200"/>
+                        <a:t>P2</a:t>
+                      </a:r>
+                    </a:p>
+                  </a:txBody>
+                  <a:tcPr/>
+                </a:tc>
+                <a:tc>
+                  <a:txBody>
+                    <a:bodyPr/>
+                    <a:lstStyle/>
+                    <a:p>
+                      <a:r>
+                        <a:rPr lang="de-DE" sz="1200"/>
+                        <a:t>Pin 6</a:t>
+                      </a:r>
+                    </a:p>
+                  </a:txBody>
+                  <a:tcPr/>
+                </a:tc>
+                <a:tc>
+                  <a:txBody>
+                    <a:bodyPr/>
+                    <a:lstStyle/>
+                    <a:p>
+                      <a:r>
+                        <a:rPr lang="de-DE" sz="1200"/>
+                        <a:t>row 3</a:t>
+                      </a:r>
+                    </a:p>
+                  </a:txBody>
+                  <a:tcPr/>
+                </a:tc>
+                <a:extLst>
+                  <a:ext uri="{0D108BD9-81ED-4DB2-BD59-A6C34878D82A}">
+                    <a16:rowId xmlns:a16="http://schemas.microsoft.com/office/drawing/2014/main" val="1343528375"/>
+                  </a:ext>
+                </a:extLst>
+              </a:tr>
+              <a:tr h="305073">
+                <a:tc>
+                  <a:txBody>
+                    <a:bodyPr/>
+                    <a:lstStyle/>
+                    <a:p>
+                      <a:r>
+                        <a:rPr lang="de-DE" sz="1200"/>
+                        <a:t>P3</a:t>
+                      </a:r>
+                    </a:p>
+                  </a:txBody>
+                  <a:tcPr/>
+                </a:tc>
+                <a:tc>
+                  <a:txBody>
+                    <a:bodyPr/>
+                    <a:lstStyle/>
+                    <a:p>
+                      <a:r>
+                        <a:rPr lang="de-DE" sz="1200"/>
+                        <a:t>Pin 4</a:t>
+                      </a:r>
+                    </a:p>
+                  </a:txBody>
+                  <a:tcPr/>
+                </a:tc>
+                <a:tc>
+                  <a:txBody>
+                    <a:bodyPr/>
+                    <a:lstStyle/>
+                    <a:p>
+                      <a:r>
+                        <a:rPr lang="de-DE" sz="1200"/>
+                        <a:t>row 4</a:t>
+                      </a:r>
+                    </a:p>
+                  </a:txBody>
+                  <a:tcPr/>
+                </a:tc>
+                <a:extLst>
+                  <a:ext uri="{0D108BD9-81ED-4DB2-BD59-A6C34878D82A}">
+                    <a16:rowId xmlns:a16="http://schemas.microsoft.com/office/drawing/2014/main" val="3144996494"/>
+                  </a:ext>
+                </a:extLst>
+              </a:tr>
+              <a:tr h="305073">
+                <a:tc>
+                  <a:txBody>
+                    <a:bodyPr/>
+                    <a:lstStyle/>
+                    <a:p>
+                      <a:r>
+                        <a:rPr lang="de-DE" sz="1200"/>
+                        <a:t>P4</a:t>
+                      </a:r>
+                    </a:p>
+                  </a:txBody>
+                  <a:tcPr/>
+                </a:tc>
+                <a:tc>
+                  <a:txBody>
+                    <a:bodyPr/>
+                    <a:lstStyle/>
+                    <a:p>
+                      <a:r>
+                        <a:rPr lang="de-DE" sz="1200"/>
+                        <a:t>Pin 3</a:t>
+                      </a:r>
+                    </a:p>
+                  </a:txBody>
+                  <a:tcPr/>
+                </a:tc>
+                <a:tc>
+                  <a:txBody>
+                    <a:bodyPr/>
+                    <a:lstStyle/>
+                    <a:p>
+                      <a:r>
+                        <a:rPr lang="de-DE" sz="1200"/>
+                        <a:t>col 1</a:t>
+                      </a:r>
+                    </a:p>
+                  </a:txBody>
+                  <a:tcPr/>
+                </a:tc>
+                <a:extLst>
+                  <a:ext uri="{0D108BD9-81ED-4DB2-BD59-A6C34878D82A}">
+                    <a16:rowId xmlns:a16="http://schemas.microsoft.com/office/drawing/2014/main" val="164278551"/>
+                  </a:ext>
+                </a:extLst>
+              </a:tr>
+              <a:tr h="305073">
+                <a:tc>
+                  <a:txBody>
+                    <a:bodyPr/>
+                    <a:lstStyle/>
+                    <a:p>
+                      <a:r>
+                        <a:rPr lang="de-DE" sz="1200"/>
+                        <a:t>P5</a:t>
+                      </a:r>
+                    </a:p>
+                  </a:txBody>
+                  <a:tcPr/>
+                </a:tc>
+                <a:tc>
+                  <a:txBody>
+                    <a:bodyPr/>
+                    <a:lstStyle/>
+                    <a:p>
+                      <a:r>
+                        <a:rPr lang="de-DE" sz="1200"/>
+                        <a:t>Pin 1</a:t>
+                      </a:r>
+                    </a:p>
+                  </a:txBody>
+                  <a:tcPr/>
+                </a:tc>
+                <a:tc>
+                  <a:txBody>
+                    <a:bodyPr/>
+                    <a:lstStyle/>
+                    <a:p>
+                      <a:r>
+                        <a:rPr lang="de-DE" sz="1200"/>
+                        <a:t>col 2</a:t>
+                      </a:r>
+                    </a:p>
+                  </a:txBody>
+                  <a:tcPr/>
+                </a:tc>
+                <a:extLst>
+                  <a:ext uri="{0D108BD9-81ED-4DB2-BD59-A6C34878D82A}">
+                    <a16:rowId xmlns:a16="http://schemas.microsoft.com/office/drawing/2014/main" val="2337221895"/>
+                  </a:ext>
+                </a:extLst>
+              </a:tr>
+              <a:tr h="305073">
+                <a:tc>
+                  <a:txBody>
+                    <a:bodyPr/>
+                    <a:lstStyle/>
+                    <a:p>
+                      <a:r>
+                        <a:rPr lang="de-DE" sz="1200"/>
+                        <a:t>P6</a:t>
+                      </a:r>
+                    </a:p>
+                  </a:txBody>
+                  <a:tcPr/>
+                </a:tc>
+                <a:tc>
+                  <a:txBody>
+                    <a:bodyPr/>
+                    <a:lstStyle/>
+                    <a:p>
+                      <a:r>
+                        <a:rPr lang="de-DE" sz="1200"/>
+                        <a:t>Pin 5</a:t>
+                      </a:r>
+                    </a:p>
+                  </a:txBody>
+                  <a:tcPr/>
+                </a:tc>
+                <a:tc>
+                  <a:txBody>
+                    <a:bodyPr/>
+                    <a:lstStyle/>
+                    <a:p>
+                      <a:r>
+                        <a:rPr lang="de-DE" sz="1200"/>
+                        <a:t>col 3</a:t>
+                      </a:r>
+                    </a:p>
+                  </a:txBody>
+                  <a:tcPr/>
+                </a:tc>
+                <a:extLst>
+                  <a:ext uri="{0D108BD9-81ED-4DB2-BD59-A6C34878D82A}">
+                    <a16:rowId xmlns:a16="http://schemas.microsoft.com/office/drawing/2014/main" val="57031951"/>
+                  </a:ext>
+                </a:extLst>
+              </a:tr>
+              <a:tr h="305073">
+                <a:tc>
+                  <a:txBody>
+                    <a:bodyPr/>
+                    <a:lstStyle/>
+                    <a:p>
+                      <a:r>
+                        <a:rPr lang="de-DE" sz="1200"/>
+                        <a:t>P7</a:t>
+                      </a:r>
+                    </a:p>
+                  </a:txBody>
+                  <a:tcPr/>
+                </a:tc>
+                <a:tc>
+                  <a:txBody>
+                    <a:bodyPr/>
+                    <a:lstStyle/>
+                    <a:p>
+                      <a:r>
+                        <a:rPr lang="de-DE" sz="1200"/>
+                        <a:t>unbelegt</a:t>
+                      </a:r>
+                    </a:p>
+                  </a:txBody>
+                  <a:tcPr/>
+                </a:tc>
+                <a:tc>
+                  <a:txBody>
+                    <a:bodyPr/>
+                    <a:lstStyle/>
+                    <a:p>
+                      <a:r>
+                        <a:rPr lang="de-DE" sz="1200"/>
+                        <a:t>col 4</a:t>
+                      </a:r>
+                    </a:p>
+                  </a:txBody>
+                  <a:tcPr/>
+                </a:tc>
+                <a:extLst>
+                  <a:ext uri="{0D108BD9-81ED-4DB2-BD59-A6C34878D82A}">
+                    <a16:rowId xmlns:a16="http://schemas.microsoft.com/office/drawing/2014/main" val="3453835715"/>
+                  </a:ext>
+                </a:extLst>
+              </a:tr>
+            </a:tbl>
+          </a:graphicData>
+        </a:graphic>
+      </p:graphicFrame>
+      <p:sp>
+        <p:nvSpPr>
+          <p:cNvPr id="69" name="Textfeld 68">
+            <a:extLst>
+              <a:ext uri="{FF2B5EF4-FFF2-40B4-BE49-F238E27FC236}">
+                <a16:creationId xmlns:a16="http://schemas.microsoft.com/office/drawing/2014/main" id="{4FF79E60-DFF4-4F8A-9040-1C773E5A11E3}"/>
+              </a:ext>
+            </a:extLst>
+          </p:cNvPr>
+          <p:cNvSpPr txBox="1"/>
+          <p:nvPr/>
+        </p:nvSpPr>
+        <p:spPr>
+          <a:xfrm>
+            <a:off x="454051" y="6068965"/>
+            <a:ext cx="6096000" cy="369332"/>
+          </a:xfrm>
+          <a:prstGeom prst="rect">
+            <a:avLst/>
+          </a:prstGeom>
+          <a:noFill/>
+        </p:spPr>
+        <p:txBody>
+          <a:bodyPr wrap="square">
+            <a:spAutoFit/>
+          </a:bodyPr>
+          <a:lstStyle/>
+          <a:p>
+            <a:r>
+              <a:rPr lang="de-DE"/>
+              <a:t>https://github.com/RobTillaart/I2CKeyPad</a:t>
+            </a:r>
           </a:p>
         </p:txBody>
       </p:sp>
@@ -29714,7 +31632,7 @@
           </a:fontRef>
         </p:style>
         <p:txBody>
-          <a:bodyPr rtlCol="0" anchor="ctr" anchorCtr="0"/>
+          <a:bodyPr rtlCol="0" anchor="t" anchorCtr="0"/>
           <a:lstStyle/>
           <a:p>
             <a:pPr algn="ctr"/>
@@ -31340,7 +33258,7 @@
         </p:nvSpPr>
         <p:spPr>
           <a:xfrm>
-            <a:off x="2633835" y="3794706"/>
+            <a:off x="2719831" y="2392884"/>
             <a:ext cx="1477199" cy="276999"/>
           </a:xfrm>
           <a:prstGeom prst="rect">

--- a/Activityboard.pptx
+++ b/Activityboard.pptx
@@ -241,7 +241,7 @@
           <a:p>
             <a:fld id="{5BAC4423-DF28-4DB7-801A-CFFD9AB199E6}" type="datetimeFigureOut">
               <a:rPr lang="de-DE" smtClean="0"/>
-              <a:t>04.10.2026</a:t>
+              <a:t>07.10.2026</a:t>
             </a:fld>
             <a:endParaRPr lang="de-DE"/>
           </a:p>
@@ -29460,6 +29460,79 @@
             </a:r>
           </a:p>
           <a:p>
+            <a:pPr lvl="1"/>
+            <a:endParaRPr lang="de-DE"/>
+          </a:p>
+          <a:p>
+            <a:r>
+              <a:rPr lang="de-DE"/>
+              <a:t>Start Button (grüne LED)</a:t>
+            </a:r>
+          </a:p>
+          <a:p>
+            <a:pPr lvl="1"/>
+            <a:r>
+              <a:rPr lang="de-DE"/>
+              <a:t>wenn der start button (unterhalb der grünen LED) gedrückt wird, werden die konfigurierten Stories hintereinander angezeigt</a:t>
+            </a:r>
+          </a:p>
+          <a:p>
+            <a:pPr lvl="1"/>
+            <a:r>
+              <a:rPr lang="de-DE"/>
+              <a:t>während dieses "Selection" Modus wird eine grüne LED angezeigt</a:t>
+            </a:r>
+          </a:p>
+          <a:p>
+            <a:pPr lvl="1"/>
+            <a:r>
+              <a:rPr lang="de-DE"/>
+              <a:t>es wird jeweils ein sound und ein bitmap geöffnet – quasi als teaser</a:t>
+            </a:r>
+          </a:p>
+          <a:p>
+            <a:pPr lvl="1"/>
+            <a:r>
+              <a:rPr lang="de-DE"/>
+              <a:t>es werden alle Stories nur einmal gezeigt, dann wird der Selektionsmodus beendet</a:t>
+            </a:r>
+          </a:p>
+          <a:p>
+            <a:pPr lvl="1"/>
+            <a:endParaRPr lang="de-DE"/>
+          </a:p>
+          <a:p>
+            <a:r>
+              <a:rPr lang="de-DE"/>
+              <a:t>Select Button (blaue LED)</a:t>
+            </a:r>
+          </a:p>
+          <a:p>
+            <a:pPr lvl="1"/>
+            <a:r>
+              <a:rPr lang="de-DE"/>
+              <a:t>während des Selektionsmodus kann die gerade angezeigte Story ausgewählt werden.</a:t>
+            </a:r>
+          </a:p>
+          <a:p>
+            <a:pPr lvl="1"/>
+            <a:r>
+              <a:rPr lang="de-DE"/>
+              <a:t>dies erfolgt durch drücken des Select Buttons (unterhalb der blauen LED)</a:t>
+            </a:r>
+          </a:p>
+          <a:p>
+            <a:pPr lvl="1"/>
+            <a:r>
+              <a:rPr lang="de-DE"/>
+              <a:t>damit wird der Selektionsmodus beendet (grüne LED erlischt) und der Reading Modus beginnt (blaue LED an)</a:t>
+            </a:r>
+          </a:p>
+          <a:p>
+            <a:pPr lvl="1"/>
+            <a:endParaRPr lang="de-DE"/>
+          </a:p>
+          <a:p>
             <a:endParaRPr lang="de-DE"/>
           </a:p>
           <a:p>
@@ -29512,7 +29585,7 @@
           <p:nvPr>
             <p:extLst>
               <p:ext uri="{D42A27DB-BD31-4B8C-83A1-F6EECF244321}">
-                <p14:modId xmlns:p14="http://schemas.microsoft.com/office/powerpoint/2010/main" val="3846377953"/>
+                <p14:modId xmlns:p14="http://schemas.microsoft.com/office/powerpoint/2010/main" val="1343716653"/>
               </p:ext>
             </p:extLst>
           </p:nvPr>
@@ -29549,14 +29622,14 @@
                     </a:ext>
                   </a:extLst>
                 </a:gridCol>
-                <a:gridCol w="585857">
+                <a:gridCol w="1709807">
                   <a:extLst>
                     <a:ext uri="{9D8B030D-6E8A-4147-A177-3AD203B41FA5}">
                       <a16:colId xmlns:a16="http://schemas.microsoft.com/office/drawing/2014/main" val="3398344140"/>
                     </a:ext>
                   </a:extLst>
                 </a:gridCol>
-                <a:gridCol w="7696200">
+                <a:gridCol w="6572250">
                   <a:extLst>
                     <a:ext uri="{9D8B030D-6E8A-4147-A177-3AD203B41FA5}">
                       <a16:colId xmlns:a16="http://schemas.microsoft.com/office/drawing/2014/main" val="217806879"/>
@@ -30458,9 +30531,26 @@
                     <a:bodyPr/>
                     <a:lstStyle/>
                     <a:p>
+                      <a:pPr marL="0" marR="0" lvl="0" indent="0" algn="l" defTabSz="914400" rtl="0" eaLnBrk="1" fontAlgn="auto" latinLnBrk="0" hangingPunct="1">
+                        <a:lnSpc>
+                          <a:spcPct val="100000"/>
+                        </a:lnSpc>
+                        <a:spcBef>
+                          <a:spcPts val="0"/>
+                        </a:spcBef>
+                        <a:spcAft>
+                          <a:spcPts val="0"/>
+                        </a:spcAft>
+                        <a:buClrTx/>
+                        <a:buSzTx/>
+                        <a:buFontTx/>
+                        <a:buNone/>
+                        <a:tabLst/>
+                        <a:defRPr/>
+                      </a:pPr>
                       <a:r>
                         <a:rPr lang="de-DE" sz="1400"/>
-                        <a:t>LED1</a:t>
+                        <a:t>START_BUTTON</a:t>
                       </a:r>
                     </a:p>
                   </a:txBody>
@@ -30568,9 +30658,26 @@
                     <a:bodyPr/>
                     <a:lstStyle/>
                     <a:p>
+                      <a:pPr marL="0" marR="0" lvl="0" indent="0" algn="l" defTabSz="914400" rtl="0" eaLnBrk="1" fontAlgn="auto" latinLnBrk="0" hangingPunct="1">
+                        <a:lnSpc>
+                          <a:spcPct val="100000"/>
+                        </a:lnSpc>
+                        <a:spcBef>
+                          <a:spcPts val="0"/>
+                        </a:spcBef>
+                        <a:spcAft>
+                          <a:spcPts val="0"/>
+                        </a:spcAft>
+                        <a:buClrTx/>
+                        <a:buSzTx/>
+                        <a:buFontTx/>
+                        <a:buNone/>
+                        <a:tabLst/>
+                        <a:defRPr/>
+                      </a:pPr>
                       <a:r>
                         <a:rPr lang="de-DE" sz="1400"/>
-                        <a:t>LED2</a:t>
+                        <a:t>SELECT_BUTTON</a:t>
                       </a:r>
                     </a:p>
                   </a:txBody>
@@ -30681,9 +30788,26 @@
                     <a:bodyPr/>
                     <a:lstStyle/>
                     <a:p>
+                      <a:pPr marL="0" marR="0" lvl="0" indent="0" algn="l" defTabSz="914400" rtl="0" eaLnBrk="1" fontAlgn="auto" latinLnBrk="0" hangingPunct="1">
+                        <a:lnSpc>
+                          <a:spcPct val="100000"/>
+                        </a:lnSpc>
+                        <a:spcBef>
+                          <a:spcPts val="0"/>
+                        </a:spcBef>
+                        <a:spcAft>
+                          <a:spcPts val="0"/>
+                        </a:spcAft>
+                        <a:buClrTx/>
+                        <a:buSzTx/>
+                        <a:buFontTx/>
+                        <a:buNone/>
+                        <a:tabLst/>
+                        <a:defRPr/>
+                      </a:pPr>
                       <a:r>
                         <a:rPr lang="de-DE" sz="1400"/>
-                        <a:t>LED3</a:t>
+                        <a:t>SELECTING_LED</a:t>
                       </a:r>
                     </a:p>
                   </a:txBody>
@@ -30830,7 +30954,7 @@
                     <a:p>
                       <a:r>
                         <a:rPr lang="de-DE" sz="1400"/>
-                        <a:t>LED4</a:t>
+                        <a:t>READING_LED</a:t>
                       </a:r>
                     </a:p>
                   </a:txBody>
@@ -31006,10 +31130,7 @@
                         <a:tabLst/>
                         <a:defRPr/>
                       </a:pPr>
-                      <a:r>
-                        <a:rPr lang="de-DE" sz="1400"/>
-                        <a:t>BTN1</a:t>
-                      </a:r>
+                      <a:endParaRPr lang="de-DE" sz="1400"/>
                     </a:p>
                   </a:txBody>
                   <a:tcPr/>
@@ -31116,10 +31237,7 @@
                     <a:bodyPr/>
                     <a:lstStyle/>
                     <a:p>
-                      <a:r>
-                        <a:rPr lang="de-DE" sz="1400"/>
-                        <a:t>BTN2</a:t>
-                      </a:r>
+                      <a:endParaRPr lang="de-DE" sz="1400"/>
                     </a:p>
                   </a:txBody>
                   <a:tcPr/>
@@ -31226,10 +31344,7 @@
                     <a:bodyPr/>
                     <a:lstStyle/>
                     <a:p>
-                      <a:r>
-                        <a:rPr lang="de-DE" sz="1400"/>
-                        <a:t>BTN3</a:t>
-                      </a:r>
+                      <a:endParaRPr lang="de-DE" sz="1400"/>
                     </a:p>
                   </a:txBody>
                   <a:tcPr/>
@@ -31491,10 +31606,7 @@
                     <a:bodyPr/>
                     <a:lstStyle/>
                     <a:p>
-                      <a:r>
-                        <a:rPr lang="de-DE" sz="1400"/>
-                        <a:t>BTN4</a:t>
-                      </a:r>
+                      <a:endParaRPr lang="de-DE" sz="1400"/>
                     </a:p>
                   </a:txBody>
                   <a:tcPr/>

--- a/Activityboard.pptx
+++ b/Activityboard.pptx
@@ -5,7 +5,7 @@
     <p:sldMasterId id="2147483648" r:id="rId1"/>
   </p:sldMasterIdLst>
   <p:notesMasterIdLst>
-    <p:notesMasterId r:id="rId47"/>
+    <p:notesMasterId r:id="rId48"/>
   </p:notesMasterIdLst>
   <p:sldIdLst>
     <p:sldId id="256" r:id="rId2"/>
@@ -30,29 +30,30 @@
     <p:sldId id="295" r:id="rId21"/>
     <p:sldId id="307" r:id="rId22"/>
     <p:sldId id="308" r:id="rId23"/>
-    <p:sldId id="296" r:id="rId24"/>
-    <p:sldId id="291" r:id="rId25"/>
-    <p:sldId id="290" r:id="rId26"/>
-    <p:sldId id="292" r:id="rId27"/>
-    <p:sldId id="274" r:id="rId28"/>
-    <p:sldId id="293" r:id="rId29"/>
-    <p:sldId id="272" r:id="rId30"/>
-    <p:sldId id="271" r:id="rId31"/>
-    <p:sldId id="275" r:id="rId32"/>
-    <p:sldId id="299" r:id="rId33"/>
-    <p:sldId id="300" r:id="rId34"/>
-    <p:sldId id="303" r:id="rId35"/>
-    <p:sldId id="304" r:id="rId36"/>
-    <p:sldId id="305" r:id="rId37"/>
-    <p:sldId id="306" r:id="rId38"/>
-    <p:sldId id="294" r:id="rId39"/>
-    <p:sldId id="301" r:id="rId40"/>
-    <p:sldId id="302" r:id="rId41"/>
-    <p:sldId id="265" r:id="rId42"/>
-    <p:sldId id="266" r:id="rId43"/>
-    <p:sldId id="257" r:id="rId44"/>
-    <p:sldId id="258" r:id="rId45"/>
-    <p:sldId id="270" r:id="rId46"/>
+    <p:sldId id="309" r:id="rId24"/>
+    <p:sldId id="296" r:id="rId25"/>
+    <p:sldId id="291" r:id="rId26"/>
+    <p:sldId id="290" r:id="rId27"/>
+    <p:sldId id="292" r:id="rId28"/>
+    <p:sldId id="274" r:id="rId29"/>
+    <p:sldId id="293" r:id="rId30"/>
+    <p:sldId id="272" r:id="rId31"/>
+    <p:sldId id="271" r:id="rId32"/>
+    <p:sldId id="275" r:id="rId33"/>
+    <p:sldId id="299" r:id="rId34"/>
+    <p:sldId id="300" r:id="rId35"/>
+    <p:sldId id="303" r:id="rId36"/>
+    <p:sldId id="304" r:id="rId37"/>
+    <p:sldId id="305" r:id="rId38"/>
+    <p:sldId id="306" r:id="rId39"/>
+    <p:sldId id="294" r:id="rId40"/>
+    <p:sldId id="301" r:id="rId41"/>
+    <p:sldId id="302" r:id="rId42"/>
+    <p:sldId id="265" r:id="rId43"/>
+    <p:sldId id="266" r:id="rId44"/>
+    <p:sldId id="257" r:id="rId45"/>
+    <p:sldId id="258" r:id="rId46"/>
+    <p:sldId id="270" r:id="rId47"/>
   </p:sldIdLst>
   <p:sldSz cx="12192000" cy="6858000"/>
   <p:notesSz cx="6797675" cy="9928225"/>
@@ -241,7 +242,7 @@
           <a:p>
             <a:fld id="{5BAC4423-DF28-4DB7-801A-CFFD9AB199E6}" type="datetimeFigureOut">
               <a:rPr lang="de-DE" smtClean="0"/>
-              <a:t>07.10.2026</a:t>
+              <a:t>08.10.2026</a:t>
             </a:fld>
             <a:endParaRPr lang="de-DE"/>
           </a:p>
@@ -741,7 +742,7 @@
           <a:p>
             <a:fld id="{B84CAAA5-4837-41F4-9386-6E1FFE2A3328}" type="slidenum">
               <a:rPr lang="de-DE" smtClean="0"/>
-              <a:t>34</a:t>
+              <a:t>35</a:t>
             </a:fld>
             <a:endParaRPr lang="de-DE"/>
           </a:p>
@@ -17753,7 +17754,7 @@
           <p:nvPr>
             <p:extLst>
               <p:ext uri="{D42A27DB-BD31-4B8C-83A1-F6EECF244321}">
-                <p14:modId xmlns:p14="http://schemas.microsoft.com/office/powerpoint/2010/main" val="3304397162"/>
+                <p14:modId xmlns:p14="http://schemas.microsoft.com/office/powerpoint/2010/main" val="1182971365"/>
               </p:ext>
             </p:extLst>
           </p:nvPr>
@@ -17891,7 +17892,10 @@
                     <a:bodyPr/>
                     <a:lstStyle/>
                     <a:p>
-                      <a:endParaRPr lang="de-DE" sz="1400"/>
+                      <a:r>
+                        <a:rPr lang="de-DE" sz="1400"/>
+                        <a:t>Master Select</a:t>
+                      </a:r>
                     </a:p>
                   </a:txBody>
                   <a:tcPr/>
@@ -18925,7 +18929,10 @@
                     <a:bodyPr/>
                     <a:lstStyle/>
                     <a:p>
-                      <a:endParaRPr lang="de-DE" sz="1400"/>
+                      <a:r>
+                        <a:rPr lang="de-DE" sz="1400"/>
+                        <a:t>INT</a:t>
+                      </a:r>
                     </a:p>
                   </a:txBody>
                   <a:tcPr/>
@@ -21367,6 +21374,924 @@
           <a:chExt cx="0" cy="0"/>
         </a:xfrm>
       </p:grpSpPr>
+      <p:sp>
+        <p:nvSpPr>
+          <p:cNvPr id="2" name="Titel 1">
+            <a:extLst>
+              <a:ext uri="{FF2B5EF4-FFF2-40B4-BE49-F238E27FC236}">
+                <a16:creationId xmlns:a16="http://schemas.microsoft.com/office/drawing/2014/main" id="{4DE03989-CB40-455A-B40F-7FBACF9D2746}"/>
+              </a:ext>
+            </a:extLst>
+          </p:cNvPr>
+          <p:cNvSpPr>
+            <a:spLocks noGrp="1"/>
+          </p:cNvSpPr>
+          <p:nvPr>
+            <p:ph type="title"/>
+          </p:nvPr>
+        </p:nvSpPr>
+        <p:spPr/>
+        <p:txBody>
+          <a:bodyPr/>
+          <a:lstStyle/>
+          <a:p>
+            <a:r>
+              <a:rPr lang="de-DE"/>
+              <a:t>PCF8574 Masterselect</a:t>
+            </a:r>
+          </a:p>
+        </p:txBody>
+      </p:sp>
+      <p:pic>
+        <p:nvPicPr>
+          <p:cNvPr id="4" name="Grafik 3">
+            <a:extLst>
+              <a:ext uri="{FF2B5EF4-FFF2-40B4-BE49-F238E27FC236}">
+                <a16:creationId xmlns:a16="http://schemas.microsoft.com/office/drawing/2014/main" id="{D9877783-4EBD-45C2-BD65-E7A81A09C668}"/>
+              </a:ext>
+            </a:extLst>
+          </p:cNvPr>
+          <p:cNvPicPr>
+            <a:picLocks noChangeAspect="1"/>
+          </p:cNvPicPr>
+          <p:nvPr/>
+        </p:nvPicPr>
+        <p:blipFill>
+          <a:blip r:embed="rId2"/>
+          <a:stretch>
+            <a:fillRect/>
+          </a:stretch>
+        </p:blipFill>
+        <p:spPr>
+          <a:xfrm>
+            <a:off x="1023801" y="743934"/>
+            <a:ext cx="1952898" cy="5477639"/>
+          </a:xfrm>
+          <a:prstGeom prst="rect">
+            <a:avLst/>
+          </a:prstGeom>
+        </p:spPr>
+      </p:pic>
+      <p:sp>
+        <p:nvSpPr>
+          <p:cNvPr id="5" name="Textfeld 4">
+            <a:extLst>
+              <a:ext uri="{FF2B5EF4-FFF2-40B4-BE49-F238E27FC236}">
+                <a16:creationId xmlns:a16="http://schemas.microsoft.com/office/drawing/2014/main" id="{4E93DEE1-EE17-4A6B-87D3-E6BC5E8604A8}"/>
+              </a:ext>
+            </a:extLst>
+          </p:cNvPr>
+          <p:cNvSpPr txBox="1"/>
+          <p:nvPr/>
+        </p:nvSpPr>
+        <p:spPr>
+          <a:xfrm>
+            <a:off x="1023801" y="5929400"/>
+            <a:ext cx="2105063" cy="369332"/>
+          </a:xfrm>
+          <a:prstGeom prst="rect">
+            <a:avLst/>
+          </a:prstGeom>
+          <a:noFill/>
+        </p:spPr>
+        <p:txBody>
+          <a:bodyPr wrap="none" rtlCol="0">
+            <a:spAutoFit/>
+          </a:bodyPr>
+          <a:lstStyle/>
+          <a:p>
+            <a:r>
+              <a:rPr lang="de-DE"/>
+              <a:t>Activity Bus Connect</a:t>
+            </a:r>
+          </a:p>
+        </p:txBody>
+      </p:sp>
+      <p:pic>
+        <p:nvPicPr>
+          <p:cNvPr id="7" name="Grafik 6">
+            <a:extLst>
+              <a:ext uri="{FF2B5EF4-FFF2-40B4-BE49-F238E27FC236}">
+                <a16:creationId xmlns:a16="http://schemas.microsoft.com/office/drawing/2014/main" id="{9E675DF0-61F5-4995-B574-D4179B127BDC}"/>
+              </a:ext>
+            </a:extLst>
+          </p:cNvPr>
+          <p:cNvPicPr>
+            <a:picLocks noChangeAspect="1"/>
+          </p:cNvPicPr>
+          <p:nvPr/>
+        </p:nvPicPr>
+        <p:blipFill>
+          <a:blip r:embed="rId3"/>
+          <a:stretch>
+            <a:fillRect/>
+          </a:stretch>
+        </p:blipFill>
+        <p:spPr>
+          <a:xfrm>
+            <a:off x="8151601" y="195947"/>
+            <a:ext cx="3421217" cy="2090053"/>
+          </a:xfrm>
+          <a:prstGeom prst="rect">
+            <a:avLst/>
+          </a:prstGeom>
+        </p:spPr>
+      </p:pic>
+      <p:graphicFrame>
+        <p:nvGraphicFramePr>
+          <p:cNvPr id="8" name="Tabelle 3">
+            <a:extLst>
+              <a:ext uri="{FF2B5EF4-FFF2-40B4-BE49-F238E27FC236}">
+                <a16:creationId xmlns:a16="http://schemas.microsoft.com/office/drawing/2014/main" id="{E8FBCE3B-7BB8-40AE-9498-84522F8DEDD8}"/>
+              </a:ext>
+            </a:extLst>
+          </p:cNvPr>
+          <p:cNvGraphicFramePr>
+            <a:graphicFrameLocks noGrp="1"/>
+          </p:cNvGraphicFramePr>
+          <p:nvPr>
+            <p:extLst>
+              <p:ext uri="{D42A27DB-BD31-4B8C-83A1-F6EECF244321}">
+                <p14:modId xmlns:p14="http://schemas.microsoft.com/office/powerpoint/2010/main" val="935666000"/>
+              </p:ext>
+            </p:extLst>
+          </p:nvPr>
+        </p:nvGraphicFramePr>
+        <p:xfrm>
+          <a:off x="2624092" y="2075554"/>
+          <a:ext cx="4043409" cy="2600272"/>
+        </p:xfrm>
+        <a:graphic>
+          <a:graphicData uri="http://schemas.openxmlformats.org/drawingml/2006/table">
+            <a:tbl>
+              <a:tblPr bandRow="1">
+                <a:tableStyleId>{5C22544A-7EE6-4342-B048-85BDC9FD1C3A}</a:tableStyleId>
+              </a:tblPr>
+              <a:tblGrid>
+                <a:gridCol w="1633745">
+                  <a:extLst>
+                    <a:ext uri="{9D8B030D-6E8A-4147-A177-3AD203B41FA5}">
+                      <a16:colId xmlns:a16="http://schemas.microsoft.com/office/drawing/2014/main" val="883978954"/>
+                    </a:ext>
+                  </a:extLst>
+                </a:gridCol>
+                <a:gridCol w="1204832">
+                  <a:extLst>
+                    <a:ext uri="{9D8B030D-6E8A-4147-A177-3AD203B41FA5}">
+                      <a16:colId xmlns:a16="http://schemas.microsoft.com/office/drawing/2014/main" val="435412168"/>
+                    </a:ext>
+                  </a:extLst>
+                </a:gridCol>
+                <a:gridCol w="1204832">
+                  <a:extLst>
+                    <a:ext uri="{9D8B030D-6E8A-4147-A177-3AD203B41FA5}">
+                      <a16:colId xmlns:a16="http://schemas.microsoft.com/office/drawing/2014/main" val="3171568005"/>
+                    </a:ext>
+                  </a:extLst>
+                </a:gridCol>
+              </a:tblGrid>
+              <a:tr h="405712">
+                <a:tc>
+                  <a:txBody>
+                    <a:bodyPr/>
+                    <a:lstStyle/>
+                    <a:p>
+                      <a:r>
+                        <a:rPr lang="de-DE" sz="1200"/>
+                        <a:t>ESP</a:t>
+                      </a:r>
+                    </a:p>
+                  </a:txBody>
+                  <a:tcPr anchor="ctr"/>
+                </a:tc>
+                <a:tc>
+                  <a:txBody>
+                    <a:bodyPr/>
+                    <a:lstStyle/>
+                    <a:p>
+                      <a:pPr algn="ctr"/>
+                      <a:r>
+                        <a:rPr lang="de-DE" sz="1200"/>
+                        <a:t>Rotary Encoder</a:t>
+                      </a:r>
+                    </a:p>
+                  </a:txBody>
+                  <a:tcPr anchor="ctr"/>
+                </a:tc>
+                <a:tc>
+                  <a:txBody>
+                    <a:bodyPr/>
+                    <a:lstStyle/>
+                    <a:p>
+                      <a:pPr algn="r"/>
+                      <a:r>
+                        <a:rPr lang="de-DE" sz="1200"/>
+                        <a:t>Relais</a:t>
+                      </a:r>
+                    </a:p>
+                  </a:txBody>
+                  <a:tcPr anchor="ctr"/>
+                </a:tc>
+                <a:extLst>
+                  <a:ext uri="{0D108BD9-81ED-4DB2-BD59-A6C34878D82A}">
+                    <a16:rowId xmlns:a16="http://schemas.microsoft.com/office/drawing/2014/main" val="1045982814"/>
+                  </a:ext>
+                </a:extLst>
+              </a:tr>
+              <a:tr h="238654">
+                <a:tc>
+                  <a:txBody>
+                    <a:bodyPr/>
+                    <a:lstStyle/>
+                    <a:p>
+                      <a:endParaRPr lang="de-DE" sz="1000"/>
+                    </a:p>
+                  </a:txBody>
+                  <a:tcPr anchor="ctr"/>
+                </a:tc>
+                <a:tc>
+                  <a:txBody>
+                    <a:bodyPr/>
+                    <a:lstStyle/>
+                    <a:p>
+                      <a:pPr algn="ctr"/>
+                      <a:r>
+                        <a:rPr lang="de-DE" sz="1000"/>
+                        <a:t>CLK</a:t>
+                      </a:r>
+                    </a:p>
+                  </a:txBody>
+                  <a:tcPr anchor="ctr"/>
+                </a:tc>
+                <a:tc>
+                  <a:txBody>
+                    <a:bodyPr/>
+                    <a:lstStyle/>
+                    <a:p>
+                      <a:pPr algn="r"/>
+                      <a:endParaRPr lang="de-DE" sz="1000"/>
+                    </a:p>
+                  </a:txBody>
+                  <a:tcPr anchor="ctr"/>
+                </a:tc>
+                <a:extLst>
+                  <a:ext uri="{0D108BD9-81ED-4DB2-BD59-A6C34878D82A}">
+                    <a16:rowId xmlns:a16="http://schemas.microsoft.com/office/drawing/2014/main" val="3380913058"/>
+                  </a:ext>
+                </a:extLst>
+              </a:tr>
+              <a:tr h="238654">
+                <a:tc>
+                  <a:txBody>
+                    <a:bodyPr/>
+                    <a:lstStyle/>
+                    <a:p>
+                      <a:endParaRPr lang="de-DE" sz="1000"/>
+                    </a:p>
+                  </a:txBody>
+                  <a:tcPr anchor="ctr"/>
+                </a:tc>
+                <a:tc>
+                  <a:txBody>
+                    <a:bodyPr/>
+                    <a:lstStyle/>
+                    <a:p>
+                      <a:pPr algn="ctr"/>
+                      <a:r>
+                        <a:rPr lang="de-DE" sz="1000"/>
+                        <a:t>DT</a:t>
+                      </a:r>
+                    </a:p>
+                  </a:txBody>
+                  <a:tcPr anchor="ctr"/>
+                </a:tc>
+                <a:tc>
+                  <a:txBody>
+                    <a:bodyPr/>
+                    <a:lstStyle/>
+                    <a:p>
+                      <a:pPr algn="r"/>
+                      <a:endParaRPr lang="de-DE" sz="1000"/>
+                    </a:p>
+                  </a:txBody>
+                  <a:tcPr anchor="ctr"/>
+                </a:tc>
+                <a:extLst>
+                  <a:ext uri="{0D108BD9-81ED-4DB2-BD59-A6C34878D82A}">
+                    <a16:rowId xmlns:a16="http://schemas.microsoft.com/office/drawing/2014/main" val="4143659889"/>
+                  </a:ext>
+                </a:extLst>
+              </a:tr>
+              <a:tr h="238654">
+                <a:tc>
+                  <a:txBody>
+                    <a:bodyPr/>
+                    <a:lstStyle/>
+                    <a:p>
+                      <a:endParaRPr lang="de-DE" sz="1000"/>
+                    </a:p>
+                  </a:txBody>
+                  <a:tcPr anchor="ctr"/>
+                </a:tc>
+                <a:tc>
+                  <a:txBody>
+                    <a:bodyPr/>
+                    <a:lstStyle/>
+                    <a:p>
+                      <a:pPr marL="0" marR="0" lvl="0" indent="0" algn="ctr" defTabSz="914400" rtl="0" eaLnBrk="1" fontAlgn="auto" latinLnBrk="0" hangingPunct="1">
+                        <a:lnSpc>
+                          <a:spcPct val="100000"/>
+                        </a:lnSpc>
+                        <a:spcBef>
+                          <a:spcPts val="0"/>
+                        </a:spcBef>
+                        <a:spcAft>
+                          <a:spcPts val="0"/>
+                        </a:spcAft>
+                        <a:buClrTx/>
+                        <a:buSzTx/>
+                        <a:buFontTx/>
+                        <a:buNone/>
+                        <a:tabLst/>
+                        <a:defRPr/>
+                      </a:pPr>
+                      <a:r>
+                        <a:rPr lang="de-DE" sz="1000"/>
+                        <a:t>SW</a:t>
+                      </a:r>
+                    </a:p>
+                  </a:txBody>
+                  <a:tcPr anchor="ctr"/>
+                </a:tc>
+                <a:tc>
+                  <a:txBody>
+                    <a:bodyPr/>
+                    <a:lstStyle/>
+                    <a:p>
+                      <a:pPr marL="0" marR="0" lvl="0" indent="0" algn="r" defTabSz="914400" rtl="0" eaLnBrk="1" fontAlgn="auto" latinLnBrk="0" hangingPunct="1">
+                        <a:lnSpc>
+                          <a:spcPct val="100000"/>
+                        </a:lnSpc>
+                        <a:spcBef>
+                          <a:spcPts val="0"/>
+                        </a:spcBef>
+                        <a:spcAft>
+                          <a:spcPts val="0"/>
+                        </a:spcAft>
+                        <a:buClrTx/>
+                        <a:buSzTx/>
+                        <a:buFontTx/>
+                        <a:buNone/>
+                        <a:tabLst/>
+                        <a:defRPr/>
+                      </a:pPr>
+                      <a:endParaRPr lang="de-DE" sz="1000"/>
+                    </a:p>
+                  </a:txBody>
+                  <a:tcPr anchor="ctr"/>
+                </a:tc>
+                <a:extLst>
+                  <a:ext uri="{0D108BD9-81ED-4DB2-BD59-A6C34878D82A}">
+                    <a16:rowId xmlns:a16="http://schemas.microsoft.com/office/drawing/2014/main" val="1787912469"/>
+                  </a:ext>
+                </a:extLst>
+              </a:tr>
+              <a:tr h="238654">
+                <a:tc>
+                  <a:txBody>
+                    <a:bodyPr/>
+                    <a:lstStyle/>
+                    <a:p>
+                      <a:endParaRPr lang="de-DE" sz="1000"/>
+                    </a:p>
+                  </a:txBody>
+                  <a:tcPr anchor="ctr"/>
+                </a:tc>
+                <a:tc>
+                  <a:txBody>
+                    <a:bodyPr/>
+                    <a:lstStyle/>
+                    <a:p>
+                      <a:pPr algn="ctr"/>
+                      <a:endParaRPr lang="de-DE" sz="1000"/>
+                    </a:p>
+                  </a:txBody>
+                  <a:tcPr anchor="ctr"/>
+                </a:tc>
+                <a:tc>
+                  <a:txBody>
+                    <a:bodyPr/>
+                    <a:lstStyle/>
+                    <a:p>
+                      <a:pPr algn="r"/>
+                      <a:endParaRPr lang="de-DE" sz="1000"/>
+                    </a:p>
+                  </a:txBody>
+                  <a:tcPr anchor="ctr"/>
+                </a:tc>
+                <a:extLst>
+                  <a:ext uri="{0D108BD9-81ED-4DB2-BD59-A6C34878D82A}">
+                    <a16:rowId xmlns:a16="http://schemas.microsoft.com/office/drawing/2014/main" val="425189404"/>
+                  </a:ext>
+                </a:extLst>
+              </a:tr>
+              <a:tr h="238654">
+                <a:tc>
+                  <a:txBody>
+                    <a:bodyPr/>
+                    <a:lstStyle/>
+                    <a:p>
+                      <a:endParaRPr lang="de-DE" sz="1000"/>
+                    </a:p>
+                  </a:txBody>
+                  <a:tcPr anchor="ctr"/>
+                </a:tc>
+                <a:tc>
+                  <a:txBody>
+                    <a:bodyPr/>
+                    <a:lstStyle/>
+                    <a:p>
+                      <a:pPr algn="ctr"/>
+                      <a:endParaRPr lang="de-DE" sz="1000"/>
+                    </a:p>
+                  </a:txBody>
+                  <a:tcPr anchor="ctr"/>
+                </a:tc>
+                <a:tc>
+                  <a:txBody>
+                    <a:bodyPr/>
+                    <a:lstStyle/>
+                    <a:p>
+                      <a:pPr algn="r"/>
+                      <a:r>
+                        <a:rPr lang="de-DE" sz="1000"/>
+                        <a:t>IN1</a:t>
+                      </a:r>
+                    </a:p>
+                  </a:txBody>
+                  <a:tcPr anchor="ctr"/>
+                </a:tc>
+                <a:extLst>
+                  <a:ext uri="{0D108BD9-81ED-4DB2-BD59-A6C34878D82A}">
+                    <a16:rowId xmlns:a16="http://schemas.microsoft.com/office/drawing/2014/main" val="1599449120"/>
+                  </a:ext>
+                </a:extLst>
+              </a:tr>
+              <a:tr h="238654">
+                <a:tc>
+                  <a:txBody>
+                    <a:bodyPr/>
+                    <a:lstStyle/>
+                    <a:p>
+                      <a:endParaRPr lang="de-DE" sz="1000"/>
+                    </a:p>
+                  </a:txBody>
+                  <a:tcPr anchor="ctr"/>
+                </a:tc>
+                <a:tc>
+                  <a:txBody>
+                    <a:bodyPr/>
+                    <a:lstStyle/>
+                    <a:p>
+                      <a:pPr algn="ctr"/>
+                      <a:endParaRPr lang="de-DE" sz="1000"/>
+                    </a:p>
+                  </a:txBody>
+                  <a:tcPr anchor="ctr"/>
+                </a:tc>
+                <a:tc>
+                  <a:txBody>
+                    <a:bodyPr/>
+                    <a:lstStyle/>
+                    <a:p>
+                      <a:pPr algn="r"/>
+                      <a:r>
+                        <a:rPr lang="de-DE" sz="1000"/>
+                        <a:t>IN2</a:t>
+                      </a:r>
+                    </a:p>
+                  </a:txBody>
+                  <a:tcPr anchor="ctr"/>
+                </a:tc>
+                <a:extLst>
+                  <a:ext uri="{0D108BD9-81ED-4DB2-BD59-A6C34878D82A}">
+                    <a16:rowId xmlns:a16="http://schemas.microsoft.com/office/drawing/2014/main" val="1990809008"/>
+                  </a:ext>
+                </a:extLst>
+              </a:tr>
+              <a:tr h="238654">
+                <a:tc>
+                  <a:txBody>
+                    <a:bodyPr/>
+                    <a:lstStyle/>
+                    <a:p>
+                      <a:endParaRPr lang="de-DE" sz="1000"/>
+                    </a:p>
+                  </a:txBody>
+                  <a:tcPr anchor="ctr"/>
+                </a:tc>
+                <a:tc>
+                  <a:txBody>
+                    <a:bodyPr/>
+                    <a:lstStyle/>
+                    <a:p>
+                      <a:pPr algn="ctr"/>
+                      <a:endParaRPr lang="de-DE" sz="1000"/>
+                    </a:p>
+                  </a:txBody>
+                  <a:tcPr anchor="ctr"/>
+                </a:tc>
+                <a:tc>
+                  <a:txBody>
+                    <a:bodyPr/>
+                    <a:lstStyle/>
+                    <a:p>
+                      <a:pPr algn="r"/>
+                      <a:r>
+                        <a:rPr lang="de-DE" sz="1000"/>
+                        <a:t>IN3</a:t>
+                      </a:r>
+                    </a:p>
+                  </a:txBody>
+                  <a:tcPr anchor="ctr"/>
+                </a:tc>
+                <a:extLst>
+                  <a:ext uri="{0D108BD9-81ED-4DB2-BD59-A6C34878D82A}">
+                    <a16:rowId xmlns:a16="http://schemas.microsoft.com/office/drawing/2014/main" val="3587662353"/>
+                  </a:ext>
+                </a:extLst>
+              </a:tr>
+              <a:tr h="238654">
+                <a:tc>
+                  <a:txBody>
+                    <a:bodyPr/>
+                    <a:lstStyle/>
+                    <a:p>
+                      <a:endParaRPr lang="de-DE" sz="1000"/>
+                    </a:p>
+                  </a:txBody>
+                  <a:tcPr anchor="ctr"/>
+                </a:tc>
+                <a:tc>
+                  <a:txBody>
+                    <a:bodyPr/>
+                    <a:lstStyle/>
+                    <a:p>
+                      <a:pPr algn="ctr"/>
+                      <a:endParaRPr lang="de-DE" sz="1000"/>
+                    </a:p>
+                  </a:txBody>
+                  <a:tcPr anchor="ctr"/>
+                </a:tc>
+                <a:tc>
+                  <a:txBody>
+                    <a:bodyPr/>
+                    <a:lstStyle/>
+                    <a:p>
+                      <a:pPr algn="r"/>
+                      <a:r>
+                        <a:rPr lang="de-DE" sz="1000"/>
+                        <a:t>IN4</a:t>
+                      </a:r>
+                    </a:p>
+                  </a:txBody>
+                  <a:tcPr anchor="ctr"/>
+                </a:tc>
+                <a:extLst>
+                  <a:ext uri="{0D108BD9-81ED-4DB2-BD59-A6C34878D82A}">
+                    <a16:rowId xmlns:a16="http://schemas.microsoft.com/office/drawing/2014/main" val="1897558436"/>
+                  </a:ext>
+                </a:extLst>
+              </a:tr>
+              <a:tr h="238654">
+                <a:tc>
+                  <a:txBody>
+                    <a:bodyPr/>
+                    <a:lstStyle/>
+                    <a:p>
+                      <a:r>
+                        <a:rPr lang="de-DE" sz="1000"/>
+                        <a:t>25</a:t>
+                      </a:r>
+                    </a:p>
+                  </a:txBody>
+                  <a:tcPr anchor="ctr"/>
+                </a:tc>
+                <a:tc>
+                  <a:txBody>
+                    <a:bodyPr/>
+                    <a:lstStyle/>
+                    <a:p>
+                      <a:pPr algn="ctr"/>
+                      <a:endParaRPr lang="de-DE" sz="1000"/>
+                    </a:p>
+                  </a:txBody>
+                  <a:tcPr anchor="ctr"/>
+                </a:tc>
+                <a:tc>
+                  <a:txBody>
+                    <a:bodyPr/>
+                    <a:lstStyle/>
+                    <a:p>
+                      <a:pPr algn="r"/>
+                      <a:endParaRPr lang="de-DE" sz="1000"/>
+                    </a:p>
+                  </a:txBody>
+                  <a:tcPr anchor="ctr"/>
+                </a:tc>
+                <a:extLst>
+                  <a:ext uri="{0D108BD9-81ED-4DB2-BD59-A6C34878D82A}">
+                    <a16:rowId xmlns:a16="http://schemas.microsoft.com/office/drawing/2014/main" val="2376243585"/>
+                  </a:ext>
+                </a:extLst>
+              </a:tr>
+            </a:tbl>
+          </a:graphicData>
+        </a:graphic>
+      </p:graphicFrame>
+      <p:pic>
+        <p:nvPicPr>
+          <p:cNvPr id="1026" name="Picture 2">
+            <a:extLst>
+              <a:ext uri="{FF2B5EF4-FFF2-40B4-BE49-F238E27FC236}">
+                <a16:creationId xmlns:a16="http://schemas.microsoft.com/office/drawing/2014/main" id="{81E9CF4E-98B7-48F9-B717-738686436DC9}"/>
+              </a:ext>
+            </a:extLst>
+          </p:cNvPr>
+          <p:cNvPicPr>
+            <a:picLocks noChangeAspect="1" noChangeArrowheads="1"/>
+          </p:cNvPicPr>
+          <p:nvPr/>
+        </p:nvPicPr>
+        <p:blipFill>
+          <a:blip r:embed="rId4">
+            <a:extLst>
+              <a:ext uri="{28A0092B-C50C-407E-A947-70E740481C1C}">
+                <a14:useLocalDpi xmlns:a14="http://schemas.microsoft.com/office/drawing/2010/main" val="0"/>
+              </a:ext>
+            </a:extLst>
+          </a:blip>
+          <a:srcRect/>
+          <a:stretch>
+            <a:fillRect/>
+          </a:stretch>
+        </p:blipFill>
+        <p:spPr bwMode="auto">
+          <a:xfrm>
+            <a:off x="7203327" y="2499825"/>
+            <a:ext cx="4729162" cy="3429575"/>
+          </a:xfrm>
+          <a:prstGeom prst="rect">
+            <a:avLst/>
+          </a:prstGeom>
+          <a:noFill/>
+          <a:extLst>
+            <a:ext uri="{909E8E84-426E-40DD-AFC4-6F175D3DCCD1}">
+              <a14:hiddenFill xmlns:a14="http://schemas.microsoft.com/office/drawing/2010/main">
+                <a:solidFill>
+                  <a:srgbClr val="FFFFFF"/>
+                </a:solidFill>
+              </a14:hiddenFill>
+            </a:ext>
+          </a:extLst>
+        </p:spPr>
+      </p:pic>
+      <p:cxnSp>
+        <p:nvCxnSpPr>
+          <p:cNvPr id="10" name="Gerade Verbindung mit Pfeil 9">
+            <a:extLst>
+              <a:ext uri="{FF2B5EF4-FFF2-40B4-BE49-F238E27FC236}">
+                <a16:creationId xmlns:a16="http://schemas.microsoft.com/office/drawing/2014/main" id="{D66BB9B4-FCAA-4AE0-BDE8-9CB5ACB8DE6E}"/>
+              </a:ext>
+            </a:extLst>
+          </p:cNvPr>
+          <p:cNvCxnSpPr>
+            <a:cxnSpLocks/>
+          </p:cNvCxnSpPr>
+          <p:nvPr/>
+        </p:nvCxnSpPr>
+        <p:spPr>
+          <a:xfrm flipV="1">
+            <a:off x="8553450" y="5965075"/>
+            <a:ext cx="0" cy="297982"/>
+          </a:xfrm>
+          <a:prstGeom prst="straightConnector1">
+            <a:avLst/>
+          </a:prstGeom>
+          <a:ln>
+            <a:tailEnd type="triangle"/>
+          </a:ln>
+        </p:spPr>
+        <p:style>
+          <a:lnRef idx="1">
+            <a:schemeClr val="accent1"/>
+          </a:lnRef>
+          <a:fillRef idx="0">
+            <a:schemeClr val="accent1"/>
+          </a:fillRef>
+          <a:effectRef idx="0">
+            <a:schemeClr val="accent1"/>
+          </a:effectRef>
+          <a:fontRef idx="minor">
+            <a:schemeClr val="tx1"/>
+          </a:fontRef>
+        </p:style>
+      </p:cxnSp>
+      <p:cxnSp>
+        <p:nvCxnSpPr>
+          <p:cNvPr id="12" name="Gerade Verbindung mit Pfeil 11">
+            <a:extLst>
+              <a:ext uri="{FF2B5EF4-FFF2-40B4-BE49-F238E27FC236}">
+                <a16:creationId xmlns:a16="http://schemas.microsoft.com/office/drawing/2014/main" id="{44EA4748-5D39-4AAE-99B7-C1B848D101D5}"/>
+              </a:ext>
+            </a:extLst>
+          </p:cNvPr>
+          <p:cNvCxnSpPr>
+            <a:cxnSpLocks/>
+          </p:cNvCxnSpPr>
+          <p:nvPr/>
+        </p:nvCxnSpPr>
+        <p:spPr>
+          <a:xfrm flipV="1">
+            <a:off x="9017000" y="5965075"/>
+            <a:ext cx="0" cy="297982"/>
+          </a:xfrm>
+          <a:prstGeom prst="straightConnector1">
+            <a:avLst/>
+          </a:prstGeom>
+          <a:ln>
+            <a:tailEnd type="triangle"/>
+          </a:ln>
+        </p:spPr>
+        <p:style>
+          <a:lnRef idx="1">
+            <a:schemeClr val="accent1"/>
+          </a:lnRef>
+          <a:fillRef idx="0">
+            <a:schemeClr val="accent1"/>
+          </a:fillRef>
+          <a:effectRef idx="0">
+            <a:schemeClr val="accent1"/>
+          </a:effectRef>
+          <a:fontRef idx="minor">
+            <a:schemeClr val="tx1"/>
+          </a:fontRef>
+        </p:style>
+      </p:cxnSp>
+      <p:cxnSp>
+        <p:nvCxnSpPr>
+          <p:cNvPr id="13" name="Gerade Verbindung mit Pfeil 12">
+            <a:extLst>
+              <a:ext uri="{FF2B5EF4-FFF2-40B4-BE49-F238E27FC236}">
+                <a16:creationId xmlns:a16="http://schemas.microsoft.com/office/drawing/2014/main" id="{B1193FE8-0BBA-4F73-AE05-EB33936C414B}"/>
+              </a:ext>
+            </a:extLst>
+          </p:cNvPr>
+          <p:cNvCxnSpPr>
+            <a:cxnSpLocks/>
+          </p:cNvCxnSpPr>
+          <p:nvPr/>
+        </p:nvCxnSpPr>
+        <p:spPr>
+          <a:xfrm flipV="1">
+            <a:off x="9480550" y="5965075"/>
+            <a:ext cx="0" cy="297982"/>
+          </a:xfrm>
+          <a:prstGeom prst="straightConnector1">
+            <a:avLst/>
+          </a:prstGeom>
+          <a:ln>
+            <a:tailEnd type="triangle"/>
+          </a:ln>
+        </p:spPr>
+        <p:style>
+          <a:lnRef idx="1">
+            <a:schemeClr val="accent1"/>
+          </a:lnRef>
+          <a:fillRef idx="0">
+            <a:schemeClr val="accent1"/>
+          </a:fillRef>
+          <a:effectRef idx="0">
+            <a:schemeClr val="accent1"/>
+          </a:effectRef>
+          <a:fontRef idx="minor">
+            <a:schemeClr val="tx1"/>
+          </a:fontRef>
+        </p:style>
+      </p:cxnSp>
+      <p:cxnSp>
+        <p:nvCxnSpPr>
+          <p:cNvPr id="14" name="Gerade Verbindung mit Pfeil 13">
+            <a:extLst>
+              <a:ext uri="{FF2B5EF4-FFF2-40B4-BE49-F238E27FC236}">
+                <a16:creationId xmlns:a16="http://schemas.microsoft.com/office/drawing/2014/main" id="{32025D9F-E2F5-4A88-B858-3593362F732E}"/>
+              </a:ext>
+            </a:extLst>
+          </p:cNvPr>
+          <p:cNvCxnSpPr>
+            <a:cxnSpLocks/>
+          </p:cNvCxnSpPr>
+          <p:nvPr/>
+        </p:nvCxnSpPr>
+        <p:spPr>
+          <a:xfrm flipV="1">
+            <a:off x="9944100" y="5965075"/>
+            <a:ext cx="0" cy="297982"/>
+          </a:xfrm>
+          <a:prstGeom prst="straightConnector1">
+            <a:avLst/>
+          </a:prstGeom>
+          <a:ln>
+            <a:tailEnd type="triangle"/>
+          </a:ln>
+        </p:spPr>
+        <p:style>
+          <a:lnRef idx="1">
+            <a:schemeClr val="accent1"/>
+          </a:lnRef>
+          <a:fillRef idx="0">
+            <a:schemeClr val="accent1"/>
+          </a:fillRef>
+          <a:effectRef idx="0">
+            <a:schemeClr val="accent1"/>
+          </a:effectRef>
+          <a:fontRef idx="minor">
+            <a:schemeClr val="tx1"/>
+          </a:fontRef>
+        </p:style>
+      </p:cxnSp>
+      <p:sp>
+        <p:nvSpPr>
+          <p:cNvPr id="11" name="Textfeld 10">
+            <a:extLst>
+              <a:ext uri="{FF2B5EF4-FFF2-40B4-BE49-F238E27FC236}">
+                <a16:creationId xmlns:a16="http://schemas.microsoft.com/office/drawing/2014/main" id="{436F5923-36B9-4BD7-BCAC-DDEF2F9B3917}"/>
+              </a:ext>
+            </a:extLst>
+          </p:cNvPr>
+          <p:cNvSpPr txBox="1"/>
+          <p:nvPr/>
+        </p:nvSpPr>
+        <p:spPr>
+          <a:xfrm>
+            <a:off x="4400550" y="5295900"/>
+            <a:ext cx="1790555" cy="646331"/>
+          </a:xfrm>
+          <a:prstGeom prst="rect">
+            <a:avLst/>
+          </a:prstGeom>
+          <a:noFill/>
+        </p:spPr>
+        <p:txBody>
+          <a:bodyPr wrap="none" rtlCol="0">
+            <a:spAutoFit/>
+          </a:bodyPr>
+          <a:lstStyle/>
+          <a:p>
+            <a:r>
+              <a:rPr lang="de-DE"/>
+              <a:t>2 x Relay Module</a:t>
+            </a:r>
+            <a:br>
+              <a:rPr lang="de-DE"/>
+            </a:br>
+            <a:r>
+              <a:rPr lang="de-DE"/>
+              <a:t>für VCC und SCL</a:t>
+            </a:r>
+          </a:p>
+        </p:txBody>
+      </p:sp>
+    </p:spTree>
+    <p:extLst>
+      <p:ext uri="{BB962C8B-B14F-4D97-AF65-F5344CB8AC3E}">
+        <p14:creationId xmlns:p14="http://schemas.microsoft.com/office/powerpoint/2010/main" val="3685730262"/>
+      </p:ext>
+    </p:extLst>
+  </p:cSld>
+  <p:clrMapOvr>
+    <a:masterClrMapping/>
+  </p:clrMapOvr>
+</p:sld>
+</file>
+
+<file path=ppt/slides/slide24.xml><?xml version="1.0" encoding="utf-8"?>
+<p:sld xmlns:a="http://schemas.openxmlformats.org/drawingml/2006/main" xmlns:r="http://schemas.openxmlformats.org/officeDocument/2006/relationships" xmlns:p="http://schemas.openxmlformats.org/presentationml/2006/main">
+  <p:cSld>
+    <p:spTree>
+      <p:nvGrpSpPr>
+        <p:cNvPr id="1" name=""/>
+        <p:cNvGrpSpPr/>
+        <p:nvPr/>
+      </p:nvGrpSpPr>
+      <p:grpSpPr>
+        <a:xfrm>
+          <a:off x="0" y="0"/>
+          <a:ext cx="0" cy="0"/>
+          <a:chOff x="0" y="0"/>
+          <a:chExt cx="0" cy="0"/>
+        </a:xfrm>
+      </p:grpSpPr>
       <p:graphicFrame>
         <p:nvGraphicFramePr>
           <p:cNvPr id="3" name="Tabelle 2">
@@ -25358,382 +26283,6 @@
 </p:sld>
 </file>
 
-<file path=ppt/slides/slide24.xml><?xml version="1.0" encoding="utf-8"?>
-<p:sld xmlns:a="http://schemas.openxmlformats.org/drawingml/2006/main" xmlns:r="http://schemas.openxmlformats.org/officeDocument/2006/relationships" xmlns:p="http://schemas.openxmlformats.org/presentationml/2006/main">
-  <p:cSld>
-    <p:spTree>
-      <p:nvGrpSpPr>
-        <p:cNvPr id="1" name=""/>
-        <p:cNvGrpSpPr/>
-        <p:nvPr/>
-      </p:nvGrpSpPr>
-      <p:grpSpPr>
-        <a:xfrm>
-          <a:off x="0" y="0"/>
-          <a:ext cx="0" cy="0"/>
-          <a:chOff x="0" y="0"/>
-          <a:chExt cx="0" cy="0"/>
-        </a:xfrm>
-      </p:grpSpPr>
-      <p:sp>
-        <p:nvSpPr>
-          <p:cNvPr id="2" name="Titel 1">
-            <a:extLst>
-              <a:ext uri="{FF2B5EF4-FFF2-40B4-BE49-F238E27FC236}">
-                <a16:creationId xmlns:a16="http://schemas.microsoft.com/office/drawing/2014/main" id="{B5378AAF-0BC5-4ABD-A43D-876A4795C25B}"/>
-              </a:ext>
-            </a:extLst>
-          </p:cNvPr>
-          <p:cNvSpPr>
-            <a:spLocks noGrp="1"/>
-          </p:cNvSpPr>
-          <p:nvPr>
-            <p:ph type="title"/>
-          </p:nvPr>
-        </p:nvSpPr>
-        <p:spPr/>
-        <p:txBody>
-          <a:bodyPr/>
-          <a:lstStyle/>
-          <a:p>
-            <a:r>
-              <a:rPr lang="de-DE"/>
-              <a:t>Backlight Pin (BL)</a:t>
-            </a:r>
-          </a:p>
-        </p:txBody>
-      </p:sp>
-      <p:sp>
-        <p:nvSpPr>
-          <p:cNvPr id="4" name="Textfeld 3">
-            <a:extLst>
-              <a:ext uri="{FF2B5EF4-FFF2-40B4-BE49-F238E27FC236}">
-                <a16:creationId xmlns:a16="http://schemas.microsoft.com/office/drawing/2014/main" id="{3650AF52-A8CF-425F-AA34-26BDFC0F4651}"/>
-              </a:ext>
-            </a:extLst>
-          </p:cNvPr>
-          <p:cNvSpPr txBox="1"/>
-          <p:nvPr/>
-        </p:nvSpPr>
-        <p:spPr>
-          <a:xfrm>
-            <a:off x="272992" y="835702"/>
-            <a:ext cx="5677959" cy="923330"/>
-          </a:xfrm>
-          <a:prstGeom prst="rect">
-            <a:avLst/>
-          </a:prstGeom>
-          <a:noFill/>
-        </p:spPr>
-        <p:txBody>
-          <a:bodyPr wrap="square">
-            <a:spAutoFit/>
-          </a:bodyPr>
-          <a:lstStyle/>
-          <a:p>
-            <a:pPr algn="l"/>
-            <a:r>
-              <a:rPr lang="de-DE" b="1" u="none" strike="noStrike">
-                <a:solidFill>
-                  <a:srgbClr val="0F1111"/>
-                </a:solidFill>
-                <a:effectLst/>
-                <a:latin typeface="Amazon Ember"/>
-              </a:rPr>
-              <a:t>Typsches Setup:</a:t>
-            </a:r>
-            <a:endParaRPr lang="de-DE" b="0" u="none" strike="noStrike">
-              <a:solidFill>
-                <a:srgbClr val="0F1111"/>
-              </a:solidFill>
-              <a:effectLst/>
-              <a:latin typeface="Amazon Ember"/>
-            </a:endParaRPr>
-          </a:p>
-          <a:p>
-            <a:pPr algn="l"/>
-            <a:r>
-              <a:rPr lang="de-DE" b="0" i="0" u="none" strike="noStrike">
-                <a:solidFill>
-                  <a:srgbClr val="0F1111"/>
-                </a:solidFill>
-                <a:effectLst/>
-                <a:latin typeface="Amazon Ember"/>
-              </a:rPr>
-              <a:t>Arduino PWM-Pin → 100–220 Ohm Widerstand → BL-Pin</a:t>
-            </a:r>
-          </a:p>
-          <a:p>
-            <a:pPr algn="l"/>
-            <a:r>
-              <a:rPr lang="de-DE" b="0" i="0" u="none" strike="noStrike">
-                <a:solidFill>
-                  <a:srgbClr val="0F1111"/>
-                </a:solidFill>
-                <a:effectLst/>
-                <a:latin typeface="Amazon Ember"/>
-              </a:rPr>
-              <a:t>Dann mit analogWrite(pin, 0-255) die Helligkeit steuern</a:t>
-            </a:r>
-          </a:p>
-        </p:txBody>
-      </p:sp>
-      <p:sp>
-        <p:nvSpPr>
-          <p:cNvPr id="6" name="Textfeld 5">
-            <a:extLst>
-              <a:ext uri="{FF2B5EF4-FFF2-40B4-BE49-F238E27FC236}">
-                <a16:creationId xmlns:a16="http://schemas.microsoft.com/office/drawing/2014/main" id="{59B53105-9887-4633-A2C6-7867BB39B808}"/>
-              </a:ext>
-            </a:extLst>
-          </p:cNvPr>
-          <p:cNvSpPr txBox="1"/>
-          <p:nvPr/>
-        </p:nvSpPr>
-        <p:spPr>
-          <a:xfrm>
-            <a:off x="272992" y="1966958"/>
-            <a:ext cx="6096000" cy="3416320"/>
-          </a:xfrm>
-          <a:prstGeom prst="rect">
-            <a:avLst/>
-          </a:prstGeom>
-          <a:noFill/>
-        </p:spPr>
-        <p:txBody>
-          <a:bodyPr wrap="square">
-            <a:spAutoFit/>
-          </a:bodyPr>
-          <a:lstStyle/>
-          <a:p>
-            <a:pPr algn="l"/>
-            <a:r>
-              <a:rPr lang="de-DE" b="1" u="none" strike="noStrike">
-                <a:solidFill>
-                  <a:srgbClr val="0F1111"/>
-                </a:solidFill>
-                <a:effectLst/>
-                <a:latin typeface="Amazon Ember"/>
-              </a:rPr>
-              <a:t>Beim Arduino funktioniert das so:</a:t>
-            </a:r>
-            <a:endParaRPr lang="de-DE" b="0" u="none" strike="noStrike">
-              <a:solidFill>
-                <a:srgbClr val="0F1111"/>
-              </a:solidFill>
-              <a:effectLst/>
-              <a:latin typeface="Amazon Ember"/>
-            </a:endParaRPr>
-          </a:p>
-          <a:p>
-            <a:pPr marL="285750" indent="-285750" algn="l">
-              <a:buFontTx/>
-              <a:buChar char="-"/>
-            </a:pPr>
-            <a:r>
-              <a:rPr lang="de-DE" b="0" u="none" strike="noStrike">
-                <a:solidFill>
-                  <a:srgbClr val="0F1111"/>
-                </a:solidFill>
-                <a:effectLst/>
-                <a:latin typeface="Amazon Ember"/>
-              </a:rPr>
-              <a:t>analogWrite(pin, 0); // 0 = komplett aus </a:t>
-            </a:r>
-            <a:endParaRPr lang="de-DE">
-              <a:solidFill>
-                <a:srgbClr val="0F1111"/>
-              </a:solidFill>
-              <a:latin typeface="Amazon Ember"/>
-            </a:endParaRPr>
-          </a:p>
-          <a:p>
-            <a:pPr marL="285750" indent="-285750" algn="l">
-              <a:buFontTx/>
-              <a:buChar char="-"/>
-            </a:pPr>
-            <a:r>
-              <a:rPr lang="de-DE" b="0" u="none" strike="noStrike">
-                <a:solidFill>
-                  <a:srgbClr val="0F1111"/>
-                </a:solidFill>
-                <a:effectLst/>
-                <a:latin typeface="Amazon Ember"/>
-              </a:rPr>
-              <a:t>analogWrite(pin, 128); // 128 = halbe Helligkeit</a:t>
-            </a:r>
-          </a:p>
-          <a:p>
-            <a:pPr marL="285750" indent="-285750" algn="l">
-              <a:buFontTx/>
-              <a:buChar char="-"/>
-            </a:pPr>
-            <a:r>
-              <a:rPr lang="de-DE" b="0" u="none" strike="noStrike">
-                <a:solidFill>
-                  <a:srgbClr val="0F1111"/>
-                </a:solidFill>
-                <a:effectLst/>
-                <a:latin typeface="Amazon Ember"/>
-              </a:rPr>
-              <a:t>analogWrite(pin, 255); // 255 = volle Helligkeit </a:t>
-            </a:r>
-            <a:br>
-              <a:rPr lang="de-DE" b="0" u="none" strike="noStrike">
-                <a:solidFill>
-                  <a:srgbClr val="0F1111"/>
-                </a:solidFill>
-                <a:effectLst/>
-                <a:latin typeface="Amazon Ember"/>
-              </a:rPr>
-            </a:br>
-            <a:endParaRPr lang="de-DE" b="0" u="none" strike="noStrike">
-              <a:solidFill>
-                <a:srgbClr val="0F1111"/>
-              </a:solidFill>
-              <a:effectLst/>
-              <a:latin typeface="Amazon Ember"/>
-            </a:endParaRPr>
-          </a:p>
-          <a:p>
-            <a:pPr algn="l"/>
-            <a:r>
-              <a:rPr lang="de-DE" b="1" u="none" strike="noStrike">
-                <a:solidFill>
-                  <a:srgbClr val="0F1111"/>
-                </a:solidFill>
-                <a:effectLst/>
-                <a:latin typeface="Amazon Ember"/>
-              </a:rPr>
-              <a:t>Für deinen BL-Pin am Display reicht aber auch einfach:</a:t>
-            </a:r>
-            <a:endParaRPr lang="de-DE" b="0" u="none" strike="noStrike">
-              <a:solidFill>
-                <a:srgbClr val="0F1111"/>
-              </a:solidFill>
-              <a:effectLst/>
-              <a:latin typeface="Amazon Ember"/>
-            </a:endParaRPr>
-          </a:p>
-          <a:p>
-            <a:pPr marL="285750" indent="-285750" algn="l">
-              <a:buFontTx/>
-              <a:buChar char="-"/>
-            </a:pPr>
-            <a:r>
-              <a:rPr lang="de-DE" b="0" u="none" strike="noStrike">
-                <a:solidFill>
-                  <a:srgbClr val="0F1111"/>
-                </a:solidFill>
-                <a:effectLst/>
-                <a:latin typeface="Amazon Ember"/>
-              </a:rPr>
-              <a:t>digitalWrite(BL_Pin, HIGH); // Backlight an</a:t>
-            </a:r>
-          </a:p>
-          <a:p>
-            <a:pPr marL="285750" indent="-285750" algn="l">
-              <a:buFontTx/>
-              <a:buChar char="-"/>
-            </a:pPr>
-            <a:r>
-              <a:rPr lang="de-DE" b="0" u="none" strike="noStrike">
-                <a:solidFill>
-                  <a:srgbClr val="0F1111"/>
-                </a:solidFill>
-                <a:effectLst/>
-                <a:latin typeface="Amazon Ember"/>
-              </a:rPr>
-              <a:t>digitalWrite(BL_Pin, LOW); // Backlight aus </a:t>
-            </a:r>
-          </a:p>
-          <a:p>
-            <a:pPr algn="l"/>
-            <a:br>
-              <a:rPr lang="de-DE" b="0" u="none" strike="noStrike">
-                <a:solidFill>
-                  <a:srgbClr val="0F1111"/>
-                </a:solidFill>
-                <a:effectLst/>
-                <a:latin typeface="Amazon Ember"/>
-              </a:rPr>
-            </a:br>
-            <a:r>
-              <a:rPr lang="de-DE" b="0" u="none" strike="noStrike">
-                <a:solidFill>
-                  <a:srgbClr val="0F1111"/>
-                </a:solidFill>
-                <a:effectLst/>
-                <a:latin typeface="Amazon Ember"/>
-              </a:rPr>
-              <a:t>Wenn du nur an/aus brauchst, ist digitalWrite völlig ausreichend – PWM (</a:t>
-            </a:r>
-            <a:r>
-              <a:rPr lang="de-DE" b="1" i="0">
-                <a:solidFill>
-                  <a:srgbClr val="0F1111"/>
-                </a:solidFill>
-                <a:effectLst/>
-                <a:latin typeface="Amazon Ember"/>
-              </a:rPr>
-              <a:t>Pulsweitenmodulation) </a:t>
-            </a:r>
-            <a:r>
-              <a:rPr lang="de-DE" b="0" u="none" strike="noStrike">
-                <a:solidFill>
-                  <a:srgbClr val="0F1111"/>
-                </a:solidFill>
-                <a:effectLst/>
-                <a:latin typeface="Amazon Ember"/>
-              </a:rPr>
-              <a:t>brauchst du nur, wenn du die Helligkeit stufenlos regeln möchtest.</a:t>
-            </a:r>
-          </a:p>
-        </p:txBody>
-      </p:sp>
-      <p:pic>
-        <p:nvPicPr>
-          <p:cNvPr id="5" name="Grafik 4">
-            <a:extLst>
-              <a:ext uri="{FF2B5EF4-FFF2-40B4-BE49-F238E27FC236}">
-                <a16:creationId xmlns:a16="http://schemas.microsoft.com/office/drawing/2014/main" id="{A51AA99B-A75E-4518-B2DF-DC16FCC789D0}"/>
-              </a:ext>
-            </a:extLst>
-          </p:cNvPr>
-          <p:cNvPicPr>
-            <a:picLocks noChangeAspect="1"/>
-          </p:cNvPicPr>
-          <p:nvPr/>
-        </p:nvPicPr>
-        <p:blipFill>
-          <a:blip r:embed="rId2"/>
-          <a:stretch>
-            <a:fillRect/>
-          </a:stretch>
-        </p:blipFill>
-        <p:spPr>
-          <a:xfrm>
-            <a:off x="6368873" y="923925"/>
-            <a:ext cx="5550136" cy="4827542"/>
-          </a:xfrm>
-          <a:prstGeom prst="rect">
-            <a:avLst/>
-          </a:prstGeom>
-        </p:spPr>
-      </p:pic>
-    </p:spTree>
-    <p:extLst>
-      <p:ext uri="{BB962C8B-B14F-4D97-AF65-F5344CB8AC3E}">
-        <p14:creationId xmlns:p14="http://schemas.microsoft.com/office/powerpoint/2010/main" val="2845987463"/>
-      </p:ext>
-    </p:extLst>
-  </p:cSld>
-  <p:clrMapOvr>
-    <a:masterClrMapping/>
-  </p:clrMapOvr>
-</p:sld>
-</file>
-
 <file path=ppt/slides/slide25.xml><?xml version="1.0" encoding="utf-8"?>
 <p:sld xmlns:a="http://schemas.openxmlformats.org/drawingml/2006/main" xmlns:r="http://schemas.openxmlformats.org/officeDocument/2006/relationships" xmlns:p="http://schemas.openxmlformats.org/presentationml/2006/main">
   <p:cSld>
@@ -25756,7 +26305,7 @@
           <p:cNvPr id="2" name="Titel 1">
             <a:extLst>
               <a:ext uri="{FF2B5EF4-FFF2-40B4-BE49-F238E27FC236}">
-                <a16:creationId xmlns:a16="http://schemas.microsoft.com/office/drawing/2014/main" id="{DCB122F7-06E5-4A20-A978-08CE3427DCBE}"/>
+                <a16:creationId xmlns:a16="http://schemas.microsoft.com/office/drawing/2014/main" id="{B5378AAF-0BC5-4ABD-A43D-876A4795C25B}"/>
               </a:ext>
             </a:extLst>
           </p:cNvPr>
@@ -25774,7 +26323,7 @@
           <a:p>
             <a:r>
               <a:rPr lang="de-DE"/>
-              <a:t>Datenleitungen schützen</a:t>
+              <a:t>Backlight Pin (BL)</a:t>
             </a:r>
           </a:p>
         </p:txBody>
@@ -25784,7 +26333,7 @@
           <p:cNvPr id="4" name="Textfeld 3">
             <a:extLst>
               <a:ext uri="{FF2B5EF4-FFF2-40B4-BE49-F238E27FC236}">
-                <a16:creationId xmlns:a16="http://schemas.microsoft.com/office/drawing/2014/main" id="{B1F10E91-03FA-4176-8218-344CD35C4A32}"/>
+                <a16:creationId xmlns:a16="http://schemas.microsoft.com/office/drawing/2014/main" id="{3650AF52-A8CF-425F-AA34-26BDFC0F4651}"/>
               </a:ext>
             </a:extLst>
           </p:cNvPr>
@@ -25793,8 +26342,8 @@
         </p:nvSpPr>
         <p:spPr>
           <a:xfrm>
-            <a:off x="550333" y="1244938"/>
-            <a:ext cx="6096000" cy="2031325"/>
+            <a:off x="272992" y="835702"/>
+            <a:ext cx="5677959" cy="923330"/>
           </a:xfrm>
           <a:prstGeom prst="rect">
             <a:avLst/>
@@ -25807,48 +26356,272 @@
           </a:bodyPr>
           <a:lstStyle/>
           <a:p>
+            <a:pPr algn="l"/>
             <a:r>
               <a:rPr lang="de-DE" b="1" u="none" strike="noStrike">
+                <a:solidFill>
+                  <a:srgbClr val="0F1111"/>
+                </a:solidFill>
                 <a:effectLst/>
-                <a:latin typeface="Google Sans"/>
+                <a:latin typeface="Amazon Ember"/>
               </a:rPr>
-              <a:t>Spannungsteiler aus Widerständen:</a:t>
-            </a:r>
-            <a:r>
-              <a:rPr lang="de-DE"/>
-              <a:t> Schalte in jede Signalleitung vom Arduino Nano zum Display (MOSI, SCK, CS, D/C, RESET) einen einfachen Spannungsteiler. Ein </a:t>
-            </a:r>
+              <a:t>Typsches Setup:</a:t>
+            </a:r>
+            <a:endParaRPr lang="de-DE" b="0" u="none" strike="noStrike">
+              <a:solidFill>
+                <a:srgbClr val="0F1111"/>
+              </a:solidFill>
+              <a:effectLst/>
+              <a:latin typeface="Amazon Ember"/>
+            </a:endParaRPr>
+          </a:p>
+          <a:p>
+            <a:pPr algn="l"/>
+            <a:r>
+              <a:rPr lang="de-DE" b="0" i="0" u="none" strike="noStrike">
+                <a:solidFill>
+                  <a:srgbClr val="0F1111"/>
+                </a:solidFill>
+                <a:effectLst/>
+                <a:latin typeface="Amazon Ember"/>
+              </a:rPr>
+              <a:t>Arduino PWM-Pin → 100–220 Ohm Widerstand → BL-Pin</a:t>
+            </a:r>
+          </a:p>
+          <a:p>
+            <a:pPr algn="l"/>
+            <a:r>
+              <a:rPr lang="de-DE" b="0" i="0" u="none" strike="noStrike">
+                <a:solidFill>
+                  <a:srgbClr val="0F1111"/>
+                </a:solidFill>
+                <a:effectLst/>
+                <a:latin typeface="Amazon Ember"/>
+              </a:rPr>
+              <a:t>Dann mit analogWrite(pin, 0-255) die Helligkeit steuern</a:t>
+            </a:r>
+          </a:p>
+        </p:txBody>
+      </p:sp>
+      <p:sp>
+        <p:nvSpPr>
+          <p:cNvPr id="6" name="Textfeld 5">
+            <a:extLst>
+              <a:ext uri="{FF2B5EF4-FFF2-40B4-BE49-F238E27FC236}">
+                <a16:creationId xmlns:a16="http://schemas.microsoft.com/office/drawing/2014/main" id="{59B53105-9887-4633-A2C6-7867BB39B808}"/>
+              </a:ext>
+            </a:extLst>
+          </p:cNvPr>
+          <p:cNvSpPr txBox="1"/>
+          <p:nvPr/>
+        </p:nvSpPr>
+        <p:spPr>
+          <a:xfrm>
+            <a:off x="272992" y="1966958"/>
+            <a:ext cx="6096000" cy="3416320"/>
+          </a:xfrm>
+          <a:prstGeom prst="rect">
+            <a:avLst/>
+          </a:prstGeom>
+          <a:noFill/>
+        </p:spPr>
+        <p:txBody>
+          <a:bodyPr wrap="square">
+            <a:spAutoFit/>
+          </a:bodyPr>
+          <a:lstStyle/>
+          <a:p>
+            <a:pPr algn="l"/>
             <a:r>
               <a:rPr lang="de-DE" b="1" u="none" strike="noStrike">
+                <a:solidFill>
+                  <a:srgbClr val="0F1111"/>
+                </a:solidFill>
                 <a:effectLst/>
-                <a:latin typeface="Google Sans"/>
+                <a:latin typeface="Amazon Ember"/>
               </a:rPr>
-              <a:t>1kΩ Widerstand</a:t>
-            </a:r>
-            <a:r>
-              <a:rPr lang="de-DE"/>
-              <a:t> in Reihe und ein </a:t>
-            </a:r>
+              <a:t>Beim Arduino funktioniert das so:</a:t>
+            </a:r>
+            <a:endParaRPr lang="de-DE" b="0" u="none" strike="noStrike">
+              <a:solidFill>
+                <a:srgbClr val="0F1111"/>
+              </a:solidFill>
+              <a:effectLst/>
+              <a:latin typeface="Amazon Ember"/>
+            </a:endParaRPr>
+          </a:p>
+          <a:p>
+            <a:pPr marL="285750" indent="-285750" algn="l">
+              <a:buFontTx/>
+              <a:buChar char="-"/>
+            </a:pPr>
+            <a:r>
+              <a:rPr lang="de-DE" b="0" u="none" strike="noStrike">
+                <a:solidFill>
+                  <a:srgbClr val="0F1111"/>
+                </a:solidFill>
+                <a:effectLst/>
+                <a:latin typeface="Amazon Ember"/>
+              </a:rPr>
+              <a:t>analogWrite(pin, 0); // 0 = komplett aus </a:t>
+            </a:r>
+            <a:endParaRPr lang="de-DE">
+              <a:solidFill>
+                <a:srgbClr val="0F1111"/>
+              </a:solidFill>
+              <a:latin typeface="Amazon Ember"/>
+            </a:endParaRPr>
+          </a:p>
+          <a:p>
+            <a:pPr marL="285750" indent="-285750" algn="l">
+              <a:buFontTx/>
+              <a:buChar char="-"/>
+            </a:pPr>
+            <a:r>
+              <a:rPr lang="de-DE" b="0" u="none" strike="noStrike">
+                <a:solidFill>
+                  <a:srgbClr val="0F1111"/>
+                </a:solidFill>
+                <a:effectLst/>
+                <a:latin typeface="Amazon Ember"/>
+              </a:rPr>
+              <a:t>analogWrite(pin, 128); // 128 = halbe Helligkeit</a:t>
+            </a:r>
+          </a:p>
+          <a:p>
+            <a:pPr marL="285750" indent="-285750" algn="l">
+              <a:buFontTx/>
+              <a:buChar char="-"/>
+            </a:pPr>
+            <a:r>
+              <a:rPr lang="de-DE" b="0" u="none" strike="noStrike">
+                <a:solidFill>
+                  <a:srgbClr val="0F1111"/>
+                </a:solidFill>
+                <a:effectLst/>
+                <a:latin typeface="Amazon Ember"/>
+              </a:rPr>
+              <a:t>analogWrite(pin, 255); // 255 = volle Helligkeit </a:t>
+            </a:r>
+            <a:br>
+              <a:rPr lang="de-DE" b="0" u="none" strike="noStrike">
+                <a:solidFill>
+                  <a:srgbClr val="0F1111"/>
+                </a:solidFill>
+                <a:effectLst/>
+                <a:latin typeface="Amazon Ember"/>
+              </a:rPr>
+            </a:br>
+            <a:endParaRPr lang="de-DE" b="0" u="none" strike="noStrike">
+              <a:solidFill>
+                <a:srgbClr val="0F1111"/>
+              </a:solidFill>
+              <a:effectLst/>
+              <a:latin typeface="Amazon Ember"/>
+            </a:endParaRPr>
+          </a:p>
+          <a:p>
+            <a:pPr algn="l"/>
             <a:r>
               <a:rPr lang="de-DE" b="1" u="none" strike="noStrike">
+                <a:solidFill>
+                  <a:srgbClr val="0F1111"/>
+                </a:solidFill>
                 <a:effectLst/>
-                <a:latin typeface="Google Sans"/>
+                <a:latin typeface="Amazon Ember"/>
               </a:rPr>
-              <a:t>2kΩ Widerstand</a:t>
-            </a:r>
-            <a:r>
-              <a:rPr lang="de-DE"/>
-              <a:t> gegen Masse (GND) senkt das 5V-Signal des Nano absolut sicher auf displayfreundliche ca. 3,3V ab. Das ist bei SPI-Frequenzen bis zu mehreren Megahertz absolut stabil.</a:t>
+              <a:t>Für deinen BL-Pin am Display reicht aber auch einfach:</a:t>
+            </a:r>
+            <a:endParaRPr lang="de-DE" b="0" u="none" strike="noStrike">
+              <a:solidFill>
+                <a:srgbClr val="0F1111"/>
+              </a:solidFill>
+              <a:effectLst/>
+              <a:latin typeface="Amazon Ember"/>
+            </a:endParaRPr>
+          </a:p>
+          <a:p>
+            <a:pPr marL="285750" indent="-285750" algn="l">
+              <a:buFontTx/>
+              <a:buChar char="-"/>
+            </a:pPr>
+            <a:r>
+              <a:rPr lang="de-DE" b="0" u="none" strike="noStrike">
+                <a:solidFill>
+                  <a:srgbClr val="0F1111"/>
+                </a:solidFill>
+                <a:effectLst/>
+                <a:latin typeface="Amazon Ember"/>
+              </a:rPr>
+              <a:t>digitalWrite(BL_Pin, HIGH); // Backlight an</a:t>
+            </a:r>
+          </a:p>
+          <a:p>
+            <a:pPr marL="285750" indent="-285750" algn="l">
+              <a:buFontTx/>
+              <a:buChar char="-"/>
+            </a:pPr>
+            <a:r>
+              <a:rPr lang="de-DE" b="0" u="none" strike="noStrike">
+                <a:solidFill>
+                  <a:srgbClr val="0F1111"/>
+                </a:solidFill>
+                <a:effectLst/>
+                <a:latin typeface="Amazon Ember"/>
+              </a:rPr>
+              <a:t>digitalWrite(BL_Pin, LOW); // Backlight aus </a:t>
+            </a:r>
+          </a:p>
+          <a:p>
+            <a:pPr algn="l"/>
+            <a:br>
+              <a:rPr lang="de-DE" b="0" u="none" strike="noStrike">
+                <a:solidFill>
+                  <a:srgbClr val="0F1111"/>
+                </a:solidFill>
+                <a:effectLst/>
+                <a:latin typeface="Amazon Ember"/>
+              </a:rPr>
+            </a:br>
+            <a:r>
+              <a:rPr lang="de-DE" b="0" u="none" strike="noStrike">
+                <a:solidFill>
+                  <a:srgbClr val="0F1111"/>
+                </a:solidFill>
+                <a:effectLst/>
+                <a:latin typeface="Amazon Ember"/>
+              </a:rPr>
+              <a:t>Wenn du nur an/aus brauchst, ist digitalWrite völlig ausreichend – PWM (</a:t>
+            </a:r>
+            <a:r>
+              <a:rPr lang="de-DE" b="1" i="0">
+                <a:solidFill>
+                  <a:srgbClr val="0F1111"/>
+                </a:solidFill>
+                <a:effectLst/>
+                <a:latin typeface="Amazon Ember"/>
+              </a:rPr>
+              <a:t>Pulsweitenmodulation) </a:t>
+            </a:r>
+            <a:r>
+              <a:rPr lang="de-DE" b="0" u="none" strike="noStrike">
+                <a:solidFill>
+                  <a:srgbClr val="0F1111"/>
+                </a:solidFill>
+                <a:effectLst/>
+                <a:latin typeface="Amazon Ember"/>
+              </a:rPr>
+              <a:t>brauchst du nur, wenn du die Helligkeit stufenlos regeln möchtest.</a:t>
             </a:r>
           </a:p>
         </p:txBody>
       </p:sp>
       <p:pic>
         <p:nvPicPr>
-          <p:cNvPr id="6" name="Grafik 5">
-            <a:extLst>
-              <a:ext uri="{FF2B5EF4-FFF2-40B4-BE49-F238E27FC236}">
-                <a16:creationId xmlns:a16="http://schemas.microsoft.com/office/drawing/2014/main" id="{0B54BDFC-5608-4071-B1C7-6164B8D591A0}"/>
+          <p:cNvPr id="5" name="Grafik 4">
+            <a:extLst>
+              <a:ext uri="{FF2B5EF4-FFF2-40B4-BE49-F238E27FC236}">
+                <a16:creationId xmlns:a16="http://schemas.microsoft.com/office/drawing/2014/main" id="{A51AA99B-A75E-4518-B2DF-DC16FCC789D0}"/>
               </a:ext>
             </a:extLst>
           </p:cNvPr>
@@ -25865,8 +26638,8 @@
         </p:blipFill>
         <p:spPr>
           <a:xfrm>
-            <a:off x="5672666" y="3366104"/>
-            <a:ext cx="5434484" cy="3295949"/>
+            <a:off x="6368873" y="923925"/>
+            <a:ext cx="5550136" cy="4827542"/>
           </a:xfrm>
           <a:prstGeom prst="rect">
             <a:avLst/>
@@ -25876,7 +26649,7 @@
     </p:spTree>
     <p:extLst>
       <p:ext uri="{BB962C8B-B14F-4D97-AF65-F5344CB8AC3E}">
-        <p14:creationId xmlns:p14="http://schemas.microsoft.com/office/powerpoint/2010/main" val="3848752547"/>
+        <p14:creationId xmlns:p14="http://schemas.microsoft.com/office/powerpoint/2010/main" val="2845987463"/>
       </p:ext>
     </p:extLst>
   </p:cSld>
@@ -25908,7 +26681,7 @@
           <p:cNvPr id="2" name="Titel 1">
             <a:extLst>
               <a:ext uri="{FF2B5EF4-FFF2-40B4-BE49-F238E27FC236}">
-                <a16:creationId xmlns:a16="http://schemas.microsoft.com/office/drawing/2014/main" id="{887D3DF3-834B-4D46-95E9-F35E286721DE}"/>
+                <a16:creationId xmlns:a16="http://schemas.microsoft.com/office/drawing/2014/main" id="{DCB122F7-06E5-4A20-A978-08CE3427DCBE}"/>
               </a:ext>
             </a:extLst>
           </p:cNvPr>
@@ -25931,12 +26704,76 @@
           </a:p>
         </p:txBody>
       </p:sp>
+      <p:sp>
+        <p:nvSpPr>
+          <p:cNvPr id="4" name="Textfeld 3">
+            <a:extLst>
+              <a:ext uri="{FF2B5EF4-FFF2-40B4-BE49-F238E27FC236}">
+                <a16:creationId xmlns:a16="http://schemas.microsoft.com/office/drawing/2014/main" id="{B1F10E91-03FA-4176-8218-344CD35C4A32}"/>
+              </a:ext>
+            </a:extLst>
+          </p:cNvPr>
+          <p:cNvSpPr txBox="1"/>
+          <p:nvPr/>
+        </p:nvSpPr>
+        <p:spPr>
+          <a:xfrm>
+            <a:off x="550333" y="1244938"/>
+            <a:ext cx="6096000" cy="2031325"/>
+          </a:xfrm>
+          <a:prstGeom prst="rect">
+            <a:avLst/>
+          </a:prstGeom>
+          <a:noFill/>
+        </p:spPr>
+        <p:txBody>
+          <a:bodyPr wrap="square">
+            <a:spAutoFit/>
+          </a:bodyPr>
+          <a:lstStyle/>
+          <a:p>
+            <a:r>
+              <a:rPr lang="de-DE" b="1" u="none" strike="noStrike">
+                <a:effectLst/>
+                <a:latin typeface="Google Sans"/>
+              </a:rPr>
+              <a:t>Spannungsteiler aus Widerständen:</a:t>
+            </a:r>
+            <a:r>
+              <a:rPr lang="de-DE"/>
+              <a:t> Schalte in jede Signalleitung vom Arduino Nano zum Display (MOSI, SCK, CS, D/C, RESET) einen einfachen Spannungsteiler. Ein </a:t>
+            </a:r>
+            <a:r>
+              <a:rPr lang="de-DE" b="1" u="none" strike="noStrike">
+                <a:effectLst/>
+                <a:latin typeface="Google Sans"/>
+              </a:rPr>
+              <a:t>1kΩ Widerstand</a:t>
+            </a:r>
+            <a:r>
+              <a:rPr lang="de-DE"/>
+              <a:t> in Reihe und ein </a:t>
+            </a:r>
+            <a:r>
+              <a:rPr lang="de-DE" b="1" u="none" strike="noStrike">
+                <a:effectLst/>
+                <a:latin typeface="Google Sans"/>
+              </a:rPr>
+              <a:t>2kΩ Widerstand</a:t>
+            </a:r>
+            <a:r>
+              <a:rPr lang="de-DE"/>
+              <a:t> gegen Masse (GND) senkt das 5V-Signal des Nano absolut sicher auf displayfreundliche ca. 3,3V ab. Das ist bei SPI-Frequenzen bis zu mehreren Megahertz absolut stabil.</a:t>
+            </a:r>
+          </a:p>
+        </p:txBody>
+      </p:sp>
       <p:pic>
         <p:nvPicPr>
-          <p:cNvPr id="14" name="Grafik 13">
-            <a:extLst>
-              <a:ext uri="{FF2B5EF4-FFF2-40B4-BE49-F238E27FC236}">
-                <a16:creationId xmlns:a16="http://schemas.microsoft.com/office/drawing/2014/main" id="{BA9057E0-0525-4E91-9150-C438379486DC}"/>
+          <p:cNvPr id="6" name="Grafik 5">
+            <a:extLst>
+              <a:ext uri="{FF2B5EF4-FFF2-40B4-BE49-F238E27FC236}">
+                <a16:creationId xmlns:a16="http://schemas.microsoft.com/office/drawing/2014/main" id="{0B54BDFC-5608-4071-B1C7-6164B8D591A0}"/>
               </a:ext>
             </a:extLst>
           </p:cNvPr>
@@ -25953,8 +26790,8 @@
         </p:blipFill>
         <p:spPr>
           <a:xfrm>
-            <a:off x="3461896" y="971549"/>
-            <a:ext cx="5703128" cy="5505877"/>
+            <a:off x="5672666" y="3366104"/>
+            <a:ext cx="5434484" cy="3295949"/>
           </a:xfrm>
           <a:prstGeom prst="rect">
             <a:avLst/>
@@ -25964,7 +26801,7 @@
     </p:spTree>
     <p:extLst>
       <p:ext uri="{BB962C8B-B14F-4D97-AF65-F5344CB8AC3E}">
-        <p14:creationId xmlns:p14="http://schemas.microsoft.com/office/powerpoint/2010/main" val="3730408958"/>
+        <p14:creationId xmlns:p14="http://schemas.microsoft.com/office/powerpoint/2010/main" val="3848752547"/>
       </p:ext>
     </p:extLst>
   </p:cSld>
@@ -25993,10 +26830,10 @@
       </p:grpSpPr>
       <p:sp>
         <p:nvSpPr>
-          <p:cNvPr id="3" name="Titel 2">
-            <a:extLst>
-              <a:ext uri="{FF2B5EF4-FFF2-40B4-BE49-F238E27FC236}">
-                <a16:creationId xmlns:a16="http://schemas.microsoft.com/office/drawing/2014/main" id="{3D10174C-7C02-4C8B-8C94-C98C8716E4FD}"/>
+          <p:cNvPr id="2" name="Titel 1">
+            <a:extLst>
+              <a:ext uri="{FF2B5EF4-FFF2-40B4-BE49-F238E27FC236}">
+                <a16:creationId xmlns:a16="http://schemas.microsoft.com/office/drawing/2014/main" id="{887D3DF3-834B-4D46-95E9-F35E286721DE}"/>
               </a:ext>
             </a:extLst>
           </p:cNvPr>
@@ -26014,15 +26851,45 @@
           <a:p>
             <a:r>
               <a:rPr lang="de-DE"/>
-              <a:t>Lingo Bingo</a:t>
+              <a:t>Datenleitungen schützen</a:t>
             </a:r>
           </a:p>
         </p:txBody>
       </p:sp>
+      <p:pic>
+        <p:nvPicPr>
+          <p:cNvPr id="14" name="Grafik 13">
+            <a:extLst>
+              <a:ext uri="{FF2B5EF4-FFF2-40B4-BE49-F238E27FC236}">
+                <a16:creationId xmlns:a16="http://schemas.microsoft.com/office/drawing/2014/main" id="{BA9057E0-0525-4E91-9150-C438379486DC}"/>
+              </a:ext>
+            </a:extLst>
+          </p:cNvPr>
+          <p:cNvPicPr>
+            <a:picLocks noChangeAspect="1"/>
+          </p:cNvPicPr>
+          <p:nvPr/>
+        </p:nvPicPr>
+        <p:blipFill>
+          <a:blip r:embed="rId2"/>
+          <a:stretch>
+            <a:fillRect/>
+          </a:stretch>
+        </p:blipFill>
+        <p:spPr>
+          <a:xfrm>
+            <a:off x="3461896" y="971549"/>
+            <a:ext cx="5703128" cy="5505877"/>
+          </a:xfrm>
+          <a:prstGeom prst="rect">
+            <a:avLst/>
+          </a:prstGeom>
+        </p:spPr>
+      </p:pic>
     </p:spTree>
     <p:extLst>
       <p:ext uri="{BB962C8B-B14F-4D97-AF65-F5344CB8AC3E}">
-        <p14:creationId xmlns:p14="http://schemas.microsoft.com/office/powerpoint/2010/main" val="18964744"/>
+        <p14:creationId xmlns:p14="http://schemas.microsoft.com/office/powerpoint/2010/main" val="3730408958"/>
       </p:ext>
     </p:extLst>
   </p:cSld>
@@ -26054,7 +26921,7 @@
           <p:cNvPr id="3" name="Titel 2">
             <a:extLst>
               <a:ext uri="{FF2B5EF4-FFF2-40B4-BE49-F238E27FC236}">
-                <a16:creationId xmlns:a16="http://schemas.microsoft.com/office/drawing/2014/main" id="{51D9B674-E0A9-452F-A749-67D4C9B83A5D}"/>
+                <a16:creationId xmlns:a16="http://schemas.microsoft.com/office/drawing/2014/main" id="{3D10174C-7C02-4C8B-8C94-C98C8716E4FD}"/>
               </a:ext>
             </a:extLst>
           </p:cNvPr>
@@ -26072,76 +26939,7 @@
           <a:p>
             <a:r>
               <a:rPr lang="de-DE"/>
-              <a:t>Lingo Bingo Gadget</a:t>
-            </a:r>
-          </a:p>
-        </p:txBody>
-      </p:sp>
-      <p:sp>
-        <p:nvSpPr>
-          <p:cNvPr id="4" name="Inhaltsplatzhalter 3">
-            <a:extLst>
-              <a:ext uri="{FF2B5EF4-FFF2-40B4-BE49-F238E27FC236}">
-                <a16:creationId xmlns:a16="http://schemas.microsoft.com/office/drawing/2014/main" id="{4BBB2065-B24E-47C9-AE24-3E3B52AE4C84}"/>
-              </a:ext>
-            </a:extLst>
-          </p:cNvPr>
-          <p:cNvSpPr>
-            <a:spLocks noGrp="1"/>
-          </p:cNvSpPr>
-          <p:nvPr>
-            <p:ph idx="1"/>
-          </p:nvPr>
-        </p:nvSpPr>
-        <p:spPr/>
-        <p:txBody>
-          <a:bodyPr/>
-          <a:lstStyle/>
-          <a:p>
-            <a:r>
-              <a:rPr lang="de-DE"/>
-              <a:t>Würfelähnliches Spiel</a:t>
-            </a:r>
-          </a:p>
-          <a:p>
-            <a:pPr lvl="1"/>
-            <a:r>
-              <a:rPr lang="de-DE"/>
-              <a:t>6 LEDs die die Würfelaugen repräsentieren</a:t>
-            </a:r>
-          </a:p>
-          <a:p>
-            <a:pPr lvl="1"/>
-            <a:r>
-              <a:rPr lang="de-DE"/>
-              <a:t>Ausgabe Jingle Sound während würfeln</a:t>
-            </a:r>
-          </a:p>
-          <a:p>
-            <a:pPr lvl="1"/>
-            <a:r>
-              <a:rPr lang="de-DE"/>
-              <a:t>Ausgabe gewürfelte Ziffer Sound in unterschiedlichen Sprachen</a:t>
-            </a:r>
-            <a:br>
-              <a:rPr lang="de-DE"/>
-            </a:br>
-            <a:endParaRPr lang="de-DE"/>
-          </a:p>
-          <a:p>
-            <a:r>
-              <a:rPr lang="de-DE"/>
-              <a:t>Taste : es wird normal gewürfelt</a:t>
-            </a:r>
-            <a:br>
-              <a:rPr lang="de-DE"/>
-            </a:br>
-            <a:endParaRPr lang="de-DE"/>
-          </a:p>
-          <a:p>
-            <a:r>
-              <a:rPr lang="de-DE"/>
-              <a:t>Numpad Eingabe : es wird gewürfelt und bei Treffer entsprechend honoriert</a:t>
+              <a:t>Lingo Bingo</a:t>
             </a:r>
           </a:p>
         </p:txBody>
@@ -26149,7 +26947,7 @@
     </p:spTree>
     <p:extLst>
       <p:ext uri="{BB962C8B-B14F-4D97-AF65-F5344CB8AC3E}">
-        <p14:creationId xmlns:p14="http://schemas.microsoft.com/office/powerpoint/2010/main" val="3256396526"/>
+        <p14:creationId xmlns:p14="http://schemas.microsoft.com/office/powerpoint/2010/main" val="18964744"/>
       </p:ext>
     </p:extLst>
   </p:cSld>
@@ -26178,10 +26976,10 @@
       </p:grpSpPr>
       <p:sp>
         <p:nvSpPr>
-          <p:cNvPr id="2" name="Titel 1">
-            <a:extLst>
-              <a:ext uri="{FF2B5EF4-FFF2-40B4-BE49-F238E27FC236}">
-                <a16:creationId xmlns:a16="http://schemas.microsoft.com/office/drawing/2014/main" id="{009294B0-BCA9-4658-B01F-4A948A05F5E0}"/>
+          <p:cNvPr id="3" name="Titel 2">
+            <a:extLst>
+              <a:ext uri="{FF2B5EF4-FFF2-40B4-BE49-F238E27FC236}">
+                <a16:creationId xmlns:a16="http://schemas.microsoft.com/office/drawing/2014/main" id="{51D9B674-E0A9-452F-A749-67D4C9B83A5D}"/>
               </a:ext>
             </a:extLst>
           </p:cNvPr>
@@ -26199,1076 +26997,84 @@
           <a:p>
             <a:r>
               <a:rPr lang="de-DE"/>
-              <a:t>Lingo Bingo Controls</a:t>
+              <a:t>Lingo Bingo Gadget</a:t>
             </a:r>
           </a:p>
         </p:txBody>
       </p:sp>
       <p:sp>
         <p:nvSpPr>
-          <p:cNvPr id="3" name="Rechteck 2">
-            <a:extLst>
-              <a:ext uri="{FF2B5EF4-FFF2-40B4-BE49-F238E27FC236}">
-                <a16:creationId xmlns:a16="http://schemas.microsoft.com/office/drawing/2014/main" id="{8C81D91A-1930-4505-82E8-656199E88503}"/>
-              </a:ext>
-            </a:extLst>
-          </p:cNvPr>
-          <p:cNvSpPr/>
-          <p:nvPr/>
+          <p:cNvPr id="4" name="Inhaltsplatzhalter 3">
+            <a:extLst>
+              <a:ext uri="{FF2B5EF4-FFF2-40B4-BE49-F238E27FC236}">
+                <a16:creationId xmlns:a16="http://schemas.microsoft.com/office/drawing/2014/main" id="{4BBB2065-B24E-47C9-AE24-3E3B52AE4C84}"/>
+              </a:ext>
+            </a:extLst>
+          </p:cNvPr>
+          <p:cNvSpPr>
+            <a:spLocks noGrp="1"/>
+          </p:cNvSpPr>
+          <p:nvPr>
+            <p:ph idx="1"/>
+          </p:nvPr>
         </p:nvSpPr>
-        <p:spPr>
-          <a:xfrm>
-            <a:off x="3600000" y="1080000"/>
-            <a:ext cx="73891" cy="83127"/>
-          </a:xfrm>
-          <a:prstGeom prst="rect">
-            <a:avLst/>
-          </a:prstGeom>
-        </p:spPr>
-        <p:style>
-          <a:lnRef idx="2">
-            <a:schemeClr val="accent1">
-              <a:shade val="50000"/>
-            </a:schemeClr>
-          </a:lnRef>
-          <a:fillRef idx="1">
-            <a:schemeClr val="accent1"/>
-          </a:fillRef>
-          <a:effectRef idx="0">
-            <a:schemeClr val="accent1"/>
-          </a:effectRef>
-          <a:fontRef idx="minor">
-            <a:schemeClr val="lt1"/>
-          </a:fontRef>
-        </p:style>
+        <p:spPr/>
         <p:txBody>
-          <a:bodyPr rtlCol="0" anchor="ctr"/>
+          <a:bodyPr/>
           <a:lstStyle/>
           <a:p>
-            <a:pPr algn="ctr"/>
+            <a:r>
+              <a:rPr lang="de-DE"/>
+              <a:t>Würfelähnliches Spiel</a:t>
+            </a:r>
+          </a:p>
+          <a:p>
+            <a:pPr lvl="1"/>
+            <a:r>
+              <a:rPr lang="de-DE"/>
+              <a:t>6 LEDs die die Würfelaugen repräsentieren</a:t>
+            </a:r>
+          </a:p>
+          <a:p>
+            <a:pPr lvl="1"/>
+            <a:r>
+              <a:rPr lang="de-DE"/>
+              <a:t>Ausgabe Jingle Sound während würfeln</a:t>
+            </a:r>
+          </a:p>
+          <a:p>
+            <a:pPr lvl="1"/>
+            <a:r>
+              <a:rPr lang="de-DE"/>
+              <a:t>Ausgabe gewürfelte Ziffer Sound in unterschiedlichen Sprachen</a:t>
+            </a:r>
+            <a:br>
+              <a:rPr lang="de-DE"/>
+            </a:br>
             <a:endParaRPr lang="de-DE"/>
           </a:p>
-        </p:txBody>
-      </p:sp>
-      <p:sp>
-        <p:nvSpPr>
-          <p:cNvPr id="4" name="Rechteck 3">
-            <a:extLst>
-              <a:ext uri="{FF2B5EF4-FFF2-40B4-BE49-F238E27FC236}">
-                <a16:creationId xmlns:a16="http://schemas.microsoft.com/office/drawing/2014/main" id="{B5767EED-AE32-4E4E-BE9D-CC7AE83284FE}"/>
-              </a:ext>
-            </a:extLst>
-          </p:cNvPr>
-          <p:cNvSpPr/>
-          <p:nvPr/>
-        </p:nvSpPr>
-        <p:spPr>
-          <a:xfrm>
-            <a:off x="7666109" y="1080000"/>
-            <a:ext cx="73891" cy="83127"/>
-          </a:xfrm>
-          <a:prstGeom prst="rect">
-            <a:avLst/>
-          </a:prstGeom>
-        </p:spPr>
-        <p:style>
-          <a:lnRef idx="2">
-            <a:schemeClr val="accent1">
-              <a:shade val="50000"/>
-            </a:schemeClr>
-          </a:lnRef>
-          <a:fillRef idx="1">
-            <a:schemeClr val="accent1"/>
-          </a:fillRef>
-          <a:effectRef idx="0">
-            <a:schemeClr val="accent1"/>
-          </a:effectRef>
-          <a:fontRef idx="minor">
-            <a:schemeClr val="lt1"/>
-          </a:fontRef>
-        </p:style>
-        <p:txBody>
-          <a:bodyPr rtlCol="0" anchor="ctr"/>
-          <a:lstStyle/>
-          <a:p>
-            <a:pPr algn="ctr"/>
+          <a:p>
+            <a:r>
+              <a:rPr lang="de-DE"/>
+              <a:t>Taste : es wird normal gewürfelt</a:t>
+            </a:r>
+            <a:br>
+              <a:rPr lang="de-DE"/>
+            </a:br>
             <a:endParaRPr lang="de-DE"/>
           </a:p>
-        </p:txBody>
-      </p:sp>
-      <p:sp>
-        <p:nvSpPr>
-          <p:cNvPr id="5" name="Rechteck 4">
-            <a:extLst>
-              <a:ext uri="{FF2B5EF4-FFF2-40B4-BE49-F238E27FC236}">
-                <a16:creationId xmlns:a16="http://schemas.microsoft.com/office/drawing/2014/main" id="{93A7AA4A-B9C6-49BF-9867-618EF6204099}"/>
-              </a:ext>
-            </a:extLst>
-          </p:cNvPr>
-          <p:cNvSpPr/>
-          <p:nvPr/>
-        </p:nvSpPr>
-        <p:spPr>
-          <a:xfrm>
-            <a:off x="3599999" y="5784872"/>
-            <a:ext cx="73891" cy="83127"/>
-          </a:xfrm>
-          <a:prstGeom prst="rect">
-            <a:avLst/>
-          </a:prstGeom>
-        </p:spPr>
-        <p:style>
-          <a:lnRef idx="2">
-            <a:schemeClr val="accent1">
-              <a:shade val="50000"/>
-            </a:schemeClr>
-          </a:lnRef>
-          <a:fillRef idx="1">
-            <a:schemeClr val="accent1"/>
-          </a:fillRef>
-          <a:effectRef idx="0">
-            <a:schemeClr val="accent1"/>
-          </a:effectRef>
-          <a:fontRef idx="minor">
-            <a:schemeClr val="lt1"/>
-          </a:fontRef>
-        </p:style>
-        <p:txBody>
-          <a:bodyPr rtlCol="0" anchor="ctr"/>
-          <a:lstStyle/>
-          <a:p>
-            <a:pPr algn="ctr"/>
-            <a:endParaRPr lang="de-DE"/>
-          </a:p>
-        </p:txBody>
-      </p:sp>
-      <p:sp>
-        <p:nvSpPr>
-          <p:cNvPr id="6" name="Rechteck 5">
-            <a:extLst>
-              <a:ext uri="{FF2B5EF4-FFF2-40B4-BE49-F238E27FC236}">
-                <a16:creationId xmlns:a16="http://schemas.microsoft.com/office/drawing/2014/main" id="{506EC625-93E9-45E1-9439-0280E2F8361C}"/>
-              </a:ext>
-            </a:extLst>
-          </p:cNvPr>
-          <p:cNvSpPr/>
-          <p:nvPr/>
-        </p:nvSpPr>
-        <p:spPr>
-          <a:xfrm>
-            <a:off x="7666109" y="5784873"/>
-            <a:ext cx="73891" cy="83127"/>
-          </a:xfrm>
-          <a:prstGeom prst="rect">
-            <a:avLst/>
-          </a:prstGeom>
-        </p:spPr>
-        <p:style>
-          <a:lnRef idx="2">
-            <a:schemeClr val="accent1">
-              <a:shade val="50000"/>
-            </a:schemeClr>
-          </a:lnRef>
-          <a:fillRef idx="1">
-            <a:schemeClr val="accent1"/>
-          </a:fillRef>
-          <a:effectRef idx="0">
-            <a:schemeClr val="accent1"/>
-          </a:effectRef>
-          <a:fontRef idx="minor">
-            <a:schemeClr val="lt1"/>
-          </a:fontRef>
-        </p:style>
-        <p:txBody>
-          <a:bodyPr rtlCol="0" anchor="ctr"/>
-          <a:lstStyle/>
-          <a:p>
-            <a:pPr algn="ctr"/>
-            <a:endParaRPr lang="de-DE"/>
-          </a:p>
-        </p:txBody>
-      </p:sp>
-      <p:sp>
-        <p:nvSpPr>
-          <p:cNvPr id="7" name="Rechteck 6">
-            <a:extLst>
-              <a:ext uri="{FF2B5EF4-FFF2-40B4-BE49-F238E27FC236}">
-                <a16:creationId xmlns:a16="http://schemas.microsoft.com/office/drawing/2014/main" id="{57DA6A1E-307B-45CC-B50F-6D8205C3369E}"/>
-              </a:ext>
-            </a:extLst>
-          </p:cNvPr>
-          <p:cNvSpPr/>
-          <p:nvPr/>
-        </p:nvSpPr>
-        <p:spPr>
-          <a:xfrm>
-            <a:off x="3600000" y="1080000"/>
-            <a:ext cx="4140000" cy="4788000"/>
-          </a:xfrm>
-          <a:prstGeom prst="rect">
-            <a:avLst/>
-          </a:prstGeom>
-          <a:noFill/>
-          <a:ln>
-            <a:noFill/>
-          </a:ln>
-        </p:spPr>
-        <p:style>
-          <a:lnRef idx="2">
-            <a:schemeClr val="accent1">
-              <a:shade val="50000"/>
-            </a:schemeClr>
-          </a:lnRef>
-          <a:fillRef idx="1">
-            <a:schemeClr val="accent1"/>
-          </a:fillRef>
-          <a:effectRef idx="0">
-            <a:schemeClr val="accent1"/>
-          </a:effectRef>
-          <a:fontRef idx="minor">
-            <a:schemeClr val="lt1"/>
-          </a:fontRef>
-        </p:style>
-        <p:txBody>
-          <a:bodyPr rtlCol="0" anchor="ctr"/>
-          <a:lstStyle/>
-          <a:p>
-            <a:pPr algn="ctr"/>
-            <a:endParaRPr lang="de-DE"/>
-          </a:p>
-        </p:txBody>
-      </p:sp>
-      <p:sp>
-        <p:nvSpPr>
-          <p:cNvPr id="10" name="Textfeld 9">
-            <a:extLst>
-              <a:ext uri="{FF2B5EF4-FFF2-40B4-BE49-F238E27FC236}">
-                <a16:creationId xmlns:a16="http://schemas.microsoft.com/office/drawing/2014/main" id="{83E11A70-FC8F-4C60-AD38-45AFDA945A17}"/>
-              </a:ext>
-            </a:extLst>
-          </p:cNvPr>
-          <p:cNvSpPr txBox="1"/>
-          <p:nvPr/>
-        </p:nvSpPr>
-        <p:spPr>
-          <a:xfrm>
-            <a:off x="628072" y="1163127"/>
-            <a:ext cx="1481496" cy="1785104"/>
-          </a:xfrm>
-          <a:prstGeom prst="rect">
-            <a:avLst/>
-          </a:prstGeom>
-          <a:noFill/>
-        </p:spPr>
-        <p:txBody>
-          <a:bodyPr wrap="none" rtlCol="0">
-            <a:spAutoFit/>
-          </a:bodyPr>
-          <a:lstStyle/>
-          <a:p>
-            <a:r>
-              <a:rPr lang="de-DE" sz="1100" b="1"/>
-              <a:t>Panel</a:t>
-            </a:r>
-            <a:r>
-              <a:rPr lang="de-DE" sz="1100"/>
-              <a:t> </a:t>
-            </a:r>
-          </a:p>
-          <a:p>
-            <a:pPr marL="171450" indent="-171450">
-              <a:buFontTx/>
-              <a:buChar char="-"/>
-            </a:pPr>
-            <a:r>
-              <a:rPr lang="de-DE" sz="1100"/>
-              <a:t>inkl. nut : 115 x 133</a:t>
-            </a:r>
-          </a:p>
-          <a:p>
-            <a:pPr marL="171450" indent="-171450">
-              <a:buFontTx/>
-              <a:buChar char="-"/>
-            </a:pPr>
-            <a:r>
-              <a:rPr lang="de-DE" sz="1100"/>
-              <a:t>innen : 100 x 120</a:t>
-            </a:r>
-          </a:p>
-          <a:p>
-            <a:pPr marL="171450" indent="-171450">
-              <a:buFontTx/>
-              <a:buChar char="-"/>
-            </a:pPr>
-            <a:endParaRPr lang="de-DE" sz="1100"/>
-          </a:p>
-          <a:p>
-            <a:r>
-              <a:rPr lang="de-DE" sz="1100" b="1"/>
-              <a:t>LED Kreis</a:t>
-            </a:r>
-          </a:p>
-          <a:p>
-            <a:pPr marL="171450" indent="-171450">
-              <a:buFontTx/>
-              <a:buChar char="-"/>
-            </a:pPr>
-            <a:r>
-              <a:rPr lang="de-DE" sz="1100"/>
-              <a:t>von oben: 50</a:t>
-            </a:r>
-          </a:p>
-          <a:p>
-            <a:pPr marL="171450" indent="-171450">
-              <a:buFontTx/>
-              <a:buChar char="-"/>
-            </a:pPr>
-            <a:r>
-              <a:rPr lang="de-DE" sz="1100"/>
-              <a:t>Radius: 30</a:t>
-            </a:r>
-          </a:p>
-          <a:p>
-            <a:pPr marL="171450" indent="-171450">
-              <a:buFontTx/>
-              <a:buChar char="-"/>
-            </a:pPr>
-            <a:endParaRPr lang="de-DE" sz="1100"/>
-          </a:p>
-          <a:p>
-            <a:r>
-              <a:rPr lang="de-DE" sz="1100"/>
-              <a:t>Charging USB (links)</a:t>
-            </a:r>
-          </a:p>
-          <a:p>
-            <a:r>
-              <a:rPr lang="de-DE" sz="1100"/>
-              <a:t>- Links : </a:t>
-            </a:r>
-          </a:p>
-        </p:txBody>
-      </p:sp>
-      <p:sp>
-        <p:nvSpPr>
-          <p:cNvPr id="19" name="Ellipse 18">
-            <a:extLst>
-              <a:ext uri="{FF2B5EF4-FFF2-40B4-BE49-F238E27FC236}">
-                <a16:creationId xmlns:a16="http://schemas.microsoft.com/office/drawing/2014/main" id="{FE6BD11C-5FA5-4430-923E-AAA9C865BC6F}"/>
-              </a:ext>
-            </a:extLst>
-          </p:cNvPr>
-          <p:cNvSpPr/>
-          <p:nvPr/>
-        </p:nvSpPr>
-        <p:spPr>
-          <a:xfrm>
-            <a:off x="5535000" y="1661400"/>
-            <a:ext cx="277200" cy="277200"/>
-          </a:xfrm>
-          <a:prstGeom prst="ellipse">
-            <a:avLst/>
-          </a:prstGeom>
-          <a:noFill/>
-          <a:ln w="6350">
-            <a:solidFill>
-              <a:schemeClr val="tx1"/>
-            </a:solidFill>
-          </a:ln>
-        </p:spPr>
-        <p:style>
-          <a:lnRef idx="2">
-            <a:schemeClr val="accent1">
-              <a:shade val="50000"/>
-            </a:schemeClr>
-          </a:lnRef>
-          <a:fillRef idx="1">
-            <a:schemeClr val="accent1"/>
-          </a:fillRef>
-          <a:effectRef idx="0">
-            <a:schemeClr val="accent1"/>
-          </a:effectRef>
-          <a:fontRef idx="minor">
-            <a:schemeClr val="lt1"/>
-          </a:fontRef>
-        </p:style>
-        <p:txBody>
-          <a:bodyPr rtlCol="0" anchor="ctr"/>
-          <a:lstStyle/>
-          <a:p>
-            <a:pPr algn="ctr"/>
-            <a:endParaRPr lang="de-DE" sz="1000"/>
-          </a:p>
-        </p:txBody>
-      </p:sp>
-      <p:sp>
-        <p:nvSpPr>
-          <p:cNvPr id="8" name="Ellipse 7">
-            <a:extLst>
-              <a:ext uri="{FF2B5EF4-FFF2-40B4-BE49-F238E27FC236}">
-                <a16:creationId xmlns:a16="http://schemas.microsoft.com/office/drawing/2014/main" id="{29D12D2C-A941-4A97-9FCF-9FB67202BD27}"/>
-              </a:ext>
-            </a:extLst>
-          </p:cNvPr>
-          <p:cNvSpPr/>
-          <p:nvPr/>
-        </p:nvSpPr>
-        <p:spPr>
-          <a:xfrm>
-            <a:off x="4590000" y="1800000"/>
-            <a:ext cx="2160000" cy="2160000"/>
-          </a:xfrm>
-          <a:prstGeom prst="ellipse">
-            <a:avLst/>
-          </a:prstGeom>
-          <a:noFill/>
-          <a:ln w="15875">
-            <a:noFill/>
-          </a:ln>
-        </p:spPr>
-        <p:style>
-          <a:lnRef idx="2">
-            <a:schemeClr val="accent1">
-              <a:shade val="50000"/>
-            </a:schemeClr>
-          </a:lnRef>
-          <a:fillRef idx="1">
-            <a:schemeClr val="accent1"/>
-          </a:fillRef>
-          <a:effectRef idx="0">
-            <a:schemeClr val="accent1"/>
-          </a:effectRef>
-          <a:fontRef idx="minor">
-            <a:schemeClr val="lt1"/>
-          </a:fontRef>
-        </p:style>
-        <p:txBody>
-          <a:bodyPr rtlCol="0" anchor="ctr"/>
-          <a:lstStyle/>
-          <a:p>
-            <a:pPr algn="ctr"/>
-            <a:endParaRPr lang="de-DE"/>
-          </a:p>
-        </p:txBody>
-      </p:sp>
-      <p:sp>
-        <p:nvSpPr>
-          <p:cNvPr id="21" name="Ellipse 20">
-            <a:extLst>
-              <a:ext uri="{FF2B5EF4-FFF2-40B4-BE49-F238E27FC236}">
-                <a16:creationId xmlns:a16="http://schemas.microsoft.com/office/drawing/2014/main" id="{A2F97A1D-1DD0-4CE6-86EE-7C0AE2919C5E}"/>
-              </a:ext>
-            </a:extLst>
-          </p:cNvPr>
-          <p:cNvSpPr/>
-          <p:nvPr/>
-        </p:nvSpPr>
-        <p:spPr>
-          <a:xfrm>
-            <a:off x="5535000" y="3822530"/>
-            <a:ext cx="277200" cy="277200"/>
-          </a:xfrm>
-          <a:prstGeom prst="ellipse">
-            <a:avLst/>
-          </a:prstGeom>
-          <a:noFill/>
-          <a:ln w="6350">
-            <a:solidFill>
-              <a:schemeClr val="tx1"/>
-            </a:solidFill>
-          </a:ln>
-        </p:spPr>
-        <p:style>
-          <a:lnRef idx="2">
-            <a:schemeClr val="accent1">
-              <a:shade val="50000"/>
-            </a:schemeClr>
-          </a:lnRef>
-          <a:fillRef idx="1">
-            <a:schemeClr val="accent1"/>
-          </a:fillRef>
-          <a:effectRef idx="0">
-            <a:schemeClr val="accent1"/>
-          </a:effectRef>
-          <a:fontRef idx="minor">
-            <a:schemeClr val="lt1"/>
-          </a:fontRef>
-        </p:style>
-        <p:txBody>
-          <a:bodyPr rtlCol="0" anchor="ctr"/>
-          <a:lstStyle/>
-          <a:p>
-            <a:pPr algn="ctr"/>
-            <a:endParaRPr lang="de-DE" sz="1000"/>
-          </a:p>
-        </p:txBody>
-      </p:sp>
-      <p:sp>
-        <p:nvSpPr>
-          <p:cNvPr id="22" name="Ellipse 21">
-            <a:extLst>
-              <a:ext uri="{FF2B5EF4-FFF2-40B4-BE49-F238E27FC236}">
-                <a16:creationId xmlns:a16="http://schemas.microsoft.com/office/drawing/2014/main" id="{5D80280E-5E86-4DC5-9250-415C611FEA86}"/>
-              </a:ext>
-            </a:extLst>
-          </p:cNvPr>
-          <p:cNvSpPr/>
-          <p:nvPr/>
-        </p:nvSpPr>
-        <p:spPr>
-          <a:xfrm>
-            <a:off x="6460244" y="2192164"/>
-            <a:ext cx="277200" cy="277200"/>
-          </a:xfrm>
-          <a:prstGeom prst="ellipse">
-            <a:avLst/>
-          </a:prstGeom>
-          <a:noFill/>
-          <a:ln w="6350">
-            <a:solidFill>
-              <a:schemeClr val="tx1"/>
-            </a:solidFill>
-          </a:ln>
-        </p:spPr>
-        <p:style>
-          <a:lnRef idx="2">
-            <a:schemeClr val="accent1">
-              <a:shade val="50000"/>
-            </a:schemeClr>
-          </a:lnRef>
-          <a:fillRef idx="1">
-            <a:schemeClr val="accent1"/>
-          </a:fillRef>
-          <a:effectRef idx="0">
-            <a:schemeClr val="accent1"/>
-          </a:effectRef>
-          <a:fontRef idx="minor">
-            <a:schemeClr val="lt1"/>
-          </a:fontRef>
-        </p:style>
-        <p:txBody>
-          <a:bodyPr rtlCol="0" anchor="ctr"/>
-          <a:lstStyle/>
-          <a:p>
-            <a:pPr algn="ctr"/>
-            <a:endParaRPr lang="de-DE" sz="1000"/>
-          </a:p>
-        </p:txBody>
-      </p:sp>
-      <p:sp>
-        <p:nvSpPr>
-          <p:cNvPr id="23" name="Ellipse 22">
-            <a:extLst>
-              <a:ext uri="{FF2B5EF4-FFF2-40B4-BE49-F238E27FC236}">
-                <a16:creationId xmlns:a16="http://schemas.microsoft.com/office/drawing/2014/main" id="{B3F7E7DC-284A-4465-9E5F-05E8B147EE68}"/>
-              </a:ext>
-            </a:extLst>
-          </p:cNvPr>
-          <p:cNvSpPr/>
-          <p:nvPr/>
-        </p:nvSpPr>
-        <p:spPr>
-          <a:xfrm>
-            <a:off x="6460244" y="3251426"/>
-            <a:ext cx="277200" cy="277200"/>
-          </a:xfrm>
-          <a:prstGeom prst="ellipse">
-            <a:avLst/>
-          </a:prstGeom>
-          <a:noFill/>
-          <a:ln w="6350">
-            <a:solidFill>
-              <a:schemeClr val="tx1"/>
-            </a:solidFill>
-          </a:ln>
-        </p:spPr>
-        <p:style>
-          <a:lnRef idx="2">
-            <a:schemeClr val="accent1">
-              <a:shade val="50000"/>
-            </a:schemeClr>
-          </a:lnRef>
-          <a:fillRef idx="1">
-            <a:schemeClr val="accent1"/>
-          </a:fillRef>
-          <a:effectRef idx="0">
-            <a:schemeClr val="accent1"/>
-          </a:effectRef>
-          <a:fontRef idx="minor">
-            <a:schemeClr val="lt1"/>
-          </a:fontRef>
-        </p:style>
-        <p:txBody>
-          <a:bodyPr rtlCol="0" anchor="ctr"/>
-          <a:lstStyle/>
-          <a:p>
-            <a:pPr algn="ctr"/>
-            <a:r>
-              <a:rPr lang="de-DE" sz="1000"/>
-              <a:t>0,77 cm</a:t>
-            </a:r>
-          </a:p>
-        </p:txBody>
-      </p:sp>
-      <p:sp>
-        <p:nvSpPr>
-          <p:cNvPr id="24" name="Ellipse 23">
-            <a:extLst>
-              <a:ext uri="{FF2B5EF4-FFF2-40B4-BE49-F238E27FC236}">
-                <a16:creationId xmlns:a16="http://schemas.microsoft.com/office/drawing/2014/main" id="{C67ACEA0-4B1E-4FB9-9974-A7C7D6E69B5A}"/>
-              </a:ext>
-            </a:extLst>
-          </p:cNvPr>
-          <p:cNvSpPr/>
-          <p:nvPr/>
-        </p:nvSpPr>
-        <p:spPr>
-          <a:xfrm>
-            <a:off x="4590000" y="2200270"/>
-            <a:ext cx="277200" cy="277200"/>
-          </a:xfrm>
-          <a:prstGeom prst="ellipse">
-            <a:avLst/>
-          </a:prstGeom>
-          <a:noFill/>
-          <a:ln w="6350">
-            <a:solidFill>
-              <a:schemeClr val="tx1"/>
-            </a:solidFill>
-          </a:ln>
-        </p:spPr>
-        <p:style>
-          <a:lnRef idx="2">
-            <a:schemeClr val="accent1">
-              <a:shade val="50000"/>
-            </a:schemeClr>
-          </a:lnRef>
-          <a:fillRef idx="1">
-            <a:schemeClr val="accent1"/>
-          </a:fillRef>
-          <a:effectRef idx="0">
-            <a:schemeClr val="accent1"/>
-          </a:effectRef>
-          <a:fontRef idx="minor">
-            <a:schemeClr val="lt1"/>
-          </a:fontRef>
-        </p:style>
-        <p:txBody>
-          <a:bodyPr rtlCol="0" anchor="ctr"/>
-          <a:lstStyle/>
-          <a:p>
-            <a:pPr algn="ctr"/>
-            <a:endParaRPr lang="de-DE" sz="1000"/>
-          </a:p>
-        </p:txBody>
-      </p:sp>
-      <p:sp>
-        <p:nvSpPr>
-          <p:cNvPr id="25" name="Ellipse 24">
-            <a:extLst>
-              <a:ext uri="{FF2B5EF4-FFF2-40B4-BE49-F238E27FC236}">
-                <a16:creationId xmlns:a16="http://schemas.microsoft.com/office/drawing/2014/main" id="{357E5471-AD02-49B0-A554-F230B748C270}"/>
-              </a:ext>
-            </a:extLst>
-          </p:cNvPr>
-          <p:cNvSpPr/>
-          <p:nvPr/>
-        </p:nvSpPr>
-        <p:spPr>
-          <a:xfrm>
-            <a:off x="4595674" y="3251426"/>
-            <a:ext cx="277200" cy="277200"/>
-          </a:xfrm>
-          <a:prstGeom prst="ellipse">
-            <a:avLst/>
-          </a:prstGeom>
-          <a:noFill/>
-          <a:ln w="6350">
-            <a:solidFill>
-              <a:schemeClr val="tx1"/>
-            </a:solidFill>
-          </a:ln>
-        </p:spPr>
-        <p:style>
-          <a:lnRef idx="2">
-            <a:schemeClr val="accent1">
-              <a:shade val="50000"/>
-            </a:schemeClr>
-          </a:lnRef>
-          <a:fillRef idx="1">
-            <a:schemeClr val="accent1"/>
-          </a:fillRef>
-          <a:effectRef idx="0">
-            <a:schemeClr val="accent1"/>
-          </a:effectRef>
-          <a:fontRef idx="minor">
-            <a:schemeClr val="lt1"/>
-          </a:fontRef>
-        </p:style>
-        <p:txBody>
-          <a:bodyPr rtlCol="0" anchor="ctr"/>
-          <a:lstStyle/>
-          <a:p>
-            <a:pPr algn="ctr"/>
-            <a:endParaRPr lang="de-DE" sz="1000"/>
-          </a:p>
-        </p:txBody>
-      </p:sp>
-      <p:sp>
-        <p:nvSpPr>
-          <p:cNvPr id="26" name="Ellipse 25">
-            <a:extLst>
-              <a:ext uri="{FF2B5EF4-FFF2-40B4-BE49-F238E27FC236}">
-                <a16:creationId xmlns:a16="http://schemas.microsoft.com/office/drawing/2014/main" id="{D69B637A-8CB4-4424-B56D-487560CF6B4D}"/>
-              </a:ext>
-            </a:extLst>
-          </p:cNvPr>
-          <p:cNvSpPr/>
-          <p:nvPr/>
-        </p:nvSpPr>
-        <p:spPr>
-          <a:xfrm>
-            <a:off x="5385600" y="4627800"/>
-            <a:ext cx="568800" cy="568800"/>
-          </a:xfrm>
-          <a:prstGeom prst="ellipse">
-            <a:avLst/>
-          </a:prstGeom>
-          <a:noFill/>
-          <a:ln w="6350">
-            <a:solidFill>
-              <a:schemeClr val="tx1"/>
-            </a:solidFill>
-          </a:ln>
-        </p:spPr>
-        <p:style>
-          <a:lnRef idx="2">
-            <a:schemeClr val="accent1">
-              <a:shade val="50000"/>
-            </a:schemeClr>
-          </a:lnRef>
-          <a:fillRef idx="1">
-            <a:schemeClr val="accent1"/>
-          </a:fillRef>
-          <a:effectRef idx="0">
-            <a:schemeClr val="accent1"/>
-          </a:effectRef>
-          <a:fontRef idx="minor">
-            <a:schemeClr val="lt1"/>
-          </a:fontRef>
-        </p:style>
-        <p:txBody>
-          <a:bodyPr rtlCol="0" anchor="ctr"/>
-          <a:lstStyle/>
-          <a:p>
-            <a:pPr algn="ctr"/>
-            <a:r>
-              <a:rPr lang="de-DE" sz="1000"/>
-              <a:t>0,77 cm</a:t>
-            </a:r>
-          </a:p>
-        </p:txBody>
-      </p:sp>
-      <p:pic>
-        <p:nvPicPr>
-          <p:cNvPr id="27" name="Grafik 26">
-            <a:extLst>
-              <a:ext uri="{FF2B5EF4-FFF2-40B4-BE49-F238E27FC236}">
-                <a16:creationId xmlns:a16="http://schemas.microsoft.com/office/drawing/2014/main" id="{C20E56B6-FDFC-43A5-B0DC-AC177F2D45CB}"/>
-              </a:ext>
-            </a:extLst>
-          </p:cNvPr>
-          <p:cNvPicPr>
-            <a:picLocks noChangeAspect="1"/>
-          </p:cNvPicPr>
-          <p:nvPr/>
-        </p:nvPicPr>
-        <p:blipFill>
-          <a:blip r:embed="rId2">
-            <a:extLst>
-              <a:ext uri="{28A0092B-C50C-407E-A947-70E740481C1C}">
-                <a14:useLocalDpi xmlns:a14="http://schemas.microsoft.com/office/drawing/2010/main" val="0"/>
-              </a:ext>
-            </a:extLst>
-          </a:blip>
-          <a:stretch>
-            <a:fillRect/>
-          </a:stretch>
-        </p:blipFill>
-        <p:spPr>
-          <a:xfrm>
-            <a:off x="5172799" y="2369974"/>
-            <a:ext cx="990977" cy="1020052"/>
-          </a:xfrm>
-          <a:prstGeom prst="rect">
-            <a:avLst/>
-          </a:prstGeom>
-        </p:spPr>
-      </p:pic>
-      <p:sp>
-        <p:nvSpPr>
-          <p:cNvPr id="30" name="Textfeld 29">
-            <a:extLst>
-              <a:ext uri="{FF2B5EF4-FFF2-40B4-BE49-F238E27FC236}">
-                <a16:creationId xmlns:a16="http://schemas.microsoft.com/office/drawing/2014/main" id="{C2F8B601-5508-4B93-8553-7D4909D66446}"/>
-              </a:ext>
-            </a:extLst>
-          </p:cNvPr>
-          <p:cNvSpPr txBox="1"/>
-          <p:nvPr/>
-        </p:nvSpPr>
-        <p:spPr>
-          <a:xfrm>
-            <a:off x="5514095" y="1288413"/>
-            <a:ext cx="301686" cy="369332"/>
-          </a:xfrm>
-          <a:prstGeom prst="rect">
-            <a:avLst/>
-          </a:prstGeom>
-          <a:noFill/>
-        </p:spPr>
-        <p:txBody>
-          <a:bodyPr wrap="none" rtlCol="0">
-            <a:spAutoFit/>
-          </a:bodyPr>
-          <a:lstStyle/>
           <a:p>
             <a:r>
               <a:rPr lang="de-DE"/>
-              <a:t>6</a:t>
-            </a:r>
-          </a:p>
-        </p:txBody>
-      </p:sp>
-      <p:sp>
-        <p:nvSpPr>
-          <p:cNvPr id="31" name="Textfeld 30">
-            <a:extLst>
-              <a:ext uri="{FF2B5EF4-FFF2-40B4-BE49-F238E27FC236}">
-                <a16:creationId xmlns:a16="http://schemas.microsoft.com/office/drawing/2014/main" id="{67462E24-93CC-49C5-B963-A6AD3BA31EE3}"/>
-              </a:ext>
-            </a:extLst>
-          </p:cNvPr>
-          <p:cNvSpPr txBox="1"/>
-          <p:nvPr/>
-        </p:nvSpPr>
-        <p:spPr>
-          <a:xfrm>
-            <a:off x="5535916" y="4080128"/>
-            <a:ext cx="301686" cy="369332"/>
-          </a:xfrm>
-          <a:prstGeom prst="rect">
-            <a:avLst/>
-          </a:prstGeom>
-          <a:noFill/>
-        </p:spPr>
-        <p:txBody>
-          <a:bodyPr wrap="none" rtlCol="0">
-            <a:spAutoFit/>
-          </a:bodyPr>
-          <a:lstStyle/>
-          <a:p>
-            <a:r>
-              <a:rPr lang="de-DE"/>
-              <a:t>1</a:t>
-            </a:r>
-          </a:p>
-        </p:txBody>
-      </p:sp>
-      <p:sp>
-        <p:nvSpPr>
-          <p:cNvPr id="32" name="Textfeld 31">
-            <a:extLst>
-              <a:ext uri="{FF2B5EF4-FFF2-40B4-BE49-F238E27FC236}">
-                <a16:creationId xmlns:a16="http://schemas.microsoft.com/office/drawing/2014/main" id="{5FAB3BBC-4581-4F10-8B29-E2371696E1DA}"/>
-              </a:ext>
-            </a:extLst>
-          </p:cNvPr>
-          <p:cNvSpPr txBox="1"/>
-          <p:nvPr/>
-        </p:nvSpPr>
-        <p:spPr>
-          <a:xfrm>
-            <a:off x="6783965" y="1967068"/>
-            <a:ext cx="301686" cy="369332"/>
-          </a:xfrm>
-          <a:prstGeom prst="rect">
-            <a:avLst/>
-          </a:prstGeom>
-          <a:noFill/>
-        </p:spPr>
-        <p:txBody>
-          <a:bodyPr wrap="none" rtlCol="0">
-            <a:spAutoFit/>
-          </a:bodyPr>
-          <a:lstStyle/>
-          <a:p>
-            <a:r>
-              <a:rPr lang="de-DE"/>
-              <a:t>3</a:t>
-            </a:r>
-          </a:p>
-        </p:txBody>
-      </p:sp>
-      <p:sp>
-        <p:nvSpPr>
-          <p:cNvPr id="33" name="Textfeld 32">
-            <a:extLst>
-              <a:ext uri="{FF2B5EF4-FFF2-40B4-BE49-F238E27FC236}">
-                <a16:creationId xmlns:a16="http://schemas.microsoft.com/office/drawing/2014/main" id="{A05DB1F1-81E2-4D6B-81F4-DACD1D8D7ADB}"/>
-              </a:ext>
-            </a:extLst>
-          </p:cNvPr>
-          <p:cNvSpPr txBox="1"/>
-          <p:nvPr/>
-        </p:nvSpPr>
-        <p:spPr>
-          <a:xfrm>
-            <a:off x="4262577" y="3430962"/>
-            <a:ext cx="301686" cy="369332"/>
-          </a:xfrm>
-          <a:prstGeom prst="rect">
-            <a:avLst/>
-          </a:prstGeom>
-          <a:noFill/>
-        </p:spPr>
-        <p:txBody>
-          <a:bodyPr wrap="none" rtlCol="0">
-            <a:spAutoFit/>
-          </a:bodyPr>
-          <a:lstStyle/>
-          <a:p>
-            <a:r>
-              <a:rPr lang="de-DE"/>
-              <a:t>4</a:t>
-            </a:r>
-          </a:p>
-        </p:txBody>
-      </p:sp>
-      <p:sp>
-        <p:nvSpPr>
-          <p:cNvPr id="34" name="Textfeld 33">
-            <a:extLst>
-              <a:ext uri="{FF2B5EF4-FFF2-40B4-BE49-F238E27FC236}">
-                <a16:creationId xmlns:a16="http://schemas.microsoft.com/office/drawing/2014/main" id="{663F8590-FCA1-4871-ADE4-2414479996E8}"/>
-              </a:ext>
-            </a:extLst>
-          </p:cNvPr>
-          <p:cNvSpPr txBox="1"/>
-          <p:nvPr/>
-        </p:nvSpPr>
-        <p:spPr>
-          <a:xfrm>
-            <a:off x="4262577" y="1967068"/>
-            <a:ext cx="301686" cy="369332"/>
-          </a:xfrm>
-          <a:prstGeom prst="rect">
-            <a:avLst/>
-          </a:prstGeom>
-          <a:noFill/>
-        </p:spPr>
-        <p:txBody>
-          <a:bodyPr wrap="none" rtlCol="0">
-            <a:spAutoFit/>
-          </a:bodyPr>
-          <a:lstStyle/>
-          <a:p>
-            <a:r>
-              <a:rPr lang="de-DE"/>
-              <a:t>2</a:t>
-            </a:r>
-          </a:p>
-        </p:txBody>
-      </p:sp>
-      <p:sp>
-        <p:nvSpPr>
-          <p:cNvPr id="35" name="Textfeld 34">
-            <a:extLst>
-              <a:ext uri="{FF2B5EF4-FFF2-40B4-BE49-F238E27FC236}">
-                <a16:creationId xmlns:a16="http://schemas.microsoft.com/office/drawing/2014/main" id="{C9875D0B-FB91-4FB6-9C67-6E77682BDA88}"/>
-              </a:ext>
-            </a:extLst>
-          </p:cNvPr>
-          <p:cNvSpPr txBox="1"/>
-          <p:nvPr/>
-        </p:nvSpPr>
-        <p:spPr>
-          <a:xfrm>
-            <a:off x="6783965" y="3430962"/>
-            <a:ext cx="301686" cy="369332"/>
-          </a:xfrm>
-          <a:prstGeom prst="rect">
-            <a:avLst/>
-          </a:prstGeom>
-          <a:noFill/>
-        </p:spPr>
-        <p:txBody>
-          <a:bodyPr wrap="none" rtlCol="0">
-            <a:spAutoFit/>
-          </a:bodyPr>
-          <a:lstStyle/>
-          <a:p>
-            <a:r>
-              <a:rPr lang="de-DE"/>
-              <a:t>5</a:t>
-            </a:r>
-          </a:p>
-        </p:txBody>
-      </p:sp>
-      <p:sp>
-        <p:nvSpPr>
-          <p:cNvPr id="38" name="Ellipse 37">
-            <a:extLst>
-              <a:ext uri="{FF2B5EF4-FFF2-40B4-BE49-F238E27FC236}">
-                <a16:creationId xmlns:a16="http://schemas.microsoft.com/office/drawing/2014/main" id="{E2B53078-64AE-46A7-909B-9CA3E0525E5A}"/>
-              </a:ext>
-            </a:extLst>
-          </p:cNvPr>
-          <p:cNvSpPr/>
-          <p:nvPr/>
-        </p:nvSpPr>
-        <p:spPr>
-          <a:xfrm>
-            <a:off x="4318287" y="1530000"/>
-            <a:ext cx="2700000" cy="2700000"/>
-          </a:xfrm>
-          <a:prstGeom prst="ellipse">
-            <a:avLst/>
-          </a:prstGeom>
-          <a:noFill/>
-          <a:ln w="15875">
-            <a:noFill/>
-          </a:ln>
-        </p:spPr>
-        <p:style>
-          <a:lnRef idx="2">
-            <a:schemeClr val="accent1">
-              <a:shade val="50000"/>
-            </a:schemeClr>
-          </a:lnRef>
-          <a:fillRef idx="1">
-            <a:schemeClr val="accent1"/>
-          </a:fillRef>
-          <a:effectRef idx="0">
-            <a:schemeClr val="accent1"/>
-          </a:effectRef>
-          <a:fontRef idx="minor">
-            <a:schemeClr val="lt1"/>
-          </a:fontRef>
-        </p:style>
-        <p:txBody>
-          <a:bodyPr rtlCol="0" anchor="ctr"/>
-          <a:lstStyle/>
-          <a:p>
-            <a:pPr algn="ctr"/>
-            <a:endParaRPr lang="de-DE"/>
+              <a:t>Numpad Eingabe : es wird gewürfelt und bei Treffer entsprechend honoriert</a:t>
+            </a:r>
           </a:p>
         </p:txBody>
       </p:sp>
     </p:spTree>
     <p:extLst>
       <p:ext uri="{BB962C8B-B14F-4D97-AF65-F5344CB8AC3E}">
-        <p14:creationId xmlns:p14="http://schemas.microsoft.com/office/powerpoint/2010/main" val="1334854503"/>
+        <p14:creationId xmlns:p14="http://schemas.microsoft.com/office/powerpoint/2010/main" val="3256396526"/>
       </p:ext>
     </p:extLst>
   </p:cSld>
@@ -28342,7 +28148,7 @@
           <p:cNvPr id="2" name="Titel 1">
             <a:extLst>
               <a:ext uri="{FF2B5EF4-FFF2-40B4-BE49-F238E27FC236}">
-                <a16:creationId xmlns:a16="http://schemas.microsoft.com/office/drawing/2014/main" id="{958251AF-2378-46D7-8F36-63315088C003}"/>
+                <a16:creationId xmlns:a16="http://schemas.microsoft.com/office/drawing/2014/main" id="{009294B0-BCA9-4658-B01F-4A948A05F5E0}"/>
               </a:ext>
             </a:extLst>
           </p:cNvPr>
@@ -28360,90 +28166,17 @@
           <a:p>
             <a:r>
               <a:rPr lang="de-DE"/>
-              <a:t>Lingo Bingo Frame</a:t>
+              <a:t>Lingo Bingo Controls</a:t>
             </a:r>
           </a:p>
         </p:txBody>
       </p:sp>
       <p:sp>
         <p:nvSpPr>
-          <p:cNvPr id="3" name="Textfeld 2">
-            <a:extLst>
-              <a:ext uri="{FF2B5EF4-FFF2-40B4-BE49-F238E27FC236}">
-                <a16:creationId xmlns:a16="http://schemas.microsoft.com/office/drawing/2014/main" id="{5C1259D2-9E72-4ADB-AF59-4F642214D412}"/>
-              </a:ext>
-            </a:extLst>
-          </p:cNvPr>
-          <p:cNvSpPr txBox="1"/>
-          <p:nvPr/>
-        </p:nvSpPr>
-        <p:spPr>
-          <a:xfrm>
-            <a:off x="628072" y="1163127"/>
-            <a:ext cx="1377300" cy="938719"/>
-          </a:xfrm>
-          <a:prstGeom prst="rect">
-            <a:avLst/>
-          </a:prstGeom>
-          <a:noFill/>
-        </p:spPr>
-        <p:txBody>
-          <a:bodyPr wrap="none" rtlCol="0">
-            <a:spAutoFit/>
-          </a:bodyPr>
-          <a:lstStyle/>
-          <a:p>
-            <a:r>
-              <a:rPr lang="de-DE" sz="1100" b="1"/>
-              <a:t>Frame</a:t>
-            </a:r>
-            <a:endParaRPr lang="de-DE" sz="1100"/>
-          </a:p>
-          <a:p>
-            <a:pPr marL="171450" indent="-171450">
-              <a:buFontTx/>
-              <a:buChar char="-"/>
-            </a:pPr>
-            <a:r>
-              <a:rPr lang="de-DE" sz="1100"/>
-              <a:t>außen : 136 x 156</a:t>
-            </a:r>
-          </a:p>
-          <a:p>
-            <a:pPr marL="171450" indent="-171450">
-              <a:buFontTx/>
-              <a:buChar char="-"/>
-            </a:pPr>
-            <a:r>
-              <a:rPr lang="de-DE" sz="1100"/>
-              <a:t>innen : 100 x 120</a:t>
-            </a:r>
-          </a:p>
-          <a:p>
-            <a:pPr marL="171450" indent="-171450">
-              <a:buFontTx/>
-              <a:buChar char="-"/>
-            </a:pPr>
-            <a:r>
-              <a:rPr lang="de-DE" sz="1100"/>
-              <a:t>Rand : 18</a:t>
-            </a:r>
-          </a:p>
-          <a:p>
-            <a:pPr marL="171450" indent="-171450">
-              <a:buFontTx/>
-              <a:buChar char="-"/>
-            </a:pPr>
-            <a:endParaRPr lang="de-DE" sz="1100"/>
-          </a:p>
-        </p:txBody>
-      </p:sp>
-      <p:sp>
-        <p:nvSpPr>
-          <p:cNvPr id="4" name="Rechteck 3">
-            <a:extLst>
-              <a:ext uri="{FF2B5EF4-FFF2-40B4-BE49-F238E27FC236}">
-                <a16:creationId xmlns:a16="http://schemas.microsoft.com/office/drawing/2014/main" id="{186257AF-5B2C-4B7D-96A4-8B463888E337}"/>
+          <p:cNvPr id="3" name="Rechteck 2">
+            <a:extLst>
+              <a:ext uri="{FF2B5EF4-FFF2-40B4-BE49-F238E27FC236}">
+                <a16:creationId xmlns:a16="http://schemas.microsoft.com/office/drawing/2014/main" id="{8C81D91A-1930-4505-82E8-656199E88503}"/>
               </a:ext>
             </a:extLst>
           </p:cNvPr>
@@ -28453,368 +28186,7 @@
         <p:spPr>
           <a:xfrm>
             <a:off x="3600000" y="1080000"/>
-            <a:ext cx="4896000" cy="5616000"/>
-          </a:xfrm>
-          <a:prstGeom prst="rect">
-            <a:avLst/>
-          </a:prstGeom>
-          <a:noFill/>
-          <a:ln w="3175">
-            <a:solidFill>
-              <a:schemeClr val="tx1"/>
-            </a:solidFill>
-          </a:ln>
-        </p:spPr>
-        <p:style>
-          <a:lnRef idx="2">
-            <a:schemeClr val="accent1"/>
-          </a:lnRef>
-          <a:fillRef idx="1">
-            <a:schemeClr val="lt1"/>
-          </a:fillRef>
-          <a:effectRef idx="0">
-            <a:schemeClr val="accent1"/>
-          </a:effectRef>
-          <a:fontRef idx="minor">
-            <a:schemeClr val="dk1"/>
-          </a:fontRef>
-        </p:style>
-        <p:txBody>
-          <a:bodyPr rtlCol="0" anchor="ctr"/>
-          <a:lstStyle/>
-          <a:p>
-            <a:pPr algn="ctr"/>
-            <a:endParaRPr lang="de-DE"/>
-          </a:p>
-        </p:txBody>
-      </p:sp>
-      <p:sp>
-        <p:nvSpPr>
-          <p:cNvPr id="5" name="Rechteck 4">
-            <a:extLst>
-              <a:ext uri="{FF2B5EF4-FFF2-40B4-BE49-F238E27FC236}">
-                <a16:creationId xmlns:a16="http://schemas.microsoft.com/office/drawing/2014/main" id="{A95B5C97-CCC5-42BE-A446-5AD71737C0C6}"/>
-              </a:ext>
-            </a:extLst>
-          </p:cNvPr>
-          <p:cNvSpPr/>
-          <p:nvPr/>
-        </p:nvSpPr>
-        <p:spPr>
-          <a:xfrm>
-            <a:off x="4248000" y="1728000"/>
-            <a:ext cx="3600000" cy="4320000"/>
-          </a:xfrm>
-          <a:prstGeom prst="rect">
-            <a:avLst/>
-          </a:prstGeom>
-          <a:noFill/>
-          <a:ln w="3175">
-            <a:solidFill>
-              <a:schemeClr val="tx1"/>
-            </a:solidFill>
-          </a:ln>
-        </p:spPr>
-        <p:style>
-          <a:lnRef idx="2">
-            <a:schemeClr val="accent1"/>
-          </a:lnRef>
-          <a:fillRef idx="1">
-            <a:schemeClr val="lt1"/>
-          </a:fillRef>
-          <a:effectRef idx="0">
-            <a:schemeClr val="accent1"/>
-          </a:effectRef>
-          <a:fontRef idx="minor">
-            <a:schemeClr val="dk1"/>
-          </a:fontRef>
-        </p:style>
-        <p:txBody>
-          <a:bodyPr rtlCol="0" anchor="ctr"/>
-          <a:lstStyle/>
-          <a:p>
-            <a:pPr algn="ctr"/>
-            <a:endParaRPr lang="de-DE"/>
-          </a:p>
-        </p:txBody>
-      </p:sp>
-      <p:sp>
-        <p:nvSpPr>
-          <p:cNvPr id="6" name="Textfeld 5">
-            <a:extLst>
-              <a:ext uri="{FF2B5EF4-FFF2-40B4-BE49-F238E27FC236}">
-                <a16:creationId xmlns:a16="http://schemas.microsoft.com/office/drawing/2014/main" id="{A682F45B-985B-409B-9268-75919B256BD7}"/>
-              </a:ext>
-            </a:extLst>
-          </p:cNvPr>
-          <p:cNvSpPr txBox="1"/>
-          <p:nvPr/>
-        </p:nvSpPr>
-        <p:spPr>
-          <a:xfrm>
-            <a:off x="4984020" y="1204780"/>
-            <a:ext cx="1595309" cy="523220"/>
-          </a:xfrm>
-          <a:prstGeom prst="rect">
-            <a:avLst/>
-          </a:prstGeom>
-          <a:noFill/>
-        </p:spPr>
-        <p:txBody>
-          <a:bodyPr wrap="none" rtlCol="0">
-            <a:spAutoFit/>
-          </a:bodyPr>
-          <a:lstStyle/>
-          <a:p>
-            <a:r>
-              <a:rPr lang="de-DE" sz="2800">
-                <a:latin typeface="Henny Penny" panose="02000505000000020004" pitchFamily="2" charset="0"/>
-              </a:rPr>
-              <a:t>Fizz Bizz</a:t>
-            </a:r>
-          </a:p>
-        </p:txBody>
-      </p:sp>
-      <p:pic>
-        <p:nvPicPr>
-          <p:cNvPr id="7" name="Grafik 6">
-            <a:extLst>
-              <a:ext uri="{FF2B5EF4-FFF2-40B4-BE49-F238E27FC236}">
-                <a16:creationId xmlns:a16="http://schemas.microsoft.com/office/drawing/2014/main" id="{54C102AA-979B-47B0-83C9-5FF96AF33A37}"/>
-              </a:ext>
-            </a:extLst>
-          </p:cNvPr>
-          <p:cNvPicPr>
-            <a:picLocks noChangeAspect="1"/>
-          </p:cNvPicPr>
-          <p:nvPr/>
-        </p:nvPicPr>
-        <p:blipFill>
-          <a:blip r:embed="rId2">
-            <a:extLst>
-              <a:ext uri="{28A0092B-C50C-407E-A947-70E740481C1C}">
-                <a14:useLocalDpi xmlns:a14="http://schemas.microsoft.com/office/drawing/2010/main" val="0"/>
-              </a:ext>
-            </a:extLst>
-          </a:blip>
-          <a:stretch>
-            <a:fillRect/>
-          </a:stretch>
-        </p:blipFill>
-        <p:spPr>
-          <a:xfrm>
-            <a:off x="7999551" y="1858620"/>
-            <a:ext cx="342000" cy="787218"/>
-          </a:xfrm>
-          <a:prstGeom prst="rect">
-            <a:avLst/>
-          </a:prstGeom>
-        </p:spPr>
-      </p:pic>
-      <p:pic>
-        <p:nvPicPr>
-          <p:cNvPr id="8" name="Grafik 7">
-            <a:extLst>
-              <a:ext uri="{FF2B5EF4-FFF2-40B4-BE49-F238E27FC236}">
-                <a16:creationId xmlns:a16="http://schemas.microsoft.com/office/drawing/2014/main" id="{D2DC5EA9-3A3F-4624-9047-CBC1F03614D2}"/>
-              </a:ext>
-            </a:extLst>
-          </p:cNvPr>
-          <p:cNvPicPr>
-            <a:picLocks noChangeAspect="1"/>
-          </p:cNvPicPr>
-          <p:nvPr/>
-        </p:nvPicPr>
-        <p:blipFill>
-          <a:blip r:embed="rId2">
-            <a:extLst>
-              <a:ext uri="{28A0092B-C50C-407E-A947-70E740481C1C}">
-                <a14:useLocalDpi xmlns:a14="http://schemas.microsoft.com/office/drawing/2010/main" val="0"/>
-              </a:ext>
-            </a:extLst>
-          </a:blip>
-          <a:stretch>
-            <a:fillRect/>
-          </a:stretch>
-        </p:blipFill>
-        <p:spPr>
-          <a:xfrm flipH="1">
-            <a:off x="3725514" y="1826707"/>
-            <a:ext cx="342000" cy="787218"/>
-          </a:xfrm>
-          <a:prstGeom prst="rect">
-            <a:avLst/>
-          </a:prstGeom>
-        </p:spPr>
-      </p:pic>
-      <p:pic>
-        <p:nvPicPr>
-          <p:cNvPr id="9" name="Grafik 8">
-            <a:extLst>
-              <a:ext uri="{FF2B5EF4-FFF2-40B4-BE49-F238E27FC236}">
-                <a16:creationId xmlns:a16="http://schemas.microsoft.com/office/drawing/2014/main" id="{1ADE3CB4-EC28-4634-96E5-026502F47903}"/>
-              </a:ext>
-            </a:extLst>
-          </p:cNvPr>
-          <p:cNvPicPr>
-            <a:picLocks noChangeAspect="1"/>
-          </p:cNvPicPr>
-          <p:nvPr/>
-        </p:nvPicPr>
-        <p:blipFill>
-          <a:blip r:embed="rId3">
-            <a:extLst>
-              <a:ext uri="{28A0092B-C50C-407E-A947-70E740481C1C}">
-                <a14:useLocalDpi xmlns:a14="http://schemas.microsoft.com/office/drawing/2010/main" val="0"/>
-              </a:ext>
-            </a:extLst>
-          </a:blip>
-          <a:stretch>
-            <a:fillRect/>
-          </a:stretch>
-        </p:blipFill>
-        <p:spPr>
-          <a:xfrm flipH="1">
-            <a:off x="7256635" y="6168215"/>
-            <a:ext cx="349738" cy="360000"/>
-          </a:xfrm>
-          <a:prstGeom prst="rect">
-            <a:avLst/>
-          </a:prstGeom>
-        </p:spPr>
-      </p:pic>
-      <p:pic>
-        <p:nvPicPr>
-          <p:cNvPr id="10" name="Grafik 9">
-            <a:extLst>
-              <a:ext uri="{FF2B5EF4-FFF2-40B4-BE49-F238E27FC236}">
-                <a16:creationId xmlns:a16="http://schemas.microsoft.com/office/drawing/2014/main" id="{CE81E583-3803-41D2-8F91-3F3FDF662ACB}"/>
-              </a:ext>
-            </a:extLst>
-          </p:cNvPr>
-          <p:cNvPicPr>
-            <a:picLocks noChangeAspect="1"/>
-          </p:cNvPicPr>
-          <p:nvPr/>
-        </p:nvPicPr>
-        <p:blipFill>
-          <a:blip r:embed="rId4">
-            <a:extLst>
-              <a:ext uri="{28A0092B-C50C-407E-A947-70E740481C1C}">
-                <a14:useLocalDpi xmlns:a14="http://schemas.microsoft.com/office/drawing/2010/main" val="0"/>
-              </a:ext>
-            </a:extLst>
-          </a:blip>
-          <a:stretch>
-            <a:fillRect/>
-          </a:stretch>
-        </p:blipFill>
-        <p:spPr>
-          <a:xfrm rot="9697007">
-            <a:off x="3790362" y="3234043"/>
-            <a:ext cx="342000" cy="660892"/>
-          </a:xfrm>
-          <a:prstGeom prst="rect">
-            <a:avLst/>
-          </a:prstGeom>
-        </p:spPr>
-      </p:pic>
-      <p:pic>
-        <p:nvPicPr>
-          <p:cNvPr id="11" name="Grafik 10">
-            <a:extLst>
-              <a:ext uri="{FF2B5EF4-FFF2-40B4-BE49-F238E27FC236}">
-                <a16:creationId xmlns:a16="http://schemas.microsoft.com/office/drawing/2014/main" id="{6AE5E9AC-5542-4D6D-B9DE-EE2227502F0B}"/>
-              </a:ext>
-            </a:extLst>
-          </p:cNvPr>
-          <p:cNvPicPr>
-            <a:picLocks noChangeAspect="1"/>
-          </p:cNvPicPr>
-          <p:nvPr/>
-        </p:nvPicPr>
-        <p:blipFill>
-          <a:blip r:embed="rId4">
-            <a:extLst>
-              <a:ext uri="{28A0092B-C50C-407E-A947-70E740481C1C}">
-                <a14:useLocalDpi xmlns:a14="http://schemas.microsoft.com/office/drawing/2010/main" val="0"/>
-              </a:ext>
-            </a:extLst>
-          </a:blip>
-          <a:stretch>
-            <a:fillRect/>
-          </a:stretch>
-        </p:blipFill>
-        <p:spPr>
-          <a:xfrm rot="11902993" flipH="1">
-            <a:off x="8011606" y="2745596"/>
-            <a:ext cx="342000" cy="660892"/>
-          </a:xfrm>
-          <a:prstGeom prst="rect">
-            <a:avLst/>
-          </a:prstGeom>
-        </p:spPr>
-      </p:pic>
-      <p:sp>
-        <p:nvSpPr>
-          <p:cNvPr id="12" name="Textfeld 11">
-            <a:extLst>
-              <a:ext uri="{FF2B5EF4-FFF2-40B4-BE49-F238E27FC236}">
-                <a16:creationId xmlns:a16="http://schemas.microsoft.com/office/drawing/2014/main" id="{68ECE7BD-5C24-4FCA-B231-F3FD8CD1E503}"/>
-              </a:ext>
-            </a:extLst>
-          </p:cNvPr>
-          <p:cNvSpPr txBox="1"/>
-          <p:nvPr/>
-        </p:nvSpPr>
-        <p:spPr>
-          <a:xfrm>
-            <a:off x="5256995" y="6148160"/>
-            <a:ext cx="1606530" cy="400110"/>
-          </a:xfrm>
-          <a:prstGeom prst="rect">
-            <a:avLst/>
-          </a:prstGeom>
-          <a:noFill/>
-        </p:spPr>
-        <p:txBody>
-          <a:bodyPr wrap="none" rtlCol="0">
-            <a:spAutoFit/>
-          </a:bodyPr>
-          <a:lstStyle>
-            <a:defPPr>
-              <a:defRPr lang="de-DE"/>
-            </a:defPPr>
-            <a:lvl1pPr>
-              <a:defRPr sz="2800">
-                <a:latin typeface="Henny Penny" panose="02000505000000020004" pitchFamily="2" charset="0"/>
-              </a:defRPr>
-            </a:lvl1pPr>
-          </a:lstStyle>
-          <a:p>
-            <a:r>
-              <a:rPr lang="de-DE" sz="2000"/>
-              <a:t>Lingo Bingo</a:t>
-            </a:r>
-          </a:p>
-        </p:txBody>
-      </p:sp>
-      <p:sp>
-        <p:nvSpPr>
-          <p:cNvPr id="14" name="Rechteck 13">
-            <a:extLst>
-              <a:ext uri="{FF2B5EF4-FFF2-40B4-BE49-F238E27FC236}">
-                <a16:creationId xmlns:a16="http://schemas.microsoft.com/office/drawing/2014/main" id="{F16FEBEB-2E04-42D9-8737-9D68507FBB75}"/>
-              </a:ext>
-            </a:extLst>
-          </p:cNvPr>
-          <p:cNvSpPr/>
-          <p:nvPr/>
-        </p:nvSpPr>
-        <p:spPr>
-          <a:xfrm>
-            <a:off x="3600000" y="1080000"/>
-            <a:ext cx="18000" cy="18000"/>
+            <a:ext cx="73891" cy="83127"/>
           </a:xfrm>
           <a:prstGeom prst="rect">
             <a:avLst/>
@@ -28847,10 +28219,10 @@
       </p:sp>
       <p:sp>
         <p:nvSpPr>
-          <p:cNvPr id="15" name="Rechteck 14">
-            <a:extLst>
-              <a:ext uri="{FF2B5EF4-FFF2-40B4-BE49-F238E27FC236}">
-                <a16:creationId xmlns:a16="http://schemas.microsoft.com/office/drawing/2014/main" id="{B2542AA7-00D5-47BD-BAD9-9F331FCA7234}"/>
+          <p:cNvPr id="4" name="Rechteck 3">
+            <a:extLst>
+              <a:ext uri="{FF2B5EF4-FFF2-40B4-BE49-F238E27FC236}">
+                <a16:creationId xmlns:a16="http://schemas.microsoft.com/office/drawing/2014/main" id="{B5767EED-AE32-4E4E-BE9D-CC7AE83284FE}"/>
               </a:ext>
             </a:extLst>
           </p:cNvPr>
@@ -28859,8 +28231,8 @@
         </p:nvSpPr>
         <p:spPr>
           <a:xfrm>
-            <a:off x="8478000" y="1071000"/>
-            <a:ext cx="18000" cy="18000"/>
+            <a:off x="7666109" y="1080000"/>
+            <a:ext cx="73891" cy="83127"/>
           </a:xfrm>
           <a:prstGeom prst="rect">
             <a:avLst/>
@@ -28893,10 +28265,10 @@
       </p:sp>
       <p:sp>
         <p:nvSpPr>
-          <p:cNvPr id="16" name="Rechteck 15">
-            <a:extLst>
-              <a:ext uri="{FF2B5EF4-FFF2-40B4-BE49-F238E27FC236}">
-                <a16:creationId xmlns:a16="http://schemas.microsoft.com/office/drawing/2014/main" id="{6BE1D3FC-6A8C-455B-B852-7BA46C4C0EF7}"/>
+          <p:cNvPr id="5" name="Rechteck 4">
+            <a:extLst>
+              <a:ext uri="{FF2B5EF4-FFF2-40B4-BE49-F238E27FC236}">
+                <a16:creationId xmlns:a16="http://schemas.microsoft.com/office/drawing/2014/main" id="{93A7AA4A-B9C6-49BF-9867-618EF6204099}"/>
               </a:ext>
             </a:extLst>
           </p:cNvPr>
@@ -28905,8 +28277,8 @@
         </p:nvSpPr>
         <p:spPr>
           <a:xfrm>
-            <a:off x="3609000" y="6674036"/>
-            <a:ext cx="18000" cy="18000"/>
+            <a:off x="3599999" y="5784872"/>
+            <a:ext cx="73891" cy="83127"/>
           </a:xfrm>
           <a:prstGeom prst="rect">
             <a:avLst/>
@@ -28939,10 +28311,10 @@
       </p:sp>
       <p:sp>
         <p:nvSpPr>
-          <p:cNvPr id="17" name="Rechteck 16">
-            <a:extLst>
-              <a:ext uri="{FF2B5EF4-FFF2-40B4-BE49-F238E27FC236}">
-                <a16:creationId xmlns:a16="http://schemas.microsoft.com/office/drawing/2014/main" id="{E35756E1-98A1-4E81-A36D-3563F350605C}"/>
+          <p:cNvPr id="6" name="Rechteck 5">
+            <a:extLst>
+              <a:ext uri="{FF2B5EF4-FFF2-40B4-BE49-F238E27FC236}">
+                <a16:creationId xmlns:a16="http://schemas.microsoft.com/office/drawing/2014/main" id="{506EC625-93E9-45E1-9439-0280E2F8361C}"/>
               </a:ext>
             </a:extLst>
           </p:cNvPr>
@@ -28951,8 +28323,8 @@
         </p:nvSpPr>
         <p:spPr>
           <a:xfrm>
-            <a:off x="8469000" y="6674036"/>
-            <a:ext cx="18000" cy="18000"/>
+            <a:off x="7666109" y="5784873"/>
+            <a:ext cx="73891" cy="83127"/>
           </a:xfrm>
           <a:prstGeom prst="rect">
             <a:avLst/>
@@ -28983,12 +28355,593 @@
           </a:p>
         </p:txBody>
       </p:sp>
+      <p:sp>
+        <p:nvSpPr>
+          <p:cNvPr id="7" name="Rechteck 6">
+            <a:extLst>
+              <a:ext uri="{FF2B5EF4-FFF2-40B4-BE49-F238E27FC236}">
+                <a16:creationId xmlns:a16="http://schemas.microsoft.com/office/drawing/2014/main" id="{57DA6A1E-307B-45CC-B50F-6D8205C3369E}"/>
+              </a:ext>
+            </a:extLst>
+          </p:cNvPr>
+          <p:cNvSpPr/>
+          <p:nvPr/>
+        </p:nvSpPr>
+        <p:spPr>
+          <a:xfrm>
+            <a:off x="3600000" y="1080000"/>
+            <a:ext cx="4140000" cy="4788000"/>
+          </a:xfrm>
+          <a:prstGeom prst="rect">
+            <a:avLst/>
+          </a:prstGeom>
+          <a:noFill/>
+          <a:ln>
+            <a:noFill/>
+          </a:ln>
+        </p:spPr>
+        <p:style>
+          <a:lnRef idx="2">
+            <a:schemeClr val="accent1">
+              <a:shade val="50000"/>
+            </a:schemeClr>
+          </a:lnRef>
+          <a:fillRef idx="1">
+            <a:schemeClr val="accent1"/>
+          </a:fillRef>
+          <a:effectRef idx="0">
+            <a:schemeClr val="accent1"/>
+          </a:effectRef>
+          <a:fontRef idx="minor">
+            <a:schemeClr val="lt1"/>
+          </a:fontRef>
+        </p:style>
+        <p:txBody>
+          <a:bodyPr rtlCol="0" anchor="ctr"/>
+          <a:lstStyle/>
+          <a:p>
+            <a:pPr algn="ctr"/>
+            <a:endParaRPr lang="de-DE"/>
+          </a:p>
+        </p:txBody>
+      </p:sp>
+      <p:sp>
+        <p:nvSpPr>
+          <p:cNvPr id="10" name="Textfeld 9">
+            <a:extLst>
+              <a:ext uri="{FF2B5EF4-FFF2-40B4-BE49-F238E27FC236}">
+                <a16:creationId xmlns:a16="http://schemas.microsoft.com/office/drawing/2014/main" id="{83E11A70-FC8F-4C60-AD38-45AFDA945A17}"/>
+              </a:ext>
+            </a:extLst>
+          </p:cNvPr>
+          <p:cNvSpPr txBox="1"/>
+          <p:nvPr/>
+        </p:nvSpPr>
+        <p:spPr>
+          <a:xfrm>
+            <a:off x="628072" y="1163127"/>
+            <a:ext cx="1481496" cy="1785104"/>
+          </a:xfrm>
+          <a:prstGeom prst="rect">
+            <a:avLst/>
+          </a:prstGeom>
+          <a:noFill/>
+        </p:spPr>
+        <p:txBody>
+          <a:bodyPr wrap="none" rtlCol="0">
+            <a:spAutoFit/>
+          </a:bodyPr>
+          <a:lstStyle/>
+          <a:p>
+            <a:r>
+              <a:rPr lang="de-DE" sz="1100" b="1"/>
+              <a:t>Panel</a:t>
+            </a:r>
+            <a:r>
+              <a:rPr lang="de-DE" sz="1100"/>
+              <a:t> </a:t>
+            </a:r>
+          </a:p>
+          <a:p>
+            <a:pPr marL="171450" indent="-171450">
+              <a:buFontTx/>
+              <a:buChar char="-"/>
+            </a:pPr>
+            <a:r>
+              <a:rPr lang="de-DE" sz="1100"/>
+              <a:t>inkl. nut : 115 x 133</a:t>
+            </a:r>
+          </a:p>
+          <a:p>
+            <a:pPr marL="171450" indent="-171450">
+              <a:buFontTx/>
+              <a:buChar char="-"/>
+            </a:pPr>
+            <a:r>
+              <a:rPr lang="de-DE" sz="1100"/>
+              <a:t>innen : 100 x 120</a:t>
+            </a:r>
+          </a:p>
+          <a:p>
+            <a:pPr marL="171450" indent="-171450">
+              <a:buFontTx/>
+              <a:buChar char="-"/>
+            </a:pPr>
+            <a:endParaRPr lang="de-DE" sz="1100"/>
+          </a:p>
+          <a:p>
+            <a:r>
+              <a:rPr lang="de-DE" sz="1100" b="1"/>
+              <a:t>LED Kreis</a:t>
+            </a:r>
+          </a:p>
+          <a:p>
+            <a:pPr marL="171450" indent="-171450">
+              <a:buFontTx/>
+              <a:buChar char="-"/>
+            </a:pPr>
+            <a:r>
+              <a:rPr lang="de-DE" sz="1100"/>
+              <a:t>von oben: 50</a:t>
+            </a:r>
+          </a:p>
+          <a:p>
+            <a:pPr marL="171450" indent="-171450">
+              <a:buFontTx/>
+              <a:buChar char="-"/>
+            </a:pPr>
+            <a:r>
+              <a:rPr lang="de-DE" sz="1100"/>
+              <a:t>Radius: 30</a:t>
+            </a:r>
+          </a:p>
+          <a:p>
+            <a:pPr marL="171450" indent="-171450">
+              <a:buFontTx/>
+              <a:buChar char="-"/>
+            </a:pPr>
+            <a:endParaRPr lang="de-DE" sz="1100"/>
+          </a:p>
+          <a:p>
+            <a:r>
+              <a:rPr lang="de-DE" sz="1100"/>
+              <a:t>Charging USB (links)</a:t>
+            </a:r>
+          </a:p>
+          <a:p>
+            <a:r>
+              <a:rPr lang="de-DE" sz="1100"/>
+              <a:t>- Links : </a:t>
+            </a:r>
+          </a:p>
+        </p:txBody>
+      </p:sp>
+      <p:sp>
+        <p:nvSpPr>
+          <p:cNvPr id="19" name="Ellipse 18">
+            <a:extLst>
+              <a:ext uri="{FF2B5EF4-FFF2-40B4-BE49-F238E27FC236}">
+                <a16:creationId xmlns:a16="http://schemas.microsoft.com/office/drawing/2014/main" id="{FE6BD11C-5FA5-4430-923E-AAA9C865BC6F}"/>
+              </a:ext>
+            </a:extLst>
+          </p:cNvPr>
+          <p:cNvSpPr/>
+          <p:nvPr/>
+        </p:nvSpPr>
+        <p:spPr>
+          <a:xfrm>
+            <a:off x="5535000" y="1661400"/>
+            <a:ext cx="277200" cy="277200"/>
+          </a:xfrm>
+          <a:prstGeom prst="ellipse">
+            <a:avLst/>
+          </a:prstGeom>
+          <a:noFill/>
+          <a:ln w="6350">
+            <a:solidFill>
+              <a:schemeClr val="tx1"/>
+            </a:solidFill>
+          </a:ln>
+        </p:spPr>
+        <p:style>
+          <a:lnRef idx="2">
+            <a:schemeClr val="accent1">
+              <a:shade val="50000"/>
+            </a:schemeClr>
+          </a:lnRef>
+          <a:fillRef idx="1">
+            <a:schemeClr val="accent1"/>
+          </a:fillRef>
+          <a:effectRef idx="0">
+            <a:schemeClr val="accent1"/>
+          </a:effectRef>
+          <a:fontRef idx="minor">
+            <a:schemeClr val="lt1"/>
+          </a:fontRef>
+        </p:style>
+        <p:txBody>
+          <a:bodyPr rtlCol="0" anchor="ctr"/>
+          <a:lstStyle/>
+          <a:p>
+            <a:pPr algn="ctr"/>
+            <a:endParaRPr lang="de-DE" sz="1000"/>
+          </a:p>
+        </p:txBody>
+      </p:sp>
+      <p:sp>
+        <p:nvSpPr>
+          <p:cNvPr id="8" name="Ellipse 7">
+            <a:extLst>
+              <a:ext uri="{FF2B5EF4-FFF2-40B4-BE49-F238E27FC236}">
+                <a16:creationId xmlns:a16="http://schemas.microsoft.com/office/drawing/2014/main" id="{29D12D2C-A941-4A97-9FCF-9FB67202BD27}"/>
+              </a:ext>
+            </a:extLst>
+          </p:cNvPr>
+          <p:cNvSpPr/>
+          <p:nvPr/>
+        </p:nvSpPr>
+        <p:spPr>
+          <a:xfrm>
+            <a:off x="4590000" y="1800000"/>
+            <a:ext cx="2160000" cy="2160000"/>
+          </a:xfrm>
+          <a:prstGeom prst="ellipse">
+            <a:avLst/>
+          </a:prstGeom>
+          <a:noFill/>
+          <a:ln w="15875">
+            <a:noFill/>
+          </a:ln>
+        </p:spPr>
+        <p:style>
+          <a:lnRef idx="2">
+            <a:schemeClr val="accent1">
+              <a:shade val="50000"/>
+            </a:schemeClr>
+          </a:lnRef>
+          <a:fillRef idx="1">
+            <a:schemeClr val="accent1"/>
+          </a:fillRef>
+          <a:effectRef idx="0">
+            <a:schemeClr val="accent1"/>
+          </a:effectRef>
+          <a:fontRef idx="minor">
+            <a:schemeClr val="lt1"/>
+          </a:fontRef>
+        </p:style>
+        <p:txBody>
+          <a:bodyPr rtlCol="0" anchor="ctr"/>
+          <a:lstStyle/>
+          <a:p>
+            <a:pPr algn="ctr"/>
+            <a:endParaRPr lang="de-DE"/>
+          </a:p>
+        </p:txBody>
+      </p:sp>
+      <p:sp>
+        <p:nvSpPr>
+          <p:cNvPr id="21" name="Ellipse 20">
+            <a:extLst>
+              <a:ext uri="{FF2B5EF4-FFF2-40B4-BE49-F238E27FC236}">
+                <a16:creationId xmlns:a16="http://schemas.microsoft.com/office/drawing/2014/main" id="{A2F97A1D-1DD0-4CE6-86EE-7C0AE2919C5E}"/>
+              </a:ext>
+            </a:extLst>
+          </p:cNvPr>
+          <p:cNvSpPr/>
+          <p:nvPr/>
+        </p:nvSpPr>
+        <p:spPr>
+          <a:xfrm>
+            <a:off x="5535000" y="3822530"/>
+            <a:ext cx="277200" cy="277200"/>
+          </a:xfrm>
+          <a:prstGeom prst="ellipse">
+            <a:avLst/>
+          </a:prstGeom>
+          <a:noFill/>
+          <a:ln w="6350">
+            <a:solidFill>
+              <a:schemeClr val="tx1"/>
+            </a:solidFill>
+          </a:ln>
+        </p:spPr>
+        <p:style>
+          <a:lnRef idx="2">
+            <a:schemeClr val="accent1">
+              <a:shade val="50000"/>
+            </a:schemeClr>
+          </a:lnRef>
+          <a:fillRef idx="1">
+            <a:schemeClr val="accent1"/>
+          </a:fillRef>
+          <a:effectRef idx="0">
+            <a:schemeClr val="accent1"/>
+          </a:effectRef>
+          <a:fontRef idx="minor">
+            <a:schemeClr val="lt1"/>
+          </a:fontRef>
+        </p:style>
+        <p:txBody>
+          <a:bodyPr rtlCol="0" anchor="ctr"/>
+          <a:lstStyle/>
+          <a:p>
+            <a:pPr algn="ctr"/>
+            <a:endParaRPr lang="de-DE" sz="1000"/>
+          </a:p>
+        </p:txBody>
+      </p:sp>
+      <p:sp>
+        <p:nvSpPr>
+          <p:cNvPr id="22" name="Ellipse 21">
+            <a:extLst>
+              <a:ext uri="{FF2B5EF4-FFF2-40B4-BE49-F238E27FC236}">
+                <a16:creationId xmlns:a16="http://schemas.microsoft.com/office/drawing/2014/main" id="{5D80280E-5E86-4DC5-9250-415C611FEA86}"/>
+              </a:ext>
+            </a:extLst>
+          </p:cNvPr>
+          <p:cNvSpPr/>
+          <p:nvPr/>
+        </p:nvSpPr>
+        <p:spPr>
+          <a:xfrm>
+            <a:off x="6460244" y="2192164"/>
+            <a:ext cx="277200" cy="277200"/>
+          </a:xfrm>
+          <a:prstGeom prst="ellipse">
+            <a:avLst/>
+          </a:prstGeom>
+          <a:noFill/>
+          <a:ln w="6350">
+            <a:solidFill>
+              <a:schemeClr val="tx1"/>
+            </a:solidFill>
+          </a:ln>
+        </p:spPr>
+        <p:style>
+          <a:lnRef idx="2">
+            <a:schemeClr val="accent1">
+              <a:shade val="50000"/>
+            </a:schemeClr>
+          </a:lnRef>
+          <a:fillRef idx="1">
+            <a:schemeClr val="accent1"/>
+          </a:fillRef>
+          <a:effectRef idx="0">
+            <a:schemeClr val="accent1"/>
+          </a:effectRef>
+          <a:fontRef idx="minor">
+            <a:schemeClr val="lt1"/>
+          </a:fontRef>
+        </p:style>
+        <p:txBody>
+          <a:bodyPr rtlCol="0" anchor="ctr"/>
+          <a:lstStyle/>
+          <a:p>
+            <a:pPr algn="ctr"/>
+            <a:endParaRPr lang="de-DE" sz="1000"/>
+          </a:p>
+        </p:txBody>
+      </p:sp>
+      <p:sp>
+        <p:nvSpPr>
+          <p:cNvPr id="23" name="Ellipse 22">
+            <a:extLst>
+              <a:ext uri="{FF2B5EF4-FFF2-40B4-BE49-F238E27FC236}">
+                <a16:creationId xmlns:a16="http://schemas.microsoft.com/office/drawing/2014/main" id="{B3F7E7DC-284A-4465-9E5F-05E8B147EE68}"/>
+              </a:ext>
+            </a:extLst>
+          </p:cNvPr>
+          <p:cNvSpPr/>
+          <p:nvPr/>
+        </p:nvSpPr>
+        <p:spPr>
+          <a:xfrm>
+            <a:off x="6460244" y="3251426"/>
+            <a:ext cx="277200" cy="277200"/>
+          </a:xfrm>
+          <a:prstGeom prst="ellipse">
+            <a:avLst/>
+          </a:prstGeom>
+          <a:noFill/>
+          <a:ln w="6350">
+            <a:solidFill>
+              <a:schemeClr val="tx1"/>
+            </a:solidFill>
+          </a:ln>
+        </p:spPr>
+        <p:style>
+          <a:lnRef idx="2">
+            <a:schemeClr val="accent1">
+              <a:shade val="50000"/>
+            </a:schemeClr>
+          </a:lnRef>
+          <a:fillRef idx="1">
+            <a:schemeClr val="accent1"/>
+          </a:fillRef>
+          <a:effectRef idx="0">
+            <a:schemeClr val="accent1"/>
+          </a:effectRef>
+          <a:fontRef idx="minor">
+            <a:schemeClr val="lt1"/>
+          </a:fontRef>
+        </p:style>
+        <p:txBody>
+          <a:bodyPr rtlCol="0" anchor="ctr"/>
+          <a:lstStyle/>
+          <a:p>
+            <a:pPr algn="ctr"/>
+            <a:r>
+              <a:rPr lang="de-DE" sz="1000"/>
+              <a:t>0,77 cm</a:t>
+            </a:r>
+          </a:p>
+        </p:txBody>
+      </p:sp>
+      <p:sp>
+        <p:nvSpPr>
+          <p:cNvPr id="24" name="Ellipse 23">
+            <a:extLst>
+              <a:ext uri="{FF2B5EF4-FFF2-40B4-BE49-F238E27FC236}">
+                <a16:creationId xmlns:a16="http://schemas.microsoft.com/office/drawing/2014/main" id="{C67ACEA0-4B1E-4FB9-9974-A7C7D6E69B5A}"/>
+              </a:ext>
+            </a:extLst>
+          </p:cNvPr>
+          <p:cNvSpPr/>
+          <p:nvPr/>
+        </p:nvSpPr>
+        <p:spPr>
+          <a:xfrm>
+            <a:off x="4590000" y="2200270"/>
+            <a:ext cx="277200" cy="277200"/>
+          </a:xfrm>
+          <a:prstGeom prst="ellipse">
+            <a:avLst/>
+          </a:prstGeom>
+          <a:noFill/>
+          <a:ln w="6350">
+            <a:solidFill>
+              <a:schemeClr val="tx1"/>
+            </a:solidFill>
+          </a:ln>
+        </p:spPr>
+        <p:style>
+          <a:lnRef idx="2">
+            <a:schemeClr val="accent1">
+              <a:shade val="50000"/>
+            </a:schemeClr>
+          </a:lnRef>
+          <a:fillRef idx="1">
+            <a:schemeClr val="accent1"/>
+          </a:fillRef>
+          <a:effectRef idx="0">
+            <a:schemeClr val="accent1"/>
+          </a:effectRef>
+          <a:fontRef idx="minor">
+            <a:schemeClr val="lt1"/>
+          </a:fontRef>
+        </p:style>
+        <p:txBody>
+          <a:bodyPr rtlCol="0" anchor="ctr"/>
+          <a:lstStyle/>
+          <a:p>
+            <a:pPr algn="ctr"/>
+            <a:endParaRPr lang="de-DE" sz="1000"/>
+          </a:p>
+        </p:txBody>
+      </p:sp>
+      <p:sp>
+        <p:nvSpPr>
+          <p:cNvPr id="25" name="Ellipse 24">
+            <a:extLst>
+              <a:ext uri="{FF2B5EF4-FFF2-40B4-BE49-F238E27FC236}">
+                <a16:creationId xmlns:a16="http://schemas.microsoft.com/office/drawing/2014/main" id="{357E5471-AD02-49B0-A554-F230B748C270}"/>
+              </a:ext>
+            </a:extLst>
+          </p:cNvPr>
+          <p:cNvSpPr/>
+          <p:nvPr/>
+        </p:nvSpPr>
+        <p:spPr>
+          <a:xfrm>
+            <a:off x="4595674" y="3251426"/>
+            <a:ext cx="277200" cy="277200"/>
+          </a:xfrm>
+          <a:prstGeom prst="ellipse">
+            <a:avLst/>
+          </a:prstGeom>
+          <a:noFill/>
+          <a:ln w="6350">
+            <a:solidFill>
+              <a:schemeClr val="tx1"/>
+            </a:solidFill>
+          </a:ln>
+        </p:spPr>
+        <p:style>
+          <a:lnRef idx="2">
+            <a:schemeClr val="accent1">
+              <a:shade val="50000"/>
+            </a:schemeClr>
+          </a:lnRef>
+          <a:fillRef idx="1">
+            <a:schemeClr val="accent1"/>
+          </a:fillRef>
+          <a:effectRef idx="0">
+            <a:schemeClr val="accent1"/>
+          </a:effectRef>
+          <a:fontRef idx="minor">
+            <a:schemeClr val="lt1"/>
+          </a:fontRef>
+        </p:style>
+        <p:txBody>
+          <a:bodyPr rtlCol="0" anchor="ctr"/>
+          <a:lstStyle/>
+          <a:p>
+            <a:pPr algn="ctr"/>
+            <a:endParaRPr lang="de-DE" sz="1000"/>
+          </a:p>
+        </p:txBody>
+      </p:sp>
+      <p:sp>
+        <p:nvSpPr>
+          <p:cNvPr id="26" name="Ellipse 25">
+            <a:extLst>
+              <a:ext uri="{FF2B5EF4-FFF2-40B4-BE49-F238E27FC236}">
+                <a16:creationId xmlns:a16="http://schemas.microsoft.com/office/drawing/2014/main" id="{D69B637A-8CB4-4424-B56D-487560CF6B4D}"/>
+              </a:ext>
+            </a:extLst>
+          </p:cNvPr>
+          <p:cNvSpPr/>
+          <p:nvPr/>
+        </p:nvSpPr>
+        <p:spPr>
+          <a:xfrm>
+            <a:off x="5385600" y="4627800"/>
+            <a:ext cx="568800" cy="568800"/>
+          </a:xfrm>
+          <a:prstGeom prst="ellipse">
+            <a:avLst/>
+          </a:prstGeom>
+          <a:noFill/>
+          <a:ln w="6350">
+            <a:solidFill>
+              <a:schemeClr val="tx1"/>
+            </a:solidFill>
+          </a:ln>
+        </p:spPr>
+        <p:style>
+          <a:lnRef idx="2">
+            <a:schemeClr val="accent1">
+              <a:shade val="50000"/>
+            </a:schemeClr>
+          </a:lnRef>
+          <a:fillRef idx="1">
+            <a:schemeClr val="accent1"/>
+          </a:fillRef>
+          <a:effectRef idx="0">
+            <a:schemeClr val="accent1"/>
+          </a:effectRef>
+          <a:fontRef idx="minor">
+            <a:schemeClr val="lt1"/>
+          </a:fontRef>
+        </p:style>
+        <p:txBody>
+          <a:bodyPr rtlCol="0" anchor="ctr"/>
+          <a:lstStyle/>
+          <a:p>
+            <a:pPr algn="ctr"/>
+            <a:r>
+              <a:rPr lang="de-DE" sz="1000"/>
+              <a:t>0,77 cm</a:t>
+            </a:r>
+          </a:p>
+        </p:txBody>
+      </p:sp>
       <p:pic>
         <p:nvPicPr>
-          <p:cNvPr id="19" name="Grafik 18">
-            <a:extLst>
-              <a:ext uri="{FF2B5EF4-FFF2-40B4-BE49-F238E27FC236}">
-                <a16:creationId xmlns:a16="http://schemas.microsoft.com/office/drawing/2014/main" id="{7A73D3EE-E8FD-4BE3-BD73-BFB7282567DC}"/>
+          <p:cNvPr id="27" name="Grafik 26">
+            <a:extLst>
+              <a:ext uri="{FF2B5EF4-FFF2-40B4-BE49-F238E27FC236}">
+                <a16:creationId xmlns:a16="http://schemas.microsoft.com/office/drawing/2014/main" id="{C20E56B6-FDFC-43A5-B0DC-AC177F2D45CB}"/>
               </a:ext>
             </a:extLst>
           </p:cNvPr>
@@ -28998,25 +28951,291 @@
           <p:nvPr/>
         </p:nvPicPr>
         <p:blipFill>
-          <a:blip r:embed="rId5"/>
+          <a:blip r:embed="rId2">
+            <a:extLst>
+              <a:ext uri="{28A0092B-C50C-407E-A947-70E740481C1C}">
+                <a14:useLocalDpi xmlns:a14="http://schemas.microsoft.com/office/drawing/2010/main" val="0"/>
+              </a:ext>
+            </a:extLst>
+          </a:blip>
           <a:stretch>
             <a:fillRect/>
           </a:stretch>
         </p:blipFill>
         <p:spPr>
           <a:xfrm>
-            <a:off x="4506475" y="6168215"/>
-            <a:ext cx="357410" cy="360000"/>
+            <a:off x="5172799" y="2369974"/>
+            <a:ext cx="990977" cy="1020052"/>
           </a:xfrm>
           <a:prstGeom prst="rect">
             <a:avLst/>
           </a:prstGeom>
         </p:spPr>
       </p:pic>
+      <p:sp>
+        <p:nvSpPr>
+          <p:cNvPr id="30" name="Textfeld 29">
+            <a:extLst>
+              <a:ext uri="{FF2B5EF4-FFF2-40B4-BE49-F238E27FC236}">
+                <a16:creationId xmlns:a16="http://schemas.microsoft.com/office/drawing/2014/main" id="{C2F8B601-5508-4B93-8553-7D4909D66446}"/>
+              </a:ext>
+            </a:extLst>
+          </p:cNvPr>
+          <p:cNvSpPr txBox="1"/>
+          <p:nvPr/>
+        </p:nvSpPr>
+        <p:spPr>
+          <a:xfrm>
+            <a:off x="5514095" y="1288413"/>
+            <a:ext cx="301686" cy="369332"/>
+          </a:xfrm>
+          <a:prstGeom prst="rect">
+            <a:avLst/>
+          </a:prstGeom>
+          <a:noFill/>
+        </p:spPr>
+        <p:txBody>
+          <a:bodyPr wrap="none" rtlCol="0">
+            <a:spAutoFit/>
+          </a:bodyPr>
+          <a:lstStyle/>
+          <a:p>
+            <a:r>
+              <a:rPr lang="de-DE"/>
+              <a:t>6</a:t>
+            </a:r>
+          </a:p>
+        </p:txBody>
+      </p:sp>
+      <p:sp>
+        <p:nvSpPr>
+          <p:cNvPr id="31" name="Textfeld 30">
+            <a:extLst>
+              <a:ext uri="{FF2B5EF4-FFF2-40B4-BE49-F238E27FC236}">
+                <a16:creationId xmlns:a16="http://schemas.microsoft.com/office/drawing/2014/main" id="{67462E24-93CC-49C5-B963-A6AD3BA31EE3}"/>
+              </a:ext>
+            </a:extLst>
+          </p:cNvPr>
+          <p:cNvSpPr txBox="1"/>
+          <p:nvPr/>
+        </p:nvSpPr>
+        <p:spPr>
+          <a:xfrm>
+            <a:off x="5535916" y="4080128"/>
+            <a:ext cx="301686" cy="369332"/>
+          </a:xfrm>
+          <a:prstGeom prst="rect">
+            <a:avLst/>
+          </a:prstGeom>
+          <a:noFill/>
+        </p:spPr>
+        <p:txBody>
+          <a:bodyPr wrap="none" rtlCol="0">
+            <a:spAutoFit/>
+          </a:bodyPr>
+          <a:lstStyle/>
+          <a:p>
+            <a:r>
+              <a:rPr lang="de-DE"/>
+              <a:t>1</a:t>
+            </a:r>
+          </a:p>
+        </p:txBody>
+      </p:sp>
+      <p:sp>
+        <p:nvSpPr>
+          <p:cNvPr id="32" name="Textfeld 31">
+            <a:extLst>
+              <a:ext uri="{FF2B5EF4-FFF2-40B4-BE49-F238E27FC236}">
+                <a16:creationId xmlns:a16="http://schemas.microsoft.com/office/drawing/2014/main" id="{5FAB3BBC-4581-4F10-8B29-E2371696E1DA}"/>
+              </a:ext>
+            </a:extLst>
+          </p:cNvPr>
+          <p:cNvSpPr txBox="1"/>
+          <p:nvPr/>
+        </p:nvSpPr>
+        <p:spPr>
+          <a:xfrm>
+            <a:off x="6783965" y="1967068"/>
+            <a:ext cx="301686" cy="369332"/>
+          </a:xfrm>
+          <a:prstGeom prst="rect">
+            <a:avLst/>
+          </a:prstGeom>
+          <a:noFill/>
+        </p:spPr>
+        <p:txBody>
+          <a:bodyPr wrap="none" rtlCol="0">
+            <a:spAutoFit/>
+          </a:bodyPr>
+          <a:lstStyle/>
+          <a:p>
+            <a:r>
+              <a:rPr lang="de-DE"/>
+              <a:t>3</a:t>
+            </a:r>
+          </a:p>
+        </p:txBody>
+      </p:sp>
+      <p:sp>
+        <p:nvSpPr>
+          <p:cNvPr id="33" name="Textfeld 32">
+            <a:extLst>
+              <a:ext uri="{FF2B5EF4-FFF2-40B4-BE49-F238E27FC236}">
+                <a16:creationId xmlns:a16="http://schemas.microsoft.com/office/drawing/2014/main" id="{A05DB1F1-81E2-4D6B-81F4-DACD1D8D7ADB}"/>
+              </a:ext>
+            </a:extLst>
+          </p:cNvPr>
+          <p:cNvSpPr txBox="1"/>
+          <p:nvPr/>
+        </p:nvSpPr>
+        <p:spPr>
+          <a:xfrm>
+            <a:off x="4262577" y="3430962"/>
+            <a:ext cx="301686" cy="369332"/>
+          </a:xfrm>
+          <a:prstGeom prst="rect">
+            <a:avLst/>
+          </a:prstGeom>
+          <a:noFill/>
+        </p:spPr>
+        <p:txBody>
+          <a:bodyPr wrap="none" rtlCol="0">
+            <a:spAutoFit/>
+          </a:bodyPr>
+          <a:lstStyle/>
+          <a:p>
+            <a:r>
+              <a:rPr lang="de-DE"/>
+              <a:t>4</a:t>
+            </a:r>
+          </a:p>
+        </p:txBody>
+      </p:sp>
+      <p:sp>
+        <p:nvSpPr>
+          <p:cNvPr id="34" name="Textfeld 33">
+            <a:extLst>
+              <a:ext uri="{FF2B5EF4-FFF2-40B4-BE49-F238E27FC236}">
+                <a16:creationId xmlns:a16="http://schemas.microsoft.com/office/drawing/2014/main" id="{663F8590-FCA1-4871-ADE4-2414479996E8}"/>
+              </a:ext>
+            </a:extLst>
+          </p:cNvPr>
+          <p:cNvSpPr txBox="1"/>
+          <p:nvPr/>
+        </p:nvSpPr>
+        <p:spPr>
+          <a:xfrm>
+            <a:off x="4262577" y="1967068"/>
+            <a:ext cx="301686" cy="369332"/>
+          </a:xfrm>
+          <a:prstGeom prst="rect">
+            <a:avLst/>
+          </a:prstGeom>
+          <a:noFill/>
+        </p:spPr>
+        <p:txBody>
+          <a:bodyPr wrap="none" rtlCol="0">
+            <a:spAutoFit/>
+          </a:bodyPr>
+          <a:lstStyle/>
+          <a:p>
+            <a:r>
+              <a:rPr lang="de-DE"/>
+              <a:t>2</a:t>
+            </a:r>
+          </a:p>
+        </p:txBody>
+      </p:sp>
+      <p:sp>
+        <p:nvSpPr>
+          <p:cNvPr id="35" name="Textfeld 34">
+            <a:extLst>
+              <a:ext uri="{FF2B5EF4-FFF2-40B4-BE49-F238E27FC236}">
+                <a16:creationId xmlns:a16="http://schemas.microsoft.com/office/drawing/2014/main" id="{C9875D0B-FB91-4FB6-9C67-6E77682BDA88}"/>
+              </a:ext>
+            </a:extLst>
+          </p:cNvPr>
+          <p:cNvSpPr txBox="1"/>
+          <p:nvPr/>
+        </p:nvSpPr>
+        <p:spPr>
+          <a:xfrm>
+            <a:off x="6783965" y="3430962"/>
+            <a:ext cx="301686" cy="369332"/>
+          </a:xfrm>
+          <a:prstGeom prst="rect">
+            <a:avLst/>
+          </a:prstGeom>
+          <a:noFill/>
+        </p:spPr>
+        <p:txBody>
+          <a:bodyPr wrap="none" rtlCol="0">
+            <a:spAutoFit/>
+          </a:bodyPr>
+          <a:lstStyle/>
+          <a:p>
+            <a:r>
+              <a:rPr lang="de-DE"/>
+              <a:t>5</a:t>
+            </a:r>
+          </a:p>
+        </p:txBody>
+      </p:sp>
+      <p:sp>
+        <p:nvSpPr>
+          <p:cNvPr id="38" name="Ellipse 37">
+            <a:extLst>
+              <a:ext uri="{FF2B5EF4-FFF2-40B4-BE49-F238E27FC236}">
+                <a16:creationId xmlns:a16="http://schemas.microsoft.com/office/drawing/2014/main" id="{E2B53078-64AE-46A7-909B-9CA3E0525E5A}"/>
+              </a:ext>
+            </a:extLst>
+          </p:cNvPr>
+          <p:cNvSpPr/>
+          <p:nvPr/>
+        </p:nvSpPr>
+        <p:spPr>
+          <a:xfrm>
+            <a:off x="4318287" y="1530000"/>
+            <a:ext cx="2700000" cy="2700000"/>
+          </a:xfrm>
+          <a:prstGeom prst="ellipse">
+            <a:avLst/>
+          </a:prstGeom>
+          <a:noFill/>
+          <a:ln w="15875">
+            <a:noFill/>
+          </a:ln>
+        </p:spPr>
+        <p:style>
+          <a:lnRef idx="2">
+            <a:schemeClr val="accent1">
+              <a:shade val="50000"/>
+            </a:schemeClr>
+          </a:lnRef>
+          <a:fillRef idx="1">
+            <a:schemeClr val="accent1"/>
+          </a:fillRef>
+          <a:effectRef idx="0">
+            <a:schemeClr val="accent1"/>
+          </a:effectRef>
+          <a:fontRef idx="minor">
+            <a:schemeClr val="lt1"/>
+          </a:fontRef>
+        </p:style>
+        <p:txBody>
+          <a:bodyPr rtlCol="0" anchor="ctr"/>
+          <a:lstStyle/>
+          <a:p>
+            <a:pPr algn="ctr"/>
+            <a:endParaRPr lang="de-DE"/>
+          </a:p>
+        </p:txBody>
+      </p:sp>
     </p:spTree>
     <p:extLst>
       <p:ext uri="{BB962C8B-B14F-4D97-AF65-F5344CB8AC3E}">
-        <p14:creationId xmlns:p14="http://schemas.microsoft.com/office/powerpoint/2010/main" val="3667934759"/>
+        <p14:creationId xmlns:p14="http://schemas.microsoft.com/office/powerpoint/2010/main" val="1334854503"/>
       </p:ext>
     </p:extLst>
   </p:cSld>
@@ -29048,7 +29267,7 @@
           <p:cNvPr id="2" name="Titel 1">
             <a:extLst>
               <a:ext uri="{FF2B5EF4-FFF2-40B4-BE49-F238E27FC236}">
-                <a16:creationId xmlns:a16="http://schemas.microsoft.com/office/drawing/2014/main" id="{80602C5F-0F9F-4C7E-8B24-2CA2582B8E54}"/>
+                <a16:creationId xmlns:a16="http://schemas.microsoft.com/office/drawing/2014/main" id="{958251AF-2378-46D7-8F36-63315088C003}"/>
               </a:ext>
             </a:extLst>
           </p:cNvPr>
@@ -29064,16 +29283,229 @@
           <a:bodyPr/>
           <a:lstStyle/>
           <a:p>
+            <a:r>
+              <a:rPr lang="de-DE"/>
+              <a:t>Lingo Bingo Frame</a:t>
+            </a:r>
+          </a:p>
+        </p:txBody>
+      </p:sp>
+      <p:sp>
+        <p:nvSpPr>
+          <p:cNvPr id="3" name="Textfeld 2">
+            <a:extLst>
+              <a:ext uri="{FF2B5EF4-FFF2-40B4-BE49-F238E27FC236}">
+                <a16:creationId xmlns:a16="http://schemas.microsoft.com/office/drawing/2014/main" id="{5C1259D2-9E72-4ADB-AF59-4F642214D412}"/>
+              </a:ext>
+            </a:extLst>
+          </p:cNvPr>
+          <p:cNvSpPr txBox="1"/>
+          <p:nvPr/>
+        </p:nvSpPr>
+        <p:spPr>
+          <a:xfrm>
+            <a:off x="628072" y="1163127"/>
+            <a:ext cx="1377300" cy="938719"/>
+          </a:xfrm>
+          <a:prstGeom prst="rect">
+            <a:avLst/>
+          </a:prstGeom>
+          <a:noFill/>
+        </p:spPr>
+        <p:txBody>
+          <a:bodyPr wrap="none" rtlCol="0">
+            <a:spAutoFit/>
+          </a:bodyPr>
+          <a:lstStyle/>
+          <a:p>
+            <a:r>
+              <a:rPr lang="de-DE" sz="1100" b="1"/>
+              <a:t>Frame</a:t>
+            </a:r>
+            <a:endParaRPr lang="de-DE" sz="1100"/>
+          </a:p>
+          <a:p>
+            <a:pPr marL="171450" indent="-171450">
+              <a:buFontTx/>
+              <a:buChar char="-"/>
+            </a:pPr>
+            <a:r>
+              <a:rPr lang="de-DE" sz="1100"/>
+              <a:t>außen : 136 x 156</a:t>
+            </a:r>
+          </a:p>
+          <a:p>
+            <a:pPr marL="171450" indent="-171450">
+              <a:buFontTx/>
+              <a:buChar char="-"/>
+            </a:pPr>
+            <a:r>
+              <a:rPr lang="de-DE" sz="1100"/>
+              <a:t>innen : 100 x 120</a:t>
+            </a:r>
+          </a:p>
+          <a:p>
+            <a:pPr marL="171450" indent="-171450">
+              <a:buFontTx/>
+              <a:buChar char="-"/>
+            </a:pPr>
+            <a:r>
+              <a:rPr lang="de-DE" sz="1100"/>
+              <a:t>Rand : 18</a:t>
+            </a:r>
+          </a:p>
+          <a:p>
+            <a:pPr marL="171450" indent="-171450">
+              <a:buFontTx/>
+              <a:buChar char="-"/>
+            </a:pPr>
+            <a:endParaRPr lang="de-DE" sz="1100"/>
+          </a:p>
+        </p:txBody>
+      </p:sp>
+      <p:sp>
+        <p:nvSpPr>
+          <p:cNvPr id="4" name="Rechteck 3">
+            <a:extLst>
+              <a:ext uri="{FF2B5EF4-FFF2-40B4-BE49-F238E27FC236}">
+                <a16:creationId xmlns:a16="http://schemas.microsoft.com/office/drawing/2014/main" id="{186257AF-5B2C-4B7D-96A4-8B463888E337}"/>
+              </a:ext>
+            </a:extLst>
+          </p:cNvPr>
+          <p:cNvSpPr/>
+          <p:nvPr/>
+        </p:nvSpPr>
+        <p:spPr>
+          <a:xfrm>
+            <a:off x="3600000" y="1080000"/>
+            <a:ext cx="4896000" cy="5616000"/>
+          </a:xfrm>
+          <a:prstGeom prst="rect">
+            <a:avLst/>
+          </a:prstGeom>
+          <a:noFill/>
+          <a:ln w="3175">
+            <a:solidFill>
+              <a:schemeClr val="tx1"/>
+            </a:solidFill>
+          </a:ln>
+        </p:spPr>
+        <p:style>
+          <a:lnRef idx="2">
+            <a:schemeClr val="accent1"/>
+          </a:lnRef>
+          <a:fillRef idx="1">
+            <a:schemeClr val="lt1"/>
+          </a:fillRef>
+          <a:effectRef idx="0">
+            <a:schemeClr val="accent1"/>
+          </a:effectRef>
+          <a:fontRef idx="minor">
+            <a:schemeClr val="dk1"/>
+          </a:fontRef>
+        </p:style>
+        <p:txBody>
+          <a:bodyPr rtlCol="0" anchor="ctr"/>
+          <a:lstStyle/>
+          <a:p>
+            <a:pPr algn="ctr"/>
             <a:endParaRPr lang="de-DE"/>
+          </a:p>
+        </p:txBody>
+      </p:sp>
+      <p:sp>
+        <p:nvSpPr>
+          <p:cNvPr id="5" name="Rechteck 4">
+            <a:extLst>
+              <a:ext uri="{FF2B5EF4-FFF2-40B4-BE49-F238E27FC236}">
+                <a16:creationId xmlns:a16="http://schemas.microsoft.com/office/drawing/2014/main" id="{A95B5C97-CCC5-42BE-A446-5AD71737C0C6}"/>
+              </a:ext>
+            </a:extLst>
+          </p:cNvPr>
+          <p:cNvSpPr/>
+          <p:nvPr/>
+        </p:nvSpPr>
+        <p:spPr>
+          <a:xfrm>
+            <a:off x="4248000" y="1728000"/>
+            <a:ext cx="3600000" cy="4320000"/>
+          </a:xfrm>
+          <a:prstGeom prst="rect">
+            <a:avLst/>
+          </a:prstGeom>
+          <a:noFill/>
+          <a:ln w="3175">
+            <a:solidFill>
+              <a:schemeClr val="tx1"/>
+            </a:solidFill>
+          </a:ln>
+        </p:spPr>
+        <p:style>
+          <a:lnRef idx="2">
+            <a:schemeClr val="accent1"/>
+          </a:lnRef>
+          <a:fillRef idx="1">
+            <a:schemeClr val="lt1"/>
+          </a:fillRef>
+          <a:effectRef idx="0">
+            <a:schemeClr val="accent1"/>
+          </a:effectRef>
+          <a:fontRef idx="minor">
+            <a:schemeClr val="dk1"/>
+          </a:fontRef>
+        </p:style>
+        <p:txBody>
+          <a:bodyPr rtlCol="0" anchor="ctr"/>
+          <a:lstStyle/>
+          <a:p>
+            <a:pPr algn="ctr"/>
+            <a:endParaRPr lang="de-DE"/>
+          </a:p>
+        </p:txBody>
+      </p:sp>
+      <p:sp>
+        <p:nvSpPr>
+          <p:cNvPr id="6" name="Textfeld 5">
+            <a:extLst>
+              <a:ext uri="{FF2B5EF4-FFF2-40B4-BE49-F238E27FC236}">
+                <a16:creationId xmlns:a16="http://schemas.microsoft.com/office/drawing/2014/main" id="{A682F45B-985B-409B-9268-75919B256BD7}"/>
+              </a:ext>
+            </a:extLst>
+          </p:cNvPr>
+          <p:cNvSpPr txBox="1"/>
+          <p:nvPr/>
+        </p:nvSpPr>
+        <p:spPr>
+          <a:xfrm>
+            <a:off x="4984020" y="1204780"/>
+            <a:ext cx="1595309" cy="523220"/>
+          </a:xfrm>
+          <a:prstGeom prst="rect">
+            <a:avLst/>
+          </a:prstGeom>
+          <a:noFill/>
+        </p:spPr>
+        <p:txBody>
+          <a:bodyPr wrap="none" rtlCol="0">
+            <a:spAutoFit/>
+          </a:bodyPr>
+          <a:lstStyle/>
+          <a:p>
+            <a:r>
+              <a:rPr lang="de-DE" sz="2800">
+                <a:latin typeface="Henny Penny" panose="02000505000000020004" pitchFamily="2" charset="0"/>
+              </a:rPr>
+              <a:t>Fizz Bizz</a:t>
+            </a:r>
           </a:p>
         </p:txBody>
       </p:sp>
       <p:pic>
         <p:nvPicPr>
-          <p:cNvPr id="3" name="Grafik 2">
-            <a:extLst>
-              <a:ext uri="{FF2B5EF4-FFF2-40B4-BE49-F238E27FC236}">
-                <a16:creationId xmlns:a16="http://schemas.microsoft.com/office/drawing/2014/main" id="{DB88AFA4-427A-46D8-9C22-3B3F456A5F7F}"/>
+          <p:cNvPr id="7" name="Grafik 6">
+            <a:extLst>
+              <a:ext uri="{FF2B5EF4-FFF2-40B4-BE49-F238E27FC236}">
+                <a16:creationId xmlns:a16="http://schemas.microsoft.com/office/drawing/2014/main" id="{54C102AA-979B-47B0-83C9-5FF96AF33A37}"/>
               </a:ext>
             </a:extLst>
           </p:cNvPr>
@@ -29096,8 +29528,8 @@
         </p:blipFill>
         <p:spPr>
           <a:xfrm>
-            <a:off x="4102903" y="3360722"/>
-            <a:ext cx="468000" cy="418266"/>
+            <a:off x="7999551" y="1858620"/>
+            <a:ext cx="342000" cy="787218"/>
           </a:xfrm>
           <a:prstGeom prst="rect">
             <a:avLst/>
@@ -29106,57 +29538,198 @@
       </p:pic>
       <p:pic>
         <p:nvPicPr>
-          <p:cNvPr id="1030" name="Picture 6" descr="Settings - Free Tools and utensils icons">
-            <a:extLst>
-              <a:ext uri="{FF2B5EF4-FFF2-40B4-BE49-F238E27FC236}">
-                <a16:creationId xmlns:a16="http://schemas.microsoft.com/office/drawing/2014/main" id="{49D6F0FB-8DF9-4837-A0A6-6611A4F0E18C}"/>
+          <p:cNvPr id="8" name="Grafik 7">
+            <a:extLst>
+              <a:ext uri="{FF2B5EF4-FFF2-40B4-BE49-F238E27FC236}">
+                <a16:creationId xmlns:a16="http://schemas.microsoft.com/office/drawing/2014/main" id="{D2DC5EA9-3A3F-4624-9047-CBC1F03614D2}"/>
               </a:ext>
             </a:extLst>
           </p:cNvPr>
           <p:cNvPicPr>
-            <a:picLocks noChangeAspect="1" noChangeArrowheads="1"/>
+            <a:picLocks noChangeAspect="1"/>
           </p:cNvPicPr>
           <p:nvPr/>
         </p:nvPicPr>
         <p:blipFill>
-          <a:blip r:embed="rId3">
+          <a:blip r:embed="rId2">
             <a:extLst>
               <a:ext uri="{28A0092B-C50C-407E-A947-70E740481C1C}">
                 <a14:useLocalDpi xmlns:a14="http://schemas.microsoft.com/office/drawing/2010/main" val="0"/>
               </a:ext>
             </a:extLst>
           </a:blip>
-          <a:srcRect/>
           <a:stretch>
             <a:fillRect/>
           </a:stretch>
         </p:blipFill>
-        <p:spPr bwMode="auto">
-          <a:xfrm>
-            <a:off x="6730903" y="3335855"/>
-            <a:ext cx="468000" cy="468000"/>
+        <p:spPr>
+          <a:xfrm flipH="1">
+            <a:off x="3725514" y="1826707"/>
+            <a:ext cx="342000" cy="787218"/>
           </a:xfrm>
           <a:prstGeom prst="rect">
             <a:avLst/>
           </a:prstGeom>
-          <a:noFill/>
-          <a:extLst>
-            <a:ext uri="{909E8E84-426E-40DD-AFC4-6F175D3DCCD1}">
-              <a14:hiddenFill xmlns:a14="http://schemas.microsoft.com/office/drawing/2010/main">
-                <a:solidFill>
-                  <a:srgbClr val="FFFFFF"/>
-                </a:solidFill>
-              </a14:hiddenFill>
-            </a:ext>
-          </a:extLst>
+        </p:spPr>
+      </p:pic>
+      <p:pic>
+        <p:nvPicPr>
+          <p:cNvPr id="9" name="Grafik 8">
+            <a:extLst>
+              <a:ext uri="{FF2B5EF4-FFF2-40B4-BE49-F238E27FC236}">
+                <a16:creationId xmlns:a16="http://schemas.microsoft.com/office/drawing/2014/main" id="{1ADE3CB4-EC28-4634-96E5-026502F47903}"/>
+              </a:ext>
+            </a:extLst>
+          </p:cNvPr>
+          <p:cNvPicPr>
+            <a:picLocks noChangeAspect="1"/>
+          </p:cNvPicPr>
+          <p:nvPr/>
+        </p:nvPicPr>
+        <p:blipFill>
+          <a:blip r:embed="rId3">
+            <a:extLst>
+              <a:ext uri="{28A0092B-C50C-407E-A947-70E740481C1C}">
+                <a14:useLocalDpi xmlns:a14="http://schemas.microsoft.com/office/drawing/2010/main" val="0"/>
+              </a:ext>
+            </a:extLst>
+          </a:blip>
+          <a:stretch>
+            <a:fillRect/>
+          </a:stretch>
+        </p:blipFill>
+        <p:spPr>
+          <a:xfrm flipH="1">
+            <a:off x="7256635" y="6168215"/>
+            <a:ext cx="349738" cy="360000"/>
+          </a:xfrm>
+          <a:prstGeom prst="rect">
+            <a:avLst/>
+          </a:prstGeom>
+        </p:spPr>
+      </p:pic>
+      <p:pic>
+        <p:nvPicPr>
+          <p:cNvPr id="10" name="Grafik 9">
+            <a:extLst>
+              <a:ext uri="{FF2B5EF4-FFF2-40B4-BE49-F238E27FC236}">
+                <a16:creationId xmlns:a16="http://schemas.microsoft.com/office/drawing/2014/main" id="{CE81E583-3803-41D2-8F91-3F3FDF662ACB}"/>
+              </a:ext>
+            </a:extLst>
+          </p:cNvPr>
+          <p:cNvPicPr>
+            <a:picLocks noChangeAspect="1"/>
+          </p:cNvPicPr>
+          <p:nvPr/>
+        </p:nvPicPr>
+        <p:blipFill>
+          <a:blip r:embed="rId4">
+            <a:extLst>
+              <a:ext uri="{28A0092B-C50C-407E-A947-70E740481C1C}">
+                <a14:useLocalDpi xmlns:a14="http://schemas.microsoft.com/office/drawing/2010/main" val="0"/>
+              </a:ext>
+            </a:extLst>
+          </a:blip>
+          <a:stretch>
+            <a:fillRect/>
+          </a:stretch>
+        </p:blipFill>
+        <p:spPr>
+          <a:xfrm rot="9697007">
+            <a:off x="3790362" y="3234043"/>
+            <a:ext cx="342000" cy="660892"/>
+          </a:xfrm>
+          <a:prstGeom prst="rect">
+            <a:avLst/>
+          </a:prstGeom>
+        </p:spPr>
+      </p:pic>
+      <p:pic>
+        <p:nvPicPr>
+          <p:cNvPr id="11" name="Grafik 10">
+            <a:extLst>
+              <a:ext uri="{FF2B5EF4-FFF2-40B4-BE49-F238E27FC236}">
+                <a16:creationId xmlns:a16="http://schemas.microsoft.com/office/drawing/2014/main" id="{6AE5E9AC-5542-4D6D-B9DE-EE2227502F0B}"/>
+              </a:ext>
+            </a:extLst>
+          </p:cNvPr>
+          <p:cNvPicPr>
+            <a:picLocks noChangeAspect="1"/>
+          </p:cNvPicPr>
+          <p:nvPr/>
+        </p:nvPicPr>
+        <p:blipFill>
+          <a:blip r:embed="rId4">
+            <a:extLst>
+              <a:ext uri="{28A0092B-C50C-407E-A947-70E740481C1C}">
+                <a14:useLocalDpi xmlns:a14="http://schemas.microsoft.com/office/drawing/2010/main" val="0"/>
+              </a:ext>
+            </a:extLst>
+          </a:blip>
+          <a:stretch>
+            <a:fillRect/>
+          </a:stretch>
+        </p:blipFill>
+        <p:spPr>
+          <a:xfrm rot="11902993" flipH="1">
+            <a:off x="8011606" y="2745596"/>
+            <a:ext cx="342000" cy="660892"/>
+          </a:xfrm>
+          <a:prstGeom prst="rect">
+            <a:avLst/>
+          </a:prstGeom>
         </p:spPr>
       </p:pic>
       <p:sp>
         <p:nvSpPr>
-          <p:cNvPr id="4" name="Rechteck 3">
-            <a:extLst>
-              <a:ext uri="{FF2B5EF4-FFF2-40B4-BE49-F238E27FC236}">
-                <a16:creationId xmlns:a16="http://schemas.microsoft.com/office/drawing/2014/main" id="{61E1F318-A3E1-4905-B544-2AD306F57087}"/>
+          <p:cNvPr id="12" name="Textfeld 11">
+            <a:extLst>
+              <a:ext uri="{FF2B5EF4-FFF2-40B4-BE49-F238E27FC236}">
+                <a16:creationId xmlns:a16="http://schemas.microsoft.com/office/drawing/2014/main" id="{68ECE7BD-5C24-4FCA-B231-F3FD8CD1E503}"/>
+              </a:ext>
+            </a:extLst>
+          </p:cNvPr>
+          <p:cNvSpPr txBox="1"/>
+          <p:nvPr/>
+        </p:nvSpPr>
+        <p:spPr>
+          <a:xfrm>
+            <a:off x="5256995" y="6148160"/>
+            <a:ext cx="1606530" cy="400110"/>
+          </a:xfrm>
+          <a:prstGeom prst="rect">
+            <a:avLst/>
+          </a:prstGeom>
+          <a:noFill/>
+        </p:spPr>
+        <p:txBody>
+          <a:bodyPr wrap="none" rtlCol="0">
+            <a:spAutoFit/>
+          </a:bodyPr>
+          <a:lstStyle>
+            <a:defPPr>
+              <a:defRPr lang="de-DE"/>
+            </a:defPPr>
+            <a:lvl1pPr>
+              <a:defRPr sz="2800">
+                <a:latin typeface="Henny Penny" panose="02000505000000020004" pitchFamily="2" charset="0"/>
+              </a:defRPr>
+            </a:lvl1pPr>
+          </a:lstStyle>
+          <a:p>
+            <a:r>
+              <a:rPr lang="de-DE" sz="2000"/>
+              <a:t>Lingo Bingo</a:t>
+            </a:r>
+          </a:p>
+        </p:txBody>
+      </p:sp>
+      <p:sp>
+        <p:nvSpPr>
+          <p:cNvPr id="14" name="Rechteck 13">
+            <a:extLst>
+              <a:ext uri="{FF2B5EF4-FFF2-40B4-BE49-F238E27FC236}">
+                <a16:creationId xmlns:a16="http://schemas.microsoft.com/office/drawing/2014/main" id="{F16FEBEB-2E04-42D9-8737-9D68507FBB75}"/>
               </a:ext>
             </a:extLst>
           </p:cNvPr>
@@ -29165,18 +29738,12 @@
         </p:nvSpPr>
         <p:spPr>
           <a:xfrm>
-            <a:off x="4027055" y="3260436"/>
-            <a:ext cx="3260436" cy="618837"/>
+            <a:off x="3600000" y="1080000"/>
+            <a:ext cx="18000" cy="18000"/>
           </a:xfrm>
           <a:prstGeom prst="rect">
             <a:avLst/>
           </a:prstGeom>
-          <a:noFill/>
-          <a:ln>
-            <a:solidFill>
-              <a:schemeClr val="accent1"/>
-            </a:solidFill>
-          </a:ln>
         </p:spPr>
         <p:style>
           <a:lnRef idx="2">
@@ -29205,94 +29772,176 @@
       </p:sp>
       <p:sp>
         <p:nvSpPr>
-          <p:cNvPr id="12" name="Textfeld 11">
-            <a:extLst>
-              <a:ext uri="{FF2B5EF4-FFF2-40B4-BE49-F238E27FC236}">
-                <a16:creationId xmlns:a16="http://schemas.microsoft.com/office/drawing/2014/main" id="{BBA9EF90-1E80-477B-AFC5-A096F1550676}"/>
-              </a:ext>
-            </a:extLst>
-          </p:cNvPr>
-          <p:cNvSpPr txBox="1"/>
+          <p:cNvPr id="15" name="Rechteck 14">
+            <a:extLst>
+              <a:ext uri="{FF2B5EF4-FFF2-40B4-BE49-F238E27FC236}">
+                <a16:creationId xmlns:a16="http://schemas.microsoft.com/office/drawing/2014/main" id="{B2542AA7-00D5-47BD-BAD9-9F331FCA7234}"/>
+              </a:ext>
+            </a:extLst>
+          </p:cNvPr>
+          <p:cNvSpPr/>
           <p:nvPr/>
         </p:nvSpPr>
         <p:spPr>
           <a:xfrm>
-            <a:off x="628072" y="1163127"/>
-            <a:ext cx="947695" cy="430887"/>
+            <a:off x="8478000" y="1071000"/>
+            <a:ext cx="18000" cy="18000"/>
           </a:xfrm>
           <a:prstGeom prst="rect">
             <a:avLst/>
           </a:prstGeom>
-          <a:noFill/>
-        </p:spPr>
+        </p:spPr>
+        <p:style>
+          <a:lnRef idx="2">
+            <a:schemeClr val="accent1">
+              <a:shade val="50000"/>
+            </a:schemeClr>
+          </a:lnRef>
+          <a:fillRef idx="1">
+            <a:schemeClr val="accent1"/>
+          </a:fillRef>
+          <a:effectRef idx="0">
+            <a:schemeClr val="accent1"/>
+          </a:effectRef>
+          <a:fontRef idx="minor">
+            <a:schemeClr val="lt1"/>
+          </a:fontRef>
+        </p:style>
         <p:txBody>
-          <a:bodyPr wrap="none" rtlCol="0">
-            <a:spAutoFit/>
-          </a:bodyPr>
+          <a:bodyPr rtlCol="0" anchor="ctr"/>
           <a:lstStyle/>
           <a:p>
-            <a:r>
-              <a:rPr lang="de-DE" sz="1100" b="1"/>
-              <a:t>Frame</a:t>
-            </a:r>
-            <a:endParaRPr lang="de-DE" sz="1100"/>
-          </a:p>
-          <a:p>
-            <a:pPr marL="171450" indent="-171450">
-              <a:buFontTx/>
-              <a:buChar char="-"/>
-            </a:pPr>
-            <a:r>
-              <a:rPr lang="de-DE" sz="1100"/>
-              <a:t>Breite : 86</a:t>
-            </a:r>
+            <a:pPr algn="ctr"/>
+            <a:endParaRPr lang="de-DE"/>
           </a:p>
         </p:txBody>
       </p:sp>
-      <p:cxnSp>
-        <p:nvCxnSpPr>
-          <p:cNvPr id="7" name="Gerader Verbinder 6">
-            <a:extLst>
-              <a:ext uri="{FF2B5EF4-FFF2-40B4-BE49-F238E27FC236}">
-                <a16:creationId xmlns:a16="http://schemas.microsoft.com/office/drawing/2014/main" id="{4B078B84-66EB-47F5-B888-32B908C1E6BA}"/>
-              </a:ext>
-            </a:extLst>
-          </p:cNvPr>
-          <p:cNvCxnSpPr>
-            <a:cxnSpLocks/>
-            <a:stCxn id="4" idx="0"/>
-            <a:endCxn id="4" idx="2"/>
-          </p:cNvCxnSpPr>
-          <p:nvPr/>
-        </p:nvCxnSpPr>
+      <p:sp>
+        <p:nvSpPr>
+          <p:cNvPr id="16" name="Rechteck 15">
+            <a:extLst>
+              <a:ext uri="{FF2B5EF4-FFF2-40B4-BE49-F238E27FC236}">
+                <a16:creationId xmlns:a16="http://schemas.microsoft.com/office/drawing/2014/main" id="{6BE1D3FC-6A8C-455B-B852-7BA46C4C0EF7}"/>
+              </a:ext>
+            </a:extLst>
+          </p:cNvPr>
+          <p:cNvSpPr/>
+          <p:nvPr/>
+        </p:nvSpPr>
         <p:spPr>
           <a:xfrm>
-            <a:off x="5657273" y="3260436"/>
-            <a:ext cx="0" cy="618837"/>
-          </a:xfrm>
-          <a:prstGeom prst="line">
+            <a:off x="3609000" y="6674036"/>
+            <a:ext cx="18000" cy="18000"/>
+          </a:xfrm>
+          <a:prstGeom prst="rect">
             <a:avLst/>
           </a:prstGeom>
         </p:spPr>
         <p:style>
-          <a:lnRef idx="1">
-            <a:schemeClr val="accent1"/>
+          <a:lnRef idx="2">
+            <a:schemeClr val="accent1">
+              <a:shade val="50000"/>
+            </a:schemeClr>
           </a:lnRef>
-          <a:fillRef idx="0">
+          <a:fillRef idx="1">
             <a:schemeClr val="accent1"/>
           </a:fillRef>
           <a:effectRef idx="0">
             <a:schemeClr val="accent1"/>
           </a:effectRef>
           <a:fontRef idx="minor">
-            <a:schemeClr val="tx1"/>
+            <a:schemeClr val="lt1"/>
           </a:fontRef>
         </p:style>
-      </p:cxnSp>
+        <p:txBody>
+          <a:bodyPr rtlCol="0" anchor="ctr"/>
+          <a:lstStyle/>
+          <a:p>
+            <a:pPr algn="ctr"/>
+            <a:endParaRPr lang="de-DE"/>
+          </a:p>
+        </p:txBody>
+      </p:sp>
+      <p:sp>
+        <p:nvSpPr>
+          <p:cNvPr id="17" name="Rechteck 16">
+            <a:extLst>
+              <a:ext uri="{FF2B5EF4-FFF2-40B4-BE49-F238E27FC236}">
+                <a16:creationId xmlns:a16="http://schemas.microsoft.com/office/drawing/2014/main" id="{E35756E1-98A1-4E81-A36D-3563F350605C}"/>
+              </a:ext>
+            </a:extLst>
+          </p:cNvPr>
+          <p:cNvSpPr/>
+          <p:nvPr/>
+        </p:nvSpPr>
+        <p:spPr>
+          <a:xfrm>
+            <a:off x="8469000" y="6674036"/>
+            <a:ext cx="18000" cy="18000"/>
+          </a:xfrm>
+          <a:prstGeom prst="rect">
+            <a:avLst/>
+          </a:prstGeom>
+        </p:spPr>
+        <p:style>
+          <a:lnRef idx="2">
+            <a:schemeClr val="accent1">
+              <a:shade val="50000"/>
+            </a:schemeClr>
+          </a:lnRef>
+          <a:fillRef idx="1">
+            <a:schemeClr val="accent1"/>
+          </a:fillRef>
+          <a:effectRef idx="0">
+            <a:schemeClr val="accent1"/>
+          </a:effectRef>
+          <a:fontRef idx="minor">
+            <a:schemeClr val="lt1"/>
+          </a:fontRef>
+        </p:style>
+        <p:txBody>
+          <a:bodyPr rtlCol="0" anchor="ctr"/>
+          <a:lstStyle/>
+          <a:p>
+            <a:pPr algn="ctr"/>
+            <a:endParaRPr lang="de-DE"/>
+          </a:p>
+        </p:txBody>
+      </p:sp>
+      <p:pic>
+        <p:nvPicPr>
+          <p:cNvPr id="19" name="Grafik 18">
+            <a:extLst>
+              <a:ext uri="{FF2B5EF4-FFF2-40B4-BE49-F238E27FC236}">
+                <a16:creationId xmlns:a16="http://schemas.microsoft.com/office/drawing/2014/main" id="{7A73D3EE-E8FD-4BE3-BD73-BFB7282567DC}"/>
+              </a:ext>
+            </a:extLst>
+          </p:cNvPr>
+          <p:cNvPicPr>
+            <a:picLocks noChangeAspect="1"/>
+          </p:cNvPicPr>
+          <p:nvPr/>
+        </p:nvPicPr>
+        <p:blipFill>
+          <a:blip r:embed="rId5"/>
+          <a:stretch>
+            <a:fillRect/>
+          </a:stretch>
+        </p:blipFill>
+        <p:spPr>
+          <a:xfrm>
+            <a:off x="4506475" y="6168215"/>
+            <a:ext cx="357410" cy="360000"/>
+          </a:xfrm>
+          <a:prstGeom prst="rect">
+            <a:avLst/>
+          </a:prstGeom>
+        </p:spPr>
+      </p:pic>
     </p:spTree>
     <p:extLst>
       <p:ext uri="{BB962C8B-B14F-4D97-AF65-F5344CB8AC3E}">
-        <p14:creationId xmlns:p14="http://schemas.microsoft.com/office/powerpoint/2010/main" val="1072550700"/>
+        <p14:creationId xmlns:p14="http://schemas.microsoft.com/office/powerpoint/2010/main" val="3667934759"/>
       </p:ext>
     </p:extLst>
   </p:cSld>
@@ -29321,10 +29970,10 @@
       </p:grpSpPr>
       <p:sp>
         <p:nvSpPr>
-          <p:cNvPr id="3" name="Titel 2">
-            <a:extLst>
-              <a:ext uri="{FF2B5EF4-FFF2-40B4-BE49-F238E27FC236}">
-                <a16:creationId xmlns:a16="http://schemas.microsoft.com/office/drawing/2014/main" id="{3D10174C-7C02-4C8B-8C94-C98C8716E4FD}"/>
+          <p:cNvPr id="2" name="Titel 1">
+            <a:extLst>
+              <a:ext uri="{FF2B5EF4-FFF2-40B4-BE49-F238E27FC236}">
+                <a16:creationId xmlns:a16="http://schemas.microsoft.com/office/drawing/2014/main" id="{80602C5F-0F9F-4C7E-8B24-2CA2582B8E54}"/>
               </a:ext>
             </a:extLst>
           </p:cNvPr>
@@ -29340,17 +29989,235 @@
           <a:bodyPr/>
           <a:lstStyle/>
           <a:p>
-            <a:r>
-              <a:rPr lang="de-DE"/>
-              <a:t>Storybook</a:t>
-            </a:r>
+            <a:endParaRPr lang="de-DE"/>
           </a:p>
         </p:txBody>
       </p:sp>
+      <p:pic>
+        <p:nvPicPr>
+          <p:cNvPr id="3" name="Grafik 2">
+            <a:extLst>
+              <a:ext uri="{FF2B5EF4-FFF2-40B4-BE49-F238E27FC236}">
+                <a16:creationId xmlns:a16="http://schemas.microsoft.com/office/drawing/2014/main" id="{DB88AFA4-427A-46D8-9C22-3B3F456A5F7F}"/>
+              </a:ext>
+            </a:extLst>
+          </p:cNvPr>
+          <p:cNvPicPr>
+            <a:picLocks noChangeAspect="1"/>
+          </p:cNvPicPr>
+          <p:nvPr/>
+        </p:nvPicPr>
+        <p:blipFill>
+          <a:blip r:embed="rId2">
+            <a:extLst>
+              <a:ext uri="{28A0092B-C50C-407E-A947-70E740481C1C}">
+                <a14:useLocalDpi xmlns:a14="http://schemas.microsoft.com/office/drawing/2010/main" val="0"/>
+              </a:ext>
+            </a:extLst>
+          </a:blip>
+          <a:stretch>
+            <a:fillRect/>
+          </a:stretch>
+        </p:blipFill>
+        <p:spPr>
+          <a:xfrm>
+            <a:off x="4102903" y="3360722"/>
+            <a:ext cx="468000" cy="418266"/>
+          </a:xfrm>
+          <a:prstGeom prst="rect">
+            <a:avLst/>
+          </a:prstGeom>
+        </p:spPr>
+      </p:pic>
+      <p:pic>
+        <p:nvPicPr>
+          <p:cNvPr id="1030" name="Picture 6" descr="Settings - Free Tools and utensils icons">
+            <a:extLst>
+              <a:ext uri="{FF2B5EF4-FFF2-40B4-BE49-F238E27FC236}">
+                <a16:creationId xmlns:a16="http://schemas.microsoft.com/office/drawing/2014/main" id="{49D6F0FB-8DF9-4837-A0A6-6611A4F0E18C}"/>
+              </a:ext>
+            </a:extLst>
+          </p:cNvPr>
+          <p:cNvPicPr>
+            <a:picLocks noChangeAspect="1" noChangeArrowheads="1"/>
+          </p:cNvPicPr>
+          <p:nvPr/>
+        </p:nvPicPr>
+        <p:blipFill>
+          <a:blip r:embed="rId3">
+            <a:extLst>
+              <a:ext uri="{28A0092B-C50C-407E-A947-70E740481C1C}">
+                <a14:useLocalDpi xmlns:a14="http://schemas.microsoft.com/office/drawing/2010/main" val="0"/>
+              </a:ext>
+            </a:extLst>
+          </a:blip>
+          <a:srcRect/>
+          <a:stretch>
+            <a:fillRect/>
+          </a:stretch>
+        </p:blipFill>
+        <p:spPr bwMode="auto">
+          <a:xfrm>
+            <a:off x="6730903" y="3335855"/>
+            <a:ext cx="468000" cy="468000"/>
+          </a:xfrm>
+          <a:prstGeom prst="rect">
+            <a:avLst/>
+          </a:prstGeom>
+          <a:noFill/>
+          <a:extLst>
+            <a:ext uri="{909E8E84-426E-40DD-AFC4-6F175D3DCCD1}">
+              <a14:hiddenFill xmlns:a14="http://schemas.microsoft.com/office/drawing/2010/main">
+                <a:solidFill>
+                  <a:srgbClr val="FFFFFF"/>
+                </a:solidFill>
+              </a14:hiddenFill>
+            </a:ext>
+          </a:extLst>
+        </p:spPr>
+      </p:pic>
+      <p:sp>
+        <p:nvSpPr>
+          <p:cNvPr id="4" name="Rechteck 3">
+            <a:extLst>
+              <a:ext uri="{FF2B5EF4-FFF2-40B4-BE49-F238E27FC236}">
+                <a16:creationId xmlns:a16="http://schemas.microsoft.com/office/drawing/2014/main" id="{61E1F318-A3E1-4905-B544-2AD306F57087}"/>
+              </a:ext>
+            </a:extLst>
+          </p:cNvPr>
+          <p:cNvSpPr/>
+          <p:nvPr/>
+        </p:nvSpPr>
+        <p:spPr>
+          <a:xfrm>
+            <a:off x="4027055" y="3260436"/>
+            <a:ext cx="3260436" cy="618837"/>
+          </a:xfrm>
+          <a:prstGeom prst="rect">
+            <a:avLst/>
+          </a:prstGeom>
+          <a:noFill/>
+          <a:ln>
+            <a:solidFill>
+              <a:schemeClr val="accent1"/>
+            </a:solidFill>
+          </a:ln>
+        </p:spPr>
+        <p:style>
+          <a:lnRef idx="2">
+            <a:schemeClr val="accent1">
+              <a:shade val="50000"/>
+            </a:schemeClr>
+          </a:lnRef>
+          <a:fillRef idx="1">
+            <a:schemeClr val="accent1"/>
+          </a:fillRef>
+          <a:effectRef idx="0">
+            <a:schemeClr val="accent1"/>
+          </a:effectRef>
+          <a:fontRef idx="minor">
+            <a:schemeClr val="lt1"/>
+          </a:fontRef>
+        </p:style>
+        <p:txBody>
+          <a:bodyPr rtlCol="0" anchor="ctr"/>
+          <a:lstStyle/>
+          <a:p>
+            <a:pPr algn="ctr"/>
+            <a:endParaRPr lang="de-DE"/>
+          </a:p>
+        </p:txBody>
+      </p:sp>
+      <p:sp>
+        <p:nvSpPr>
+          <p:cNvPr id="12" name="Textfeld 11">
+            <a:extLst>
+              <a:ext uri="{FF2B5EF4-FFF2-40B4-BE49-F238E27FC236}">
+                <a16:creationId xmlns:a16="http://schemas.microsoft.com/office/drawing/2014/main" id="{BBA9EF90-1E80-477B-AFC5-A096F1550676}"/>
+              </a:ext>
+            </a:extLst>
+          </p:cNvPr>
+          <p:cNvSpPr txBox="1"/>
+          <p:nvPr/>
+        </p:nvSpPr>
+        <p:spPr>
+          <a:xfrm>
+            <a:off x="628072" y="1163127"/>
+            <a:ext cx="947695" cy="430887"/>
+          </a:xfrm>
+          <a:prstGeom prst="rect">
+            <a:avLst/>
+          </a:prstGeom>
+          <a:noFill/>
+        </p:spPr>
+        <p:txBody>
+          <a:bodyPr wrap="none" rtlCol="0">
+            <a:spAutoFit/>
+          </a:bodyPr>
+          <a:lstStyle/>
+          <a:p>
+            <a:r>
+              <a:rPr lang="de-DE" sz="1100" b="1"/>
+              <a:t>Frame</a:t>
+            </a:r>
+            <a:endParaRPr lang="de-DE" sz="1100"/>
+          </a:p>
+          <a:p>
+            <a:pPr marL="171450" indent="-171450">
+              <a:buFontTx/>
+              <a:buChar char="-"/>
+            </a:pPr>
+            <a:r>
+              <a:rPr lang="de-DE" sz="1100"/>
+              <a:t>Breite : 86</a:t>
+            </a:r>
+          </a:p>
+        </p:txBody>
+      </p:sp>
+      <p:cxnSp>
+        <p:nvCxnSpPr>
+          <p:cNvPr id="7" name="Gerader Verbinder 6">
+            <a:extLst>
+              <a:ext uri="{FF2B5EF4-FFF2-40B4-BE49-F238E27FC236}">
+                <a16:creationId xmlns:a16="http://schemas.microsoft.com/office/drawing/2014/main" id="{4B078B84-66EB-47F5-B888-32B908C1E6BA}"/>
+              </a:ext>
+            </a:extLst>
+          </p:cNvPr>
+          <p:cNvCxnSpPr>
+            <a:cxnSpLocks/>
+            <a:stCxn id="4" idx="0"/>
+            <a:endCxn id="4" idx="2"/>
+          </p:cNvCxnSpPr>
+          <p:nvPr/>
+        </p:nvCxnSpPr>
+        <p:spPr>
+          <a:xfrm>
+            <a:off x="5657273" y="3260436"/>
+            <a:ext cx="0" cy="618837"/>
+          </a:xfrm>
+          <a:prstGeom prst="line">
+            <a:avLst/>
+          </a:prstGeom>
+        </p:spPr>
+        <p:style>
+          <a:lnRef idx="1">
+            <a:schemeClr val="accent1"/>
+          </a:lnRef>
+          <a:fillRef idx="0">
+            <a:schemeClr val="accent1"/>
+          </a:fillRef>
+          <a:effectRef idx="0">
+            <a:schemeClr val="accent1"/>
+          </a:effectRef>
+          <a:fontRef idx="minor">
+            <a:schemeClr val="tx1"/>
+          </a:fontRef>
+        </p:style>
+      </p:cxnSp>
     </p:spTree>
     <p:extLst>
       <p:ext uri="{BB962C8B-B14F-4D97-AF65-F5344CB8AC3E}">
-        <p14:creationId xmlns:p14="http://schemas.microsoft.com/office/powerpoint/2010/main" val="1817157621"/>
+        <p14:creationId xmlns:p14="http://schemas.microsoft.com/office/powerpoint/2010/main" val="1072550700"/>
       </p:ext>
     </p:extLst>
   </p:cSld>
@@ -29382,6 +30249,64 @@
           <p:cNvPr id="3" name="Titel 2">
             <a:extLst>
               <a:ext uri="{FF2B5EF4-FFF2-40B4-BE49-F238E27FC236}">
+                <a16:creationId xmlns:a16="http://schemas.microsoft.com/office/drawing/2014/main" id="{3D10174C-7C02-4C8B-8C94-C98C8716E4FD}"/>
+              </a:ext>
+            </a:extLst>
+          </p:cNvPr>
+          <p:cNvSpPr>
+            <a:spLocks noGrp="1"/>
+          </p:cNvSpPr>
+          <p:nvPr>
+            <p:ph type="title"/>
+          </p:nvPr>
+        </p:nvSpPr>
+        <p:spPr/>
+        <p:txBody>
+          <a:bodyPr/>
+          <a:lstStyle/>
+          <a:p>
+            <a:r>
+              <a:rPr lang="de-DE"/>
+              <a:t>Storybook</a:t>
+            </a:r>
+          </a:p>
+        </p:txBody>
+      </p:sp>
+    </p:spTree>
+    <p:extLst>
+      <p:ext uri="{BB962C8B-B14F-4D97-AF65-F5344CB8AC3E}">
+        <p14:creationId xmlns:p14="http://schemas.microsoft.com/office/powerpoint/2010/main" val="1817157621"/>
+      </p:ext>
+    </p:extLst>
+  </p:cSld>
+  <p:clrMapOvr>
+    <a:masterClrMapping/>
+  </p:clrMapOvr>
+</p:sld>
+</file>
+
+<file path=ppt/slides/slide34.xml><?xml version="1.0" encoding="utf-8"?>
+<p:sld xmlns:a="http://schemas.openxmlformats.org/drawingml/2006/main" xmlns:r="http://schemas.openxmlformats.org/officeDocument/2006/relationships" xmlns:p="http://schemas.openxmlformats.org/presentationml/2006/main">
+  <p:cSld>
+    <p:spTree>
+      <p:nvGrpSpPr>
+        <p:cNvPr id="1" name=""/>
+        <p:cNvGrpSpPr/>
+        <p:nvPr/>
+      </p:nvGrpSpPr>
+      <p:grpSpPr>
+        <a:xfrm>
+          <a:off x="0" y="0"/>
+          <a:ext cx="0" cy="0"/>
+          <a:chOff x="0" y="0"/>
+          <a:chExt cx="0" cy="0"/>
+        </a:xfrm>
+      </p:grpSpPr>
+      <p:sp>
+        <p:nvSpPr>
+          <p:cNvPr id="3" name="Titel 2">
+            <a:extLst>
+              <a:ext uri="{FF2B5EF4-FFF2-40B4-BE49-F238E27FC236}">
                 <a16:creationId xmlns:a16="http://schemas.microsoft.com/office/drawing/2014/main" id="{51D9B674-E0A9-452F-A749-67D4C9B83A5D}"/>
               </a:ext>
             </a:extLst>
@@ -29553,7 +30478,7 @@
 </p:sld>
 </file>
 
-<file path=ppt/slides/slide34.xml><?xml version="1.0" encoding="utf-8"?>
+<file path=ppt/slides/slide35.xml><?xml version="1.0" encoding="utf-8"?>
 <p:sld xmlns:a="http://schemas.openxmlformats.org/drawingml/2006/main" xmlns:r="http://schemas.openxmlformats.org/officeDocument/2006/relationships" xmlns:p="http://schemas.openxmlformats.org/presentationml/2006/main">
   <p:cSld>
     <p:spTree>
@@ -32265,7 +33190,7 @@
 </p:sld>
 </file>
 
-<file path=ppt/slides/slide35.xml><?xml version="1.0" encoding="utf-8"?>
+<file path=ppt/slides/slide36.xml><?xml version="1.0" encoding="utf-8"?>
 <p:sld xmlns:a="http://schemas.openxmlformats.org/drawingml/2006/main" xmlns:r="http://schemas.openxmlformats.org/officeDocument/2006/relationships" xmlns:p="http://schemas.openxmlformats.org/presentationml/2006/main">
   <p:cSld>
     <p:spTree>
@@ -32605,7 +33530,7 @@
 </p:sld>
 </file>
 
-<file path=ppt/slides/slide36.xml><?xml version="1.0" encoding="utf-8"?>
+<file path=ppt/slides/slide37.xml><?xml version="1.0" encoding="utf-8"?>
 <p:sld xmlns:a="http://schemas.openxmlformats.org/drawingml/2006/main" xmlns:r="http://schemas.openxmlformats.org/officeDocument/2006/relationships" xmlns:p="http://schemas.openxmlformats.org/presentationml/2006/main">
   <p:cSld>
     <p:spTree>
@@ -33316,7 +34241,7 @@
 </p:sld>
 </file>
 
-<file path=ppt/slides/slide37.xml><?xml version="1.0" encoding="utf-8"?>
+<file path=ppt/slides/slide38.xml><?xml version="1.0" encoding="utf-8"?>
 <p:sld xmlns:a="http://schemas.openxmlformats.org/drawingml/2006/main" xmlns:r="http://schemas.openxmlformats.org/officeDocument/2006/relationships" xmlns:p="http://schemas.openxmlformats.org/presentationml/2006/main">
   <p:cSld>
     <p:spTree>
@@ -35767,7 +36692,7 @@
 </p:sld>
 </file>
 
-<file path=ppt/slides/slide38.xml><?xml version="1.0" encoding="utf-8"?>
+<file path=ppt/slides/slide39.xml><?xml version="1.0" encoding="utf-8"?>
 <p:sld xmlns:a="http://schemas.openxmlformats.org/drawingml/2006/main" xmlns:r="http://schemas.openxmlformats.org/officeDocument/2006/relationships" xmlns:p="http://schemas.openxmlformats.org/presentationml/2006/main">
   <p:cSld>
     <p:spTree>
@@ -35825,7 +36750,1527 @@
 </p:sld>
 </file>
 
-<file path=ppt/slides/slide39.xml><?xml version="1.0" encoding="utf-8"?>
+<file path=ppt/slides/slide4.xml><?xml version="1.0" encoding="utf-8"?>
+<p:sld xmlns:a="http://schemas.openxmlformats.org/drawingml/2006/main" xmlns:r="http://schemas.openxmlformats.org/officeDocument/2006/relationships" xmlns:p="http://schemas.openxmlformats.org/presentationml/2006/main">
+  <p:cSld>
+    <p:spTree>
+      <p:nvGrpSpPr>
+        <p:cNvPr id="1" name=""/>
+        <p:cNvGrpSpPr/>
+        <p:nvPr/>
+      </p:nvGrpSpPr>
+      <p:grpSpPr>
+        <a:xfrm>
+          <a:off x="0" y="0"/>
+          <a:ext cx="0" cy="0"/>
+          <a:chOff x="0" y="0"/>
+          <a:chExt cx="0" cy="0"/>
+        </a:xfrm>
+      </p:grpSpPr>
+      <p:sp>
+        <p:nvSpPr>
+          <p:cNvPr id="11" name="Textfeld 10">
+            <a:extLst>
+              <a:ext uri="{FF2B5EF4-FFF2-40B4-BE49-F238E27FC236}">
+                <a16:creationId xmlns:a16="http://schemas.microsoft.com/office/drawing/2014/main" id="{56DC88D4-CE4D-45AF-8C76-D38E7B37FDC4}"/>
+              </a:ext>
+            </a:extLst>
+          </p:cNvPr>
+          <p:cNvSpPr txBox="1"/>
+          <p:nvPr/>
+        </p:nvSpPr>
+        <p:spPr>
+          <a:xfrm>
+            <a:off x="1906845" y="1548846"/>
+            <a:ext cx="1459054" cy="900246"/>
+          </a:xfrm>
+          <a:prstGeom prst="rect">
+            <a:avLst/>
+          </a:prstGeom>
+          <a:noFill/>
+        </p:spPr>
+        <p:txBody>
+          <a:bodyPr wrap="none" rtlCol="0">
+            <a:spAutoFit/>
+          </a:bodyPr>
+          <a:lstStyle/>
+          <a:p>
+            <a:r>
+              <a:rPr lang="de-DE" sz="1050" b="1"/>
+              <a:t>USB Pin Mapping</a:t>
+            </a:r>
+          </a:p>
+          <a:p>
+            <a:pPr marL="171450" indent="-171450">
+              <a:buFont typeface="Arial" panose="020B0604020202020204" pitchFamily="34" charset="0"/>
+              <a:buChar char="•"/>
+            </a:pPr>
+            <a:r>
+              <a:rPr lang="de-DE" sz="1050"/>
+              <a:t>G : GND </a:t>
+            </a:r>
+          </a:p>
+          <a:p>
+            <a:pPr marL="171450" indent="-171450">
+              <a:buFont typeface="Arial" panose="020B0604020202020204" pitchFamily="34" charset="0"/>
+              <a:buChar char="•"/>
+            </a:pPr>
+            <a:r>
+              <a:rPr lang="de-DE" sz="1050"/>
+              <a:t>D- : SDA (Ardino A4)</a:t>
+            </a:r>
+          </a:p>
+          <a:p>
+            <a:pPr marL="171450" indent="-171450">
+              <a:buFont typeface="Arial" panose="020B0604020202020204" pitchFamily="34" charset="0"/>
+              <a:buChar char="•"/>
+            </a:pPr>
+            <a:r>
+              <a:rPr lang="de-DE" sz="1050"/>
+              <a:t>D+ : SCL (Ardino A5)</a:t>
+            </a:r>
+          </a:p>
+          <a:p>
+            <a:pPr marL="171450" indent="-171450">
+              <a:buFont typeface="Arial" panose="020B0604020202020204" pitchFamily="34" charset="0"/>
+              <a:buChar char="•"/>
+            </a:pPr>
+            <a:r>
+              <a:rPr lang="de-DE" sz="1050"/>
+              <a:t>V : 5V</a:t>
+            </a:r>
+          </a:p>
+        </p:txBody>
+      </p:sp>
+      <p:sp>
+        <p:nvSpPr>
+          <p:cNvPr id="36" name="Rechteck 35">
+            <a:extLst>
+              <a:ext uri="{FF2B5EF4-FFF2-40B4-BE49-F238E27FC236}">
+                <a16:creationId xmlns:a16="http://schemas.microsoft.com/office/drawing/2014/main" id="{8A5DFFB1-12E2-40C7-BCB4-E7E8E3CC8C65}"/>
+              </a:ext>
+            </a:extLst>
+          </p:cNvPr>
+          <p:cNvSpPr/>
+          <p:nvPr/>
+        </p:nvSpPr>
+        <p:spPr>
+          <a:xfrm>
+            <a:off x="3686322" y="1524215"/>
+            <a:ext cx="6400362" cy="475671"/>
+          </a:xfrm>
+          <a:prstGeom prst="rect">
+            <a:avLst/>
+          </a:prstGeom>
+          <a:solidFill>
+            <a:schemeClr val="tx2">
+              <a:lumMod val="20000"/>
+              <a:lumOff val="80000"/>
+            </a:schemeClr>
+          </a:solidFill>
+          <a:ln>
+            <a:solidFill>
+              <a:schemeClr val="accent2">
+                <a:shade val="50000"/>
+              </a:schemeClr>
+            </a:solidFill>
+          </a:ln>
+        </p:spPr>
+        <p:style>
+          <a:lnRef idx="2">
+            <a:schemeClr val="accent3">
+              <a:shade val="50000"/>
+            </a:schemeClr>
+          </a:lnRef>
+          <a:fillRef idx="1">
+            <a:schemeClr val="accent3"/>
+          </a:fillRef>
+          <a:effectRef idx="0">
+            <a:schemeClr val="accent3"/>
+          </a:effectRef>
+          <a:fontRef idx="minor">
+            <a:schemeClr val="lt1"/>
+          </a:fontRef>
+        </p:style>
+        <p:txBody>
+          <a:bodyPr rtlCol="0" anchor="b" anchorCtr="0"/>
+          <a:lstStyle/>
+          <a:p>
+            <a:pPr algn="ctr"/>
+            <a:r>
+              <a:rPr lang="de-DE" sz="1200" b="1">
+                <a:solidFill>
+                  <a:schemeClr val="tx1"/>
+                </a:solidFill>
+              </a:rPr>
+              <a:t>I2C Sockets Board</a:t>
+            </a:r>
+          </a:p>
+        </p:txBody>
+      </p:sp>
+      <p:sp>
+        <p:nvSpPr>
+          <p:cNvPr id="37" name="Rechteck 36">
+            <a:extLst>
+              <a:ext uri="{FF2B5EF4-FFF2-40B4-BE49-F238E27FC236}">
+                <a16:creationId xmlns:a16="http://schemas.microsoft.com/office/drawing/2014/main" id="{DA618160-B645-4880-8C62-124AE0484CD2}"/>
+              </a:ext>
+            </a:extLst>
+          </p:cNvPr>
+          <p:cNvSpPr/>
+          <p:nvPr/>
+        </p:nvSpPr>
+        <p:spPr>
+          <a:xfrm>
+            <a:off x="3822720" y="1754523"/>
+            <a:ext cx="1090824" cy="488893"/>
+          </a:xfrm>
+          <a:prstGeom prst="rect">
+            <a:avLst/>
+          </a:prstGeom>
+        </p:spPr>
+        <p:style>
+          <a:lnRef idx="2">
+            <a:schemeClr val="accent1"/>
+          </a:lnRef>
+          <a:fillRef idx="1">
+            <a:schemeClr val="lt1"/>
+          </a:fillRef>
+          <a:effectRef idx="0">
+            <a:schemeClr val="accent1"/>
+          </a:effectRef>
+          <a:fontRef idx="minor">
+            <a:schemeClr val="dk1"/>
+          </a:fontRef>
+        </p:style>
+        <p:txBody>
+          <a:bodyPr lIns="0" tIns="0" rIns="0" bIns="0" rtlCol="0" anchor="ctr"/>
+          <a:lstStyle/>
+          <a:p>
+            <a:pPr algn="ctr"/>
+            <a:r>
+              <a:rPr lang="de-DE" sz="1050"/>
+              <a:t>Gadget A </a:t>
+            </a:r>
+            <a:br>
+              <a:rPr lang="de-DE" sz="1050"/>
+            </a:br>
+            <a:r>
+              <a:rPr lang="de-DE" sz="1050"/>
+              <a:t>Panel Port USB</a:t>
+            </a:r>
+          </a:p>
+        </p:txBody>
+      </p:sp>
+      <p:sp>
+        <p:nvSpPr>
+          <p:cNvPr id="38" name="Rechteck 37">
+            <a:extLst>
+              <a:ext uri="{FF2B5EF4-FFF2-40B4-BE49-F238E27FC236}">
+                <a16:creationId xmlns:a16="http://schemas.microsoft.com/office/drawing/2014/main" id="{7F456F1E-9DB0-4032-AE29-389468E87743}"/>
+              </a:ext>
+            </a:extLst>
+          </p:cNvPr>
+          <p:cNvSpPr/>
+          <p:nvPr/>
+        </p:nvSpPr>
+        <p:spPr>
+          <a:xfrm>
+            <a:off x="4988723" y="1754523"/>
+            <a:ext cx="1090824" cy="488893"/>
+          </a:xfrm>
+          <a:prstGeom prst="rect">
+            <a:avLst/>
+          </a:prstGeom>
+        </p:spPr>
+        <p:style>
+          <a:lnRef idx="2">
+            <a:schemeClr val="accent1"/>
+          </a:lnRef>
+          <a:fillRef idx="1">
+            <a:schemeClr val="lt1"/>
+          </a:fillRef>
+          <a:effectRef idx="0">
+            <a:schemeClr val="accent1"/>
+          </a:effectRef>
+          <a:fontRef idx="minor">
+            <a:schemeClr val="dk1"/>
+          </a:fontRef>
+        </p:style>
+        <p:txBody>
+          <a:bodyPr lIns="0" tIns="0" rIns="0" bIns="0" rtlCol="0" anchor="ctr"/>
+          <a:lstStyle/>
+          <a:p>
+            <a:pPr algn="ctr"/>
+            <a:r>
+              <a:rPr lang="de-DE" sz="1050"/>
+              <a:t>Gadget B </a:t>
+            </a:r>
+            <a:br>
+              <a:rPr lang="de-DE" sz="1050"/>
+            </a:br>
+            <a:r>
+              <a:rPr lang="de-DE" sz="1050"/>
+              <a:t>Panel Port USB</a:t>
+            </a:r>
+          </a:p>
+        </p:txBody>
+      </p:sp>
+      <p:sp>
+        <p:nvSpPr>
+          <p:cNvPr id="43" name="Rechteck 42">
+            <a:extLst>
+              <a:ext uri="{FF2B5EF4-FFF2-40B4-BE49-F238E27FC236}">
+                <a16:creationId xmlns:a16="http://schemas.microsoft.com/office/drawing/2014/main" id="{84EF28E1-E101-417E-9F93-1C3763EE9F1E}"/>
+              </a:ext>
+            </a:extLst>
+          </p:cNvPr>
+          <p:cNvSpPr/>
+          <p:nvPr/>
+        </p:nvSpPr>
+        <p:spPr>
+          <a:xfrm>
+            <a:off x="7666555" y="1754523"/>
+            <a:ext cx="1090824" cy="488893"/>
+          </a:xfrm>
+          <a:prstGeom prst="rect">
+            <a:avLst/>
+          </a:prstGeom>
+        </p:spPr>
+        <p:style>
+          <a:lnRef idx="2">
+            <a:schemeClr val="accent1"/>
+          </a:lnRef>
+          <a:fillRef idx="1">
+            <a:schemeClr val="lt1"/>
+          </a:fillRef>
+          <a:effectRef idx="0">
+            <a:schemeClr val="accent1"/>
+          </a:effectRef>
+          <a:fontRef idx="minor">
+            <a:schemeClr val="dk1"/>
+          </a:fontRef>
+        </p:style>
+        <p:txBody>
+          <a:bodyPr lIns="0" tIns="0" rIns="0" bIns="0" rtlCol="0" anchor="ctr"/>
+          <a:lstStyle/>
+          <a:p>
+            <a:pPr algn="ctr"/>
+            <a:r>
+              <a:rPr lang="de-DE" sz="1050"/>
+              <a:t>Gadget C </a:t>
+            </a:r>
+            <a:br>
+              <a:rPr lang="de-DE" sz="1050"/>
+            </a:br>
+            <a:r>
+              <a:rPr lang="de-DE" sz="1050"/>
+              <a:t>Panel Port USB</a:t>
+            </a:r>
+          </a:p>
+        </p:txBody>
+      </p:sp>
+      <p:sp>
+        <p:nvSpPr>
+          <p:cNvPr id="44" name="Rechteck 43">
+            <a:extLst>
+              <a:ext uri="{FF2B5EF4-FFF2-40B4-BE49-F238E27FC236}">
+                <a16:creationId xmlns:a16="http://schemas.microsoft.com/office/drawing/2014/main" id="{040896B2-28E3-4E51-BC38-4B82A4E22D10}"/>
+              </a:ext>
+            </a:extLst>
+          </p:cNvPr>
+          <p:cNvSpPr/>
+          <p:nvPr/>
+        </p:nvSpPr>
+        <p:spPr>
+          <a:xfrm>
+            <a:off x="8836382" y="1754523"/>
+            <a:ext cx="1090824" cy="488893"/>
+          </a:xfrm>
+          <a:prstGeom prst="rect">
+            <a:avLst/>
+          </a:prstGeom>
+        </p:spPr>
+        <p:style>
+          <a:lnRef idx="2">
+            <a:schemeClr val="accent1"/>
+          </a:lnRef>
+          <a:fillRef idx="1">
+            <a:schemeClr val="lt1"/>
+          </a:fillRef>
+          <a:effectRef idx="0">
+            <a:schemeClr val="accent1"/>
+          </a:effectRef>
+          <a:fontRef idx="minor">
+            <a:schemeClr val="dk1"/>
+          </a:fontRef>
+        </p:style>
+        <p:txBody>
+          <a:bodyPr lIns="0" tIns="0" rIns="0" bIns="0" rtlCol="0" anchor="ctr"/>
+          <a:lstStyle/>
+          <a:p>
+            <a:pPr algn="ctr"/>
+            <a:r>
+              <a:rPr lang="de-DE" sz="1050"/>
+              <a:t>Gadget D </a:t>
+            </a:r>
+            <a:br>
+              <a:rPr lang="de-DE" sz="1050"/>
+            </a:br>
+            <a:r>
+              <a:rPr lang="de-DE" sz="1050"/>
+              <a:t>Panel Port USB</a:t>
+            </a:r>
+          </a:p>
+        </p:txBody>
+      </p:sp>
+      <p:sp>
+        <p:nvSpPr>
+          <p:cNvPr id="47" name="Rechteck 46">
+            <a:extLst>
+              <a:ext uri="{FF2B5EF4-FFF2-40B4-BE49-F238E27FC236}">
+                <a16:creationId xmlns:a16="http://schemas.microsoft.com/office/drawing/2014/main" id="{15541076-C957-4821-A4AA-5329A39729AA}"/>
+              </a:ext>
+            </a:extLst>
+          </p:cNvPr>
+          <p:cNvSpPr/>
+          <p:nvPr/>
+        </p:nvSpPr>
+        <p:spPr>
+          <a:xfrm>
+            <a:off x="1714770" y="3707824"/>
+            <a:ext cx="8371914" cy="2235776"/>
+          </a:xfrm>
+          <a:prstGeom prst="rect">
+            <a:avLst/>
+          </a:prstGeom>
+          <a:solidFill>
+            <a:schemeClr val="tx2">
+              <a:lumMod val="20000"/>
+              <a:lumOff val="80000"/>
+            </a:schemeClr>
+          </a:solidFill>
+          <a:ln>
+            <a:solidFill>
+              <a:schemeClr val="accent2">
+                <a:shade val="50000"/>
+              </a:schemeClr>
+            </a:solidFill>
+          </a:ln>
+        </p:spPr>
+        <p:style>
+          <a:lnRef idx="2">
+            <a:schemeClr val="accent3">
+              <a:shade val="50000"/>
+            </a:schemeClr>
+          </a:lnRef>
+          <a:fillRef idx="1">
+            <a:schemeClr val="accent3"/>
+          </a:fillRef>
+          <a:effectRef idx="0">
+            <a:schemeClr val="accent3"/>
+          </a:effectRef>
+          <a:fontRef idx="minor">
+            <a:schemeClr val="lt1"/>
+          </a:fontRef>
+        </p:style>
+        <p:txBody>
+          <a:bodyPr rtlCol="0" anchor="ctr" anchorCtr="0"/>
+          <a:lstStyle/>
+          <a:p>
+            <a:pPr algn="ctr"/>
+            <a:endParaRPr lang="de-DE" sz="1400"/>
+          </a:p>
+        </p:txBody>
+      </p:sp>
+      <p:sp>
+        <p:nvSpPr>
+          <p:cNvPr id="48" name="Rechteck 47">
+            <a:extLst>
+              <a:ext uri="{FF2B5EF4-FFF2-40B4-BE49-F238E27FC236}">
+                <a16:creationId xmlns:a16="http://schemas.microsoft.com/office/drawing/2014/main" id="{A40BF01E-2DCA-4E73-A232-D120912B12CF}"/>
+              </a:ext>
+            </a:extLst>
+          </p:cNvPr>
+          <p:cNvSpPr/>
+          <p:nvPr/>
+        </p:nvSpPr>
+        <p:spPr>
+          <a:xfrm>
+            <a:off x="6881438" y="4398673"/>
+            <a:ext cx="2155161" cy="476250"/>
+          </a:xfrm>
+          <a:prstGeom prst="rect">
+            <a:avLst/>
+          </a:prstGeom>
+          <a:solidFill>
+            <a:schemeClr val="accent3">
+              <a:lumMod val="20000"/>
+              <a:lumOff val="80000"/>
+            </a:schemeClr>
+          </a:solidFill>
+        </p:spPr>
+        <p:style>
+          <a:lnRef idx="2">
+            <a:schemeClr val="accent1">
+              <a:shade val="50000"/>
+            </a:schemeClr>
+          </a:lnRef>
+          <a:fillRef idx="1">
+            <a:schemeClr val="accent1"/>
+          </a:fillRef>
+          <a:effectRef idx="0">
+            <a:schemeClr val="accent1"/>
+          </a:effectRef>
+          <a:fontRef idx="minor">
+            <a:schemeClr val="lt1"/>
+          </a:fontRef>
+        </p:style>
+        <p:txBody>
+          <a:bodyPr rtlCol="0" anchor="ctr"/>
+          <a:lstStyle/>
+          <a:p>
+            <a:pPr algn="ctr"/>
+            <a:r>
+              <a:rPr lang="de-DE" sz="1050" b="1">
+                <a:solidFill>
+                  <a:schemeClr val="tx1"/>
+                </a:solidFill>
+              </a:rPr>
+              <a:t>Arduino Nano</a:t>
+            </a:r>
+          </a:p>
+        </p:txBody>
+      </p:sp>
+      <p:sp>
+        <p:nvSpPr>
+          <p:cNvPr id="49" name="Textfeld 48">
+            <a:extLst>
+              <a:ext uri="{FF2B5EF4-FFF2-40B4-BE49-F238E27FC236}">
+                <a16:creationId xmlns:a16="http://schemas.microsoft.com/office/drawing/2014/main" id="{0174C8A6-F452-45A0-922C-D2322AA080F4}"/>
+              </a:ext>
+            </a:extLst>
+          </p:cNvPr>
+          <p:cNvSpPr txBox="1"/>
+          <p:nvPr/>
+        </p:nvSpPr>
+        <p:spPr>
+          <a:xfrm>
+            <a:off x="1826223" y="3866219"/>
+            <a:ext cx="1629036" cy="276999"/>
+          </a:xfrm>
+          <a:prstGeom prst="rect">
+            <a:avLst/>
+          </a:prstGeom>
+          <a:noFill/>
+        </p:spPr>
+        <p:txBody>
+          <a:bodyPr wrap="none" rtlCol="0">
+            <a:spAutoFit/>
+          </a:bodyPr>
+          <a:lstStyle/>
+          <a:p>
+            <a:r>
+              <a:rPr lang="de-DE" sz="1200" b="1"/>
+              <a:t>General Gadget Board</a:t>
+            </a:r>
+          </a:p>
+        </p:txBody>
+      </p:sp>
+      <p:sp>
+        <p:nvSpPr>
+          <p:cNvPr id="50" name="Rechteck 49">
+            <a:extLst>
+              <a:ext uri="{FF2B5EF4-FFF2-40B4-BE49-F238E27FC236}">
+                <a16:creationId xmlns:a16="http://schemas.microsoft.com/office/drawing/2014/main" id="{58C83A44-09D3-415C-86FB-BBDA5121B123}"/>
+              </a:ext>
+            </a:extLst>
+          </p:cNvPr>
+          <p:cNvSpPr/>
+          <p:nvPr/>
+        </p:nvSpPr>
+        <p:spPr>
+          <a:xfrm>
+            <a:off x="8681491" y="4245586"/>
+            <a:ext cx="271142" cy="276999"/>
+          </a:xfrm>
+          <a:prstGeom prst="rect">
+            <a:avLst/>
+          </a:prstGeom>
+          <a:solidFill>
+            <a:schemeClr val="accent2">
+              <a:lumMod val="75000"/>
+            </a:schemeClr>
+          </a:solidFill>
+          <a:ln/>
+        </p:spPr>
+        <p:style>
+          <a:lnRef idx="2">
+            <a:schemeClr val="accent5">
+              <a:shade val="50000"/>
+            </a:schemeClr>
+          </a:lnRef>
+          <a:fillRef idx="1">
+            <a:schemeClr val="accent5"/>
+          </a:fillRef>
+          <a:effectRef idx="0">
+            <a:schemeClr val="accent5"/>
+          </a:effectRef>
+          <a:fontRef idx="minor">
+            <a:schemeClr val="lt1"/>
+          </a:fontRef>
+        </p:style>
+        <p:txBody>
+          <a:bodyPr rtlCol="0" anchor="ctr"/>
+          <a:lstStyle/>
+          <a:p>
+            <a:pPr algn="ctr"/>
+            <a:endParaRPr lang="de-DE" sz="1400"/>
+          </a:p>
+        </p:txBody>
+      </p:sp>
+      <p:sp>
+        <p:nvSpPr>
+          <p:cNvPr id="53" name="Rechteck 52">
+            <a:extLst>
+              <a:ext uri="{FF2B5EF4-FFF2-40B4-BE49-F238E27FC236}">
+                <a16:creationId xmlns:a16="http://schemas.microsoft.com/office/drawing/2014/main" id="{ECC7F473-BB48-4E87-81C9-89B8357E0734}"/>
+              </a:ext>
+            </a:extLst>
+          </p:cNvPr>
+          <p:cNvSpPr/>
+          <p:nvPr/>
+        </p:nvSpPr>
+        <p:spPr>
+          <a:xfrm>
+            <a:off x="8195665" y="2751713"/>
+            <a:ext cx="1224284" cy="596632"/>
+          </a:xfrm>
+          <a:prstGeom prst="rect">
+            <a:avLst/>
+          </a:prstGeom>
+        </p:spPr>
+        <p:style>
+          <a:lnRef idx="2">
+            <a:schemeClr val="accent1"/>
+          </a:lnRef>
+          <a:fillRef idx="1">
+            <a:schemeClr val="lt1"/>
+          </a:fillRef>
+          <a:effectRef idx="0">
+            <a:schemeClr val="accent1"/>
+          </a:effectRef>
+          <a:fontRef idx="minor">
+            <a:schemeClr val="dk1"/>
+          </a:fontRef>
+        </p:style>
+        <p:txBody>
+          <a:bodyPr rtlCol="0" anchor="ctr"/>
+          <a:lstStyle/>
+          <a:p>
+            <a:pPr algn="ctr"/>
+            <a:r>
+              <a:rPr lang="de-DE" sz="1050"/>
+              <a:t>Service </a:t>
+            </a:r>
+            <a:br>
+              <a:rPr lang="de-DE" sz="1050"/>
+            </a:br>
+            <a:r>
+              <a:rPr lang="de-DE" sz="1050"/>
+              <a:t>Panel Port (USB)</a:t>
+            </a:r>
+          </a:p>
+        </p:txBody>
+      </p:sp>
+      <p:cxnSp>
+        <p:nvCxnSpPr>
+          <p:cNvPr id="56" name="Gerader Verbinder 55">
+            <a:extLst>
+              <a:ext uri="{FF2B5EF4-FFF2-40B4-BE49-F238E27FC236}">
+                <a16:creationId xmlns:a16="http://schemas.microsoft.com/office/drawing/2014/main" id="{07C487F2-F593-46C4-B533-F9B43CDC73B8}"/>
+              </a:ext>
+            </a:extLst>
+          </p:cNvPr>
+          <p:cNvCxnSpPr>
+            <a:cxnSpLocks/>
+            <a:stCxn id="53" idx="2"/>
+            <a:endCxn id="50" idx="0"/>
+          </p:cNvCxnSpPr>
+          <p:nvPr/>
+        </p:nvCxnSpPr>
+        <p:spPr>
+          <a:xfrm>
+            <a:off x="8807807" y="3348345"/>
+            <a:ext cx="9255" cy="897241"/>
+          </a:xfrm>
+          <a:prstGeom prst="line">
+            <a:avLst/>
+          </a:prstGeom>
+          <a:ln w="73025" cmpd="tri">
+            <a:solidFill>
+              <a:srgbClr val="C00000"/>
+            </a:solidFill>
+            <a:prstDash val="solid"/>
+          </a:ln>
+        </p:spPr>
+        <p:style>
+          <a:lnRef idx="1">
+            <a:schemeClr val="accent1"/>
+          </a:lnRef>
+          <a:fillRef idx="0">
+            <a:schemeClr val="accent1"/>
+          </a:fillRef>
+          <a:effectRef idx="0">
+            <a:schemeClr val="accent1"/>
+          </a:effectRef>
+          <a:fontRef idx="minor">
+            <a:schemeClr val="tx1"/>
+          </a:fontRef>
+        </p:style>
+      </p:cxnSp>
+      <p:sp>
+        <p:nvSpPr>
+          <p:cNvPr id="57" name="Rechteck 56">
+            <a:extLst>
+              <a:ext uri="{FF2B5EF4-FFF2-40B4-BE49-F238E27FC236}">
+                <a16:creationId xmlns:a16="http://schemas.microsoft.com/office/drawing/2014/main" id="{22549A2D-87A2-4E92-9A9A-FC9B5FBEE3A6}"/>
+              </a:ext>
+            </a:extLst>
+          </p:cNvPr>
+          <p:cNvSpPr/>
+          <p:nvPr/>
+        </p:nvSpPr>
+        <p:spPr>
+          <a:xfrm>
+            <a:off x="3755990" y="2751713"/>
+            <a:ext cx="1224284" cy="596632"/>
+          </a:xfrm>
+          <a:prstGeom prst="rect">
+            <a:avLst/>
+          </a:prstGeom>
+        </p:spPr>
+        <p:style>
+          <a:lnRef idx="2">
+            <a:schemeClr val="accent1"/>
+          </a:lnRef>
+          <a:fillRef idx="1">
+            <a:schemeClr val="lt1"/>
+          </a:fillRef>
+          <a:effectRef idx="0">
+            <a:schemeClr val="accent1"/>
+          </a:effectRef>
+          <a:fontRef idx="minor">
+            <a:schemeClr val="dk1"/>
+          </a:fontRef>
+        </p:style>
+        <p:txBody>
+          <a:bodyPr rtlCol="0" anchor="ctr"/>
+          <a:lstStyle/>
+          <a:p>
+            <a:pPr algn="ctr"/>
+            <a:r>
+              <a:rPr lang="de-DE" sz="1050"/>
+              <a:t>I2C Bus </a:t>
+            </a:r>
+            <a:br>
+              <a:rPr lang="de-DE" sz="1050"/>
+            </a:br>
+            <a:r>
+              <a:rPr lang="de-DE" sz="1050"/>
+              <a:t>Panel Port (USB)</a:t>
+            </a:r>
+          </a:p>
+        </p:txBody>
+      </p:sp>
+      <p:cxnSp>
+        <p:nvCxnSpPr>
+          <p:cNvPr id="58" name="Gerader Verbinder 57">
+            <a:extLst>
+              <a:ext uri="{FF2B5EF4-FFF2-40B4-BE49-F238E27FC236}">
+                <a16:creationId xmlns:a16="http://schemas.microsoft.com/office/drawing/2014/main" id="{7496F8F8-C29E-4701-9FF4-70C0B8AFCAD7}"/>
+              </a:ext>
+            </a:extLst>
+          </p:cNvPr>
+          <p:cNvCxnSpPr>
+            <a:cxnSpLocks/>
+            <a:stCxn id="37" idx="2"/>
+            <a:endCxn id="57" idx="0"/>
+          </p:cNvCxnSpPr>
+          <p:nvPr/>
+        </p:nvCxnSpPr>
+        <p:spPr>
+          <a:xfrm>
+            <a:off x="4368132" y="2243416"/>
+            <a:ext cx="0" cy="508297"/>
+          </a:xfrm>
+          <a:prstGeom prst="line">
+            <a:avLst/>
+          </a:prstGeom>
+          <a:ln w="73025" cmpd="tri">
+            <a:solidFill>
+              <a:srgbClr val="C00000"/>
+            </a:solidFill>
+            <a:prstDash val="solid"/>
+          </a:ln>
+        </p:spPr>
+        <p:style>
+          <a:lnRef idx="1">
+            <a:schemeClr val="accent1"/>
+          </a:lnRef>
+          <a:fillRef idx="0">
+            <a:schemeClr val="accent1"/>
+          </a:fillRef>
+          <a:effectRef idx="0">
+            <a:schemeClr val="accent1"/>
+          </a:effectRef>
+          <a:fontRef idx="minor">
+            <a:schemeClr val="tx1"/>
+          </a:fontRef>
+        </p:style>
+      </p:cxnSp>
+      <p:cxnSp>
+        <p:nvCxnSpPr>
+          <p:cNvPr id="59" name="Gerader Verbinder 25">
+            <a:extLst>
+              <a:ext uri="{FF2B5EF4-FFF2-40B4-BE49-F238E27FC236}">
+                <a16:creationId xmlns:a16="http://schemas.microsoft.com/office/drawing/2014/main" id="{4BD1B8E9-F92D-4CA1-95BD-D3FDDCA6737E}"/>
+              </a:ext>
+            </a:extLst>
+          </p:cNvPr>
+          <p:cNvCxnSpPr>
+            <a:cxnSpLocks/>
+            <a:stCxn id="64" idx="2"/>
+            <a:endCxn id="62" idx="0"/>
+          </p:cNvCxnSpPr>
+          <p:nvPr/>
+        </p:nvCxnSpPr>
+        <p:spPr>
+          <a:xfrm rot="16200000" flipH="1">
+            <a:off x="6001924" y="2362229"/>
+            <a:ext cx="699345" cy="3067368"/>
+          </a:xfrm>
+          <a:prstGeom prst="bentConnector3">
+            <a:avLst>
+              <a:gd name="adj1" fmla="val 50000"/>
+            </a:avLst>
+          </a:prstGeom>
+          <a:ln w="12700">
+            <a:prstDash val="sysDash"/>
+          </a:ln>
+        </p:spPr>
+        <p:style>
+          <a:lnRef idx="1">
+            <a:schemeClr val="accent1"/>
+          </a:lnRef>
+          <a:fillRef idx="0">
+            <a:schemeClr val="accent1"/>
+          </a:fillRef>
+          <a:effectRef idx="0">
+            <a:schemeClr val="accent1"/>
+          </a:effectRef>
+          <a:fontRef idx="minor">
+            <a:schemeClr val="tx1"/>
+          </a:fontRef>
+        </p:style>
+      </p:cxnSp>
+      <p:cxnSp>
+        <p:nvCxnSpPr>
+          <p:cNvPr id="60" name="Gerader Verbinder 144">
+            <a:extLst>
+              <a:ext uri="{FF2B5EF4-FFF2-40B4-BE49-F238E27FC236}">
+                <a16:creationId xmlns:a16="http://schemas.microsoft.com/office/drawing/2014/main" id="{EE51453A-DFEA-4EB9-87F2-B4E26FAA40DC}"/>
+              </a:ext>
+            </a:extLst>
+          </p:cNvPr>
+          <p:cNvCxnSpPr>
+            <a:cxnSpLocks/>
+            <a:stCxn id="61" idx="0"/>
+            <a:endCxn id="63" idx="2"/>
+          </p:cNvCxnSpPr>
+          <p:nvPr/>
+        </p:nvCxnSpPr>
+        <p:spPr>
+          <a:xfrm rot="16200000" flipV="1">
+            <a:off x="5645106" y="2423483"/>
+            <a:ext cx="690849" cy="2936366"/>
+          </a:xfrm>
+          <a:prstGeom prst="bentConnector3">
+            <a:avLst>
+              <a:gd name="adj1" fmla="val 21046"/>
+            </a:avLst>
+          </a:prstGeom>
+          <a:ln w="12700">
+            <a:prstDash val="sysDash"/>
+          </a:ln>
+        </p:spPr>
+        <p:style>
+          <a:lnRef idx="1">
+            <a:schemeClr val="accent1"/>
+          </a:lnRef>
+          <a:fillRef idx="0">
+            <a:schemeClr val="accent1"/>
+          </a:fillRef>
+          <a:effectRef idx="0">
+            <a:schemeClr val="accent1"/>
+          </a:effectRef>
+          <a:fontRef idx="minor">
+            <a:schemeClr val="tx1"/>
+          </a:fontRef>
+        </p:style>
+      </p:cxnSp>
+      <p:sp>
+        <p:nvSpPr>
+          <p:cNvPr id="61" name="Textfeld 60">
+            <a:extLst>
+              <a:ext uri="{FF2B5EF4-FFF2-40B4-BE49-F238E27FC236}">
+                <a16:creationId xmlns:a16="http://schemas.microsoft.com/office/drawing/2014/main" id="{2F5168E0-AB4F-4916-A84E-851F1FE537D2}"/>
+              </a:ext>
+            </a:extLst>
+          </p:cNvPr>
+          <p:cNvSpPr txBox="1"/>
+          <p:nvPr/>
+        </p:nvSpPr>
+        <p:spPr>
+          <a:xfrm>
+            <a:off x="7384975" y="4237090"/>
+            <a:ext cx="147476" cy="161583"/>
+          </a:xfrm>
+          <a:prstGeom prst="rect">
+            <a:avLst/>
+          </a:prstGeom>
+          <a:noFill/>
+        </p:spPr>
+        <p:txBody>
+          <a:bodyPr wrap="none" lIns="0" tIns="0" rIns="0" bIns="0" rtlCol="0">
+            <a:spAutoFit/>
+          </a:bodyPr>
+          <a:lstStyle/>
+          <a:p>
+            <a:pPr algn="ctr"/>
+            <a:r>
+              <a:rPr lang="de-DE" sz="1050"/>
+              <a:t>A5</a:t>
+            </a:r>
+          </a:p>
+        </p:txBody>
+      </p:sp>
+      <p:sp>
+        <p:nvSpPr>
+          <p:cNvPr id="62" name="Textfeld 61">
+            <a:extLst>
+              <a:ext uri="{FF2B5EF4-FFF2-40B4-BE49-F238E27FC236}">
+                <a16:creationId xmlns:a16="http://schemas.microsoft.com/office/drawing/2014/main" id="{EE2449FA-AF1F-4A81-BC06-8CA2B156DDC8}"/>
+              </a:ext>
+            </a:extLst>
+          </p:cNvPr>
+          <p:cNvSpPr txBox="1"/>
+          <p:nvPr/>
+        </p:nvSpPr>
+        <p:spPr>
+          <a:xfrm>
+            <a:off x="7811542" y="4245586"/>
+            <a:ext cx="147476" cy="161583"/>
+          </a:xfrm>
+          <a:prstGeom prst="rect">
+            <a:avLst/>
+          </a:prstGeom>
+          <a:noFill/>
+        </p:spPr>
+        <p:txBody>
+          <a:bodyPr wrap="none" lIns="0" tIns="0" rIns="0" bIns="0" rtlCol="0">
+            <a:spAutoFit/>
+          </a:bodyPr>
+          <a:lstStyle/>
+          <a:p>
+            <a:pPr algn="ctr"/>
+            <a:r>
+              <a:rPr lang="de-DE" sz="1050"/>
+              <a:t>A4</a:t>
+            </a:r>
+          </a:p>
+        </p:txBody>
+      </p:sp>
+      <p:sp>
+        <p:nvSpPr>
+          <p:cNvPr id="63" name="Textfeld 62">
+            <a:extLst>
+              <a:ext uri="{FF2B5EF4-FFF2-40B4-BE49-F238E27FC236}">
+                <a16:creationId xmlns:a16="http://schemas.microsoft.com/office/drawing/2014/main" id="{FA1E916C-83F4-4294-82C9-19AB781C3A7B}"/>
+              </a:ext>
+            </a:extLst>
+          </p:cNvPr>
+          <p:cNvSpPr txBox="1"/>
+          <p:nvPr/>
+        </p:nvSpPr>
+        <p:spPr>
+          <a:xfrm>
+            <a:off x="4447005" y="3384658"/>
+            <a:ext cx="150683" cy="161583"/>
+          </a:xfrm>
+          <a:prstGeom prst="rect">
+            <a:avLst/>
+          </a:prstGeom>
+          <a:noFill/>
+        </p:spPr>
+        <p:txBody>
+          <a:bodyPr wrap="none" lIns="0" tIns="0" rIns="0" bIns="0" rtlCol="0">
+            <a:spAutoFit/>
+          </a:bodyPr>
+          <a:lstStyle/>
+          <a:p>
+            <a:pPr algn="ctr"/>
+            <a:r>
+              <a:rPr lang="de-DE" sz="1050"/>
+              <a:t>D+</a:t>
+            </a:r>
+          </a:p>
+        </p:txBody>
+      </p:sp>
+      <p:sp>
+        <p:nvSpPr>
+          <p:cNvPr id="64" name="Textfeld 63">
+            <a:extLst>
+              <a:ext uri="{FF2B5EF4-FFF2-40B4-BE49-F238E27FC236}">
+                <a16:creationId xmlns:a16="http://schemas.microsoft.com/office/drawing/2014/main" id="{9664CBA6-EE12-467C-BBAF-83C33CD5BC48}"/>
+              </a:ext>
+            </a:extLst>
+          </p:cNvPr>
+          <p:cNvSpPr txBox="1"/>
+          <p:nvPr/>
+        </p:nvSpPr>
+        <p:spPr>
+          <a:xfrm>
+            <a:off x="4755394" y="3384658"/>
+            <a:ext cx="125035" cy="161583"/>
+          </a:xfrm>
+          <a:prstGeom prst="rect">
+            <a:avLst/>
+          </a:prstGeom>
+          <a:noFill/>
+        </p:spPr>
+        <p:txBody>
+          <a:bodyPr wrap="none" lIns="0" tIns="0" rIns="0" bIns="0" rtlCol="0">
+            <a:spAutoFit/>
+          </a:bodyPr>
+          <a:lstStyle/>
+          <a:p>
+            <a:pPr algn="ctr"/>
+            <a:r>
+              <a:rPr lang="de-DE" sz="1050"/>
+              <a:t>D-</a:t>
+            </a:r>
+          </a:p>
+        </p:txBody>
+      </p:sp>
+      <p:sp>
+        <p:nvSpPr>
+          <p:cNvPr id="65" name="Textfeld 64">
+            <a:extLst>
+              <a:ext uri="{FF2B5EF4-FFF2-40B4-BE49-F238E27FC236}">
+                <a16:creationId xmlns:a16="http://schemas.microsoft.com/office/drawing/2014/main" id="{6AE57407-BB77-4F82-BB74-051727B81BB6}"/>
+              </a:ext>
+            </a:extLst>
+          </p:cNvPr>
+          <p:cNvSpPr txBox="1"/>
+          <p:nvPr/>
+        </p:nvSpPr>
+        <p:spPr>
+          <a:xfrm>
+            <a:off x="4034421" y="3384658"/>
+            <a:ext cx="254878" cy="161583"/>
+          </a:xfrm>
+          <a:prstGeom prst="rect">
+            <a:avLst/>
+          </a:prstGeom>
+          <a:noFill/>
+        </p:spPr>
+        <p:txBody>
+          <a:bodyPr wrap="none" lIns="0" tIns="0" rIns="0" bIns="0" rtlCol="0">
+            <a:spAutoFit/>
+          </a:bodyPr>
+          <a:lstStyle/>
+          <a:p>
+            <a:pPr algn="ctr"/>
+            <a:r>
+              <a:rPr lang="de-DE" sz="1050"/>
+              <a:t>GND</a:t>
+            </a:r>
+          </a:p>
+        </p:txBody>
+      </p:sp>
+      <p:sp>
+        <p:nvSpPr>
+          <p:cNvPr id="66" name="Textfeld 65">
+            <a:extLst>
+              <a:ext uri="{FF2B5EF4-FFF2-40B4-BE49-F238E27FC236}">
+                <a16:creationId xmlns:a16="http://schemas.microsoft.com/office/drawing/2014/main" id="{9E22AFBC-053F-4454-9533-8080405529D3}"/>
+              </a:ext>
+            </a:extLst>
+          </p:cNvPr>
+          <p:cNvSpPr txBox="1"/>
+          <p:nvPr/>
+        </p:nvSpPr>
+        <p:spPr>
+          <a:xfrm>
+            <a:off x="3799771" y="3384658"/>
+            <a:ext cx="76944" cy="161583"/>
+          </a:xfrm>
+          <a:prstGeom prst="rect">
+            <a:avLst/>
+          </a:prstGeom>
+          <a:noFill/>
+        </p:spPr>
+        <p:txBody>
+          <a:bodyPr wrap="none" lIns="0" tIns="0" rIns="0" bIns="0" rtlCol="0">
+            <a:spAutoFit/>
+          </a:bodyPr>
+          <a:lstStyle/>
+          <a:p>
+            <a:pPr algn="ctr"/>
+            <a:r>
+              <a:rPr lang="de-DE" sz="1050"/>
+              <a:t>V</a:t>
+            </a:r>
+          </a:p>
+        </p:txBody>
+      </p:sp>
+      <p:sp>
+        <p:nvSpPr>
+          <p:cNvPr id="67" name="Textfeld 66">
+            <a:extLst>
+              <a:ext uri="{FF2B5EF4-FFF2-40B4-BE49-F238E27FC236}">
+                <a16:creationId xmlns:a16="http://schemas.microsoft.com/office/drawing/2014/main" id="{8E4803F8-8375-41E8-9F26-3C269B2658EB}"/>
+              </a:ext>
+            </a:extLst>
+          </p:cNvPr>
+          <p:cNvSpPr txBox="1"/>
+          <p:nvPr/>
+        </p:nvSpPr>
+        <p:spPr>
+          <a:xfrm>
+            <a:off x="6649194" y="4659400"/>
+            <a:ext cx="145874" cy="161583"/>
+          </a:xfrm>
+          <a:prstGeom prst="rect">
+            <a:avLst/>
+          </a:prstGeom>
+          <a:noFill/>
+        </p:spPr>
+        <p:txBody>
+          <a:bodyPr wrap="none" lIns="0" tIns="0" rIns="0" bIns="0" rtlCol="0">
+            <a:spAutoFit/>
+          </a:bodyPr>
+          <a:lstStyle/>
+          <a:p>
+            <a:pPr algn="ctr"/>
+            <a:r>
+              <a:rPr lang="de-DE" sz="1050"/>
+              <a:t>5V</a:t>
+            </a:r>
+          </a:p>
+        </p:txBody>
+      </p:sp>
+      <p:sp>
+        <p:nvSpPr>
+          <p:cNvPr id="68" name="Textfeld 67">
+            <a:extLst>
+              <a:ext uri="{FF2B5EF4-FFF2-40B4-BE49-F238E27FC236}">
+                <a16:creationId xmlns:a16="http://schemas.microsoft.com/office/drawing/2014/main" id="{3ED310A7-CC75-43D4-8697-2E524F283436}"/>
+              </a:ext>
+            </a:extLst>
+          </p:cNvPr>
+          <p:cNvSpPr txBox="1"/>
+          <p:nvPr/>
+        </p:nvSpPr>
+        <p:spPr>
+          <a:xfrm>
+            <a:off x="6594691" y="4434987"/>
+            <a:ext cx="254878" cy="161583"/>
+          </a:xfrm>
+          <a:prstGeom prst="rect">
+            <a:avLst/>
+          </a:prstGeom>
+          <a:noFill/>
+        </p:spPr>
+        <p:txBody>
+          <a:bodyPr wrap="none" lIns="0" tIns="0" rIns="0" bIns="0" rtlCol="0">
+            <a:spAutoFit/>
+          </a:bodyPr>
+          <a:lstStyle/>
+          <a:p>
+            <a:pPr algn="ctr"/>
+            <a:r>
+              <a:rPr lang="de-DE" sz="1050"/>
+              <a:t>GND</a:t>
+            </a:r>
+          </a:p>
+        </p:txBody>
+      </p:sp>
+      <p:cxnSp>
+        <p:nvCxnSpPr>
+          <p:cNvPr id="69" name="Gerader Verbinder 144">
+            <a:extLst>
+              <a:ext uri="{FF2B5EF4-FFF2-40B4-BE49-F238E27FC236}">
+                <a16:creationId xmlns:a16="http://schemas.microsoft.com/office/drawing/2014/main" id="{A2FCE0FD-763F-48B9-A30D-C8C576ACFA05}"/>
+              </a:ext>
+            </a:extLst>
+          </p:cNvPr>
+          <p:cNvCxnSpPr>
+            <a:cxnSpLocks/>
+            <a:stCxn id="67" idx="1"/>
+            <a:endCxn id="66" idx="2"/>
+          </p:cNvCxnSpPr>
+          <p:nvPr/>
+        </p:nvCxnSpPr>
+        <p:spPr>
+          <a:xfrm rot="10800000">
+            <a:off x="3838244" y="3546242"/>
+            <a:ext cx="2810951" cy="1193951"/>
+          </a:xfrm>
+          <a:prstGeom prst="bentConnector2">
+            <a:avLst/>
+          </a:prstGeom>
+          <a:ln w="12700">
+            <a:prstDash val="sysDash"/>
+          </a:ln>
+        </p:spPr>
+        <p:style>
+          <a:lnRef idx="1">
+            <a:schemeClr val="accent1"/>
+          </a:lnRef>
+          <a:fillRef idx="0">
+            <a:schemeClr val="accent1"/>
+          </a:fillRef>
+          <a:effectRef idx="0">
+            <a:schemeClr val="accent1"/>
+          </a:effectRef>
+          <a:fontRef idx="minor">
+            <a:schemeClr val="tx1"/>
+          </a:fontRef>
+        </p:style>
+      </p:cxnSp>
+      <p:cxnSp>
+        <p:nvCxnSpPr>
+          <p:cNvPr id="70" name="Gerader Verbinder 144">
+            <a:extLst>
+              <a:ext uri="{FF2B5EF4-FFF2-40B4-BE49-F238E27FC236}">
+                <a16:creationId xmlns:a16="http://schemas.microsoft.com/office/drawing/2014/main" id="{5CFD8E38-D655-4F0B-8C80-B16737427665}"/>
+              </a:ext>
+            </a:extLst>
+          </p:cNvPr>
+          <p:cNvCxnSpPr>
+            <a:cxnSpLocks/>
+            <a:stCxn id="68" idx="1"/>
+            <a:endCxn id="65" idx="2"/>
+          </p:cNvCxnSpPr>
+          <p:nvPr/>
+        </p:nvCxnSpPr>
+        <p:spPr>
+          <a:xfrm rot="10800000">
+            <a:off x="4161861" y="3546241"/>
+            <a:ext cx="2432831" cy="969538"/>
+          </a:xfrm>
+          <a:prstGeom prst="bentConnector2">
+            <a:avLst/>
+          </a:prstGeom>
+          <a:ln w="12700">
+            <a:prstDash val="sysDash"/>
+          </a:ln>
+        </p:spPr>
+        <p:style>
+          <a:lnRef idx="1">
+            <a:schemeClr val="accent1"/>
+          </a:lnRef>
+          <a:fillRef idx="0">
+            <a:schemeClr val="accent1"/>
+          </a:fillRef>
+          <a:effectRef idx="0">
+            <a:schemeClr val="accent1"/>
+          </a:effectRef>
+          <a:fontRef idx="minor">
+            <a:schemeClr val="tx1"/>
+          </a:fontRef>
+        </p:style>
+      </p:cxnSp>
+      <p:sp>
+        <p:nvSpPr>
+          <p:cNvPr id="71" name="Rechteck 70">
+            <a:extLst>
+              <a:ext uri="{FF2B5EF4-FFF2-40B4-BE49-F238E27FC236}">
+                <a16:creationId xmlns:a16="http://schemas.microsoft.com/office/drawing/2014/main" id="{C85F59A0-9865-46A3-A3D7-2CC035447306}"/>
+              </a:ext>
+            </a:extLst>
+          </p:cNvPr>
+          <p:cNvSpPr/>
+          <p:nvPr/>
+        </p:nvSpPr>
+        <p:spPr>
+          <a:xfrm>
+            <a:off x="3301022" y="5099673"/>
+            <a:ext cx="1273762" cy="476250"/>
+          </a:xfrm>
+          <a:prstGeom prst="rect">
+            <a:avLst/>
+          </a:prstGeom>
+          <a:solidFill>
+            <a:schemeClr val="accent3">
+              <a:lumMod val="20000"/>
+              <a:lumOff val="80000"/>
+            </a:schemeClr>
+          </a:solidFill>
+        </p:spPr>
+        <p:style>
+          <a:lnRef idx="2">
+            <a:schemeClr val="accent1">
+              <a:shade val="50000"/>
+            </a:schemeClr>
+          </a:lnRef>
+          <a:fillRef idx="1">
+            <a:schemeClr val="accent1"/>
+          </a:fillRef>
+          <a:effectRef idx="0">
+            <a:schemeClr val="accent1"/>
+          </a:effectRef>
+          <a:fontRef idx="minor">
+            <a:schemeClr val="lt1"/>
+          </a:fontRef>
+        </p:style>
+        <p:txBody>
+          <a:bodyPr rtlCol="0" anchor="ctr"/>
+          <a:lstStyle/>
+          <a:p>
+            <a:pPr algn="ctr"/>
+            <a:r>
+              <a:rPr lang="de-DE" sz="1050" b="1">
+                <a:solidFill>
+                  <a:schemeClr val="tx1"/>
+                </a:solidFill>
+              </a:rPr>
+              <a:t>other component</a:t>
+            </a:r>
+          </a:p>
+        </p:txBody>
+      </p:sp>
+      <p:sp>
+        <p:nvSpPr>
+          <p:cNvPr id="72" name="Rechteck 71">
+            <a:extLst>
+              <a:ext uri="{FF2B5EF4-FFF2-40B4-BE49-F238E27FC236}">
+                <a16:creationId xmlns:a16="http://schemas.microsoft.com/office/drawing/2014/main" id="{48A0DF21-A8D5-4153-A5A7-FEB9C5D358B3}"/>
+              </a:ext>
+            </a:extLst>
+          </p:cNvPr>
+          <p:cNvSpPr/>
+          <p:nvPr/>
+        </p:nvSpPr>
+        <p:spPr>
+          <a:xfrm>
+            <a:off x="4804529" y="5099673"/>
+            <a:ext cx="1273762" cy="476250"/>
+          </a:xfrm>
+          <a:prstGeom prst="rect">
+            <a:avLst/>
+          </a:prstGeom>
+          <a:solidFill>
+            <a:schemeClr val="accent3">
+              <a:lumMod val="20000"/>
+              <a:lumOff val="80000"/>
+            </a:schemeClr>
+          </a:solidFill>
+        </p:spPr>
+        <p:style>
+          <a:lnRef idx="2">
+            <a:schemeClr val="accent1">
+              <a:shade val="50000"/>
+            </a:schemeClr>
+          </a:lnRef>
+          <a:fillRef idx="1">
+            <a:schemeClr val="accent1"/>
+          </a:fillRef>
+          <a:effectRef idx="0">
+            <a:schemeClr val="accent1"/>
+          </a:effectRef>
+          <a:fontRef idx="minor">
+            <a:schemeClr val="lt1"/>
+          </a:fontRef>
+        </p:style>
+        <p:txBody>
+          <a:bodyPr rtlCol="0" anchor="ctr"/>
+          <a:lstStyle/>
+          <a:p>
+            <a:pPr algn="ctr"/>
+            <a:r>
+              <a:rPr lang="de-DE" sz="1050" b="1">
+                <a:solidFill>
+                  <a:schemeClr val="tx1"/>
+                </a:solidFill>
+              </a:rPr>
+              <a:t>other component</a:t>
+            </a:r>
+          </a:p>
+        </p:txBody>
+      </p:sp>
+      <p:sp>
+        <p:nvSpPr>
+          <p:cNvPr id="73" name="Rechteck 72">
+            <a:extLst>
+              <a:ext uri="{FF2B5EF4-FFF2-40B4-BE49-F238E27FC236}">
+                <a16:creationId xmlns:a16="http://schemas.microsoft.com/office/drawing/2014/main" id="{61A5DCC2-244B-41DD-B002-2E7FB2D50244}"/>
+              </a:ext>
+            </a:extLst>
+          </p:cNvPr>
+          <p:cNvSpPr/>
+          <p:nvPr/>
+        </p:nvSpPr>
+        <p:spPr>
+          <a:xfrm>
+            <a:off x="6308036" y="5099673"/>
+            <a:ext cx="1273762" cy="476250"/>
+          </a:xfrm>
+          <a:prstGeom prst="rect">
+            <a:avLst/>
+          </a:prstGeom>
+          <a:solidFill>
+            <a:schemeClr val="accent3">
+              <a:lumMod val="20000"/>
+              <a:lumOff val="80000"/>
+            </a:schemeClr>
+          </a:solidFill>
+        </p:spPr>
+        <p:style>
+          <a:lnRef idx="2">
+            <a:schemeClr val="accent1">
+              <a:shade val="50000"/>
+            </a:schemeClr>
+          </a:lnRef>
+          <a:fillRef idx="1">
+            <a:schemeClr val="accent1"/>
+          </a:fillRef>
+          <a:effectRef idx="0">
+            <a:schemeClr val="accent1"/>
+          </a:effectRef>
+          <a:fontRef idx="minor">
+            <a:schemeClr val="lt1"/>
+          </a:fontRef>
+        </p:style>
+        <p:txBody>
+          <a:bodyPr rtlCol="0" anchor="ctr"/>
+          <a:lstStyle/>
+          <a:p>
+            <a:pPr algn="ctr"/>
+            <a:r>
+              <a:rPr lang="de-DE" sz="1050" b="1">
+                <a:solidFill>
+                  <a:schemeClr val="tx1"/>
+                </a:solidFill>
+              </a:rPr>
+              <a:t>other component</a:t>
+            </a:r>
+          </a:p>
+        </p:txBody>
+      </p:sp>
+      <p:sp>
+        <p:nvSpPr>
+          <p:cNvPr id="74" name="Rechteck 73">
+            <a:extLst>
+              <a:ext uri="{FF2B5EF4-FFF2-40B4-BE49-F238E27FC236}">
+                <a16:creationId xmlns:a16="http://schemas.microsoft.com/office/drawing/2014/main" id="{15E3F546-3073-4295-ACA2-F6944308CAD1}"/>
+              </a:ext>
+            </a:extLst>
+          </p:cNvPr>
+          <p:cNvSpPr/>
+          <p:nvPr/>
+        </p:nvSpPr>
+        <p:spPr>
+          <a:xfrm>
+            <a:off x="7811542" y="5099673"/>
+            <a:ext cx="1273762" cy="476250"/>
+          </a:xfrm>
+          <a:prstGeom prst="rect">
+            <a:avLst/>
+          </a:prstGeom>
+          <a:solidFill>
+            <a:schemeClr val="accent3">
+              <a:lumMod val="20000"/>
+              <a:lumOff val="80000"/>
+            </a:schemeClr>
+          </a:solidFill>
+        </p:spPr>
+        <p:style>
+          <a:lnRef idx="2">
+            <a:schemeClr val="accent1">
+              <a:shade val="50000"/>
+            </a:schemeClr>
+          </a:lnRef>
+          <a:fillRef idx="1">
+            <a:schemeClr val="accent1"/>
+          </a:fillRef>
+          <a:effectRef idx="0">
+            <a:schemeClr val="accent1"/>
+          </a:effectRef>
+          <a:fontRef idx="minor">
+            <a:schemeClr val="lt1"/>
+          </a:fontRef>
+        </p:style>
+        <p:txBody>
+          <a:bodyPr rtlCol="0" anchor="ctr"/>
+          <a:lstStyle/>
+          <a:p>
+            <a:pPr algn="ctr"/>
+            <a:r>
+              <a:rPr lang="de-DE" sz="1050" b="1">
+                <a:solidFill>
+                  <a:schemeClr val="tx1"/>
+                </a:solidFill>
+              </a:rPr>
+              <a:t>other component</a:t>
+            </a:r>
+          </a:p>
+        </p:txBody>
+      </p:sp>
+      <p:sp>
+        <p:nvSpPr>
+          <p:cNvPr id="2" name="Titel 1">
+            <a:extLst>
+              <a:ext uri="{FF2B5EF4-FFF2-40B4-BE49-F238E27FC236}">
+                <a16:creationId xmlns:a16="http://schemas.microsoft.com/office/drawing/2014/main" id="{49FA0F46-CE89-441C-AC20-A5BCDEBF691C}"/>
+              </a:ext>
+            </a:extLst>
+          </p:cNvPr>
+          <p:cNvSpPr>
+            <a:spLocks noGrp="1"/>
+          </p:cNvSpPr>
+          <p:nvPr>
+            <p:ph type="title"/>
+          </p:nvPr>
+        </p:nvSpPr>
+        <p:spPr/>
+        <p:txBody>
+          <a:bodyPr/>
+          <a:lstStyle/>
+          <a:p>
+            <a:r>
+              <a:rPr lang="de-DE"/>
+              <a:t>Standard Layout Gadget</a:t>
+            </a:r>
+          </a:p>
+        </p:txBody>
+      </p:sp>
+    </p:spTree>
+    <p:extLst>
+      <p:ext uri="{BB962C8B-B14F-4D97-AF65-F5344CB8AC3E}">
+        <p14:creationId xmlns:p14="http://schemas.microsoft.com/office/powerpoint/2010/main" val="2333306632"/>
+      </p:ext>
+    </p:extLst>
+  </p:cSld>
+  <p:clrMapOvr>
+    <a:masterClrMapping/>
+  </p:clrMapOvr>
+</p:sld>
+</file>
+
+<file path=ppt/slides/slide40.xml><?xml version="1.0" encoding="utf-8"?>
 <p:sld xmlns:a="http://schemas.openxmlformats.org/drawingml/2006/main" xmlns:r="http://schemas.openxmlformats.org/officeDocument/2006/relationships" xmlns:p="http://schemas.openxmlformats.org/presentationml/2006/main">
   <p:cSld>
     <p:spTree>
@@ -37116,1527 +39561,7 @@
 </p:sld>
 </file>
 
-<file path=ppt/slides/slide4.xml><?xml version="1.0" encoding="utf-8"?>
-<p:sld xmlns:a="http://schemas.openxmlformats.org/drawingml/2006/main" xmlns:r="http://schemas.openxmlformats.org/officeDocument/2006/relationships" xmlns:p="http://schemas.openxmlformats.org/presentationml/2006/main">
-  <p:cSld>
-    <p:spTree>
-      <p:nvGrpSpPr>
-        <p:cNvPr id="1" name=""/>
-        <p:cNvGrpSpPr/>
-        <p:nvPr/>
-      </p:nvGrpSpPr>
-      <p:grpSpPr>
-        <a:xfrm>
-          <a:off x="0" y="0"/>
-          <a:ext cx="0" cy="0"/>
-          <a:chOff x="0" y="0"/>
-          <a:chExt cx="0" cy="0"/>
-        </a:xfrm>
-      </p:grpSpPr>
-      <p:sp>
-        <p:nvSpPr>
-          <p:cNvPr id="11" name="Textfeld 10">
-            <a:extLst>
-              <a:ext uri="{FF2B5EF4-FFF2-40B4-BE49-F238E27FC236}">
-                <a16:creationId xmlns:a16="http://schemas.microsoft.com/office/drawing/2014/main" id="{56DC88D4-CE4D-45AF-8C76-D38E7B37FDC4}"/>
-              </a:ext>
-            </a:extLst>
-          </p:cNvPr>
-          <p:cNvSpPr txBox="1"/>
-          <p:nvPr/>
-        </p:nvSpPr>
-        <p:spPr>
-          <a:xfrm>
-            <a:off x="1906845" y="1548846"/>
-            <a:ext cx="1459054" cy="900246"/>
-          </a:xfrm>
-          <a:prstGeom prst="rect">
-            <a:avLst/>
-          </a:prstGeom>
-          <a:noFill/>
-        </p:spPr>
-        <p:txBody>
-          <a:bodyPr wrap="none" rtlCol="0">
-            <a:spAutoFit/>
-          </a:bodyPr>
-          <a:lstStyle/>
-          <a:p>
-            <a:r>
-              <a:rPr lang="de-DE" sz="1050" b="1"/>
-              <a:t>USB Pin Mapping</a:t>
-            </a:r>
-          </a:p>
-          <a:p>
-            <a:pPr marL="171450" indent="-171450">
-              <a:buFont typeface="Arial" panose="020B0604020202020204" pitchFamily="34" charset="0"/>
-              <a:buChar char="•"/>
-            </a:pPr>
-            <a:r>
-              <a:rPr lang="de-DE" sz="1050"/>
-              <a:t>G : GND </a:t>
-            </a:r>
-          </a:p>
-          <a:p>
-            <a:pPr marL="171450" indent="-171450">
-              <a:buFont typeface="Arial" panose="020B0604020202020204" pitchFamily="34" charset="0"/>
-              <a:buChar char="•"/>
-            </a:pPr>
-            <a:r>
-              <a:rPr lang="de-DE" sz="1050"/>
-              <a:t>D- : SDA (Ardino A4)</a:t>
-            </a:r>
-          </a:p>
-          <a:p>
-            <a:pPr marL="171450" indent="-171450">
-              <a:buFont typeface="Arial" panose="020B0604020202020204" pitchFamily="34" charset="0"/>
-              <a:buChar char="•"/>
-            </a:pPr>
-            <a:r>
-              <a:rPr lang="de-DE" sz="1050"/>
-              <a:t>D+ : SCL (Ardino A5)</a:t>
-            </a:r>
-          </a:p>
-          <a:p>
-            <a:pPr marL="171450" indent="-171450">
-              <a:buFont typeface="Arial" panose="020B0604020202020204" pitchFamily="34" charset="0"/>
-              <a:buChar char="•"/>
-            </a:pPr>
-            <a:r>
-              <a:rPr lang="de-DE" sz="1050"/>
-              <a:t>V : 5V</a:t>
-            </a:r>
-          </a:p>
-        </p:txBody>
-      </p:sp>
-      <p:sp>
-        <p:nvSpPr>
-          <p:cNvPr id="36" name="Rechteck 35">
-            <a:extLst>
-              <a:ext uri="{FF2B5EF4-FFF2-40B4-BE49-F238E27FC236}">
-                <a16:creationId xmlns:a16="http://schemas.microsoft.com/office/drawing/2014/main" id="{8A5DFFB1-12E2-40C7-BCB4-E7E8E3CC8C65}"/>
-              </a:ext>
-            </a:extLst>
-          </p:cNvPr>
-          <p:cNvSpPr/>
-          <p:nvPr/>
-        </p:nvSpPr>
-        <p:spPr>
-          <a:xfrm>
-            <a:off x="3686322" y="1524215"/>
-            <a:ext cx="6400362" cy="475671"/>
-          </a:xfrm>
-          <a:prstGeom prst="rect">
-            <a:avLst/>
-          </a:prstGeom>
-          <a:solidFill>
-            <a:schemeClr val="tx2">
-              <a:lumMod val="20000"/>
-              <a:lumOff val="80000"/>
-            </a:schemeClr>
-          </a:solidFill>
-          <a:ln>
-            <a:solidFill>
-              <a:schemeClr val="accent2">
-                <a:shade val="50000"/>
-              </a:schemeClr>
-            </a:solidFill>
-          </a:ln>
-        </p:spPr>
-        <p:style>
-          <a:lnRef idx="2">
-            <a:schemeClr val="accent3">
-              <a:shade val="50000"/>
-            </a:schemeClr>
-          </a:lnRef>
-          <a:fillRef idx="1">
-            <a:schemeClr val="accent3"/>
-          </a:fillRef>
-          <a:effectRef idx="0">
-            <a:schemeClr val="accent3"/>
-          </a:effectRef>
-          <a:fontRef idx="minor">
-            <a:schemeClr val="lt1"/>
-          </a:fontRef>
-        </p:style>
-        <p:txBody>
-          <a:bodyPr rtlCol="0" anchor="b" anchorCtr="0"/>
-          <a:lstStyle/>
-          <a:p>
-            <a:pPr algn="ctr"/>
-            <a:r>
-              <a:rPr lang="de-DE" sz="1200" b="1">
-                <a:solidFill>
-                  <a:schemeClr val="tx1"/>
-                </a:solidFill>
-              </a:rPr>
-              <a:t>I2C Sockets Board</a:t>
-            </a:r>
-          </a:p>
-        </p:txBody>
-      </p:sp>
-      <p:sp>
-        <p:nvSpPr>
-          <p:cNvPr id="37" name="Rechteck 36">
-            <a:extLst>
-              <a:ext uri="{FF2B5EF4-FFF2-40B4-BE49-F238E27FC236}">
-                <a16:creationId xmlns:a16="http://schemas.microsoft.com/office/drawing/2014/main" id="{DA618160-B645-4880-8C62-124AE0484CD2}"/>
-              </a:ext>
-            </a:extLst>
-          </p:cNvPr>
-          <p:cNvSpPr/>
-          <p:nvPr/>
-        </p:nvSpPr>
-        <p:spPr>
-          <a:xfrm>
-            <a:off x="3822720" y="1754523"/>
-            <a:ext cx="1090824" cy="488893"/>
-          </a:xfrm>
-          <a:prstGeom prst="rect">
-            <a:avLst/>
-          </a:prstGeom>
-        </p:spPr>
-        <p:style>
-          <a:lnRef idx="2">
-            <a:schemeClr val="accent1"/>
-          </a:lnRef>
-          <a:fillRef idx="1">
-            <a:schemeClr val="lt1"/>
-          </a:fillRef>
-          <a:effectRef idx="0">
-            <a:schemeClr val="accent1"/>
-          </a:effectRef>
-          <a:fontRef idx="minor">
-            <a:schemeClr val="dk1"/>
-          </a:fontRef>
-        </p:style>
-        <p:txBody>
-          <a:bodyPr lIns="0" tIns="0" rIns="0" bIns="0" rtlCol="0" anchor="ctr"/>
-          <a:lstStyle/>
-          <a:p>
-            <a:pPr algn="ctr"/>
-            <a:r>
-              <a:rPr lang="de-DE" sz="1050"/>
-              <a:t>Gadget A </a:t>
-            </a:r>
-            <a:br>
-              <a:rPr lang="de-DE" sz="1050"/>
-            </a:br>
-            <a:r>
-              <a:rPr lang="de-DE" sz="1050"/>
-              <a:t>Panel Port USB</a:t>
-            </a:r>
-          </a:p>
-        </p:txBody>
-      </p:sp>
-      <p:sp>
-        <p:nvSpPr>
-          <p:cNvPr id="38" name="Rechteck 37">
-            <a:extLst>
-              <a:ext uri="{FF2B5EF4-FFF2-40B4-BE49-F238E27FC236}">
-                <a16:creationId xmlns:a16="http://schemas.microsoft.com/office/drawing/2014/main" id="{7F456F1E-9DB0-4032-AE29-389468E87743}"/>
-              </a:ext>
-            </a:extLst>
-          </p:cNvPr>
-          <p:cNvSpPr/>
-          <p:nvPr/>
-        </p:nvSpPr>
-        <p:spPr>
-          <a:xfrm>
-            <a:off x="4988723" y="1754523"/>
-            <a:ext cx="1090824" cy="488893"/>
-          </a:xfrm>
-          <a:prstGeom prst="rect">
-            <a:avLst/>
-          </a:prstGeom>
-        </p:spPr>
-        <p:style>
-          <a:lnRef idx="2">
-            <a:schemeClr val="accent1"/>
-          </a:lnRef>
-          <a:fillRef idx="1">
-            <a:schemeClr val="lt1"/>
-          </a:fillRef>
-          <a:effectRef idx="0">
-            <a:schemeClr val="accent1"/>
-          </a:effectRef>
-          <a:fontRef idx="minor">
-            <a:schemeClr val="dk1"/>
-          </a:fontRef>
-        </p:style>
-        <p:txBody>
-          <a:bodyPr lIns="0" tIns="0" rIns="0" bIns="0" rtlCol="0" anchor="ctr"/>
-          <a:lstStyle/>
-          <a:p>
-            <a:pPr algn="ctr"/>
-            <a:r>
-              <a:rPr lang="de-DE" sz="1050"/>
-              <a:t>Gadget B </a:t>
-            </a:r>
-            <a:br>
-              <a:rPr lang="de-DE" sz="1050"/>
-            </a:br>
-            <a:r>
-              <a:rPr lang="de-DE" sz="1050"/>
-              <a:t>Panel Port USB</a:t>
-            </a:r>
-          </a:p>
-        </p:txBody>
-      </p:sp>
-      <p:sp>
-        <p:nvSpPr>
-          <p:cNvPr id="43" name="Rechteck 42">
-            <a:extLst>
-              <a:ext uri="{FF2B5EF4-FFF2-40B4-BE49-F238E27FC236}">
-                <a16:creationId xmlns:a16="http://schemas.microsoft.com/office/drawing/2014/main" id="{84EF28E1-E101-417E-9F93-1C3763EE9F1E}"/>
-              </a:ext>
-            </a:extLst>
-          </p:cNvPr>
-          <p:cNvSpPr/>
-          <p:nvPr/>
-        </p:nvSpPr>
-        <p:spPr>
-          <a:xfrm>
-            <a:off x="7666555" y="1754523"/>
-            <a:ext cx="1090824" cy="488893"/>
-          </a:xfrm>
-          <a:prstGeom prst="rect">
-            <a:avLst/>
-          </a:prstGeom>
-        </p:spPr>
-        <p:style>
-          <a:lnRef idx="2">
-            <a:schemeClr val="accent1"/>
-          </a:lnRef>
-          <a:fillRef idx="1">
-            <a:schemeClr val="lt1"/>
-          </a:fillRef>
-          <a:effectRef idx="0">
-            <a:schemeClr val="accent1"/>
-          </a:effectRef>
-          <a:fontRef idx="minor">
-            <a:schemeClr val="dk1"/>
-          </a:fontRef>
-        </p:style>
-        <p:txBody>
-          <a:bodyPr lIns="0" tIns="0" rIns="0" bIns="0" rtlCol="0" anchor="ctr"/>
-          <a:lstStyle/>
-          <a:p>
-            <a:pPr algn="ctr"/>
-            <a:r>
-              <a:rPr lang="de-DE" sz="1050"/>
-              <a:t>Gadget C </a:t>
-            </a:r>
-            <a:br>
-              <a:rPr lang="de-DE" sz="1050"/>
-            </a:br>
-            <a:r>
-              <a:rPr lang="de-DE" sz="1050"/>
-              <a:t>Panel Port USB</a:t>
-            </a:r>
-          </a:p>
-        </p:txBody>
-      </p:sp>
-      <p:sp>
-        <p:nvSpPr>
-          <p:cNvPr id="44" name="Rechteck 43">
-            <a:extLst>
-              <a:ext uri="{FF2B5EF4-FFF2-40B4-BE49-F238E27FC236}">
-                <a16:creationId xmlns:a16="http://schemas.microsoft.com/office/drawing/2014/main" id="{040896B2-28E3-4E51-BC38-4B82A4E22D10}"/>
-              </a:ext>
-            </a:extLst>
-          </p:cNvPr>
-          <p:cNvSpPr/>
-          <p:nvPr/>
-        </p:nvSpPr>
-        <p:spPr>
-          <a:xfrm>
-            <a:off x="8836382" y="1754523"/>
-            <a:ext cx="1090824" cy="488893"/>
-          </a:xfrm>
-          <a:prstGeom prst="rect">
-            <a:avLst/>
-          </a:prstGeom>
-        </p:spPr>
-        <p:style>
-          <a:lnRef idx="2">
-            <a:schemeClr val="accent1"/>
-          </a:lnRef>
-          <a:fillRef idx="1">
-            <a:schemeClr val="lt1"/>
-          </a:fillRef>
-          <a:effectRef idx="0">
-            <a:schemeClr val="accent1"/>
-          </a:effectRef>
-          <a:fontRef idx="minor">
-            <a:schemeClr val="dk1"/>
-          </a:fontRef>
-        </p:style>
-        <p:txBody>
-          <a:bodyPr lIns="0" tIns="0" rIns="0" bIns="0" rtlCol="0" anchor="ctr"/>
-          <a:lstStyle/>
-          <a:p>
-            <a:pPr algn="ctr"/>
-            <a:r>
-              <a:rPr lang="de-DE" sz="1050"/>
-              <a:t>Gadget D </a:t>
-            </a:r>
-            <a:br>
-              <a:rPr lang="de-DE" sz="1050"/>
-            </a:br>
-            <a:r>
-              <a:rPr lang="de-DE" sz="1050"/>
-              <a:t>Panel Port USB</a:t>
-            </a:r>
-          </a:p>
-        </p:txBody>
-      </p:sp>
-      <p:sp>
-        <p:nvSpPr>
-          <p:cNvPr id="47" name="Rechteck 46">
-            <a:extLst>
-              <a:ext uri="{FF2B5EF4-FFF2-40B4-BE49-F238E27FC236}">
-                <a16:creationId xmlns:a16="http://schemas.microsoft.com/office/drawing/2014/main" id="{15541076-C957-4821-A4AA-5329A39729AA}"/>
-              </a:ext>
-            </a:extLst>
-          </p:cNvPr>
-          <p:cNvSpPr/>
-          <p:nvPr/>
-        </p:nvSpPr>
-        <p:spPr>
-          <a:xfrm>
-            <a:off x="1714770" y="3707824"/>
-            <a:ext cx="8371914" cy="2235776"/>
-          </a:xfrm>
-          <a:prstGeom prst="rect">
-            <a:avLst/>
-          </a:prstGeom>
-          <a:solidFill>
-            <a:schemeClr val="tx2">
-              <a:lumMod val="20000"/>
-              <a:lumOff val="80000"/>
-            </a:schemeClr>
-          </a:solidFill>
-          <a:ln>
-            <a:solidFill>
-              <a:schemeClr val="accent2">
-                <a:shade val="50000"/>
-              </a:schemeClr>
-            </a:solidFill>
-          </a:ln>
-        </p:spPr>
-        <p:style>
-          <a:lnRef idx="2">
-            <a:schemeClr val="accent3">
-              <a:shade val="50000"/>
-            </a:schemeClr>
-          </a:lnRef>
-          <a:fillRef idx="1">
-            <a:schemeClr val="accent3"/>
-          </a:fillRef>
-          <a:effectRef idx="0">
-            <a:schemeClr val="accent3"/>
-          </a:effectRef>
-          <a:fontRef idx="minor">
-            <a:schemeClr val="lt1"/>
-          </a:fontRef>
-        </p:style>
-        <p:txBody>
-          <a:bodyPr rtlCol="0" anchor="ctr" anchorCtr="0"/>
-          <a:lstStyle/>
-          <a:p>
-            <a:pPr algn="ctr"/>
-            <a:endParaRPr lang="de-DE" sz="1400"/>
-          </a:p>
-        </p:txBody>
-      </p:sp>
-      <p:sp>
-        <p:nvSpPr>
-          <p:cNvPr id="48" name="Rechteck 47">
-            <a:extLst>
-              <a:ext uri="{FF2B5EF4-FFF2-40B4-BE49-F238E27FC236}">
-                <a16:creationId xmlns:a16="http://schemas.microsoft.com/office/drawing/2014/main" id="{A40BF01E-2DCA-4E73-A232-D120912B12CF}"/>
-              </a:ext>
-            </a:extLst>
-          </p:cNvPr>
-          <p:cNvSpPr/>
-          <p:nvPr/>
-        </p:nvSpPr>
-        <p:spPr>
-          <a:xfrm>
-            <a:off x="6881438" y="4398673"/>
-            <a:ext cx="2155161" cy="476250"/>
-          </a:xfrm>
-          <a:prstGeom prst="rect">
-            <a:avLst/>
-          </a:prstGeom>
-          <a:solidFill>
-            <a:schemeClr val="accent3">
-              <a:lumMod val="20000"/>
-              <a:lumOff val="80000"/>
-            </a:schemeClr>
-          </a:solidFill>
-        </p:spPr>
-        <p:style>
-          <a:lnRef idx="2">
-            <a:schemeClr val="accent1">
-              <a:shade val="50000"/>
-            </a:schemeClr>
-          </a:lnRef>
-          <a:fillRef idx="1">
-            <a:schemeClr val="accent1"/>
-          </a:fillRef>
-          <a:effectRef idx="0">
-            <a:schemeClr val="accent1"/>
-          </a:effectRef>
-          <a:fontRef idx="minor">
-            <a:schemeClr val="lt1"/>
-          </a:fontRef>
-        </p:style>
-        <p:txBody>
-          <a:bodyPr rtlCol="0" anchor="ctr"/>
-          <a:lstStyle/>
-          <a:p>
-            <a:pPr algn="ctr"/>
-            <a:r>
-              <a:rPr lang="de-DE" sz="1050" b="1">
-                <a:solidFill>
-                  <a:schemeClr val="tx1"/>
-                </a:solidFill>
-              </a:rPr>
-              <a:t>Arduino Nano</a:t>
-            </a:r>
-          </a:p>
-        </p:txBody>
-      </p:sp>
-      <p:sp>
-        <p:nvSpPr>
-          <p:cNvPr id="49" name="Textfeld 48">
-            <a:extLst>
-              <a:ext uri="{FF2B5EF4-FFF2-40B4-BE49-F238E27FC236}">
-                <a16:creationId xmlns:a16="http://schemas.microsoft.com/office/drawing/2014/main" id="{0174C8A6-F452-45A0-922C-D2322AA080F4}"/>
-              </a:ext>
-            </a:extLst>
-          </p:cNvPr>
-          <p:cNvSpPr txBox="1"/>
-          <p:nvPr/>
-        </p:nvSpPr>
-        <p:spPr>
-          <a:xfrm>
-            <a:off x="1826223" y="3866219"/>
-            <a:ext cx="1629036" cy="276999"/>
-          </a:xfrm>
-          <a:prstGeom prst="rect">
-            <a:avLst/>
-          </a:prstGeom>
-          <a:noFill/>
-        </p:spPr>
-        <p:txBody>
-          <a:bodyPr wrap="none" rtlCol="0">
-            <a:spAutoFit/>
-          </a:bodyPr>
-          <a:lstStyle/>
-          <a:p>
-            <a:r>
-              <a:rPr lang="de-DE" sz="1200" b="1"/>
-              <a:t>General Gadget Board</a:t>
-            </a:r>
-          </a:p>
-        </p:txBody>
-      </p:sp>
-      <p:sp>
-        <p:nvSpPr>
-          <p:cNvPr id="50" name="Rechteck 49">
-            <a:extLst>
-              <a:ext uri="{FF2B5EF4-FFF2-40B4-BE49-F238E27FC236}">
-                <a16:creationId xmlns:a16="http://schemas.microsoft.com/office/drawing/2014/main" id="{58C83A44-09D3-415C-86FB-BBDA5121B123}"/>
-              </a:ext>
-            </a:extLst>
-          </p:cNvPr>
-          <p:cNvSpPr/>
-          <p:nvPr/>
-        </p:nvSpPr>
-        <p:spPr>
-          <a:xfrm>
-            <a:off x="8681491" y="4245586"/>
-            <a:ext cx="271142" cy="276999"/>
-          </a:xfrm>
-          <a:prstGeom prst="rect">
-            <a:avLst/>
-          </a:prstGeom>
-          <a:solidFill>
-            <a:schemeClr val="accent2">
-              <a:lumMod val="75000"/>
-            </a:schemeClr>
-          </a:solidFill>
-          <a:ln/>
-        </p:spPr>
-        <p:style>
-          <a:lnRef idx="2">
-            <a:schemeClr val="accent5">
-              <a:shade val="50000"/>
-            </a:schemeClr>
-          </a:lnRef>
-          <a:fillRef idx="1">
-            <a:schemeClr val="accent5"/>
-          </a:fillRef>
-          <a:effectRef idx="0">
-            <a:schemeClr val="accent5"/>
-          </a:effectRef>
-          <a:fontRef idx="minor">
-            <a:schemeClr val="lt1"/>
-          </a:fontRef>
-        </p:style>
-        <p:txBody>
-          <a:bodyPr rtlCol="0" anchor="ctr"/>
-          <a:lstStyle/>
-          <a:p>
-            <a:pPr algn="ctr"/>
-            <a:endParaRPr lang="de-DE" sz="1400"/>
-          </a:p>
-        </p:txBody>
-      </p:sp>
-      <p:sp>
-        <p:nvSpPr>
-          <p:cNvPr id="53" name="Rechteck 52">
-            <a:extLst>
-              <a:ext uri="{FF2B5EF4-FFF2-40B4-BE49-F238E27FC236}">
-                <a16:creationId xmlns:a16="http://schemas.microsoft.com/office/drawing/2014/main" id="{ECC7F473-BB48-4E87-81C9-89B8357E0734}"/>
-              </a:ext>
-            </a:extLst>
-          </p:cNvPr>
-          <p:cNvSpPr/>
-          <p:nvPr/>
-        </p:nvSpPr>
-        <p:spPr>
-          <a:xfrm>
-            <a:off x="8195665" y="2751713"/>
-            <a:ext cx="1224284" cy="596632"/>
-          </a:xfrm>
-          <a:prstGeom prst="rect">
-            <a:avLst/>
-          </a:prstGeom>
-        </p:spPr>
-        <p:style>
-          <a:lnRef idx="2">
-            <a:schemeClr val="accent1"/>
-          </a:lnRef>
-          <a:fillRef idx="1">
-            <a:schemeClr val="lt1"/>
-          </a:fillRef>
-          <a:effectRef idx="0">
-            <a:schemeClr val="accent1"/>
-          </a:effectRef>
-          <a:fontRef idx="minor">
-            <a:schemeClr val="dk1"/>
-          </a:fontRef>
-        </p:style>
-        <p:txBody>
-          <a:bodyPr rtlCol="0" anchor="ctr"/>
-          <a:lstStyle/>
-          <a:p>
-            <a:pPr algn="ctr"/>
-            <a:r>
-              <a:rPr lang="de-DE" sz="1050"/>
-              <a:t>Service </a:t>
-            </a:r>
-            <a:br>
-              <a:rPr lang="de-DE" sz="1050"/>
-            </a:br>
-            <a:r>
-              <a:rPr lang="de-DE" sz="1050"/>
-              <a:t>Panel Port (USB)</a:t>
-            </a:r>
-          </a:p>
-        </p:txBody>
-      </p:sp>
-      <p:cxnSp>
-        <p:nvCxnSpPr>
-          <p:cNvPr id="56" name="Gerader Verbinder 55">
-            <a:extLst>
-              <a:ext uri="{FF2B5EF4-FFF2-40B4-BE49-F238E27FC236}">
-                <a16:creationId xmlns:a16="http://schemas.microsoft.com/office/drawing/2014/main" id="{07C487F2-F593-46C4-B533-F9B43CDC73B8}"/>
-              </a:ext>
-            </a:extLst>
-          </p:cNvPr>
-          <p:cNvCxnSpPr>
-            <a:cxnSpLocks/>
-            <a:stCxn id="53" idx="2"/>
-            <a:endCxn id="50" idx="0"/>
-          </p:cNvCxnSpPr>
-          <p:nvPr/>
-        </p:nvCxnSpPr>
-        <p:spPr>
-          <a:xfrm>
-            <a:off x="8807807" y="3348345"/>
-            <a:ext cx="9255" cy="897241"/>
-          </a:xfrm>
-          <a:prstGeom prst="line">
-            <a:avLst/>
-          </a:prstGeom>
-          <a:ln w="73025" cmpd="tri">
-            <a:solidFill>
-              <a:srgbClr val="C00000"/>
-            </a:solidFill>
-            <a:prstDash val="solid"/>
-          </a:ln>
-        </p:spPr>
-        <p:style>
-          <a:lnRef idx="1">
-            <a:schemeClr val="accent1"/>
-          </a:lnRef>
-          <a:fillRef idx="0">
-            <a:schemeClr val="accent1"/>
-          </a:fillRef>
-          <a:effectRef idx="0">
-            <a:schemeClr val="accent1"/>
-          </a:effectRef>
-          <a:fontRef idx="minor">
-            <a:schemeClr val="tx1"/>
-          </a:fontRef>
-        </p:style>
-      </p:cxnSp>
-      <p:sp>
-        <p:nvSpPr>
-          <p:cNvPr id="57" name="Rechteck 56">
-            <a:extLst>
-              <a:ext uri="{FF2B5EF4-FFF2-40B4-BE49-F238E27FC236}">
-                <a16:creationId xmlns:a16="http://schemas.microsoft.com/office/drawing/2014/main" id="{22549A2D-87A2-4E92-9A9A-FC9B5FBEE3A6}"/>
-              </a:ext>
-            </a:extLst>
-          </p:cNvPr>
-          <p:cNvSpPr/>
-          <p:nvPr/>
-        </p:nvSpPr>
-        <p:spPr>
-          <a:xfrm>
-            <a:off x="3755990" y="2751713"/>
-            <a:ext cx="1224284" cy="596632"/>
-          </a:xfrm>
-          <a:prstGeom prst="rect">
-            <a:avLst/>
-          </a:prstGeom>
-        </p:spPr>
-        <p:style>
-          <a:lnRef idx="2">
-            <a:schemeClr val="accent1"/>
-          </a:lnRef>
-          <a:fillRef idx="1">
-            <a:schemeClr val="lt1"/>
-          </a:fillRef>
-          <a:effectRef idx="0">
-            <a:schemeClr val="accent1"/>
-          </a:effectRef>
-          <a:fontRef idx="minor">
-            <a:schemeClr val="dk1"/>
-          </a:fontRef>
-        </p:style>
-        <p:txBody>
-          <a:bodyPr rtlCol="0" anchor="ctr"/>
-          <a:lstStyle/>
-          <a:p>
-            <a:pPr algn="ctr"/>
-            <a:r>
-              <a:rPr lang="de-DE" sz="1050"/>
-              <a:t>I2C Bus </a:t>
-            </a:r>
-            <a:br>
-              <a:rPr lang="de-DE" sz="1050"/>
-            </a:br>
-            <a:r>
-              <a:rPr lang="de-DE" sz="1050"/>
-              <a:t>Panel Port (USB)</a:t>
-            </a:r>
-          </a:p>
-        </p:txBody>
-      </p:sp>
-      <p:cxnSp>
-        <p:nvCxnSpPr>
-          <p:cNvPr id="58" name="Gerader Verbinder 57">
-            <a:extLst>
-              <a:ext uri="{FF2B5EF4-FFF2-40B4-BE49-F238E27FC236}">
-                <a16:creationId xmlns:a16="http://schemas.microsoft.com/office/drawing/2014/main" id="{7496F8F8-C29E-4701-9FF4-70C0B8AFCAD7}"/>
-              </a:ext>
-            </a:extLst>
-          </p:cNvPr>
-          <p:cNvCxnSpPr>
-            <a:cxnSpLocks/>
-            <a:stCxn id="37" idx="2"/>
-            <a:endCxn id="57" idx="0"/>
-          </p:cNvCxnSpPr>
-          <p:nvPr/>
-        </p:nvCxnSpPr>
-        <p:spPr>
-          <a:xfrm>
-            <a:off x="4368132" y="2243416"/>
-            <a:ext cx="0" cy="508297"/>
-          </a:xfrm>
-          <a:prstGeom prst="line">
-            <a:avLst/>
-          </a:prstGeom>
-          <a:ln w="73025" cmpd="tri">
-            <a:solidFill>
-              <a:srgbClr val="C00000"/>
-            </a:solidFill>
-            <a:prstDash val="solid"/>
-          </a:ln>
-        </p:spPr>
-        <p:style>
-          <a:lnRef idx="1">
-            <a:schemeClr val="accent1"/>
-          </a:lnRef>
-          <a:fillRef idx="0">
-            <a:schemeClr val="accent1"/>
-          </a:fillRef>
-          <a:effectRef idx="0">
-            <a:schemeClr val="accent1"/>
-          </a:effectRef>
-          <a:fontRef idx="minor">
-            <a:schemeClr val="tx1"/>
-          </a:fontRef>
-        </p:style>
-      </p:cxnSp>
-      <p:cxnSp>
-        <p:nvCxnSpPr>
-          <p:cNvPr id="59" name="Gerader Verbinder 25">
-            <a:extLst>
-              <a:ext uri="{FF2B5EF4-FFF2-40B4-BE49-F238E27FC236}">
-                <a16:creationId xmlns:a16="http://schemas.microsoft.com/office/drawing/2014/main" id="{4BD1B8E9-F92D-4CA1-95BD-D3FDDCA6737E}"/>
-              </a:ext>
-            </a:extLst>
-          </p:cNvPr>
-          <p:cNvCxnSpPr>
-            <a:cxnSpLocks/>
-            <a:stCxn id="64" idx="2"/>
-            <a:endCxn id="62" idx="0"/>
-          </p:cNvCxnSpPr>
-          <p:nvPr/>
-        </p:nvCxnSpPr>
-        <p:spPr>
-          <a:xfrm rot="16200000" flipH="1">
-            <a:off x="6001924" y="2362229"/>
-            <a:ext cx="699345" cy="3067368"/>
-          </a:xfrm>
-          <a:prstGeom prst="bentConnector3">
-            <a:avLst>
-              <a:gd name="adj1" fmla="val 50000"/>
-            </a:avLst>
-          </a:prstGeom>
-          <a:ln w="12700">
-            <a:prstDash val="sysDash"/>
-          </a:ln>
-        </p:spPr>
-        <p:style>
-          <a:lnRef idx="1">
-            <a:schemeClr val="accent1"/>
-          </a:lnRef>
-          <a:fillRef idx="0">
-            <a:schemeClr val="accent1"/>
-          </a:fillRef>
-          <a:effectRef idx="0">
-            <a:schemeClr val="accent1"/>
-          </a:effectRef>
-          <a:fontRef idx="minor">
-            <a:schemeClr val="tx1"/>
-          </a:fontRef>
-        </p:style>
-      </p:cxnSp>
-      <p:cxnSp>
-        <p:nvCxnSpPr>
-          <p:cNvPr id="60" name="Gerader Verbinder 144">
-            <a:extLst>
-              <a:ext uri="{FF2B5EF4-FFF2-40B4-BE49-F238E27FC236}">
-                <a16:creationId xmlns:a16="http://schemas.microsoft.com/office/drawing/2014/main" id="{EE51453A-DFEA-4EB9-87F2-B4E26FAA40DC}"/>
-              </a:ext>
-            </a:extLst>
-          </p:cNvPr>
-          <p:cNvCxnSpPr>
-            <a:cxnSpLocks/>
-            <a:stCxn id="61" idx="0"/>
-            <a:endCxn id="63" idx="2"/>
-          </p:cNvCxnSpPr>
-          <p:nvPr/>
-        </p:nvCxnSpPr>
-        <p:spPr>
-          <a:xfrm rot="16200000" flipV="1">
-            <a:off x="5645106" y="2423483"/>
-            <a:ext cx="690849" cy="2936366"/>
-          </a:xfrm>
-          <a:prstGeom prst="bentConnector3">
-            <a:avLst>
-              <a:gd name="adj1" fmla="val 21046"/>
-            </a:avLst>
-          </a:prstGeom>
-          <a:ln w="12700">
-            <a:prstDash val="sysDash"/>
-          </a:ln>
-        </p:spPr>
-        <p:style>
-          <a:lnRef idx="1">
-            <a:schemeClr val="accent1"/>
-          </a:lnRef>
-          <a:fillRef idx="0">
-            <a:schemeClr val="accent1"/>
-          </a:fillRef>
-          <a:effectRef idx="0">
-            <a:schemeClr val="accent1"/>
-          </a:effectRef>
-          <a:fontRef idx="minor">
-            <a:schemeClr val="tx1"/>
-          </a:fontRef>
-        </p:style>
-      </p:cxnSp>
-      <p:sp>
-        <p:nvSpPr>
-          <p:cNvPr id="61" name="Textfeld 60">
-            <a:extLst>
-              <a:ext uri="{FF2B5EF4-FFF2-40B4-BE49-F238E27FC236}">
-                <a16:creationId xmlns:a16="http://schemas.microsoft.com/office/drawing/2014/main" id="{2F5168E0-AB4F-4916-A84E-851F1FE537D2}"/>
-              </a:ext>
-            </a:extLst>
-          </p:cNvPr>
-          <p:cNvSpPr txBox="1"/>
-          <p:nvPr/>
-        </p:nvSpPr>
-        <p:spPr>
-          <a:xfrm>
-            <a:off x="7384975" y="4237090"/>
-            <a:ext cx="147476" cy="161583"/>
-          </a:xfrm>
-          <a:prstGeom prst="rect">
-            <a:avLst/>
-          </a:prstGeom>
-          <a:noFill/>
-        </p:spPr>
-        <p:txBody>
-          <a:bodyPr wrap="none" lIns="0" tIns="0" rIns="0" bIns="0" rtlCol="0">
-            <a:spAutoFit/>
-          </a:bodyPr>
-          <a:lstStyle/>
-          <a:p>
-            <a:pPr algn="ctr"/>
-            <a:r>
-              <a:rPr lang="de-DE" sz="1050"/>
-              <a:t>A5</a:t>
-            </a:r>
-          </a:p>
-        </p:txBody>
-      </p:sp>
-      <p:sp>
-        <p:nvSpPr>
-          <p:cNvPr id="62" name="Textfeld 61">
-            <a:extLst>
-              <a:ext uri="{FF2B5EF4-FFF2-40B4-BE49-F238E27FC236}">
-                <a16:creationId xmlns:a16="http://schemas.microsoft.com/office/drawing/2014/main" id="{EE2449FA-AF1F-4A81-BC06-8CA2B156DDC8}"/>
-              </a:ext>
-            </a:extLst>
-          </p:cNvPr>
-          <p:cNvSpPr txBox="1"/>
-          <p:nvPr/>
-        </p:nvSpPr>
-        <p:spPr>
-          <a:xfrm>
-            <a:off x="7811542" y="4245586"/>
-            <a:ext cx="147476" cy="161583"/>
-          </a:xfrm>
-          <a:prstGeom prst="rect">
-            <a:avLst/>
-          </a:prstGeom>
-          <a:noFill/>
-        </p:spPr>
-        <p:txBody>
-          <a:bodyPr wrap="none" lIns="0" tIns="0" rIns="0" bIns="0" rtlCol="0">
-            <a:spAutoFit/>
-          </a:bodyPr>
-          <a:lstStyle/>
-          <a:p>
-            <a:pPr algn="ctr"/>
-            <a:r>
-              <a:rPr lang="de-DE" sz="1050"/>
-              <a:t>A4</a:t>
-            </a:r>
-          </a:p>
-        </p:txBody>
-      </p:sp>
-      <p:sp>
-        <p:nvSpPr>
-          <p:cNvPr id="63" name="Textfeld 62">
-            <a:extLst>
-              <a:ext uri="{FF2B5EF4-FFF2-40B4-BE49-F238E27FC236}">
-                <a16:creationId xmlns:a16="http://schemas.microsoft.com/office/drawing/2014/main" id="{FA1E916C-83F4-4294-82C9-19AB781C3A7B}"/>
-              </a:ext>
-            </a:extLst>
-          </p:cNvPr>
-          <p:cNvSpPr txBox="1"/>
-          <p:nvPr/>
-        </p:nvSpPr>
-        <p:spPr>
-          <a:xfrm>
-            <a:off x="4447005" y="3384658"/>
-            <a:ext cx="150683" cy="161583"/>
-          </a:xfrm>
-          <a:prstGeom prst="rect">
-            <a:avLst/>
-          </a:prstGeom>
-          <a:noFill/>
-        </p:spPr>
-        <p:txBody>
-          <a:bodyPr wrap="none" lIns="0" tIns="0" rIns="0" bIns="0" rtlCol="0">
-            <a:spAutoFit/>
-          </a:bodyPr>
-          <a:lstStyle/>
-          <a:p>
-            <a:pPr algn="ctr"/>
-            <a:r>
-              <a:rPr lang="de-DE" sz="1050"/>
-              <a:t>D+</a:t>
-            </a:r>
-          </a:p>
-        </p:txBody>
-      </p:sp>
-      <p:sp>
-        <p:nvSpPr>
-          <p:cNvPr id="64" name="Textfeld 63">
-            <a:extLst>
-              <a:ext uri="{FF2B5EF4-FFF2-40B4-BE49-F238E27FC236}">
-                <a16:creationId xmlns:a16="http://schemas.microsoft.com/office/drawing/2014/main" id="{9664CBA6-EE12-467C-BBAF-83C33CD5BC48}"/>
-              </a:ext>
-            </a:extLst>
-          </p:cNvPr>
-          <p:cNvSpPr txBox="1"/>
-          <p:nvPr/>
-        </p:nvSpPr>
-        <p:spPr>
-          <a:xfrm>
-            <a:off x="4755394" y="3384658"/>
-            <a:ext cx="125035" cy="161583"/>
-          </a:xfrm>
-          <a:prstGeom prst="rect">
-            <a:avLst/>
-          </a:prstGeom>
-          <a:noFill/>
-        </p:spPr>
-        <p:txBody>
-          <a:bodyPr wrap="none" lIns="0" tIns="0" rIns="0" bIns="0" rtlCol="0">
-            <a:spAutoFit/>
-          </a:bodyPr>
-          <a:lstStyle/>
-          <a:p>
-            <a:pPr algn="ctr"/>
-            <a:r>
-              <a:rPr lang="de-DE" sz="1050"/>
-              <a:t>D-</a:t>
-            </a:r>
-          </a:p>
-        </p:txBody>
-      </p:sp>
-      <p:sp>
-        <p:nvSpPr>
-          <p:cNvPr id="65" name="Textfeld 64">
-            <a:extLst>
-              <a:ext uri="{FF2B5EF4-FFF2-40B4-BE49-F238E27FC236}">
-                <a16:creationId xmlns:a16="http://schemas.microsoft.com/office/drawing/2014/main" id="{6AE57407-BB77-4F82-BB74-051727B81BB6}"/>
-              </a:ext>
-            </a:extLst>
-          </p:cNvPr>
-          <p:cNvSpPr txBox="1"/>
-          <p:nvPr/>
-        </p:nvSpPr>
-        <p:spPr>
-          <a:xfrm>
-            <a:off x="4034421" y="3384658"/>
-            <a:ext cx="254878" cy="161583"/>
-          </a:xfrm>
-          <a:prstGeom prst="rect">
-            <a:avLst/>
-          </a:prstGeom>
-          <a:noFill/>
-        </p:spPr>
-        <p:txBody>
-          <a:bodyPr wrap="none" lIns="0" tIns="0" rIns="0" bIns="0" rtlCol="0">
-            <a:spAutoFit/>
-          </a:bodyPr>
-          <a:lstStyle/>
-          <a:p>
-            <a:pPr algn="ctr"/>
-            <a:r>
-              <a:rPr lang="de-DE" sz="1050"/>
-              <a:t>GND</a:t>
-            </a:r>
-          </a:p>
-        </p:txBody>
-      </p:sp>
-      <p:sp>
-        <p:nvSpPr>
-          <p:cNvPr id="66" name="Textfeld 65">
-            <a:extLst>
-              <a:ext uri="{FF2B5EF4-FFF2-40B4-BE49-F238E27FC236}">
-                <a16:creationId xmlns:a16="http://schemas.microsoft.com/office/drawing/2014/main" id="{9E22AFBC-053F-4454-9533-8080405529D3}"/>
-              </a:ext>
-            </a:extLst>
-          </p:cNvPr>
-          <p:cNvSpPr txBox="1"/>
-          <p:nvPr/>
-        </p:nvSpPr>
-        <p:spPr>
-          <a:xfrm>
-            <a:off x="3799771" y="3384658"/>
-            <a:ext cx="76944" cy="161583"/>
-          </a:xfrm>
-          <a:prstGeom prst="rect">
-            <a:avLst/>
-          </a:prstGeom>
-          <a:noFill/>
-        </p:spPr>
-        <p:txBody>
-          <a:bodyPr wrap="none" lIns="0" tIns="0" rIns="0" bIns="0" rtlCol="0">
-            <a:spAutoFit/>
-          </a:bodyPr>
-          <a:lstStyle/>
-          <a:p>
-            <a:pPr algn="ctr"/>
-            <a:r>
-              <a:rPr lang="de-DE" sz="1050"/>
-              <a:t>V</a:t>
-            </a:r>
-          </a:p>
-        </p:txBody>
-      </p:sp>
-      <p:sp>
-        <p:nvSpPr>
-          <p:cNvPr id="67" name="Textfeld 66">
-            <a:extLst>
-              <a:ext uri="{FF2B5EF4-FFF2-40B4-BE49-F238E27FC236}">
-                <a16:creationId xmlns:a16="http://schemas.microsoft.com/office/drawing/2014/main" id="{8E4803F8-8375-41E8-9F26-3C269B2658EB}"/>
-              </a:ext>
-            </a:extLst>
-          </p:cNvPr>
-          <p:cNvSpPr txBox="1"/>
-          <p:nvPr/>
-        </p:nvSpPr>
-        <p:spPr>
-          <a:xfrm>
-            <a:off x="6649194" y="4659400"/>
-            <a:ext cx="145874" cy="161583"/>
-          </a:xfrm>
-          <a:prstGeom prst="rect">
-            <a:avLst/>
-          </a:prstGeom>
-          <a:noFill/>
-        </p:spPr>
-        <p:txBody>
-          <a:bodyPr wrap="none" lIns="0" tIns="0" rIns="0" bIns="0" rtlCol="0">
-            <a:spAutoFit/>
-          </a:bodyPr>
-          <a:lstStyle/>
-          <a:p>
-            <a:pPr algn="ctr"/>
-            <a:r>
-              <a:rPr lang="de-DE" sz="1050"/>
-              <a:t>5V</a:t>
-            </a:r>
-          </a:p>
-        </p:txBody>
-      </p:sp>
-      <p:sp>
-        <p:nvSpPr>
-          <p:cNvPr id="68" name="Textfeld 67">
-            <a:extLst>
-              <a:ext uri="{FF2B5EF4-FFF2-40B4-BE49-F238E27FC236}">
-                <a16:creationId xmlns:a16="http://schemas.microsoft.com/office/drawing/2014/main" id="{3ED310A7-CC75-43D4-8697-2E524F283436}"/>
-              </a:ext>
-            </a:extLst>
-          </p:cNvPr>
-          <p:cNvSpPr txBox="1"/>
-          <p:nvPr/>
-        </p:nvSpPr>
-        <p:spPr>
-          <a:xfrm>
-            <a:off x="6594691" y="4434987"/>
-            <a:ext cx="254878" cy="161583"/>
-          </a:xfrm>
-          <a:prstGeom prst="rect">
-            <a:avLst/>
-          </a:prstGeom>
-          <a:noFill/>
-        </p:spPr>
-        <p:txBody>
-          <a:bodyPr wrap="none" lIns="0" tIns="0" rIns="0" bIns="0" rtlCol="0">
-            <a:spAutoFit/>
-          </a:bodyPr>
-          <a:lstStyle/>
-          <a:p>
-            <a:pPr algn="ctr"/>
-            <a:r>
-              <a:rPr lang="de-DE" sz="1050"/>
-              <a:t>GND</a:t>
-            </a:r>
-          </a:p>
-        </p:txBody>
-      </p:sp>
-      <p:cxnSp>
-        <p:nvCxnSpPr>
-          <p:cNvPr id="69" name="Gerader Verbinder 144">
-            <a:extLst>
-              <a:ext uri="{FF2B5EF4-FFF2-40B4-BE49-F238E27FC236}">
-                <a16:creationId xmlns:a16="http://schemas.microsoft.com/office/drawing/2014/main" id="{A2FCE0FD-763F-48B9-A30D-C8C576ACFA05}"/>
-              </a:ext>
-            </a:extLst>
-          </p:cNvPr>
-          <p:cNvCxnSpPr>
-            <a:cxnSpLocks/>
-            <a:stCxn id="67" idx="1"/>
-            <a:endCxn id="66" idx="2"/>
-          </p:cNvCxnSpPr>
-          <p:nvPr/>
-        </p:nvCxnSpPr>
-        <p:spPr>
-          <a:xfrm rot="10800000">
-            <a:off x="3838244" y="3546242"/>
-            <a:ext cx="2810951" cy="1193951"/>
-          </a:xfrm>
-          <a:prstGeom prst="bentConnector2">
-            <a:avLst/>
-          </a:prstGeom>
-          <a:ln w="12700">
-            <a:prstDash val="sysDash"/>
-          </a:ln>
-        </p:spPr>
-        <p:style>
-          <a:lnRef idx="1">
-            <a:schemeClr val="accent1"/>
-          </a:lnRef>
-          <a:fillRef idx="0">
-            <a:schemeClr val="accent1"/>
-          </a:fillRef>
-          <a:effectRef idx="0">
-            <a:schemeClr val="accent1"/>
-          </a:effectRef>
-          <a:fontRef idx="minor">
-            <a:schemeClr val="tx1"/>
-          </a:fontRef>
-        </p:style>
-      </p:cxnSp>
-      <p:cxnSp>
-        <p:nvCxnSpPr>
-          <p:cNvPr id="70" name="Gerader Verbinder 144">
-            <a:extLst>
-              <a:ext uri="{FF2B5EF4-FFF2-40B4-BE49-F238E27FC236}">
-                <a16:creationId xmlns:a16="http://schemas.microsoft.com/office/drawing/2014/main" id="{5CFD8E38-D655-4F0B-8C80-B16737427665}"/>
-              </a:ext>
-            </a:extLst>
-          </p:cNvPr>
-          <p:cNvCxnSpPr>
-            <a:cxnSpLocks/>
-            <a:stCxn id="68" idx="1"/>
-            <a:endCxn id="65" idx="2"/>
-          </p:cNvCxnSpPr>
-          <p:nvPr/>
-        </p:nvCxnSpPr>
-        <p:spPr>
-          <a:xfrm rot="10800000">
-            <a:off x="4161861" y="3546241"/>
-            <a:ext cx="2432831" cy="969538"/>
-          </a:xfrm>
-          <a:prstGeom prst="bentConnector2">
-            <a:avLst/>
-          </a:prstGeom>
-          <a:ln w="12700">
-            <a:prstDash val="sysDash"/>
-          </a:ln>
-        </p:spPr>
-        <p:style>
-          <a:lnRef idx="1">
-            <a:schemeClr val="accent1"/>
-          </a:lnRef>
-          <a:fillRef idx="0">
-            <a:schemeClr val="accent1"/>
-          </a:fillRef>
-          <a:effectRef idx="0">
-            <a:schemeClr val="accent1"/>
-          </a:effectRef>
-          <a:fontRef idx="minor">
-            <a:schemeClr val="tx1"/>
-          </a:fontRef>
-        </p:style>
-      </p:cxnSp>
-      <p:sp>
-        <p:nvSpPr>
-          <p:cNvPr id="71" name="Rechteck 70">
-            <a:extLst>
-              <a:ext uri="{FF2B5EF4-FFF2-40B4-BE49-F238E27FC236}">
-                <a16:creationId xmlns:a16="http://schemas.microsoft.com/office/drawing/2014/main" id="{C85F59A0-9865-46A3-A3D7-2CC035447306}"/>
-              </a:ext>
-            </a:extLst>
-          </p:cNvPr>
-          <p:cNvSpPr/>
-          <p:nvPr/>
-        </p:nvSpPr>
-        <p:spPr>
-          <a:xfrm>
-            <a:off x="3301022" y="5099673"/>
-            <a:ext cx="1273762" cy="476250"/>
-          </a:xfrm>
-          <a:prstGeom prst="rect">
-            <a:avLst/>
-          </a:prstGeom>
-          <a:solidFill>
-            <a:schemeClr val="accent3">
-              <a:lumMod val="20000"/>
-              <a:lumOff val="80000"/>
-            </a:schemeClr>
-          </a:solidFill>
-        </p:spPr>
-        <p:style>
-          <a:lnRef idx="2">
-            <a:schemeClr val="accent1">
-              <a:shade val="50000"/>
-            </a:schemeClr>
-          </a:lnRef>
-          <a:fillRef idx="1">
-            <a:schemeClr val="accent1"/>
-          </a:fillRef>
-          <a:effectRef idx="0">
-            <a:schemeClr val="accent1"/>
-          </a:effectRef>
-          <a:fontRef idx="minor">
-            <a:schemeClr val="lt1"/>
-          </a:fontRef>
-        </p:style>
-        <p:txBody>
-          <a:bodyPr rtlCol="0" anchor="ctr"/>
-          <a:lstStyle/>
-          <a:p>
-            <a:pPr algn="ctr"/>
-            <a:r>
-              <a:rPr lang="de-DE" sz="1050" b="1">
-                <a:solidFill>
-                  <a:schemeClr val="tx1"/>
-                </a:solidFill>
-              </a:rPr>
-              <a:t>other component</a:t>
-            </a:r>
-          </a:p>
-        </p:txBody>
-      </p:sp>
-      <p:sp>
-        <p:nvSpPr>
-          <p:cNvPr id="72" name="Rechteck 71">
-            <a:extLst>
-              <a:ext uri="{FF2B5EF4-FFF2-40B4-BE49-F238E27FC236}">
-                <a16:creationId xmlns:a16="http://schemas.microsoft.com/office/drawing/2014/main" id="{48A0DF21-A8D5-4153-A5A7-FEB9C5D358B3}"/>
-              </a:ext>
-            </a:extLst>
-          </p:cNvPr>
-          <p:cNvSpPr/>
-          <p:nvPr/>
-        </p:nvSpPr>
-        <p:spPr>
-          <a:xfrm>
-            <a:off x="4804529" y="5099673"/>
-            <a:ext cx="1273762" cy="476250"/>
-          </a:xfrm>
-          <a:prstGeom prst="rect">
-            <a:avLst/>
-          </a:prstGeom>
-          <a:solidFill>
-            <a:schemeClr val="accent3">
-              <a:lumMod val="20000"/>
-              <a:lumOff val="80000"/>
-            </a:schemeClr>
-          </a:solidFill>
-        </p:spPr>
-        <p:style>
-          <a:lnRef idx="2">
-            <a:schemeClr val="accent1">
-              <a:shade val="50000"/>
-            </a:schemeClr>
-          </a:lnRef>
-          <a:fillRef idx="1">
-            <a:schemeClr val="accent1"/>
-          </a:fillRef>
-          <a:effectRef idx="0">
-            <a:schemeClr val="accent1"/>
-          </a:effectRef>
-          <a:fontRef idx="minor">
-            <a:schemeClr val="lt1"/>
-          </a:fontRef>
-        </p:style>
-        <p:txBody>
-          <a:bodyPr rtlCol="0" anchor="ctr"/>
-          <a:lstStyle/>
-          <a:p>
-            <a:pPr algn="ctr"/>
-            <a:r>
-              <a:rPr lang="de-DE" sz="1050" b="1">
-                <a:solidFill>
-                  <a:schemeClr val="tx1"/>
-                </a:solidFill>
-              </a:rPr>
-              <a:t>other component</a:t>
-            </a:r>
-          </a:p>
-        </p:txBody>
-      </p:sp>
-      <p:sp>
-        <p:nvSpPr>
-          <p:cNvPr id="73" name="Rechteck 72">
-            <a:extLst>
-              <a:ext uri="{FF2B5EF4-FFF2-40B4-BE49-F238E27FC236}">
-                <a16:creationId xmlns:a16="http://schemas.microsoft.com/office/drawing/2014/main" id="{61A5DCC2-244B-41DD-B002-2E7FB2D50244}"/>
-              </a:ext>
-            </a:extLst>
-          </p:cNvPr>
-          <p:cNvSpPr/>
-          <p:nvPr/>
-        </p:nvSpPr>
-        <p:spPr>
-          <a:xfrm>
-            <a:off x="6308036" y="5099673"/>
-            <a:ext cx="1273762" cy="476250"/>
-          </a:xfrm>
-          <a:prstGeom prst="rect">
-            <a:avLst/>
-          </a:prstGeom>
-          <a:solidFill>
-            <a:schemeClr val="accent3">
-              <a:lumMod val="20000"/>
-              <a:lumOff val="80000"/>
-            </a:schemeClr>
-          </a:solidFill>
-        </p:spPr>
-        <p:style>
-          <a:lnRef idx="2">
-            <a:schemeClr val="accent1">
-              <a:shade val="50000"/>
-            </a:schemeClr>
-          </a:lnRef>
-          <a:fillRef idx="1">
-            <a:schemeClr val="accent1"/>
-          </a:fillRef>
-          <a:effectRef idx="0">
-            <a:schemeClr val="accent1"/>
-          </a:effectRef>
-          <a:fontRef idx="minor">
-            <a:schemeClr val="lt1"/>
-          </a:fontRef>
-        </p:style>
-        <p:txBody>
-          <a:bodyPr rtlCol="0" anchor="ctr"/>
-          <a:lstStyle/>
-          <a:p>
-            <a:pPr algn="ctr"/>
-            <a:r>
-              <a:rPr lang="de-DE" sz="1050" b="1">
-                <a:solidFill>
-                  <a:schemeClr val="tx1"/>
-                </a:solidFill>
-              </a:rPr>
-              <a:t>other component</a:t>
-            </a:r>
-          </a:p>
-        </p:txBody>
-      </p:sp>
-      <p:sp>
-        <p:nvSpPr>
-          <p:cNvPr id="74" name="Rechteck 73">
-            <a:extLst>
-              <a:ext uri="{FF2B5EF4-FFF2-40B4-BE49-F238E27FC236}">
-                <a16:creationId xmlns:a16="http://schemas.microsoft.com/office/drawing/2014/main" id="{15E3F546-3073-4295-ACA2-F6944308CAD1}"/>
-              </a:ext>
-            </a:extLst>
-          </p:cNvPr>
-          <p:cNvSpPr/>
-          <p:nvPr/>
-        </p:nvSpPr>
-        <p:spPr>
-          <a:xfrm>
-            <a:off x="7811542" y="5099673"/>
-            <a:ext cx="1273762" cy="476250"/>
-          </a:xfrm>
-          <a:prstGeom prst="rect">
-            <a:avLst/>
-          </a:prstGeom>
-          <a:solidFill>
-            <a:schemeClr val="accent3">
-              <a:lumMod val="20000"/>
-              <a:lumOff val="80000"/>
-            </a:schemeClr>
-          </a:solidFill>
-        </p:spPr>
-        <p:style>
-          <a:lnRef idx="2">
-            <a:schemeClr val="accent1">
-              <a:shade val="50000"/>
-            </a:schemeClr>
-          </a:lnRef>
-          <a:fillRef idx="1">
-            <a:schemeClr val="accent1"/>
-          </a:fillRef>
-          <a:effectRef idx="0">
-            <a:schemeClr val="accent1"/>
-          </a:effectRef>
-          <a:fontRef idx="minor">
-            <a:schemeClr val="lt1"/>
-          </a:fontRef>
-        </p:style>
-        <p:txBody>
-          <a:bodyPr rtlCol="0" anchor="ctr"/>
-          <a:lstStyle/>
-          <a:p>
-            <a:pPr algn="ctr"/>
-            <a:r>
-              <a:rPr lang="de-DE" sz="1050" b="1">
-                <a:solidFill>
-                  <a:schemeClr val="tx1"/>
-                </a:solidFill>
-              </a:rPr>
-              <a:t>other component</a:t>
-            </a:r>
-          </a:p>
-        </p:txBody>
-      </p:sp>
-      <p:sp>
-        <p:nvSpPr>
-          <p:cNvPr id="2" name="Titel 1">
-            <a:extLst>
-              <a:ext uri="{FF2B5EF4-FFF2-40B4-BE49-F238E27FC236}">
-                <a16:creationId xmlns:a16="http://schemas.microsoft.com/office/drawing/2014/main" id="{49FA0F46-CE89-441C-AC20-A5BCDEBF691C}"/>
-              </a:ext>
-            </a:extLst>
-          </p:cNvPr>
-          <p:cNvSpPr>
-            <a:spLocks noGrp="1"/>
-          </p:cNvSpPr>
-          <p:nvPr>
-            <p:ph type="title"/>
-          </p:nvPr>
-        </p:nvSpPr>
-        <p:spPr/>
-        <p:txBody>
-          <a:bodyPr/>
-          <a:lstStyle/>
-          <a:p>
-            <a:r>
-              <a:rPr lang="de-DE"/>
-              <a:t>Standard Layout Gadget</a:t>
-            </a:r>
-          </a:p>
-        </p:txBody>
-      </p:sp>
-    </p:spTree>
-    <p:extLst>
-      <p:ext uri="{BB962C8B-B14F-4D97-AF65-F5344CB8AC3E}">
-        <p14:creationId xmlns:p14="http://schemas.microsoft.com/office/powerpoint/2010/main" val="2333306632"/>
-      </p:ext>
-    </p:extLst>
-  </p:cSld>
-  <p:clrMapOvr>
-    <a:masterClrMapping/>
-  </p:clrMapOvr>
-</p:sld>
-</file>
-
-<file path=ppt/slides/slide40.xml><?xml version="1.0" encoding="utf-8"?>
+<file path=ppt/slides/slide41.xml><?xml version="1.0" encoding="utf-8"?>
 <p:sld xmlns:a="http://schemas.openxmlformats.org/drawingml/2006/main" xmlns:r="http://schemas.openxmlformats.org/officeDocument/2006/relationships" xmlns:p="http://schemas.openxmlformats.org/presentationml/2006/main">
   <p:cSld>
     <p:spTree>
@@ -38761,7 +39686,7 @@
 </p:sld>
 </file>
 
-<file path=ppt/slides/slide41.xml><?xml version="1.0" encoding="utf-8"?>
+<file path=ppt/slides/slide42.xml><?xml version="1.0" encoding="utf-8"?>
 <p:sld xmlns:a="http://schemas.openxmlformats.org/drawingml/2006/main" xmlns:r="http://schemas.openxmlformats.org/officeDocument/2006/relationships" xmlns:p="http://schemas.openxmlformats.org/presentationml/2006/main">
   <p:cSld>
     <p:spTree>
@@ -41170,7 +42095,7 @@
 </p:sld>
 </file>
 
-<file path=ppt/slides/slide42.xml><?xml version="1.0" encoding="utf-8"?>
+<file path=ppt/slides/slide43.xml><?xml version="1.0" encoding="utf-8"?>
 <p:sld xmlns:a="http://schemas.openxmlformats.org/drawingml/2006/main" xmlns:r="http://schemas.openxmlformats.org/officeDocument/2006/relationships" xmlns:p="http://schemas.openxmlformats.org/presentationml/2006/main">
   <p:cSld>
     <p:spTree>
@@ -43676,7 +44601,7 @@
 </p:sld>
 </file>
 
-<file path=ppt/slides/slide43.xml><?xml version="1.0" encoding="utf-8"?>
+<file path=ppt/slides/slide44.xml><?xml version="1.0" encoding="utf-8"?>
 <p:sld xmlns:a="http://schemas.openxmlformats.org/drawingml/2006/main" xmlns:r="http://schemas.openxmlformats.org/officeDocument/2006/relationships" xmlns:p="http://schemas.openxmlformats.org/presentationml/2006/main">
   <p:cSld>
     <p:spTree>
@@ -50275,7 +51200,7 @@
 </p:sld>
 </file>
 
-<file path=ppt/slides/slide44.xml><?xml version="1.0" encoding="utf-8"?>
+<file path=ppt/slides/slide45.xml><?xml version="1.0" encoding="utf-8"?>
 <p:sld xmlns:a="http://schemas.openxmlformats.org/drawingml/2006/main" xmlns:r="http://schemas.openxmlformats.org/officeDocument/2006/relationships" xmlns:p="http://schemas.openxmlformats.org/presentationml/2006/main">
   <p:cSld>
     <p:spTree>
@@ -50377,7 +51302,7 @@
 </p:sld>
 </file>
 
-<file path=ppt/slides/slide45.xml><?xml version="1.0" encoding="utf-8"?>
+<file path=ppt/slides/slide46.xml><?xml version="1.0" encoding="utf-8"?>
 <p:sld xmlns:a="http://schemas.openxmlformats.org/drawingml/2006/main" xmlns:r="http://schemas.openxmlformats.org/officeDocument/2006/relationships" xmlns:p="http://schemas.openxmlformats.org/presentationml/2006/main">
   <p:cSld>
     <p:spTree>

--- a/Activityboard.pptx
+++ b/Activityboard.pptx
@@ -17756,7 +17756,7 @@
           <p:nvPr>
             <p:extLst>
               <p:ext uri="{D42A27DB-BD31-4B8C-83A1-F6EECF244321}">
-                <p14:modId xmlns:p14="http://schemas.microsoft.com/office/powerpoint/2010/main" val="324218789"/>
+                <p14:modId xmlns:p14="http://schemas.microsoft.com/office/powerpoint/2010/main" val="2626316262"/>
               </p:ext>
             </p:extLst>
           </p:nvPr>
@@ -17917,7 +17917,7 @@
                       <a:pPr algn="r"/>
                       <a:r>
                         <a:rPr lang="de-DE" sz="1400"/>
-                        <a:t>Rotary</a:t>
+                        <a:t>Wake</a:t>
                       </a:r>
                     </a:p>
                   </a:txBody>
@@ -18693,7 +18693,35 @@
                     <a:bodyPr/>
                     <a:lstStyle/>
                     <a:p>
-                      <a:endParaRPr lang="de-DE" sz="1400"/>
+                      <a:pPr marL="0" marR="0" lvl="0" indent="0" algn="l" defTabSz="914400" rtl="0" eaLnBrk="1" fontAlgn="auto" latinLnBrk="0" hangingPunct="1">
+                        <a:lnSpc>
+                          <a:spcPct val="100000"/>
+                        </a:lnSpc>
+                        <a:spcBef>
+                          <a:spcPts val="0"/>
+                        </a:spcBef>
+                        <a:spcAft>
+                          <a:spcPts val="0"/>
+                        </a:spcAft>
+                        <a:buClrTx/>
+                        <a:buSzTx/>
+                        <a:buFontTx/>
+                        <a:buNone/>
+                        <a:tabLst/>
+                        <a:defRPr/>
+                      </a:pPr>
+                      <a:r>
+                        <a:rPr lang="de-DE" sz="1400"/>
+                        <a:t>CLK-1 (10 k</a:t>
+                      </a:r>
+                      <a:r>
+                        <a:rPr lang="el-GR" sz="1400"/>
+                        <a:t>Ω</a:t>
+                      </a:r>
+                      <a:r>
+                        <a:rPr lang="de-DE" sz="1400"/>
+                        <a:t>)</a:t>
+                      </a:r>
                     </a:p>
                   </a:txBody>
                   <a:tcPr/>
@@ -18814,9 +18842,26 @@
                     <a:bodyPr/>
                     <a:lstStyle/>
                     <a:p>
+                      <a:pPr marL="0" marR="0" lvl="0" indent="0" algn="l" defTabSz="914400" rtl="0" eaLnBrk="1" fontAlgn="auto" latinLnBrk="0" hangingPunct="1">
+                        <a:lnSpc>
+                          <a:spcPct val="100000"/>
+                        </a:lnSpc>
+                        <a:spcBef>
+                          <a:spcPts val="0"/>
+                        </a:spcBef>
+                        <a:spcAft>
+                          <a:spcPts val="0"/>
+                        </a:spcAft>
+                        <a:buClrTx/>
+                        <a:buSzTx/>
+                        <a:buFontTx/>
+                        <a:buNone/>
+                        <a:tabLst/>
+                        <a:defRPr/>
+                      </a:pPr>
                       <a:r>
                         <a:rPr lang="de-DE" sz="1400"/>
-                        <a:t>CLK-1</a:t>
+                        <a:t>DT-1</a:t>
                       </a:r>
                     </a:p>
                   </a:txBody>
@@ -18937,7 +18982,7 @@
                     <a:p>
                       <a:r>
                         <a:rPr lang="de-DE" sz="1400"/>
-                        <a:t>DT-1</a:t>
+                        <a:t>SW-1</a:t>
                       </a:r>
                     </a:p>
                   </a:txBody>
@@ -19560,7 +19605,10 @@
                     <a:lstStyle/>
                     <a:p>
                       <a:pPr algn="r"/>
-                      <a:endParaRPr lang="de-DE" sz="1400"/>
+                      <a:r>
+                        <a:rPr lang="de-DE" sz="1400"/>
+                        <a:t>XX</a:t>
+                      </a:r>
                     </a:p>
                   </a:txBody>
                   <a:tcPr/>
@@ -21713,14 +21761,14 @@
           <p:nvPr>
             <p:extLst>
               <p:ext uri="{D42A27DB-BD31-4B8C-83A1-F6EECF244321}">
-                <p14:modId xmlns:p14="http://schemas.microsoft.com/office/powerpoint/2010/main" val="52895758"/>
+                <p14:modId xmlns:p14="http://schemas.microsoft.com/office/powerpoint/2010/main" val="828006962"/>
               </p:ext>
             </p:extLst>
           </p:nvPr>
         </p:nvGraphicFramePr>
         <p:xfrm>
           <a:off x="1558060" y="9525"/>
-          <a:ext cx="5519015" cy="6848470"/>
+          <a:ext cx="5519015" cy="6848485"/>
         </p:xfrm>
         <a:graphic>
           <a:graphicData uri="http://schemas.openxmlformats.org/drawingml/2006/table">
@@ -21758,7 +21806,7 @@
                   </a:extLst>
                 </a:gridCol>
               </a:tblGrid>
-              <a:tr h="226758">
+              <a:tr h="219491">
                 <a:tc>
                   <a:txBody>
                     <a:bodyPr/>
@@ -21879,7 +21927,7 @@
                   </a:ext>
                 </a:extLst>
               </a:tr>
-              <a:tr h="226758">
+              <a:tr h="219491">
                 <a:tc>
                   <a:txBody>
                     <a:bodyPr/>
@@ -22000,7 +22048,7 @@
                   </a:ext>
                 </a:extLst>
               </a:tr>
-              <a:tr h="226758">
+              <a:tr h="219491">
                 <a:tc>
                   <a:txBody>
                     <a:bodyPr/>
@@ -22121,7 +22169,7 @@
                   </a:ext>
                 </a:extLst>
               </a:tr>
-              <a:tr h="226758">
+              <a:tr h="219491">
                 <a:tc>
                   <a:txBody>
                     <a:bodyPr/>
@@ -22242,7 +22290,7 @@
                   </a:ext>
                 </a:extLst>
               </a:tr>
-              <a:tr h="226758">
+              <a:tr h="219491">
                 <a:tc>
                   <a:txBody>
                     <a:bodyPr/>
@@ -22363,7 +22411,7 @@
                   </a:ext>
                 </a:extLst>
               </a:tr>
-              <a:tr h="226758">
+              <a:tr h="219491">
                 <a:tc>
                   <a:txBody>
                     <a:bodyPr/>
@@ -22484,7 +22532,7 @@
                   </a:ext>
                 </a:extLst>
               </a:tr>
-              <a:tr h="226758">
+              <a:tr h="219491">
                 <a:tc>
                   <a:txBody>
                     <a:bodyPr/>
@@ -22605,7 +22653,7 @@
                   </a:ext>
                 </a:extLst>
               </a:tr>
-              <a:tr h="226758">
+              <a:tr h="219491">
                 <a:tc>
                   <a:txBody>
                     <a:bodyPr/>
@@ -22732,7 +22780,7 @@
                   </a:ext>
                 </a:extLst>
               </a:tr>
-              <a:tr h="226758">
+              <a:tr h="219491">
                 <a:tc>
                   <a:txBody>
                     <a:bodyPr/>
@@ -22859,7 +22907,7 @@
                   </a:ext>
                 </a:extLst>
               </a:tr>
-              <a:tr h="226758">
+              <a:tr h="219491">
                 <a:tc>
                   <a:txBody>
                     <a:bodyPr/>
@@ -22986,7 +23034,7 @@
                   </a:ext>
                 </a:extLst>
               </a:tr>
-              <a:tr h="226758">
+              <a:tr h="219491">
                 <a:tc>
                   <a:txBody>
                     <a:bodyPr/>
@@ -23113,7 +23161,7 @@
                   </a:ext>
                 </a:extLst>
               </a:tr>
-              <a:tr h="226758">
+              <a:tr h="219491">
                 <a:tc>
                   <a:txBody>
                     <a:bodyPr/>
@@ -23240,7 +23288,7 @@
                   </a:ext>
                 </a:extLst>
               </a:tr>
-              <a:tr h="226758">
+              <a:tr h="219491">
                 <a:tc>
                   <a:txBody>
                     <a:bodyPr/>
@@ -23367,7 +23415,7 @@
                   </a:ext>
                 </a:extLst>
               </a:tr>
-              <a:tr h="226758">
+              <a:tr h="219491">
                 <a:tc>
                   <a:txBody>
                     <a:bodyPr/>
@@ -23494,7 +23542,7 @@
                   </a:ext>
                 </a:extLst>
               </a:tr>
-              <a:tr h="226758">
+              <a:tr h="219491">
                 <a:tc>
                   <a:txBody>
                     <a:bodyPr/>
@@ -23621,7 +23669,7 @@
                   </a:ext>
                 </a:extLst>
               </a:tr>
-              <a:tr h="226758">
+              <a:tr h="219491">
                 <a:tc>
                   <a:txBody>
                     <a:bodyPr/>
@@ -23742,7 +23790,7 @@
                   </a:ext>
                 </a:extLst>
               </a:tr>
-              <a:tr h="226758">
+              <a:tr h="219491">
                 <a:tc>
                   <a:txBody>
                     <a:bodyPr/>
@@ -23863,7 +23911,7 @@
                   </a:ext>
                 </a:extLst>
               </a:tr>
-              <a:tr h="226758">
+              <a:tr h="219491">
                 <a:tc>
                   <a:txBody>
                     <a:bodyPr/>
@@ -23984,7 +24032,7 @@
                   </a:ext>
                 </a:extLst>
               </a:tr>
-              <a:tr h="226758">
+              <a:tr h="219491">
                 <a:tc>
                   <a:txBody>
                     <a:bodyPr/>
@@ -24105,7 +24153,7 @@
                   </a:ext>
                 </a:extLst>
               </a:tr>
-              <a:tr h="226758">
+              <a:tr h="219491">
                 <a:tc>
                   <a:txBody>
                     <a:bodyPr/>
@@ -24226,7 +24274,7 @@
                   </a:ext>
                 </a:extLst>
               </a:tr>
-              <a:tr h="226758">
+              <a:tr h="219491">
                 <a:tc>
                   <a:txBody>
                     <a:bodyPr/>
@@ -24347,7 +24395,7 @@
                   </a:ext>
                 </a:extLst>
               </a:tr>
-              <a:tr h="226758">
+              <a:tr h="219491">
                 <a:tc>
                   <a:txBody>
                     <a:bodyPr/>
@@ -24468,7 +24516,7 @@
                   </a:ext>
                 </a:extLst>
               </a:tr>
-              <a:tr h="226758">
+              <a:tr h="219491">
                 <a:tc>
                   <a:txBody>
                     <a:bodyPr/>
@@ -24589,7 +24637,7 @@
                   </a:ext>
                 </a:extLst>
               </a:tr>
-              <a:tr h="272488">
+              <a:tr h="263755">
                 <a:tc>
                   <a:txBody>
                     <a:bodyPr/>
@@ -24709,7 +24757,7 @@
                   </a:ext>
                 </a:extLst>
               </a:tr>
-              <a:tr h="226758">
+              <a:tr h="219491">
                 <a:tc>
                   <a:txBody>
                     <a:bodyPr/>
@@ -24848,7 +24896,7 @@
                   </a:ext>
                 </a:extLst>
               </a:tr>
-              <a:tr h="226758">
+              <a:tr h="219491">
                 <a:tc>
                   <a:txBody>
                     <a:bodyPr/>
@@ -24921,7 +24969,7 @@
                           <a:effectLst/>
                           <a:latin typeface="Calibri" panose="020F0502020204030204" pitchFamily="34" charset="0"/>
                         </a:rPr>
-                        <a:t>GPIO 32</a:t>
+                        <a:t>GPIO 35</a:t>
                       </a:r>
                     </a:p>
                   </a:txBody>
@@ -24960,7 +25008,7 @@
                   </a:ext>
                 </a:extLst>
               </a:tr>
-              <a:tr h="226758">
+              <a:tr h="219491">
                 <a:tc>
                   <a:txBody>
                     <a:bodyPr/>
@@ -25033,7 +25081,7 @@
                           <a:effectLst/>
                           <a:latin typeface="Calibri" panose="020F0502020204030204" pitchFamily="34" charset="0"/>
                         </a:rPr>
-                        <a:t>GPIO 33</a:t>
+                        <a:t>GPIO 32</a:t>
                       </a:r>
                     </a:p>
                   </a:txBody>
@@ -25072,7 +25120,128 @@
                   </a:ext>
                 </a:extLst>
               </a:tr>
-              <a:tr h="226758">
+              <a:tr h="219491">
+                <a:tc>
+                  <a:txBody>
+                    <a:bodyPr/>
+                    <a:lstStyle/>
+                    <a:p>
+                      <a:pPr marL="108000" algn="l" fontAlgn="b">
+                        <a:spcBef>
+                          <a:spcPts val="0"/>
+                        </a:spcBef>
+                        <a:spcAft>
+                          <a:spcPts val="0"/>
+                        </a:spcAft>
+                      </a:pPr>
+                      <a:endParaRPr lang="de-DE" sz="900" b="0" i="0" u="none" strike="noStrike">
+                        <a:solidFill>
+                          <a:srgbClr val="000000"/>
+                        </a:solidFill>
+                        <a:effectLst/>
+                        <a:latin typeface="Calibri" panose="020F0502020204030204" pitchFamily="34" charset="0"/>
+                      </a:endParaRPr>
+                    </a:p>
+                  </a:txBody>
+                  <a:tcPr marL="7002" marR="7002" marT="0" marB="0" anchor="b"/>
+                </a:tc>
+                <a:tc>
+                  <a:txBody>
+                    <a:bodyPr/>
+                    <a:lstStyle/>
+                    <a:p>
+                      <a:pPr marL="108000" algn="l" rtl="0" fontAlgn="ctr">
+                        <a:spcBef>
+                          <a:spcPts val="0"/>
+                        </a:spcBef>
+                        <a:spcAft>
+                          <a:spcPts val="0"/>
+                        </a:spcAft>
+                      </a:pPr>
+                      <a:r>
+                        <a:rPr lang="de-DE" sz="900" b="0" i="0" u="none" strike="noStrike">
+                          <a:solidFill>
+                            <a:srgbClr val="000000"/>
+                          </a:solidFill>
+                          <a:effectLst/>
+                          <a:latin typeface="Calibri" panose="020F0502020204030204" pitchFamily="34" charset="0"/>
+                        </a:rPr>
+                        <a:t>LEFT SW</a:t>
+                      </a:r>
+                    </a:p>
+                  </a:txBody>
+                  <a:tcPr marL="7002" marR="7002" marT="0" marB="0" anchor="ctr"/>
+                </a:tc>
+                <a:tc>
+                  <a:txBody>
+                    <a:bodyPr/>
+                    <a:lstStyle/>
+                    <a:p>
+                      <a:pPr marL="108000" algn="l" rtl="0" fontAlgn="ctr">
+                        <a:spcBef>
+                          <a:spcPts val="0"/>
+                        </a:spcBef>
+                        <a:spcAft>
+                          <a:spcPts val="0"/>
+                        </a:spcAft>
+                      </a:pPr>
+                      <a:r>
+                        <a:rPr lang="de-DE" sz="900" b="0" i="0" u="none" strike="noStrike">
+                          <a:solidFill>
+                            <a:srgbClr val="000000"/>
+                          </a:solidFill>
+                          <a:effectLst/>
+                          <a:latin typeface="Calibri" panose="020F0502020204030204" pitchFamily="34" charset="0"/>
+                        </a:rPr>
+                        <a:t>GPIO 33</a:t>
+                      </a:r>
+                    </a:p>
+                  </a:txBody>
+                  <a:tcPr marL="7002" marR="7002" marT="0" marB="0" anchor="ctr"/>
+                </a:tc>
+                <a:tc>
+                  <a:txBody>
+                    <a:bodyPr/>
+                    <a:lstStyle/>
+                    <a:p>
+                      <a:pPr marL="108000" marR="0" lvl="0" indent="0" algn="l" defTabSz="914400" rtl="0" eaLnBrk="1" fontAlgn="ctr" latinLnBrk="0" hangingPunct="1">
+                        <a:lnSpc>
+                          <a:spcPct val="100000"/>
+                        </a:lnSpc>
+                        <a:spcBef>
+                          <a:spcPts val="0"/>
+                        </a:spcBef>
+                        <a:spcAft>
+                          <a:spcPts val="0"/>
+                        </a:spcAft>
+                        <a:buClrTx/>
+                        <a:buSzTx/>
+                        <a:buFontTx/>
+                        <a:buNone/>
+                        <a:tabLst/>
+                        <a:defRPr/>
+                      </a:pPr>
+                      <a:r>
+                        <a:rPr lang="de-DE" sz="900" b="0" i="0" u="none" strike="noStrike">
+                          <a:solidFill>
+                            <a:srgbClr val="000000"/>
+                          </a:solidFill>
+                          <a:effectLst/>
+                          <a:latin typeface="Calibri" panose="020F0502020204030204" pitchFamily="34" charset="0"/>
+                        </a:rPr>
+                        <a:t>SW at Rotary Encoder on left side</a:t>
+                      </a:r>
+                    </a:p>
+                  </a:txBody>
+                  <a:tcPr marL="7002" marR="7002" marT="0" marB="0" anchor="ctr"/>
+                </a:tc>
+                <a:extLst>
+                  <a:ext uri="{0D108BD9-81ED-4DB2-BD59-A6C34878D82A}">
+                    <a16:rowId xmlns:a16="http://schemas.microsoft.com/office/drawing/2014/main" val="3877505065"/>
+                  </a:ext>
+                </a:extLst>
+              </a:tr>
+              <a:tr h="219491">
                 <a:tc>
                   <a:txBody>
                     <a:bodyPr/>
@@ -25184,7 +25353,7 @@
                   </a:ext>
                 </a:extLst>
               </a:tr>
-              <a:tr h="226758">
+              <a:tr h="219491">
                 <a:tc>
                   <a:txBody>
                     <a:bodyPr/>
@@ -25296,7 +25465,7 @@
                   </a:ext>
                 </a:extLst>
               </a:tr>
-              <a:tr h="226758">
+              <a:tr h="219491">
                 <a:tc>
                   <a:txBody>
                     <a:bodyPr/>
